--- a/docs/zh/00-代码总览与运行时走读-WPS兼容版.pptx
+++ b/docs/zh/00-代码总览与运行时走读-WPS兼容版.pptx
@@ -21,21 +21,6 @@
     <p:sldId id="269" r:id="rId20"/>
     <p:sldId id="270" r:id="rId21"/>
     <p:sldId id="271" r:id="rId22"/>
-    <p:sldId id="272" r:id="rId23"/>
-    <p:sldId id="273" r:id="rId24"/>
-    <p:sldId id="274" r:id="rId25"/>
-    <p:sldId id="275" r:id="rId26"/>
-    <p:sldId id="276" r:id="rId27"/>
-    <p:sldId id="277" r:id="rId28"/>
-    <p:sldId id="278" r:id="rId29"/>
-    <p:sldId id="279" r:id="rId30"/>
-    <p:sldId id="280" r:id="rId31"/>
-    <p:sldId id="281" r:id="rId32"/>
-    <p:sldId id="282" r:id="rId33"/>
-    <p:sldId id="283" r:id="rId34"/>
-    <p:sldId id="284" r:id="rId35"/>
-    <p:sldId id="285" r:id="rId36"/>
-    <p:sldId id="286" r:id="rId37"/>
   </p:sldIdLst>
   <p:sldSz cx="12191695" cy="6858000" type="screen4x3"/>
   <p:notesSz cx="6858000" cy="9144000"/>
@@ -3134,8 +3119,8 @@
         </p:nvSpPr>
         <p:spPr>
           <a:xfrm>
-            <a:off x="594360" y="411480"/>
-            <a:ext cx="10607040" cy="777240"/>
+            <a:off x="594360" y="384048"/>
+            <a:ext cx="10789920" cy="685800"/>
           </a:xfrm>
           <a:prstGeom prst="rect">
             <a:avLst/>
@@ -3148,13 +3133,12 @@
           </a:bodyPr>
           <a:lstStyle/>
           <a:p>
-            <a:pPr algn="l"/>
             <a:r>
               <a:rPr sz="2800" b="1">
                 <a:solidFill>
                   <a:srgbClr val="FFFFFF"/>
                 </a:solidFill>
-                <a:latin typeface="PingFang SC"/>
+                <a:latin typeface="Arial"/>
               </a:rPr>
               <a:t>Claude Code Source 代码走读</a:t>
             </a:r>
@@ -3169,8 +3153,8 @@
         </p:nvSpPr>
         <p:spPr>
           <a:xfrm>
-            <a:off x="658368" y="1417320"/>
-            <a:ext cx="10241280" cy="822960"/>
+            <a:off x="658368" y="1280160"/>
+            <a:ext cx="10241280" cy="640080"/>
           </a:xfrm>
           <a:prstGeom prst="rect">
             <a:avLst/>
@@ -3184,11 +3168,11 @@
           <a:lstStyle/>
           <a:p>
             <a:r>
-              <a:rPr sz="1600" b="0">
+              <a:rPr sz="1500" b="0">
                 <a:solidFill>
                   <a:srgbClr val="FFFFFF"/>
                 </a:solidFill>
-                <a:latin typeface="PingFang SC"/>
+                <a:latin typeface="Arial"/>
               </a:rPr>
               <a:t>基于源码的 runtime 架构、主调用链与关键设计</a:t>
             </a:r>
@@ -3203,8 +3187,8 @@
         </p:nvSpPr>
         <p:spPr>
           <a:xfrm>
-            <a:off x="777240" y="2240280"/>
-            <a:ext cx="10332720" cy="1828800"/>
+            <a:off x="822960" y="2103120"/>
+            <a:ext cx="10241280" cy="2011680"/>
           </a:xfrm>
           <a:prstGeom prst="rect">
             <a:avLst/>
@@ -3223,11 +3207,11 @@
               </a:spcAft>
             </a:pPr>
             <a:r>
-              <a:rPr sz="1900" b="0">
+              <a:rPr sz="1800" b="0">
                 <a:solidFill>
                   <a:srgbClr val="FFFFFF"/>
                 </a:solidFill>
-                <a:latin typeface="PingFang SC"/>
+                <a:latin typeface="Arial"/>
               </a:rPr>
               <a:t>重点：turn loop、compact、tool execution、task runtime</a:t>
             </a:r>
@@ -3239,11 +3223,11 @@
               </a:spcAft>
             </a:pPr>
             <a:r>
-              <a:rPr sz="1900" b="0">
+              <a:rPr sz="1800" b="0">
                 <a:solidFill>
                   <a:srgbClr val="FFFFFF"/>
                 </a:solidFill>
-                <a:latin typeface="PingFang SC"/>
+                <a:latin typeface="Arial"/>
               </a:rPr>
               <a:t>目标：先建立整体模型，再进入关键代码</a:t>
             </a:r>
@@ -3264,7 +3248,7 @@
     <p:bg>
       <p:bgPr>
         <a:solidFill>
-          <a:srgbClr val="101C3F"/>
+          <a:srgbClr val="F8FAFC"/>
         </a:solidFill>
         <a:effectLst/>
       </p:bgPr>
@@ -3284,8 +3268,8 @@
         </p:nvSpPr>
         <p:spPr>
           <a:xfrm>
-            <a:off x="594360" y="411480"/>
-            <a:ext cx="10607040" cy="777240"/>
+            <a:off x="594360" y="384048"/>
+            <a:ext cx="10789920" cy="685800"/>
           </a:xfrm>
           <a:prstGeom prst="rect">
             <a:avLst/>
@@ -3298,29 +3282,481 @@
           </a:bodyPr>
           <a:lstStyle/>
           <a:p>
-            <a:pPr algn="l"/>
-            <a:r>
-              <a:rPr sz="2800" b="1">
-                <a:solidFill>
-                  <a:srgbClr val="FFFFFF"/>
-                </a:solidFill>
-                <a:latin typeface="PingFang SC"/>
-              </a:rPr>
-              <a:t>三、为什么 query.ts 是核心</a:t>
-            </a:r>
-          </a:p>
-        </p:txBody>
-      </p:sp>
-      <p:sp>
-        <p:nvSpPr>
-          <p:cNvPr id="3" name="TextBox 2"/>
+            <a:r>
+              <a:rPr sz="2600" b="1">
+                <a:solidFill>
+                  <a:srgbClr val="0B1F44"/>
+                </a:solidFill>
+                <a:latin typeface="Arial"/>
+              </a:rPr>
+              <a:t>compact：分层整理，不是一刀切摘要</a:t>
+            </a:r>
+          </a:p>
+        </p:txBody>
+      </p:sp>
+      <p:sp>
+        <p:nvSpPr>
+          <p:cNvPr id="3" name="Rectangle 2"/>
+          <p:cNvSpPr/>
+          <p:nvPr/>
+        </p:nvSpPr>
+        <p:spPr>
+          <a:xfrm>
+            <a:off x="621792" y="1078992"/>
+            <a:ext cx="2011680" cy="27432"/>
+          </a:xfrm>
+          <a:prstGeom prst="rect">
+            <a:avLst/>
+          </a:prstGeom>
+          <a:solidFill>
+            <a:srgbClr val="DBE4F0"/>
+          </a:solidFill>
+          <a:ln>
+            <a:noFill/>
+          </a:ln>
+        </p:spPr>
+        <p:style>
+          <a:lnRef idx="1">
+            <a:schemeClr val="accent1"/>
+          </a:lnRef>
+          <a:fillRef idx="3">
+            <a:schemeClr val="accent1"/>
+          </a:fillRef>
+          <a:effectRef idx="2">
+            <a:schemeClr val="accent1"/>
+          </a:effectRef>
+          <a:fontRef idx="minor">
+            <a:schemeClr val="lt1"/>
+          </a:fontRef>
+        </p:style>
+        <p:txBody>
+          <a:bodyPr rtlCol="0" anchor="ctr"/>
+          <a:lstStyle/>
+          <a:p>
+            <a:pPr algn="ctr"/>
+          </a:p>
+        </p:txBody>
+      </p:sp>
+      <p:sp>
+        <p:nvSpPr>
+          <p:cNvPr id="4" name="Rounded Rectangle 3"/>
+          <p:cNvSpPr/>
+          <p:nvPr/>
+        </p:nvSpPr>
+        <p:spPr>
+          <a:xfrm>
+            <a:off x="731520" y="1828800"/>
+            <a:ext cx="1371600" cy="640080"/>
+          </a:xfrm>
+          <a:prstGeom prst="roundRect">
+            <a:avLst/>
+          </a:prstGeom>
+          <a:solidFill>
+            <a:srgbClr val="FFFFFF"/>
+          </a:solidFill>
+          <a:ln>
+            <a:solidFill>
+              <a:srgbClr val="205295"/>
+            </a:solidFill>
+          </a:ln>
+        </p:spPr>
+        <p:style>
+          <a:lnRef idx="1">
+            <a:schemeClr val="accent1"/>
+          </a:lnRef>
+          <a:fillRef idx="3">
+            <a:schemeClr val="accent1"/>
+          </a:fillRef>
+          <a:effectRef idx="2">
+            <a:schemeClr val="accent1"/>
+          </a:effectRef>
+          <a:fontRef idx="minor">
+            <a:schemeClr val="lt1"/>
+          </a:fontRef>
+        </p:style>
+        <p:txBody>
+          <a:bodyPr rtlCol="0" anchor="ctr" wrap="square" lIns="76200" rIns="76200" tIns="50800" bIns="50800"/>
+          <a:lstStyle/>
+          <a:p>
+            <a:pPr algn="ctr"/>
+            <a:r>
+              <a:rPr sz="1600" b="1">
+                <a:solidFill>
+                  <a:srgbClr val="0B1F44"/>
+                </a:solidFill>
+                <a:latin typeface="Arial"/>
+              </a:rPr>
+              <a:t>snip</a:t>
+            </a:r>
+          </a:p>
+        </p:txBody>
+      </p:sp>
+      <p:sp>
+        <p:nvSpPr>
+          <p:cNvPr id="5" name="Rounded Rectangle 4"/>
+          <p:cNvSpPr/>
+          <p:nvPr/>
+        </p:nvSpPr>
+        <p:spPr>
+          <a:xfrm>
+            <a:off x="2468880" y="1828800"/>
+            <a:ext cx="1645920" cy="640080"/>
+          </a:xfrm>
+          <a:prstGeom prst="roundRect">
+            <a:avLst/>
+          </a:prstGeom>
+          <a:solidFill>
+            <a:srgbClr val="FFFFFF"/>
+          </a:solidFill>
+          <a:ln>
+            <a:solidFill>
+              <a:srgbClr val="205295"/>
+            </a:solidFill>
+          </a:ln>
+        </p:spPr>
+        <p:style>
+          <a:lnRef idx="1">
+            <a:schemeClr val="accent1"/>
+          </a:lnRef>
+          <a:fillRef idx="3">
+            <a:schemeClr val="accent1"/>
+          </a:fillRef>
+          <a:effectRef idx="2">
+            <a:schemeClr val="accent1"/>
+          </a:effectRef>
+          <a:fontRef idx="minor">
+            <a:schemeClr val="lt1"/>
+          </a:fontRef>
+        </p:style>
+        <p:txBody>
+          <a:bodyPr rtlCol="0" anchor="ctr" wrap="square" lIns="76200" rIns="76200" tIns="50800" bIns="50800"/>
+          <a:lstStyle/>
+          <a:p>
+            <a:pPr algn="ctr"/>
+            <a:r>
+              <a:rPr sz="1600" b="1">
+                <a:solidFill>
+                  <a:srgbClr val="0B1F44"/>
+                </a:solidFill>
+                <a:latin typeface="Arial"/>
+              </a:rPr>
+              <a:t>microcompact</a:t>
+            </a:r>
+          </a:p>
+        </p:txBody>
+      </p:sp>
+      <p:sp>
+        <p:nvSpPr>
+          <p:cNvPr id="6" name="Rounded Rectangle 5"/>
+          <p:cNvSpPr/>
+          <p:nvPr/>
+        </p:nvSpPr>
+        <p:spPr>
+          <a:xfrm>
+            <a:off x="4480560" y="1828800"/>
+            <a:ext cx="1737360" cy="640080"/>
+          </a:xfrm>
+          <a:prstGeom prst="roundRect">
+            <a:avLst/>
+          </a:prstGeom>
+          <a:solidFill>
+            <a:srgbClr val="FFFFFF"/>
+          </a:solidFill>
+          <a:ln>
+            <a:solidFill>
+              <a:srgbClr val="205295"/>
+            </a:solidFill>
+          </a:ln>
+        </p:spPr>
+        <p:style>
+          <a:lnRef idx="1">
+            <a:schemeClr val="accent1"/>
+          </a:lnRef>
+          <a:fillRef idx="3">
+            <a:schemeClr val="accent1"/>
+          </a:fillRef>
+          <a:effectRef idx="2">
+            <a:schemeClr val="accent1"/>
+          </a:effectRef>
+          <a:fontRef idx="minor">
+            <a:schemeClr val="lt1"/>
+          </a:fontRef>
+        </p:style>
+        <p:txBody>
+          <a:bodyPr rtlCol="0" anchor="ctr" wrap="square" lIns="76200" rIns="76200" tIns="50800" bIns="50800"/>
+          <a:lstStyle/>
+          <a:p>
+            <a:pPr algn="ctr"/>
+            <a:r>
+              <a:rPr sz="1600" b="1">
+                <a:solidFill>
+                  <a:srgbClr val="0B1F44"/>
+                </a:solidFill>
+                <a:latin typeface="Arial"/>
+              </a:rPr>
+              <a:t>collapse</a:t>
+            </a:r>
+          </a:p>
+        </p:txBody>
+      </p:sp>
+      <p:sp>
+        <p:nvSpPr>
+          <p:cNvPr id="7" name="Rounded Rectangle 6"/>
+          <p:cNvSpPr/>
+          <p:nvPr/>
+        </p:nvSpPr>
+        <p:spPr>
+          <a:xfrm>
+            <a:off x="6583680" y="1828800"/>
+            <a:ext cx="1645920" cy="640080"/>
+          </a:xfrm>
+          <a:prstGeom prst="roundRect">
+            <a:avLst/>
+          </a:prstGeom>
+          <a:solidFill>
+            <a:srgbClr val="FFFFFF"/>
+          </a:solidFill>
+          <a:ln>
+            <a:solidFill>
+              <a:srgbClr val="205295"/>
+            </a:solidFill>
+          </a:ln>
+        </p:spPr>
+        <p:style>
+          <a:lnRef idx="1">
+            <a:schemeClr val="accent1"/>
+          </a:lnRef>
+          <a:fillRef idx="3">
+            <a:schemeClr val="accent1"/>
+          </a:fillRef>
+          <a:effectRef idx="2">
+            <a:schemeClr val="accent1"/>
+          </a:effectRef>
+          <a:fontRef idx="minor">
+            <a:schemeClr val="lt1"/>
+          </a:fontRef>
+        </p:style>
+        <p:txBody>
+          <a:bodyPr rtlCol="0" anchor="ctr" wrap="square" lIns="76200" rIns="76200" tIns="50800" bIns="50800"/>
+          <a:lstStyle/>
+          <a:p>
+            <a:pPr algn="ctr"/>
+            <a:r>
+              <a:rPr sz="1600" b="1">
+                <a:solidFill>
+                  <a:srgbClr val="0B1F44"/>
+                </a:solidFill>
+                <a:latin typeface="Arial"/>
+              </a:rPr>
+              <a:t>autocompact</a:t>
+            </a:r>
+          </a:p>
+        </p:txBody>
+      </p:sp>
+      <p:sp>
+        <p:nvSpPr>
+          <p:cNvPr id="8" name="Rounded Rectangle 7"/>
+          <p:cNvSpPr/>
+          <p:nvPr/>
+        </p:nvSpPr>
+        <p:spPr>
+          <a:xfrm>
+            <a:off x="8595360" y="1828800"/>
+            <a:ext cx="2011680" cy="640080"/>
+          </a:xfrm>
+          <a:prstGeom prst="roundRect">
+            <a:avLst/>
+          </a:prstGeom>
+          <a:solidFill>
+            <a:srgbClr val="FFFFFF"/>
+          </a:solidFill>
+          <a:ln>
+            <a:solidFill>
+              <a:srgbClr val="205295"/>
+            </a:solidFill>
+          </a:ln>
+        </p:spPr>
+        <p:style>
+          <a:lnRef idx="1">
+            <a:schemeClr val="accent1"/>
+          </a:lnRef>
+          <a:fillRef idx="3">
+            <a:schemeClr val="accent1"/>
+          </a:fillRef>
+          <a:effectRef idx="2">
+            <a:schemeClr val="accent1"/>
+          </a:effectRef>
+          <a:fontRef idx="minor">
+            <a:schemeClr val="lt1"/>
+          </a:fontRef>
+        </p:style>
+        <p:txBody>
+          <a:bodyPr rtlCol="0" anchor="ctr" wrap="square" lIns="76200" rIns="76200" tIns="50800" bIns="50800"/>
+          <a:lstStyle/>
+          <a:p>
+            <a:pPr algn="ctr"/>
+            <a:r>
+              <a:rPr sz="1600" b="1">
+                <a:solidFill>
+                  <a:srgbClr val="0B1F44"/>
+                </a:solidFill>
+                <a:latin typeface="Arial"/>
+              </a:rPr>
+              <a:t>reactive compact</a:t>
+            </a:r>
+          </a:p>
+        </p:txBody>
+      </p:sp>
+      <p:cxnSp>
+        <p:nvCxnSpPr>
+          <p:cNvPr id="9" name="Connector 8"/>
+          <p:cNvCxnSpPr/>
+          <p:nvPr/>
+        </p:nvCxnSpPr>
+        <p:spPr>
+          <a:xfrm>
+            <a:off x="2103120" y="2148840"/>
+            <a:ext cx="365760" cy="0"/>
+          </a:xfrm>
+          <a:prstGeom prst="line">
+            <a:avLst/>
+          </a:prstGeom>
+          <a:ln w="25400">
+            <a:solidFill>
+              <a:srgbClr val="205295"/>
+            </a:solidFill>
+          </a:ln>
+        </p:spPr>
+        <p:style>
+          <a:lnRef idx="2">
+            <a:schemeClr val="accent1"/>
+          </a:lnRef>
+          <a:fillRef idx="0">
+            <a:schemeClr val="accent1"/>
+          </a:fillRef>
+          <a:effectRef idx="1">
+            <a:schemeClr val="accent1"/>
+          </a:effectRef>
+          <a:fontRef idx="minor">
+            <a:schemeClr val="tx1"/>
+          </a:fontRef>
+        </p:style>
+      </p:cxnSp>
+      <p:cxnSp>
+        <p:nvCxnSpPr>
+          <p:cNvPr id="10" name="Connector 9"/>
+          <p:cNvCxnSpPr/>
+          <p:nvPr/>
+        </p:nvCxnSpPr>
+        <p:spPr>
+          <a:xfrm>
+            <a:off x="4114800" y="2148840"/>
+            <a:ext cx="365760" cy="0"/>
+          </a:xfrm>
+          <a:prstGeom prst="line">
+            <a:avLst/>
+          </a:prstGeom>
+          <a:ln w="25400">
+            <a:solidFill>
+              <a:srgbClr val="205295"/>
+            </a:solidFill>
+          </a:ln>
+        </p:spPr>
+        <p:style>
+          <a:lnRef idx="2">
+            <a:schemeClr val="accent1"/>
+          </a:lnRef>
+          <a:fillRef idx="0">
+            <a:schemeClr val="accent1"/>
+          </a:fillRef>
+          <a:effectRef idx="1">
+            <a:schemeClr val="accent1"/>
+          </a:effectRef>
+          <a:fontRef idx="minor">
+            <a:schemeClr val="tx1"/>
+          </a:fontRef>
+        </p:style>
+      </p:cxnSp>
+      <p:cxnSp>
+        <p:nvCxnSpPr>
+          <p:cNvPr id="11" name="Connector 10"/>
+          <p:cNvCxnSpPr/>
+          <p:nvPr/>
+        </p:nvCxnSpPr>
+        <p:spPr>
+          <a:xfrm>
+            <a:off x="6217920" y="2148840"/>
+            <a:ext cx="365760" cy="0"/>
+          </a:xfrm>
+          <a:prstGeom prst="line">
+            <a:avLst/>
+          </a:prstGeom>
+          <a:ln w="25400">
+            <a:solidFill>
+              <a:srgbClr val="205295"/>
+            </a:solidFill>
+          </a:ln>
+        </p:spPr>
+        <p:style>
+          <a:lnRef idx="2">
+            <a:schemeClr val="accent1"/>
+          </a:lnRef>
+          <a:fillRef idx="0">
+            <a:schemeClr val="accent1"/>
+          </a:fillRef>
+          <a:effectRef idx="1">
+            <a:schemeClr val="accent1"/>
+          </a:effectRef>
+          <a:fontRef idx="minor">
+            <a:schemeClr val="tx1"/>
+          </a:fontRef>
+        </p:style>
+      </p:cxnSp>
+      <p:cxnSp>
+        <p:nvCxnSpPr>
+          <p:cNvPr id="12" name="Connector 11"/>
+          <p:cNvCxnSpPr/>
+          <p:nvPr/>
+        </p:nvCxnSpPr>
+        <p:spPr>
+          <a:xfrm>
+            <a:off x="8229600" y="2148840"/>
+            <a:ext cx="365760" cy="0"/>
+          </a:xfrm>
+          <a:prstGeom prst="line">
+            <a:avLst/>
+          </a:prstGeom>
+          <a:ln w="25400">
+            <a:solidFill>
+              <a:srgbClr val="205295"/>
+            </a:solidFill>
+          </a:ln>
+        </p:spPr>
+        <p:style>
+          <a:lnRef idx="2">
+            <a:schemeClr val="accent1"/>
+          </a:lnRef>
+          <a:fillRef idx="0">
+            <a:schemeClr val="accent1"/>
+          </a:fillRef>
+          <a:effectRef idx="1">
+            <a:schemeClr val="accent1"/>
+          </a:effectRef>
+          <a:fontRef idx="minor">
+            <a:schemeClr val="tx1"/>
+          </a:fontRef>
+        </p:style>
+      </p:cxnSp>
+      <p:sp>
+        <p:nvSpPr>
+          <p:cNvPr id="13" name="TextBox 12"/>
           <p:cNvSpPr txBox="1"/>
           <p:nvPr/>
         </p:nvSpPr>
         <p:spPr>
           <a:xfrm>
-            <a:off x="658368" y="1417320"/>
-            <a:ext cx="10241280" cy="822960"/>
+            <a:off x="822960" y="3291840"/>
+            <a:ext cx="10149840" cy="1828800"/>
           </a:xfrm>
           <a:prstGeom prst="rect">
             <a:avLst/>
@@ -3333,14 +3769,51 @@
           </a:bodyPr>
           <a:lstStyle/>
           <a:p>
-            <a:r>
-              <a:rPr sz="1600" b="0">
-                <a:solidFill>
-                  <a:srgbClr val="FFFFFF"/>
-                </a:solidFill>
-                <a:latin typeface="PingFang SC"/>
-              </a:rPr>
-              <a:t>真正把 Claude Code 变成 agent runtime 的，是 turn loop。</a:t>
+            <a:pPr>
+              <a:spcAft>
+                <a:spcPts val="800"/>
+              </a:spcAft>
+            </a:pPr>
+            <a:r>
+              <a:rPr sz="1700" b="0">
+                <a:solidFill>
+                  <a:srgbClr val="1F2937"/>
+                </a:solidFill>
+                <a:latin typeface="Arial"/>
+              </a:rPr>
+              <a:t>要按两条轴来理解：主动整理 vs 被动恢复；轻量缩减 vs full compact</a:t>
+            </a:r>
+          </a:p>
+          <a:p>
+            <a:pPr>
+              <a:spcAft>
+                <a:spcPts val="800"/>
+              </a:spcAft>
+            </a:pPr>
+            <a:r>
+              <a:rPr sz="1700" b="0">
+                <a:solidFill>
+                  <a:srgbClr val="1F2937"/>
+                </a:solidFill>
+                <a:latin typeface="Arial"/>
+              </a:rPr>
+              <a:t>full compact 后保留的不是只有 summary，还包括 boundary、文件恢复、plan_mode、invoked_skills、deferred delta</a:t>
+            </a:r>
+          </a:p>
+          <a:p>
+            <a:pPr>
+              <a:spcAft>
+                <a:spcPts val="800"/>
+              </a:spcAft>
+            </a:pPr>
+            <a:r>
+              <a:rPr sz="1700" b="0">
+                <a:solidFill>
+                  <a:srgbClr val="1F2937"/>
+                </a:solidFill>
+                <a:latin typeface="Arial"/>
+              </a:rPr>
+              <a:t>本质上是在重建可继续工作的最小 context</a:t>
             </a:r>
           </a:p>
         </p:txBody>
@@ -3379,8 +3852,8 @@
         </p:nvSpPr>
         <p:spPr>
           <a:xfrm>
-            <a:off x="594360" y="411480"/>
-            <a:ext cx="10607040" cy="777240"/>
+            <a:off x="594360" y="384048"/>
+            <a:ext cx="10789920" cy="685800"/>
           </a:xfrm>
           <a:prstGeom prst="rect">
             <a:avLst/>
@@ -3393,15 +3866,14 @@
           </a:bodyPr>
           <a:lstStyle/>
           <a:p>
-            <a:pPr algn="l"/>
             <a:r>
               <a:rPr sz="2600" b="1">
                 <a:solidFill>
                   <a:srgbClr val="0B1F44"/>
                 </a:solidFill>
-                <a:latin typeface="PingFang SC"/>
-              </a:rPr>
-              <a:t>为什么 query.ts 是核心</a:t>
+                <a:latin typeface="Arial"/>
+              </a:rPr>
+              <a:t>context 不是只靠 messages</a:t>
             </a:r>
           </a:p>
         </p:txBody>
@@ -3414,8 +3886,8 @@
         </p:nvSpPr>
         <p:spPr>
           <a:xfrm>
-            <a:off x="621792" y="1143000"/>
-            <a:ext cx="2194560" cy="36576"/>
+            <a:off x="621792" y="1078992"/>
+            <a:ext cx="2011680" cy="27432"/>
           </a:xfrm>
           <a:prstGeom prst="rect">
             <a:avLst/>
@@ -3457,8 +3929,42 @@
         </p:nvSpPr>
         <p:spPr>
           <a:xfrm>
-            <a:off x="822960" y="1554480"/>
-            <a:ext cx="10058400" cy="4389120"/>
+            <a:off x="731520" y="1600200"/>
+            <a:ext cx="4389120" cy="457200"/>
+          </a:xfrm>
+          <a:prstGeom prst="rect">
+            <a:avLst/>
+          </a:prstGeom>
+          <a:noFill/>
+        </p:spPr>
+        <p:txBody>
+          <a:bodyPr wrap="none">
+            <a:spAutoFit/>
+          </a:bodyPr>
+          <a:lstStyle/>
+          <a:p>
+            <a:r>
+              <a:rPr sz="1800" b="1">
+                <a:solidFill>
+                  <a:srgbClr val="205295"/>
+                </a:solidFill>
+                <a:latin typeface="Arial"/>
+              </a:rPr>
+              <a:t>Skills / attachments</a:t>
+            </a:r>
+          </a:p>
+        </p:txBody>
+      </p:sp>
+      <p:sp>
+        <p:nvSpPr>
+          <p:cNvPr id="5" name="TextBox 4"/>
+          <p:cNvSpPr txBox="1"/>
+          <p:nvPr/>
+        </p:nvSpPr>
+        <p:spPr>
+          <a:xfrm>
+            <a:off x="731520" y="2011680"/>
+            <a:ext cx="4389120" cy="3200400"/>
           </a:xfrm>
           <a:prstGeom prst="rect">
             <a:avLst/>
@@ -3477,13 +3983,13 @@
               </a:spcAft>
             </a:pPr>
             <a:r>
-              <a:rPr sz="2000" b="0">
+              <a:rPr sz="1700" b="0">
                 <a:solidFill>
                   <a:srgbClr val="1F2937"/>
                 </a:solidFill>
-                <a:latin typeface="PingFang SC"/>
-              </a:rPr>
-              <a:t>它不是一次 API 调用的包装层，而是 runtime kernel</a:t>
+                <a:latin typeface="Arial"/>
+              </a:rPr>
+              <a:t>skill 被扫描到只是 capability 可见</a:t>
             </a:r>
           </a:p>
           <a:p>
@@ -3493,13 +3999,13 @@
               </a:spcAft>
             </a:pPr>
             <a:r>
-              <a:rPr sz="2000" b="0">
+              <a:rPr sz="1700" b="0">
                 <a:solidFill>
                   <a:srgbClr val="1F2937"/>
                 </a:solidFill>
-                <a:latin typeface="PingFang SC"/>
-              </a:rPr>
-              <a:t>负责准备 messages、context 治理、模型请求、streaming 输出</a:t>
+                <a:latin typeface="Arial"/>
+              </a:rPr>
+              <a:t>真正调用 skill 时，正文才进入 context</a:t>
             </a:r>
           </a:p>
           <a:p>
@@ -3509,15 +4015,72 @@
               </a:spcAft>
             </a:pPr>
             <a:r>
-              <a:rPr sz="2000" b="0">
+              <a:rPr sz="1700" b="0">
                 <a:solidFill>
                   <a:srgbClr val="1F2937"/>
                 </a:solidFill>
-                <a:latin typeface="PingFang SC"/>
-              </a:rPr>
-              <a:t>负责处理 tool_use / tool_result</a:t>
-            </a:r>
-          </a:p>
+                <a:latin typeface="Arial"/>
+              </a:rPr>
+              <a:t>attachments.ts 会按 turn 注入 memories、plan_mode、mailbox、delta 等工作面信息</a:t>
+            </a:r>
+          </a:p>
+        </p:txBody>
+      </p:sp>
+      <p:sp>
+        <p:nvSpPr>
+          <p:cNvPr id="6" name="TextBox 5"/>
+          <p:cNvSpPr txBox="1"/>
+          <p:nvPr/>
+        </p:nvSpPr>
+        <p:spPr>
+          <a:xfrm>
+            <a:off x="6217920" y="1600200"/>
+            <a:ext cx="4389120" cy="457200"/>
+          </a:xfrm>
+          <a:prstGeom prst="rect">
+            <a:avLst/>
+          </a:prstGeom>
+          <a:noFill/>
+        </p:spPr>
+        <p:txBody>
+          <a:bodyPr wrap="none">
+            <a:spAutoFit/>
+          </a:bodyPr>
+          <a:lstStyle/>
+          <a:p>
+            <a:r>
+              <a:rPr sz="1800" b="1">
+                <a:solidFill>
+                  <a:srgbClr val="205295"/>
+                </a:solidFill>
+                <a:latin typeface="Arial"/>
+              </a:rPr>
+              <a:t>关键状态载体</a:t>
+            </a:r>
+          </a:p>
+        </p:txBody>
+      </p:sp>
+      <p:sp>
+        <p:nvSpPr>
+          <p:cNvPr id="7" name="TextBox 6"/>
+          <p:cNvSpPr txBox="1"/>
+          <p:nvPr/>
+        </p:nvSpPr>
+        <p:spPr>
+          <a:xfrm>
+            <a:off x="6217920" y="2011680"/>
+            <a:ext cx="4389120" cy="3200400"/>
+          </a:xfrm>
+          <a:prstGeom prst="rect">
+            <a:avLst/>
+          </a:prstGeom>
+          <a:noFill/>
+        </p:spPr>
+        <p:txBody>
+          <a:bodyPr wrap="square" lIns="76200" rIns="76200" tIns="50800" bIns="50800">
+            <a:spAutoFit/>
+          </a:bodyPr>
+          <a:lstStyle/>
           <a:p>
             <a:pPr>
               <a:spcAft>
@@ -3525,13 +4088,61 @@
               </a:spcAft>
             </a:pPr>
             <a:r>
-              <a:rPr sz="2000" b="0">
+              <a:rPr sz="1700" b="0">
                 <a:solidFill>
                   <a:srgbClr val="1F2937"/>
                 </a:solidFill>
-                <a:latin typeface="PingFang SC"/>
-              </a:rPr>
-              <a:t>负责决定 continue / retry / compact / stop</a:t>
+                <a:latin typeface="Arial"/>
+              </a:rPr>
+              <a:t>messages：turn-local 工作面</a:t>
+            </a:r>
+          </a:p>
+          <a:p>
+            <a:pPr>
+              <a:spcAft>
+                <a:spcPts val="800"/>
+              </a:spcAft>
+            </a:pPr>
+            <a:r>
+              <a:rPr sz="1700" b="0">
+                <a:solidFill>
+                  <a:srgbClr val="1F2937"/>
+                </a:solidFill>
+                <a:latin typeface="Arial"/>
+              </a:rPr>
+              <a:t>transcript / sidechain：durable history</a:t>
+            </a:r>
+          </a:p>
+          <a:p>
+            <a:pPr>
+              <a:spcAft>
+                <a:spcPts val="800"/>
+              </a:spcAft>
+            </a:pPr>
+            <a:r>
+              <a:rPr sz="1700" b="0">
+                <a:solidFill>
+                  <a:srgbClr val="1F2937"/>
+                </a:solidFill>
+                <a:latin typeface="Arial"/>
+              </a:rPr>
+              <a:t>ToolUseContext：工具执行总线</a:t>
+            </a:r>
+          </a:p>
+          <a:p>
+            <a:pPr>
+              <a:spcAft>
+                <a:spcPts val="800"/>
+              </a:spcAft>
+            </a:pPr>
+            <a:r>
+              <a:rPr sz="1700" b="0">
+                <a:solidFill>
+                  <a:srgbClr val="1F2937"/>
+                </a:solidFill>
+                <a:latin typeface="Arial"/>
+              </a:rPr>
+              <a:t>AppState：宿主共享状态</a:t>
             </a:r>
           </a:p>
         </p:txBody>
@@ -3570,8 +4181,8 @@
         </p:nvSpPr>
         <p:spPr>
           <a:xfrm>
-            <a:off x="594360" y="411480"/>
-            <a:ext cx="10607040" cy="777240"/>
+            <a:off x="594360" y="384048"/>
+            <a:ext cx="10789920" cy="685800"/>
           </a:xfrm>
           <a:prstGeom prst="rect">
             <a:avLst/>
@@ -3584,15 +4195,14 @@
           </a:bodyPr>
           <a:lstStyle/>
           <a:p>
-            <a:pPr algn="l"/>
             <a:r>
               <a:rPr sz="2600" b="1">
                 <a:solidFill>
                   <a:srgbClr val="0B1F44"/>
                 </a:solidFill>
-                <a:latin typeface="PingFang SC"/>
-              </a:rPr>
-              <a:t>turn loop 的结构</a:t>
+                <a:latin typeface="Arial"/>
+              </a:rPr>
+              <a:t>tool call 不是直接执行</a:t>
             </a:r>
           </a:p>
         </p:txBody>
@@ -3605,8 +4215,8 @@
         </p:nvSpPr>
         <p:spPr>
           <a:xfrm>
-            <a:off x="621792" y="1143000"/>
-            <a:ext cx="2194560" cy="36576"/>
+            <a:off x="621792" y="1078992"/>
+            <a:ext cx="2011680" cy="27432"/>
           </a:xfrm>
           <a:prstGeom prst="rect">
             <a:avLst/>
@@ -3642,14 +4252,513 @@
       </p:sp>
       <p:sp>
         <p:nvSpPr>
-          <p:cNvPr id="4" name="TextBox 3"/>
+          <p:cNvPr id="4" name="Rounded Rectangle 3"/>
+          <p:cNvSpPr/>
+          <p:nvPr/>
+        </p:nvSpPr>
+        <p:spPr>
+          <a:xfrm>
+            <a:off x="548640" y="2468880"/>
+            <a:ext cx="1645920" cy="731520"/>
+          </a:xfrm>
+          <a:prstGeom prst="roundRect">
+            <a:avLst/>
+          </a:prstGeom>
+          <a:solidFill>
+            <a:srgbClr val="FFFFFF"/>
+          </a:solidFill>
+          <a:ln>
+            <a:solidFill>
+              <a:srgbClr val="205295"/>
+            </a:solidFill>
+          </a:ln>
+        </p:spPr>
+        <p:style>
+          <a:lnRef idx="1">
+            <a:schemeClr val="accent1"/>
+          </a:lnRef>
+          <a:fillRef idx="3">
+            <a:schemeClr val="accent1"/>
+          </a:fillRef>
+          <a:effectRef idx="2">
+            <a:schemeClr val="accent1"/>
+          </a:effectRef>
+          <a:fontRef idx="minor">
+            <a:schemeClr val="lt1"/>
+          </a:fontRef>
+        </p:style>
+        <p:txBody>
+          <a:bodyPr rtlCol="0" anchor="ctr" wrap="square" lIns="76200" rIns="76200" tIns="50800" bIns="50800"/>
+          <a:lstStyle/>
+          <a:p>
+            <a:pPr algn="ctr"/>
+            <a:r>
+              <a:rPr sz="1600" b="1">
+                <a:solidFill>
+                  <a:srgbClr val="0B1F44"/>
+                </a:solidFill>
+                <a:latin typeface="Arial"/>
+              </a:rPr>
+              <a:t>schema</a:t>
+            </a:r>
+          </a:p>
+        </p:txBody>
+      </p:sp>
+      <p:cxnSp>
+        <p:nvCxnSpPr>
+          <p:cNvPr id="5" name="Connector 4"/>
+          <p:cNvCxnSpPr/>
+          <p:nvPr/>
+        </p:nvCxnSpPr>
+        <p:spPr>
+          <a:xfrm>
+            <a:off x="2194560" y="2834640"/>
+            <a:ext cx="182880" cy="0"/>
+          </a:xfrm>
+          <a:prstGeom prst="line">
+            <a:avLst/>
+          </a:prstGeom>
+          <a:ln w="25400">
+            <a:solidFill>
+              <a:srgbClr val="205295"/>
+            </a:solidFill>
+          </a:ln>
+        </p:spPr>
+        <p:style>
+          <a:lnRef idx="2">
+            <a:schemeClr val="accent1"/>
+          </a:lnRef>
+          <a:fillRef idx="0">
+            <a:schemeClr val="accent1"/>
+          </a:fillRef>
+          <a:effectRef idx="1">
+            <a:schemeClr val="accent1"/>
+          </a:effectRef>
+          <a:fontRef idx="minor">
+            <a:schemeClr val="tx1"/>
+          </a:fontRef>
+        </p:style>
+      </p:cxnSp>
+      <p:sp>
+        <p:nvSpPr>
+          <p:cNvPr id="6" name="Rounded Rectangle 5"/>
+          <p:cNvSpPr/>
+          <p:nvPr/>
+        </p:nvSpPr>
+        <p:spPr>
+          <a:xfrm>
+            <a:off x="2560320" y="2468880"/>
+            <a:ext cx="1645920" cy="731520"/>
+          </a:xfrm>
+          <a:prstGeom prst="roundRect">
+            <a:avLst/>
+          </a:prstGeom>
+          <a:solidFill>
+            <a:srgbClr val="FFFFFF"/>
+          </a:solidFill>
+          <a:ln>
+            <a:solidFill>
+              <a:srgbClr val="205295"/>
+            </a:solidFill>
+          </a:ln>
+        </p:spPr>
+        <p:style>
+          <a:lnRef idx="1">
+            <a:schemeClr val="accent1"/>
+          </a:lnRef>
+          <a:fillRef idx="3">
+            <a:schemeClr val="accent1"/>
+          </a:fillRef>
+          <a:effectRef idx="2">
+            <a:schemeClr val="accent1"/>
+          </a:effectRef>
+          <a:fontRef idx="minor">
+            <a:schemeClr val="lt1"/>
+          </a:fontRef>
+        </p:style>
+        <p:txBody>
+          <a:bodyPr rtlCol="0" anchor="ctr" wrap="square" lIns="76200" rIns="76200" tIns="50800" bIns="50800"/>
+          <a:lstStyle/>
+          <a:p>
+            <a:pPr algn="ctr"/>
+            <a:r>
+              <a:rPr sz="1600" b="1">
+                <a:solidFill>
+                  <a:srgbClr val="0B1F44"/>
+                </a:solidFill>
+                <a:latin typeface="Arial"/>
+              </a:rPr>
+              <a:t>validateInput</a:t>
+            </a:r>
+          </a:p>
+        </p:txBody>
+      </p:sp>
+      <p:cxnSp>
+        <p:nvCxnSpPr>
+          <p:cNvPr id="7" name="Connector 6"/>
+          <p:cNvCxnSpPr/>
+          <p:nvPr/>
+        </p:nvCxnSpPr>
+        <p:spPr>
+          <a:xfrm>
+            <a:off x="4206240" y="2834640"/>
+            <a:ext cx="182880" cy="0"/>
+          </a:xfrm>
+          <a:prstGeom prst="line">
+            <a:avLst/>
+          </a:prstGeom>
+          <a:ln w="25400">
+            <a:solidFill>
+              <a:srgbClr val="205295"/>
+            </a:solidFill>
+          </a:ln>
+        </p:spPr>
+        <p:style>
+          <a:lnRef idx="2">
+            <a:schemeClr val="accent1"/>
+          </a:lnRef>
+          <a:fillRef idx="0">
+            <a:schemeClr val="accent1"/>
+          </a:fillRef>
+          <a:effectRef idx="1">
+            <a:schemeClr val="accent1"/>
+          </a:effectRef>
+          <a:fontRef idx="minor">
+            <a:schemeClr val="tx1"/>
+          </a:fontRef>
+        </p:style>
+      </p:cxnSp>
+      <p:sp>
+        <p:nvSpPr>
+          <p:cNvPr id="8" name="Rounded Rectangle 7"/>
+          <p:cNvSpPr/>
+          <p:nvPr/>
+        </p:nvSpPr>
+        <p:spPr>
+          <a:xfrm>
+            <a:off x="4572000" y="2468880"/>
+            <a:ext cx="1920240" cy="731520"/>
+          </a:xfrm>
+          <a:prstGeom prst="roundRect">
+            <a:avLst/>
+          </a:prstGeom>
+          <a:solidFill>
+            <a:srgbClr val="FFFFFF"/>
+          </a:solidFill>
+          <a:ln>
+            <a:solidFill>
+              <a:srgbClr val="205295"/>
+            </a:solidFill>
+          </a:ln>
+        </p:spPr>
+        <p:style>
+          <a:lnRef idx="1">
+            <a:schemeClr val="accent1"/>
+          </a:lnRef>
+          <a:fillRef idx="3">
+            <a:schemeClr val="accent1"/>
+          </a:fillRef>
+          <a:effectRef idx="2">
+            <a:schemeClr val="accent1"/>
+          </a:effectRef>
+          <a:fontRef idx="minor">
+            <a:schemeClr val="lt1"/>
+          </a:fontRef>
+        </p:style>
+        <p:txBody>
+          <a:bodyPr rtlCol="0" anchor="ctr" wrap="square" lIns="76200" rIns="76200" tIns="50800" bIns="50800"/>
+          <a:lstStyle/>
+          <a:p>
+            <a:pPr algn="ctr"/>
+            <a:r>
+              <a:rPr sz="1600" b="1">
+                <a:solidFill>
+                  <a:srgbClr val="0B1F44"/>
+                </a:solidFill>
+                <a:latin typeface="Arial"/>
+              </a:rPr>
+              <a:t>classifier / hooks</a:t>
+            </a:r>
+          </a:p>
+        </p:txBody>
+      </p:sp>
+      <p:cxnSp>
+        <p:nvCxnSpPr>
+          <p:cNvPr id="9" name="Connector 8"/>
+          <p:cNvCxnSpPr/>
+          <p:nvPr/>
+        </p:nvCxnSpPr>
+        <p:spPr>
+          <a:xfrm>
+            <a:off x="6492240" y="2834640"/>
+            <a:ext cx="182880" cy="0"/>
+          </a:xfrm>
+          <a:prstGeom prst="line">
+            <a:avLst/>
+          </a:prstGeom>
+          <a:ln w="25400">
+            <a:solidFill>
+              <a:srgbClr val="205295"/>
+            </a:solidFill>
+          </a:ln>
+        </p:spPr>
+        <p:style>
+          <a:lnRef idx="2">
+            <a:schemeClr val="accent1"/>
+          </a:lnRef>
+          <a:fillRef idx="0">
+            <a:schemeClr val="accent1"/>
+          </a:fillRef>
+          <a:effectRef idx="1">
+            <a:schemeClr val="accent1"/>
+          </a:effectRef>
+          <a:fontRef idx="minor">
+            <a:schemeClr val="tx1"/>
+          </a:fontRef>
+        </p:style>
+      </p:cxnSp>
+      <p:sp>
+        <p:nvSpPr>
+          <p:cNvPr id="10" name="Rounded Rectangle 9"/>
+          <p:cNvSpPr/>
+          <p:nvPr/>
+        </p:nvSpPr>
+        <p:spPr>
+          <a:xfrm>
+            <a:off x="6858000" y="2468880"/>
+            <a:ext cx="1645920" cy="731520"/>
+          </a:xfrm>
+          <a:prstGeom prst="roundRect">
+            <a:avLst/>
+          </a:prstGeom>
+          <a:solidFill>
+            <a:srgbClr val="FFFFFF"/>
+          </a:solidFill>
+          <a:ln>
+            <a:solidFill>
+              <a:srgbClr val="205295"/>
+            </a:solidFill>
+          </a:ln>
+        </p:spPr>
+        <p:style>
+          <a:lnRef idx="1">
+            <a:schemeClr val="accent1"/>
+          </a:lnRef>
+          <a:fillRef idx="3">
+            <a:schemeClr val="accent1"/>
+          </a:fillRef>
+          <a:effectRef idx="2">
+            <a:schemeClr val="accent1"/>
+          </a:effectRef>
+          <a:fontRef idx="minor">
+            <a:schemeClr val="lt1"/>
+          </a:fontRef>
+        </p:style>
+        <p:txBody>
+          <a:bodyPr rtlCol="0" anchor="ctr" wrap="square" lIns="76200" rIns="76200" tIns="50800" bIns="50800"/>
+          <a:lstStyle/>
+          <a:p>
+            <a:pPr algn="ctr"/>
+            <a:r>
+              <a:rPr sz="1600" b="1">
+                <a:solidFill>
+                  <a:srgbClr val="0B1F44"/>
+                </a:solidFill>
+                <a:latin typeface="Arial"/>
+              </a:rPr>
+              <a:t>permission</a:t>
+            </a:r>
+          </a:p>
+        </p:txBody>
+      </p:sp>
+      <p:cxnSp>
+        <p:nvCxnSpPr>
+          <p:cNvPr id="11" name="Connector 10"/>
+          <p:cNvCxnSpPr/>
+          <p:nvPr/>
+        </p:nvCxnSpPr>
+        <p:spPr>
+          <a:xfrm>
+            <a:off x="8503920" y="2834640"/>
+            <a:ext cx="182880" cy="0"/>
+          </a:xfrm>
+          <a:prstGeom prst="line">
+            <a:avLst/>
+          </a:prstGeom>
+          <a:ln w="25400">
+            <a:solidFill>
+              <a:srgbClr val="205295"/>
+            </a:solidFill>
+          </a:ln>
+        </p:spPr>
+        <p:style>
+          <a:lnRef idx="2">
+            <a:schemeClr val="accent1"/>
+          </a:lnRef>
+          <a:fillRef idx="0">
+            <a:schemeClr val="accent1"/>
+          </a:fillRef>
+          <a:effectRef idx="1">
+            <a:schemeClr val="accent1"/>
+          </a:effectRef>
+          <a:fontRef idx="minor">
+            <a:schemeClr val="tx1"/>
+          </a:fontRef>
+        </p:style>
+      </p:cxnSp>
+      <p:sp>
+        <p:nvSpPr>
+          <p:cNvPr id="12" name="Rounded Rectangle 11"/>
+          <p:cNvSpPr/>
+          <p:nvPr/>
+        </p:nvSpPr>
+        <p:spPr>
+          <a:xfrm>
+            <a:off x="8869680" y="2468880"/>
+            <a:ext cx="1645920" cy="731520"/>
+          </a:xfrm>
+          <a:prstGeom prst="roundRect">
+            <a:avLst/>
+          </a:prstGeom>
+          <a:solidFill>
+            <a:srgbClr val="DDEAFB"/>
+          </a:solidFill>
+          <a:ln>
+            <a:solidFill>
+              <a:srgbClr val="205295"/>
+            </a:solidFill>
+          </a:ln>
+        </p:spPr>
+        <p:style>
+          <a:lnRef idx="1">
+            <a:schemeClr val="accent1"/>
+          </a:lnRef>
+          <a:fillRef idx="3">
+            <a:schemeClr val="accent1"/>
+          </a:fillRef>
+          <a:effectRef idx="2">
+            <a:schemeClr val="accent1"/>
+          </a:effectRef>
+          <a:fontRef idx="minor">
+            <a:schemeClr val="lt1"/>
+          </a:fontRef>
+        </p:style>
+        <p:txBody>
+          <a:bodyPr rtlCol="0" anchor="ctr" wrap="square" lIns="76200" rIns="76200" tIns="50800" bIns="50800"/>
+          <a:lstStyle/>
+          <a:p>
+            <a:pPr algn="ctr"/>
+            <a:r>
+              <a:rPr sz="1600" b="1">
+                <a:solidFill>
+                  <a:srgbClr val="0B1F44"/>
+                </a:solidFill>
+                <a:latin typeface="Arial"/>
+              </a:rPr>
+              <a:t>tool.call()</a:t>
+            </a:r>
+          </a:p>
+        </p:txBody>
+      </p:sp>
+      <p:cxnSp>
+        <p:nvCxnSpPr>
+          <p:cNvPr id="13" name="Connector 12"/>
+          <p:cNvCxnSpPr/>
+          <p:nvPr/>
+        </p:nvCxnSpPr>
+        <p:spPr>
+          <a:xfrm>
+            <a:off x="10515600" y="2834640"/>
+            <a:ext cx="182880" cy="0"/>
+          </a:xfrm>
+          <a:prstGeom prst="line">
+            <a:avLst/>
+          </a:prstGeom>
+          <a:ln w="25400">
+            <a:solidFill>
+              <a:srgbClr val="205295"/>
+            </a:solidFill>
+          </a:ln>
+        </p:spPr>
+        <p:style>
+          <a:lnRef idx="2">
+            <a:schemeClr val="accent1"/>
+          </a:lnRef>
+          <a:fillRef idx="0">
+            <a:schemeClr val="accent1"/>
+          </a:fillRef>
+          <a:effectRef idx="1">
+            <a:schemeClr val="accent1"/>
+          </a:effectRef>
+          <a:fontRef idx="minor">
+            <a:schemeClr val="tx1"/>
+          </a:fontRef>
+        </p:style>
+      </p:cxnSp>
+      <p:sp>
+        <p:nvSpPr>
+          <p:cNvPr id="14" name="Rounded Rectangle 13"/>
+          <p:cNvSpPr/>
+          <p:nvPr/>
+        </p:nvSpPr>
+        <p:spPr>
+          <a:xfrm>
+            <a:off x="10881359" y="2468880"/>
+            <a:ext cx="1645920" cy="731520"/>
+          </a:xfrm>
+          <a:prstGeom prst="roundRect">
+            <a:avLst/>
+          </a:prstGeom>
+          <a:solidFill>
+            <a:srgbClr val="FFFFFF"/>
+          </a:solidFill>
+          <a:ln>
+            <a:solidFill>
+              <a:srgbClr val="205295"/>
+            </a:solidFill>
+          </a:ln>
+        </p:spPr>
+        <p:style>
+          <a:lnRef idx="1">
+            <a:schemeClr val="accent1"/>
+          </a:lnRef>
+          <a:fillRef idx="3">
+            <a:schemeClr val="accent1"/>
+          </a:fillRef>
+          <a:effectRef idx="2">
+            <a:schemeClr val="accent1"/>
+          </a:effectRef>
+          <a:fontRef idx="minor">
+            <a:schemeClr val="lt1"/>
+          </a:fontRef>
+        </p:style>
+        <p:txBody>
+          <a:bodyPr rtlCol="0" anchor="ctr" wrap="square" lIns="76200" rIns="76200" tIns="50800" bIns="50800"/>
+          <a:lstStyle/>
+          <a:p>
+            <a:pPr algn="ctr"/>
+            <a:r>
+              <a:rPr sz="1600" b="1">
+                <a:solidFill>
+                  <a:srgbClr val="0B1F44"/>
+                </a:solidFill>
+                <a:latin typeface="Arial"/>
+              </a:rPr>
+              <a:t>result processing</a:t>
+            </a:r>
+          </a:p>
+        </p:txBody>
+      </p:sp>
+      <p:sp>
+        <p:nvSpPr>
+          <p:cNvPr id="15" name="TextBox 14"/>
           <p:cNvSpPr txBox="1"/>
           <p:nvPr/>
         </p:nvSpPr>
         <p:spPr>
           <a:xfrm>
-            <a:off x="822960" y="1554480"/>
-            <a:ext cx="10058400" cy="4389120"/>
+            <a:off x="822960" y="4023360"/>
+            <a:ext cx="10149840" cy="1645920"/>
           </a:xfrm>
           <a:prstGeom prst="rect">
             <a:avLst/>
@@ -3668,13 +4777,13 @@
               </a:spcAft>
             </a:pPr>
             <a:r>
-              <a:rPr sz="2000" b="0">
+              <a:rPr sz="1700" b="0">
                 <a:solidFill>
                   <a:srgbClr val="1F2937"/>
                 </a:solidFill>
-                <a:latin typeface="PingFang SC"/>
-              </a:rPr>
-              <a:t>先做 context 治理：tool result budget、snip、microcompact、collapse、autocompact</a:t>
+                <a:latin typeface="Arial"/>
+              </a:rPr>
+              <a:t>真实路径不是 findToolByName -&gt; tool.call 这么短</a:t>
             </a:r>
           </a:p>
           <a:p>
@@ -3684,13 +4793,13 @@
               </a:spcAft>
             </a:pPr>
             <a:r>
-              <a:rPr sz="2000" b="0">
+              <a:rPr sz="1700" b="0">
                 <a:solidFill>
                   <a:srgbClr val="1F2937"/>
                 </a:solidFill>
-                <a:latin typeface="PingFang SC"/>
-              </a:rPr>
-              <a:t>再构造 API 请求并接收 streaming 输出</a:t>
+                <a:latin typeface="Arial"/>
+              </a:rPr>
+              <a:t>前面有 schema、hooks、classifier、permission 决策</a:t>
             </a:r>
           </a:p>
           <a:p>
@@ -3700,13 +4809,13 @@
               </a:spcAft>
             </a:pPr>
             <a:r>
-              <a:rPr sz="2000" b="0">
+              <a:rPr sz="1700" b="0">
                 <a:solidFill>
                   <a:srgbClr val="1F2937"/>
                 </a:solidFill>
-                <a:latin typeface="PingFang SC"/>
-              </a:rPr>
-              <a:t>若出现 tool_use，进入工具执行器</a:t>
+                <a:latin typeface="Arial"/>
+              </a:rPr>
+              <a:t>后面还有 result block、content replacement、post-tool hooks、attachments</a:t>
             </a:r>
           </a:p>
           <a:p>
@@ -3716,29 +4825,13 @@
               </a:spcAft>
             </a:pPr>
             <a:r>
-              <a:rPr sz="2000" b="0">
+              <a:rPr sz="1700" b="0">
                 <a:solidFill>
                   <a:srgbClr val="1F2937"/>
                 </a:solidFill>
-                <a:latin typeface="PingFang SC"/>
-              </a:rPr>
-              <a:t>tool_result 回写 messages 后，决定是否继续下一轮</a:t>
-            </a:r>
-          </a:p>
-          <a:p>
-            <a:pPr>
-              <a:spcAft>
-                <a:spcPts val="800"/>
-              </a:spcAft>
-            </a:pPr>
-            <a:r>
-              <a:rPr sz="2000" b="0">
-                <a:solidFill>
-                  <a:srgbClr val="1F2937"/>
-                </a:solidFill>
-                <a:latin typeface="PingFang SC"/>
-              </a:rPr>
-              <a:t>因此它更像带 recovery 分支的 state machine，而不是线性 pipeline</a:t>
+                <a:latin typeface="Arial"/>
+              </a:rPr>
+              <a:t>autonomy boundary 在 tool pipeline，而不是 UI 表面</a:t>
             </a:r>
           </a:p>
         </p:txBody>
@@ -3777,8 +4870,8 @@
         </p:nvSpPr>
         <p:spPr>
           <a:xfrm>
-            <a:off x="594360" y="411480"/>
-            <a:ext cx="10607040" cy="777240"/>
+            <a:off x="594360" y="384048"/>
+            <a:ext cx="10789920" cy="685800"/>
           </a:xfrm>
           <a:prstGeom prst="rect">
             <a:avLst/>
@@ -3791,15 +4884,14 @@
           </a:bodyPr>
           <a:lstStyle/>
           <a:p>
-            <a:pPr algn="l"/>
             <a:r>
               <a:rPr sz="2600" b="1">
                 <a:solidFill>
                   <a:srgbClr val="0B1F44"/>
                 </a:solidFill>
-                <a:latin typeface="PingFang SC"/>
-              </a:rPr>
-              <a:t>QueryEngine.ts：conversation host</a:t>
+                <a:latin typeface="Arial"/>
+              </a:rPr>
+              <a:t>task runtime 与 mailbox</a:t>
             </a:r>
           </a:p>
         </p:txBody>
@@ -3812,8 +4904,8 @@
         </p:nvSpPr>
         <p:spPr>
           <a:xfrm>
-            <a:off x="621792" y="1143000"/>
-            <a:ext cx="2194560" cy="36576"/>
+            <a:off x="621792" y="1078992"/>
+            <a:ext cx="2011680" cy="27432"/>
           </a:xfrm>
           <a:prstGeom prst="rect">
             <a:avLst/>
@@ -3849,14 +4941,459 @@
       </p:sp>
       <p:sp>
         <p:nvSpPr>
-          <p:cNvPr id="4" name="TextBox 3"/>
+          <p:cNvPr id="4" name="Rounded Rectangle 3"/>
+          <p:cNvSpPr/>
+          <p:nvPr/>
+        </p:nvSpPr>
+        <p:spPr>
+          <a:xfrm>
+            <a:off x="822960" y="2011680"/>
+            <a:ext cx="1645920" cy="731520"/>
+          </a:xfrm>
+          <a:prstGeom prst="roundRect">
+            <a:avLst/>
+          </a:prstGeom>
+          <a:solidFill>
+            <a:srgbClr val="FFFFFF"/>
+          </a:solidFill>
+          <a:ln>
+            <a:solidFill>
+              <a:srgbClr val="205295"/>
+            </a:solidFill>
+          </a:ln>
+        </p:spPr>
+        <p:style>
+          <a:lnRef idx="1">
+            <a:schemeClr val="accent1"/>
+          </a:lnRef>
+          <a:fillRef idx="3">
+            <a:schemeClr val="accent1"/>
+          </a:fillRef>
+          <a:effectRef idx="2">
+            <a:schemeClr val="accent1"/>
+          </a:effectRef>
+          <a:fontRef idx="minor">
+            <a:schemeClr val="lt1"/>
+          </a:fontRef>
+        </p:style>
+        <p:txBody>
+          <a:bodyPr rtlCol="0" anchor="ctr" wrap="square" lIns="76200" rIns="76200" tIns="50800" bIns="50800"/>
+          <a:lstStyle/>
+          <a:p>
+            <a:pPr algn="ctr"/>
+            <a:r>
+              <a:rPr sz="1600" b="1">
+                <a:solidFill>
+                  <a:srgbClr val="0B1F44"/>
+                </a:solidFill>
+                <a:latin typeface="Arial"/>
+              </a:rPr>
+              <a:t>User / Main</a:t>
+            </a:r>
+          </a:p>
+        </p:txBody>
+      </p:sp>
+      <p:sp>
+        <p:nvSpPr>
+          <p:cNvPr id="5" name="Rounded Rectangle 4"/>
+          <p:cNvSpPr/>
+          <p:nvPr/>
+        </p:nvSpPr>
+        <p:spPr>
+          <a:xfrm>
+            <a:off x="3017520" y="2011680"/>
+            <a:ext cx="1828800" cy="731520"/>
+          </a:xfrm>
+          <a:prstGeom prst="roundRect">
+            <a:avLst/>
+          </a:prstGeom>
+          <a:solidFill>
+            <a:srgbClr val="FFFFFF"/>
+          </a:solidFill>
+          <a:ln>
+            <a:solidFill>
+              <a:srgbClr val="205295"/>
+            </a:solidFill>
+          </a:ln>
+        </p:spPr>
+        <p:style>
+          <a:lnRef idx="1">
+            <a:schemeClr val="accent1"/>
+          </a:lnRef>
+          <a:fillRef idx="3">
+            <a:schemeClr val="accent1"/>
+          </a:fillRef>
+          <a:effectRef idx="2">
+            <a:schemeClr val="accent1"/>
+          </a:effectRef>
+          <a:fontRef idx="minor">
+            <a:schemeClr val="lt1"/>
+          </a:fontRef>
+        </p:style>
+        <p:txBody>
+          <a:bodyPr rtlCol="0" anchor="ctr" wrap="square" lIns="76200" rIns="76200" tIns="50800" bIns="50800"/>
+          <a:lstStyle/>
+          <a:p>
+            <a:pPr algn="ctr"/>
+            <a:r>
+              <a:rPr sz="1600" b="1">
+                <a:solidFill>
+                  <a:srgbClr val="0B1F44"/>
+                </a:solidFill>
+                <a:latin typeface="Arial"/>
+              </a:rPr>
+              <a:t>task runtime</a:t>
+            </a:r>
+          </a:p>
+        </p:txBody>
+      </p:sp>
+      <p:sp>
+        <p:nvSpPr>
+          <p:cNvPr id="6" name="Rounded Rectangle 5"/>
+          <p:cNvSpPr/>
+          <p:nvPr/>
+        </p:nvSpPr>
+        <p:spPr>
+          <a:xfrm>
+            <a:off x="5394960" y="2011680"/>
+            <a:ext cx="1828800" cy="731520"/>
+          </a:xfrm>
+          <a:prstGeom prst="roundRect">
+            <a:avLst/>
+          </a:prstGeom>
+          <a:solidFill>
+            <a:srgbClr val="FFFFFF"/>
+          </a:solidFill>
+          <a:ln>
+            <a:solidFill>
+              <a:srgbClr val="205295"/>
+            </a:solidFill>
+          </a:ln>
+        </p:spPr>
+        <p:style>
+          <a:lnRef idx="1">
+            <a:schemeClr val="accent1"/>
+          </a:lnRef>
+          <a:fillRef idx="3">
+            <a:schemeClr val="accent1"/>
+          </a:fillRef>
+          <a:effectRef idx="2">
+            <a:schemeClr val="accent1"/>
+          </a:effectRef>
+          <a:fontRef idx="minor">
+            <a:schemeClr val="lt1"/>
+          </a:fontRef>
+        </p:style>
+        <p:txBody>
+          <a:bodyPr rtlCol="0" anchor="ctr" wrap="square" lIns="76200" rIns="76200" tIns="50800" bIns="50800"/>
+          <a:lstStyle/>
+          <a:p>
+            <a:pPr algn="ctr"/>
+            <a:r>
+              <a:rPr sz="1600" b="1">
+                <a:solidFill>
+                  <a:srgbClr val="0B1F44"/>
+                </a:solidFill>
+                <a:latin typeface="Arial"/>
+              </a:rPr>
+              <a:t>subagent</a:t>
+            </a:r>
+          </a:p>
+        </p:txBody>
+      </p:sp>
+      <p:sp>
+        <p:nvSpPr>
+          <p:cNvPr id="7" name="Rounded Rectangle 6"/>
+          <p:cNvSpPr/>
+          <p:nvPr/>
+        </p:nvSpPr>
+        <p:spPr>
+          <a:xfrm>
+            <a:off x="7772400" y="2011680"/>
+            <a:ext cx="1920240" cy="731520"/>
+          </a:xfrm>
+          <a:prstGeom prst="roundRect">
+            <a:avLst/>
+          </a:prstGeom>
+          <a:solidFill>
+            <a:srgbClr val="FFFFFF"/>
+          </a:solidFill>
+          <a:ln>
+            <a:solidFill>
+              <a:srgbClr val="205295"/>
+            </a:solidFill>
+          </a:ln>
+        </p:spPr>
+        <p:style>
+          <a:lnRef idx="1">
+            <a:schemeClr val="accent1"/>
+          </a:lnRef>
+          <a:fillRef idx="3">
+            <a:schemeClr val="accent1"/>
+          </a:fillRef>
+          <a:effectRef idx="2">
+            <a:schemeClr val="accent1"/>
+          </a:effectRef>
+          <a:fontRef idx="minor">
+            <a:schemeClr val="lt1"/>
+          </a:fontRef>
+        </p:style>
+        <p:txBody>
+          <a:bodyPr rtlCol="0" anchor="ctr" wrap="square" lIns="76200" rIns="76200" tIns="50800" bIns="50800"/>
+          <a:lstStyle/>
+          <a:p>
+            <a:pPr algn="ctr"/>
+            <a:r>
+              <a:rPr sz="1600" b="1">
+                <a:solidFill>
+                  <a:srgbClr val="0B1F44"/>
+                </a:solidFill>
+                <a:latin typeface="Arial"/>
+              </a:rPr>
+              <a:t>mailbox / queue</a:t>
+            </a:r>
+          </a:p>
+        </p:txBody>
+      </p:sp>
+      <p:sp>
+        <p:nvSpPr>
+          <p:cNvPr id="8" name="Rounded Rectangle 7"/>
+          <p:cNvSpPr/>
+          <p:nvPr/>
+        </p:nvSpPr>
+        <p:spPr>
+          <a:xfrm>
+            <a:off x="5303520" y="4023360"/>
+            <a:ext cx="2103120" cy="731520"/>
+          </a:xfrm>
+          <a:prstGeom prst="roundRect">
+            <a:avLst/>
+          </a:prstGeom>
+          <a:solidFill>
+            <a:srgbClr val="DDEAFB"/>
+          </a:solidFill>
+          <a:ln>
+            <a:solidFill>
+              <a:srgbClr val="205295"/>
+            </a:solidFill>
+          </a:ln>
+        </p:spPr>
+        <p:style>
+          <a:lnRef idx="1">
+            <a:schemeClr val="accent1"/>
+          </a:lnRef>
+          <a:fillRef idx="3">
+            <a:schemeClr val="accent1"/>
+          </a:fillRef>
+          <a:effectRef idx="2">
+            <a:schemeClr val="accent1"/>
+          </a:effectRef>
+          <a:fontRef idx="minor">
+            <a:schemeClr val="lt1"/>
+          </a:fontRef>
+        </p:style>
+        <p:txBody>
+          <a:bodyPr rtlCol="0" anchor="ctr" wrap="square" lIns="76200" rIns="76200" tIns="50800" bIns="50800"/>
+          <a:lstStyle/>
+          <a:p>
+            <a:pPr algn="ctr"/>
+            <a:r>
+              <a:rPr sz="1600" b="1">
+                <a:solidFill>
+                  <a:srgbClr val="0B1F44"/>
+                </a:solidFill>
+                <a:latin typeface="Arial"/>
+              </a:rPr>
+              <a:t>task-notification</a:t>
+            </a:r>
+          </a:p>
+        </p:txBody>
+      </p:sp>
+      <p:cxnSp>
+        <p:nvCxnSpPr>
+          <p:cNvPr id="9" name="Connector 8"/>
+          <p:cNvCxnSpPr/>
+          <p:nvPr/>
+        </p:nvCxnSpPr>
+        <p:spPr>
+          <a:xfrm>
+            <a:off x="2468880" y="2377440"/>
+            <a:ext cx="548640" cy="0"/>
+          </a:xfrm>
+          <a:prstGeom prst="line">
+            <a:avLst/>
+          </a:prstGeom>
+          <a:ln w="25400">
+            <a:solidFill>
+              <a:srgbClr val="205295"/>
+            </a:solidFill>
+          </a:ln>
+        </p:spPr>
+        <p:style>
+          <a:lnRef idx="2">
+            <a:schemeClr val="accent1"/>
+          </a:lnRef>
+          <a:fillRef idx="0">
+            <a:schemeClr val="accent1"/>
+          </a:fillRef>
+          <a:effectRef idx="1">
+            <a:schemeClr val="accent1"/>
+          </a:effectRef>
+          <a:fontRef idx="minor">
+            <a:schemeClr val="tx1"/>
+          </a:fontRef>
+        </p:style>
+      </p:cxnSp>
+      <p:cxnSp>
+        <p:nvCxnSpPr>
+          <p:cNvPr id="10" name="Connector 9"/>
+          <p:cNvCxnSpPr/>
+          <p:nvPr/>
+        </p:nvCxnSpPr>
+        <p:spPr>
+          <a:xfrm>
+            <a:off x="4846320" y="2377440"/>
+            <a:ext cx="548640" cy="0"/>
+          </a:xfrm>
+          <a:prstGeom prst="line">
+            <a:avLst/>
+          </a:prstGeom>
+          <a:ln w="25400">
+            <a:solidFill>
+              <a:srgbClr val="205295"/>
+            </a:solidFill>
+          </a:ln>
+        </p:spPr>
+        <p:style>
+          <a:lnRef idx="2">
+            <a:schemeClr val="accent1"/>
+          </a:lnRef>
+          <a:fillRef idx="0">
+            <a:schemeClr val="accent1"/>
+          </a:fillRef>
+          <a:effectRef idx="1">
+            <a:schemeClr val="accent1"/>
+          </a:effectRef>
+          <a:fontRef idx="minor">
+            <a:schemeClr val="tx1"/>
+          </a:fontRef>
+        </p:style>
+      </p:cxnSp>
+      <p:cxnSp>
+        <p:nvCxnSpPr>
+          <p:cNvPr id="11" name="Connector 10"/>
+          <p:cNvCxnSpPr/>
+          <p:nvPr/>
+        </p:nvCxnSpPr>
+        <p:spPr>
+          <a:xfrm>
+            <a:off x="7223760" y="2377440"/>
+            <a:ext cx="548640" cy="0"/>
+          </a:xfrm>
+          <a:prstGeom prst="line">
+            <a:avLst/>
+          </a:prstGeom>
+          <a:ln w="25400">
+            <a:solidFill>
+              <a:srgbClr val="205295"/>
+            </a:solidFill>
+          </a:ln>
+        </p:spPr>
+        <p:style>
+          <a:lnRef idx="2">
+            <a:schemeClr val="accent1"/>
+          </a:lnRef>
+          <a:fillRef idx="0">
+            <a:schemeClr val="accent1"/>
+          </a:fillRef>
+          <a:effectRef idx="1">
+            <a:schemeClr val="accent1"/>
+          </a:effectRef>
+          <a:fontRef idx="minor">
+            <a:schemeClr val="tx1"/>
+          </a:fontRef>
+        </p:style>
+      </p:cxnSp>
+      <p:cxnSp>
+        <p:nvCxnSpPr>
+          <p:cNvPr id="12" name="Connector 11"/>
+          <p:cNvCxnSpPr/>
+          <p:nvPr/>
+        </p:nvCxnSpPr>
+        <p:spPr>
+          <a:xfrm flipH="1">
+            <a:off x="6309360" y="2743200"/>
+            <a:ext cx="1463040" cy="1280160"/>
+          </a:xfrm>
+          <a:prstGeom prst="line">
+            <a:avLst/>
+          </a:prstGeom>
+          <a:ln w="25400">
+            <a:solidFill>
+              <a:srgbClr val="205295"/>
+            </a:solidFill>
+          </a:ln>
+        </p:spPr>
+        <p:style>
+          <a:lnRef idx="2">
+            <a:schemeClr val="accent1"/>
+          </a:lnRef>
+          <a:fillRef idx="0">
+            <a:schemeClr val="accent1"/>
+          </a:fillRef>
+          <a:effectRef idx="1">
+            <a:schemeClr val="accent1"/>
+          </a:effectRef>
+          <a:fontRef idx="minor">
+            <a:schemeClr val="tx1"/>
+          </a:fontRef>
+        </p:style>
+      </p:cxnSp>
+      <p:cxnSp>
+        <p:nvCxnSpPr>
+          <p:cNvPr id="13" name="Connector 12"/>
+          <p:cNvCxnSpPr/>
+          <p:nvPr/>
+        </p:nvCxnSpPr>
+        <p:spPr>
+          <a:xfrm flipH="1" flipV="1">
+            <a:off x="1737360" y="2743200"/>
+            <a:ext cx="3566160" cy="1645920"/>
+          </a:xfrm>
+          <a:prstGeom prst="line">
+            <a:avLst/>
+          </a:prstGeom>
+          <a:ln w="25400">
+            <a:solidFill>
+              <a:srgbClr val="205295"/>
+            </a:solidFill>
+          </a:ln>
+        </p:spPr>
+        <p:style>
+          <a:lnRef idx="2">
+            <a:schemeClr val="accent1"/>
+          </a:lnRef>
+          <a:fillRef idx="0">
+            <a:schemeClr val="accent1"/>
+          </a:fillRef>
+          <a:effectRef idx="1">
+            <a:schemeClr val="accent1"/>
+          </a:effectRef>
+          <a:fontRef idx="minor">
+            <a:schemeClr val="tx1"/>
+          </a:fontRef>
+        </p:style>
+      </p:cxnSp>
+      <p:sp>
+        <p:nvSpPr>
+          <p:cNvPr id="14" name="TextBox 13"/>
           <p:cNvSpPr txBox="1"/>
           <p:nvPr/>
         </p:nvSpPr>
         <p:spPr>
           <a:xfrm>
-            <a:off x="822960" y="1554480"/>
-            <a:ext cx="10058400" cy="4389120"/>
+            <a:off x="822960" y="4846320"/>
+            <a:ext cx="10149840" cy="1097280"/>
           </a:xfrm>
           <a:prstGeom prst="rect">
             <a:avLst/>
@@ -3875,13 +5412,13 @@
               </a:spcAft>
             </a:pPr>
             <a:r>
-              <a:rPr sz="2000" b="0">
+              <a:rPr sz="1600" b="0">
                 <a:solidFill>
                   <a:srgbClr val="1F2937"/>
                 </a:solidFill>
-                <a:latin typeface="PingFang SC"/>
-              </a:rPr>
-              <a:t>不是内核本身，而是会话宿主</a:t>
+                <a:latin typeface="Arial"/>
+              </a:rPr>
+              <a:t>task/framework.ts 负责注册、轮询、GC、notification</a:t>
             </a:r>
           </a:p>
           <a:p>
@@ -3891,13 +5428,13 @@
               </a:spcAft>
             </a:pPr>
             <a:r>
-              <a:rPr sz="2000" b="0">
+              <a:rPr sz="1600" b="0">
                 <a:solidFill>
                   <a:srgbClr val="1F2937"/>
                 </a:solidFill>
-                <a:latin typeface="PingFang SC"/>
-              </a:rPr>
-              <a:t>负责保持多轮消息历史、聚合 usage、维护 permission denial</a:t>
+                <a:latin typeface="Arial"/>
+              </a:rPr>
+              <a:t>runAgent.ts 负责 subagent、sidechain transcript、metadata</a:t>
             </a:r>
           </a:p>
           <a:p>
@@ -3907,13 +5444,13 @@
               </a:spcAft>
             </a:pPr>
             <a:r>
-              <a:rPr sz="2000" b="0">
+              <a:rPr sz="1600" b="0">
                 <a:solidFill>
                   <a:srgbClr val="1F2937"/>
                 </a:solidFill>
-                <a:latin typeface="PingFang SC"/>
-              </a:rPr>
-              <a:t>持有 readFileState、预落盘 transcript、做 SDK/headless 输出投影</a:t>
+                <a:latin typeface="Arial"/>
+              </a:rPr>
+              <a:t>mailbox / pendingMessages 的投递发生在 turn 边界</a:t>
             </a:r>
           </a:p>
           <a:p>
@@ -3923,13 +5460,13 @@
               </a:spcAft>
             </a:pPr>
             <a:r>
-              <a:rPr sz="2000" b="0">
+              <a:rPr sz="1600" b="0">
                 <a:solidFill>
                   <a:srgbClr val="1F2937"/>
                 </a:solidFill>
-                <a:latin typeface="PingFang SC"/>
-              </a:rPr>
-              <a:t>可以简单记成：query.ts 负责一轮怎么跑，QueryEngine.ts 负责一段会话怎么活</a:t>
+                <a:latin typeface="Arial"/>
+              </a:rPr>
+              <a:t>这牺牲了一点即时性，但换来了 turn 内状态一致性</a:t>
             </a:r>
           </a:p>
         </p:txBody>
@@ -3948,7 +5485,7 @@
     <p:bg>
       <p:bgPr>
         <a:solidFill>
-          <a:srgbClr val="101C3F"/>
+          <a:srgbClr val="F8FAFC"/>
         </a:solidFill>
         <a:effectLst/>
       </p:bgPr>
@@ -3968,8 +5505,8 @@
         </p:nvSpPr>
         <p:spPr>
           <a:xfrm>
-            <a:off x="594360" y="411480"/>
-            <a:ext cx="10607040" cy="777240"/>
+            <a:off x="594360" y="384048"/>
+            <a:ext cx="10789920" cy="685800"/>
           </a:xfrm>
           <a:prstGeom prst="rect">
             <a:avLst/>
@@ -3982,29 +5519,105 @@
           </a:bodyPr>
           <a:lstStyle/>
           <a:p>
-            <a:pPr algn="l"/>
-            <a:r>
-              <a:rPr sz="2800" b="1">
-                <a:solidFill>
-                  <a:srgbClr val="FFFFFF"/>
-                </a:solidFill>
-                <a:latin typeface="PingFang SC"/>
-              </a:rPr>
-              <a:t>四、长会话为什么还能稳定工作</a:t>
-            </a:r>
-          </a:p>
-        </p:txBody>
-      </p:sp>
-      <p:sp>
-        <p:nvSpPr>
-          <p:cNvPr id="3" name="TextBox 2"/>
+            <a:r>
+              <a:rPr sz="2600" b="1">
+                <a:solidFill>
+                  <a:srgbClr val="0B1F44"/>
+                </a:solidFill>
+                <a:latin typeface="Arial"/>
+              </a:rPr>
+              <a:t>为什么它更像产品化 runtime</a:t>
+            </a:r>
+          </a:p>
+        </p:txBody>
+      </p:sp>
+      <p:sp>
+        <p:nvSpPr>
+          <p:cNvPr id="3" name="Rectangle 2"/>
+          <p:cNvSpPr/>
+          <p:nvPr/>
+        </p:nvSpPr>
+        <p:spPr>
+          <a:xfrm>
+            <a:off x="621792" y="1078992"/>
+            <a:ext cx="2011680" cy="27432"/>
+          </a:xfrm>
+          <a:prstGeom prst="rect">
+            <a:avLst/>
+          </a:prstGeom>
+          <a:solidFill>
+            <a:srgbClr val="DBE4F0"/>
+          </a:solidFill>
+          <a:ln>
+            <a:noFill/>
+          </a:ln>
+        </p:spPr>
+        <p:style>
+          <a:lnRef idx="1">
+            <a:schemeClr val="accent1"/>
+          </a:lnRef>
+          <a:fillRef idx="3">
+            <a:schemeClr val="accent1"/>
+          </a:fillRef>
+          <a:effectRef idx="2">
+            <a:schemeClr val="accent1"/>
+          </a:effectRef>
+          <a:fontRef idx="minor">
+            <a:schemeClr val="lt1"/>
+          </a:fontRef>
+        </p:style>
+        <p:txBody>
+          <a:bodyPr rtlCol="0" anchor="ctr"/>
+          <a:lstStyle/>
+          <a:p>
+            <a:pPr algn="ctr"/>
+          </a:p>
+        </p:txBody>
+      </p:sp>
+      <p:sp>
+        <p:nvSpPr>
+          <p:cNvPr id="4" name="TextBox 3"/>
           <p:cNvSpPr txBox="1"/>
           <p:nvPr/>
         </p:nvSpPr>
         <p:spPr>
           <a:xfrm>
-            <a:off x="658368" y="1417320"/>
-            <a:ext cx="10241280" cy="822960"/>
+            <a:off x="731520" y="1600200"/>
+            <a:ext cx="4389120" cy="457200"/>
+          </a:xfrm>
+          <a:prstGeom prst="rect">
+            <a:avLst/>
+          </a:prstGeom>
+          <a:noFill/>
+        </p:spPr>
+        <p:txBody>
+          <a:bodyPr wrap="none">
+            <a:spAutoFit/>
+          </a:bodyPr>
+          <a:lstStyle/>
+          <a:p>
+            <a:r>
+              <a:rPr sz="1800" b="1">
+                <a:solidFill>
+                  <a:srgbClr val="205295"/>
+                </a:solidFill>
+                <a:latin typeface="Arial"/>
+              </a:rPr>
+              <a:t>控制面</a:t>
+            </a:r>
+          </a:p>
+        </p:txBody>
+      </p:sp>
+      <p:sp>
+        <p:nvSpPr>
+          <p:cNvPr id="5" name="TextBox 4"/>
+          <p:cNvSpPr txBox="1"/>
+          <p:nvPr/>
+        </p:nvSpPr>
+        <p:spPr>
+          <a:xfrm>
+            <a:off x="731520" y="2011680"/>
+            <a:ext cx="4389120" cy="3200400"/>
           </a:xfrm>
           <a:prstGeom prst="rect">
             <a:avLst/>
@@ -4017,14 +5630,172 @@
           </a:bodyPr>
           <a:lstStyle/>
           <a:p>
-            <a:r>
-              <a:rPr sz="1600" b="0">
-                <a:solidFill>
-                  <a:srgbClr val="FFFFFF"/>
-                </a:solidFill>
-                <a:latin typeface="PingFang SC"/>
-              </a:rPr>
-              <a:t>关键不是“回答更聪明”，而是 runtime 如何保住连续性。</a:t>
+            <a:pPr>
+              <a:spcAft>
+                <a:spcPts val="800"/>
+              </a:spcAft>
+            </a:pPr>
+            <a:r>
+              <a:rPr sz="1700" b="0">
+                <a:solidFill>
+                  <a:srgbClr val="1F2937"/>
+                </a:solidFill>
+                <a:latin typeface="Arial"/>
+              </a:rPr>
+              <a:t>认证：OAuth / API key / third-party provider</a:t>
+            </a:r>
+          </a:p>
+          <a:p>
+            <a:pPr>
+              <a:spcAft>
+                <a:spcPts val="800"/>
+              </a:spcAft>
+            </a:pPr>
+            <a:r>
+              <a:rPr sz="1700" b="0">
+                <a:solidFill>
+                  <a:srgbClr val="1F2937"/>
+                </a:solidFill>
+                <a:latin typeface="Arial"/>
+              </a:rPr>
+              <a:t>策略：policy_limits、remote managed settings、forceLoginOrgUUID</a:t>
+            </a:r>
+          </a:p>
+          <a:p>
+            <a:pPr>
+              <a:spcAft>
+                <a:spcPts val="800"/>
+              </a:spcAft>
+            </a:pPr>
+            <a:r>
+              <a:rPr sz="1700" b="0">
+                <a:solidFill>
+                  <a:srgbClr val="1F2937"/>
+                </a:solidFill>
+                <a:latin typeface="Arial"/>
+              </a:rPr>
+              <a:t>结论：服务端负责裁决，客户端负责执行</a:t>
+            </a:r>
+          </a:p>
+        </p:txBody>
+      </p:sp>
+      <p:sp>
+        <p:nvSpPr>
+          <p:cNvPr id="6" name="TextBox 5"/>
+          <p:cNvSpPr txBox="1"/>
+          <p:nvPr/>
+        </p:nvSpPr>
+        <p:spPr>
+          <a:xfrm>
+            <a:off x="6217920" y="1600200"/>
+            <a:ext cx="4389120" cy="457200"/>
+          </a:xfrm>
+          <a:prstGeom prst="rect">
+            <a:avLst/>
+          </a:prstGeom>
+          <a:noFill/>
+        </p:spPr>
+        <p:txBody>
+          <a:bodyPr wrap="none">
+            <a:spAutoFit/>
+          </a:bodyPr>
+          <a:lstStyle/>
+          <a:p>
+            <a:r>
+              <a:rPr sz="1800" b="1">
+                <a:solidFill>
+                  <a:srgbClr val="205295"/>
+                </a:solidFill>
+                <a:latin typeface="Arial"/>
+              </a:rPr>
+              <a:t>扩展面与观测</a:t>
+            </a:r>
+          </a:p>
+        </p:txBody>
+      </p:sp>
+      <p:sp>
+        <p:nvSpPr>
+          <p:cNvPr id="7" name="TextBox 6"/>
+          <p:cNvSpPr txBox="1"/>
+          <p:nvPr/>
+        </p:nvSpPr>
+        <p:spPr>
+          <a:xfrm>
+            <a:off x="6217920" y="2011680"/>
+            <a:ext cx="4389120" cy="3200400"/>
+          </a:xfrm>
+          <a:prstGeom prst="rect">
+            <a:avLst/>
+          </a:prstGeom>
+          <a:noFill/>
+        </p:spPr>
+        <p:txBody>
+          <a:bodyPr wrap="square" lIns="76200" rIns="76200" tIns="50800" bIns="50800">
+            <a:spAutoFit/>
+          </a:bodyPr>
+          <a:lstStyle/>
+          <a:p>
+            <a:pPr>
+              <a:spcAft>
+                <a:spcPts val="800"/>
+              </a:spcAft>
+            </a:pPr>
+            <a:r>
+              <a:rPr sz="1700" b="0">
+                <a:solidFill>
+                  <a:srgbClr val="1F2937"/>
+                </a:solidFill>
+                <a:latin typeface="Arial"/>
+              </a:rPr>
+              <a:t>API 层是多 provider 统一适配层</a:t>
+            </a:r>
+          </a:p>
+          <a:p>
+            <a:pPr>
+              <a:spcAft>
+                <a:spcPts val="800"/>
+              </a:spcAft>
+            </a:pPr>
+            <a:r>
+              <a:rPr sz="1700" b="0">
+                <a:solidFill>
+                  <a:srgbClr val="1F2937"/>
+                </a:solidFill>
+                <a:latin typeface="Arial"/>
+              </a:rPr>
+              <a:t>prompt stack 是一层 control plane</a:t>
+            </a:r>
+          </a:p>
+          <a:p>
+            <a:pPr>
+              <a:spcAft>
+                <a:spcPts val="800"/>
+              </a:spcAft>
+            </a:pPr>
+            <a:r>
+              <a:rPr sz="1700" b="0">
+                <a:solidFill>
+                  <a:srgbClr val="1F2937"/>
+                </a:solidFill>
+                <a:latin typeface="Arial"/>
+              </a:rPr>
+              <a:t>MCP / plugins / commands / skills 都是一级扩展面</a:t>
+            </a:r>
+          </a:p>
+          <a:p>
+            <a:pPr>
+              <a:spcAft>
+                <a:spcPts val="800"/>
+              </a:spcAft>
+            </a:pPr>
+            <a:r>
+              <a:rPr sz="1700" b="0">
+                <a:solidFill>
+                  <a:srgbClr val="1F2937"/>
+                </a:solidFill>
+                <a:latin typeface="Arial"/>
+              </a:rPr>
+              <a:t>queryProfiler / analyzeContext / cacheBreakDetection 负责解释系统为何变慢或变贵</a:t>
             </a:r>
           </a:p>
         </p:txBody>
@@ -4063,8 +5834,8 @@
         </p:nvSpPr>
         <p:spPr>
           <a:xfrm>
-            <a:off x="594360" y="411480"/>
-            <a:ext cx="10607040" cy="777240"/>
+            <a:off x="594360" y="384048"/>
+            <a:ext cx="10789920" cy="685800"/>
           </a:xfrm>
           <a:prstGeom prst="rect">
             <a:avLst/>
@@ -4077,15 +5848,14 @@
           </a:bodyPr>
           <a:lstStyle/>
           <a:p>
-            <a:pPr algn="l"/>
             <a:r>
               <a:rPr sz="2600" b="1">
                 <a:solidFill>
                   <a:srgbClr val="0B1F44"/>
                 </a:solidFill>
-                <a:latin typeface="PingFang SC"/>
-              </a:rPr>
-              <a:t>为什么会话可以恢复</a:t>
+                <a:latin typeface="Arial"/>
+              </a:rPr>
+              <a:t>最后只保留最重要的结论</a:t>
             </a:r>
           </a:p>
         </p:txBody>
@@ -4098,8 +5868,8 @@
         </p:nvSpPr>
         <p:spPr>
           <a:xfrm>
-            <a:off x="621792" y="1143000"/>
-            <a:ext cx="2194560" cy="36576"/>
+            <a:off x="621792" y="1078992"/>
+            <a:ext cx="2011680" cy="27432"/>
           </a:xfrm>
           <a:prstGeom prst="rect">
             <a:avLst/>
@@ -4141,8 +5911,42 @@
         </p:nvSpPr>
         <p:spPr>
           <a:xfrm>
-            <a:off x="822960" y="1554480"/>
-            <a:ext cx="10058400" cy="4389120"/>
+            <a:off x="731520" y="1600200"/>
+            <a:ext cx="4389120" cy="457200"/>
+          </a:xfrm>
+          <a:prstGeom prst="rect">
+            <a:avLst/>
+          </a:prstGeom>
+          <a:noFill/>
+        </p:spPr>
+        <p:txBody>
+          <a:bodyPr wrap="none">
+            <a:spAutoFit/>
+          </a:bodyPr>
+          <a:lstStyle/>
+          <a:p>
+            <a:r>
+              <a:rPr sz="1800" b="1">
+                <a:solidFill>
+                  <a:srgbClr val="205295"/>
+                </a:solidFill>
+                <a:latin typeface="Arial"/>
+              </a:rPr>
+              <a:t>读源码时先抓</a:t>
+            </a:r>
+          </a:p>
+        </p:txBody>
+      </p:sp>
+      <p:sp>
+        <p:nvSpPr>
+          <p:cNvPr id="5" name="TextBox 4"/>
+          <p:cNvSpPr txBox="1"/>
+          <p:nvPr/>
+        </p:nvSpPr>
+        <p:spPr>
+          <a:xfrm>
+            <a:off x="731520" y="2011680"/>
+            <a:ext cx="4389120" cy="3200400"/>
           </a:xfrm>
           <a:prstGeom prst="rect">
             <a:avLst/>
@@ -4161,13 +5965,13 @@
               </a:spcAft>
             </a:pPr>
             <a:r>
-              <a:rPr sz="2000" b="0">
+              <a:rPr sz="1700" b="0">
                 <a:solidFill>
                   <a:srgbClr val="1F2937"/>
                 </a:solidFill>
-                <a:latin typeface="PingFang SC"/>
-              </a:rPr>
-              <a:t>Claude Code 维护的是可恢复消息链，不只是聊天记录</a:t>
+                <a:latin typeface="Arial"/>
+              </a:rPr>
+              <a:t>main.tsx -&gt; query.ts -&gt; tools</a:t>
             </a:r>
           </a:p>
           <a:p>
@@ -4177,13 +5981,13 @@
               </a:spcAft>
             </a:pPr>
             <a:r>
-              <a:rPr sz="2000" b="0">
+              <a:rPr sz="1700" b="0">
                 <a:solidFill>
                   <a:srgbClr val="1F2937"/>
                 </a:solidFill>
-                <a:latin typeface="PingFang SC"/>
-              </a:rPr>
-              <a:t>sessionStorage.ts 负责 durable transcript</a:t>
+                <a:latin typeface="Arial"/>
+              </a:rPr>
+              <a:t>settings -&gt; auth -&gt; api client</a:t>
             </a:r>
           </a:p>
           <a:p>
@@ -4193,15 +5997,72 @@
               </a:spcAft>
             </a:pPr>
             <a:r>
-              <a:rPr sz="2000" b="0">
+              <a:rPr sz="1700" b="0">
                 <a:solidFill>
                   <a:srgbClr val="1F2937"/>
                 </a:solidFill>
-                <a:latin typeface="PingFang SC"/>
-              </a:rPr>
-              <a:t>conversationRecovery.ts 会过滤坏消息并补 continuation</a:t>
-            </a:r>
-          </a:p>
+                <a:latin typeface="Arial"/>
+              </a:rPr>
+              <a:t>policy / managed settings -&gt; 本地执行</a:t>
+            </a:r>
+          </a:p>
+        </p:txBody>
+      </p:sp>
+      <p:sp>
+        <p:nvSpPr>
+          <p:cNvPr id="6" name="TextBox 5"/>
+          <p:cNvSpPr txBox="1"/>
+          <p:nvPr/>
+        </p:nvSpPr>
+        <p:spPr>
+          <a:xfrm>
+            <a:off x="6217920" y="1600200"/>
+            <a:ext cx="4389120" cy="457200"/>
+          </a:xfrm>
+          <a:prstGeom prst="rect">
+            <a:avLst/>
+          </a:prstGeom>
+          <a:noFill/>
+        </p:spPr>
+        <p:txBody>
+          <a:bodyPr wrap="none">
+            <a:spAutoFit/>
+          </a:bodyPr>
+          <a:lstStyle/>
+          <a:p>
+            <a:r>
+              <a:rPr sz="1800" b="1">
+                <a:solidFill>
+                  <a:srgbClr val="205295"/>
+                </a:solidFill>
+                <a:latin typeface="Arial"/>
+              </a:rPr>
+              <a:t>从源码提炼的使用建议</a:t>
+            </a:r>
+          </a:p>
+        </p:txBody>
+      </p:sp>
+      <p:sp>
+        <p:nvSpPr>
+          <p:cNvPr id="7" name="TextBox 6"/>
+          <p:cNvSpPr txBox="1"/>
+          <p:nvPr/>
+        </p:nvSpPr>
+        <p:spPr>
+          <a:xfrm>
+            <a:off x="6217920" y="2011680"/>
+            <a:ext cx="4389120" cy="3200400"/>
+          </a:xfrm>
+          <a:prstGeom prst="rect">
+            <a:avLst/>
+          </a:prstGeom>
+          <a:noFill/>
+        </p:spPr>
+        <p:txBody>
+          <a:bodyPr wrap="square" lIns="76200" rIns="76200" tIns="50800" bIns="50800">
+            <a:spAutoFit/>
+          </a:bodyPr>
+          <a:lstStyle/>
           <a:p>
             <a:pPr>
               <a:spcAft>
@@ -4209,13 +6070,95 @@
               </a:spcAft>
             </a:pPr>
             <a:r>
-              <a:rPr sz="2000" b="0">
+              <a:rPr sz="1700" b="0">
                 <a:solidFill>
                   <a:srgbClr val="1F2937"/>
                 </a:solidFill>
-                <a:latin typeface="PingFang SC"/>
-              </a:rPr>
-              <a:t>恢复目标不是忠实回放磁盘内容，而是把系统修回 API 可继续状态</a:t>
+                <a:latin typeface="Arial"/>
+              </a:rPr>
+              <a:t>先读相关代码再改</a:t>
+            </a:r>
+          </a:p>
+          <a:p>
+            <a:pPr>
+              <a:spcAft>
+                <a:spcPts val="800"/>
+              </a:spcAft>
+            </a:pPr>
+            <a:r>
+              <a:rPr sz="1700" b="0">
+                <a:solidFill>
+                  <a:srgbClr val="1F2937"/>
+                </a:solidFill>
+                <a:latin typeface="Arial"/>
+              </a:rPr>
+              <a:t>优先复用现有实现</a:t>
+            </a:r>
+          </a:p>
+          <a:p>
+            <a:pPr>
+              <a:spcAft>
+                <a:spcPts val="800"/>
+              </a:spcAft>
+            </a:pPr>
+            <a:r>
+              <a:rPr sz="1700" b="0">
+                <a:solidFill>
+                  <a:srgbClr val="1F2937"/>
+                </a:solidFill>
+                <a:latin typeface="Arial"/>
+              </a:rPr>
+              <a:t>做最小必要改动</a:t>
+            </a:r>
+          </a:p>
+          <a:p>
+            <a:pPr>
+              <a:spcAft>
+                <a:spcPts val="800"/>
+              </a:spcAft>
+            </a:pPr>
+            <a:r>
+              <a:rPr sz="1700" b="0">
+                <a:solidFill>
+                  <a:srgbClr val="1F2937"/>
+                </a:solidFill>
+                <a:latin typeface="Arial"/>
+              </a:rPr>
+              <a:t>验证后如实汇报</a:t>
+            </a:r>
+          </a:p>
+        </p:txBody>
+      </p:sp>
+      <p:sp>
+        <p:nvSpPr>
+          <p:cNvPr id="8" name="TextBox 7"/>
+          <p:cNvSpPr txBox="1"/>
+          <p:nvPr/>
+        </p:nvSpPr>
+        <p:spPr>
+          <a:xfrm>
+            <a:off x="841248" y="5532120"/>
+            <a:ext cx="10058400" cy="502920"/>
+          </a:xfrm>
+          <a:prstGeom prst="rect">
+            <a:avLst/>
+          </a:prstGeom>
+          <a:noFill/>
+        </p:spPr>
+        <p:txBody>
+          <a:bodyPr wrap="square" lIns="76200" rIns="76200" tIns="50800" bIns="50800">
+            <a:spAutoFit/>
+          </a:bodyPr>
+          <a:lstStyle/>
+          <a:p>
+            <a:r>
+              <a:rPr sz="1400" b="0">
+                <a:solidFill>
+                  <a:srgbClr val="475569"/>
+                </a:solidFill>
+                <a:latin typeface="Arial"/>
+              </a:rPr>
+              <a:t>一句话：Claude Code 本质上是一个围绕 turn loop 构建的、可被企业管理的终端 agent runtime。</a:t>
             </a:r>
           </a:p>
         </p:txBody>
@@ -4234,7 +6177,7 @@
     <p:bg>
       <p:bgPr>
         <a:solidFill>
-          <a:srgbClr val="F8FAFC"/>
+          <a:srgbClr val="101C3F"/>
         </a:solidFill>
         <a:effectLst/>
       </p:bgPr>
@@ -4254,8 +6197,8 @@
         </p:nvSpPr>
         <p:spPr>
           <a:xfrm>
-            <a:off x="594360" y="411480"/>
-            <a:ext cx="10607040" cy="777240"/>
+            <a:off x="594360" y="384048"/>
+            <a:ext cx="10789920" cy="685800"/>
           </a:xfrm>
           <a:prstGeom prst="rect">
             <a:avLst/>
@@ -4268,72 +6211,28 @@
           </a:bodyPr>
           <a:lstStyle/>
           <a:p>
-            <a:pPr algn="l"/>
-            <a:r>
-              <a:rPr sz="2600" b="1">
-                <a:solidFill>
-                  <a:srgbClr val="0B1F44"/>
-                </a:solidFill>
-                <a:latin typeface="PingFang SC"/>
-              </a:rPr>
-              <a:t>为什么大 tool result 不会拖垮上下文</a:t>
-            </a:r>
-          </a:p>
-        </p:txBody>
-      </p:sp>
-      <p:sp>
-        <p:nvSpPr>
-          <p:cNvPr id="3" name="Rectangle 2"/>
-          <p:cNvSpPr/>
-          <p:nvPr/>
-        </p:nvSpPr>
-        <p:spPr>
-          <a:xfrm>
-            <a:off x="621792" y="1143000"/>
-            <a:ext cx="2194560" cy="36576"/>
-          </a:xfrm>
-          <a:prstGeom prst="rect">
-            <a:avLst/>
-          </a:prstGeom>
-          <a:solidFill>
-            <a:srgbClr val="DBE4F0"/>
-          </a:solidFill>
-          <a:ln>
-            <a:noFill/>
-          </a:ln>
-        </p:spPr>
-        <p:style>
-          <a:lnRef idx="1">
-            <a:schemeClr val="accent1"/>
-          </a:lnRef>
-          <a:fillRef idx="3">
-            <a:schemeClr val="accent1"/>
-          </a:fillRef>
-          <a:effectRef idx="2">
-            <a:schemeClr val="accent1"/>
-          </a:effectRef>
-          <a:fontRef idx="minor">
-            <a:schemeClr val="lt1"/>
-          </a:fontRef>
-        </p:style>
-        <p:txBody>
-          <a:bodyPr rtlCol="0" anchor="ctr"/>
-          <a:lstStyle/>
-          <a:p>
-            <a:pPr algn="ctr"/>
-          </a:p>
-        </p:txBody>
-      </p:sp>
-      <p:sp>
-        <p:nvSpPr>
-          <p:cNvPr id="4" name="TextBox 3"/>
+            <a:r>
+              <a:rPr sz="2800" b="1">
+                <a:solidFill>
+                  <a:srgbClr val="FFFFFF"/>
+                </a:solidFill>
+                <a:latin typeface="Arial"/>
+              </a:rPr>
+              <a:t>谢谢</a:t>
+            </a:r>
+          </a:p>
+        </p:txBody>
+      </p:sp>
+      <p:sp>
+        <p:nvSpPr>
+          <p:cNvPr id="3" name="TextBox 2"/>
           <p:cNvSpPr txBox="1"/>
           <p:nvPr/>
         </p:nvSpPr>
         <p:spPr>
           <a:xfrm>
-            <a:off x="822960" y="1554480"/>
-            <a:ext cx="10058400" cy="4389120"/>
+            <a:off x="658368" y="1280160"/>
+            <a:ext cx="10241280" cy="640080"/>
           </a:xfrm>
           <a:prstGeom prst="rect">
             <a:avLst/>
@@ -4346,674 +6245,14 @@
           </a:bodyPr>
           <a:lstStyle/>
           <a:p>
-            <a:pPr>
-              <a:spcAft>
-                <a:spcPts val="800"/>
-              </a:spcAft>
-            </a:pPr>
-            <a:r>
-              <a:rPr sz="2000" b="0">
-                <a:solidFill>
-                  <a:srgbClr val="1F2937"/>
-                </a:solidFill>
-                <a:latin typeface="PingFang SC"/>
-              </a:rPr>
-              <a:t>关键机制是 tool result budget / content replacement</a:t>
-            </a:r>
-          </a:p>
-          <a:p>
-            <a:pPr>
-              <a:spcAft>
-                <a:spcPts val="800"/>
-              </a:spcAft>
-            </a:pPr>
-            <a:r>
-              <a:rPr sz="2000" b="0">
-                <a:solidFill>
-                  <a:srgbClr val="1F2937"/>
-                </a:solidFill>
-                <a:latin typeface="PingFang SC"/>
-              </a:rPr>
-              <a:t>解决的不是“截断输出”，而是“冻结输出命运”</a:t>
-            </a:r>
-          </a:p>
-          <a:p>
-            <a:pPr>
-              <a:spcAft>
-                <a:spcPts val="800"/>
-              </a:spcAft>
-            </a:pPr>
-            <a:r>
-              <a:rPr sz="2000" b="0">
-                <a:solidFill>
-                  <a:srgbClr val="1F2937"/>
-                </a:solidFill>
-                <a:latin typeface="PingFang SC"/>
-              </a:rPr>
-              <a:t>某个 tool_use_id 一旦决定替换，后面必须稳定复用相同 replacement</a:t>
-            </a:r>
-          </a:p>
-          <a:p>
-            <a:pPr>
-              <a:spcAft>
-                <a:spcPts val="800"/>
-              </a:spcAft>
-            </a:pPr>
-            <a:r>
-              <a:rPr sz="2000" b="0">
-                <a:solidFill>
-                  <a:srgbClr val="1F2937"/>
-                </a:solidFill>
-                <a:latin typeface="PingFang SC"/>
-              </a:rPr>
-              <a:t>价值是保护 prompt cache prefix，降低 long-running session 漂移</a:t>
-            </a:r>
-          </a:p>
-        </p:txBody>
-      </p:sp>
-    </p:spTree>
-  </p:cSld>
-  <p:clrMapOvr>
-    <a:masterClrMapping/>
-  </p:clrMapOvr>
-</p:sld>
-</file>
-
-<file path=ppt/slides/slide17.xml><?xml version="1.0" encoding="utf-8"?>
-<p:sld xmlns:a="http://schemas.openxmlformats.org/drawingml/2006/main" xmlns:p="http://schemas.openxmlformats.org/presentationml/2006/main" xmlns:r="http://schemas.openxmlformats.org/officeDocument/2006/relationships">
-  <p:cSld>
-    <p:bg>
-      <p:bgPr>
-        <a:solidFill>
-          <a:srgbClr val="F8FAFC"/>
-        </a:solidFill>
-        <a:effectLst/>
-      </p:bgPr>
-    </p:bg>
-    <p:spTree>
-      <p:nvGrpSpPr>
-        <p:cNvPr id="1" name=""/>
-        <p:cNvGrpSpPr/>
-        <p:nvPr/>
-      </p:nvGrpSpPr>
-      <p:grpSpPr/>
-      <p:sp>
-        <p:nvSpPr>
-          <p:cNvPr id="2" name="TextBox 1"/>
-          <p:cNvSpPr txBox="1"/>
-          <p:nvPr/>
-        </p:nvSpPr>
-        <p:spPr>
-          <a:xfrm>
-            <a:off x="594360" y="411480"/>
-            <a:ext cx="10607040" cy="777240"/>
-          </a:xfrm>
-          <a:prstGeom prst="rect">
-            <a:avLst/>
-          </a:prstGeom>
-          <a:noFill/>
-        </p:spPr>
-        <p:txBody>
-          <a:bodyPr wrap="square" lIns="76200" rIns="76200" tIns="50800" bIns="50800">
-            <a:spAutoFit/>
-          </a:bodyPr>
-          <a:lstStyle/>
-          <a:p>
-            <a:pPr algn="l"/>
-            <a:r>
-              <a:rPr sz="2600" b="1">
-                <a:solidFill>
-                  <a:srgbClr val="0B1F44"/>
-                </a:solidFill>
-                <a:latin typeface="PingFang SC"/>
-              </a:rPr>
-              <a:t>compact：分层整理，而不是一刀切摘要</a:t>
-            </a:r>
-          </a:p>
-        </p:txBody>
-      </p:sp>
-      <p:sp>
-        <p:nvSpPr>
-          <p:cNvPr id="3" name="Rectangle 2"/>
-          <p:cNvSpPr/>
-          <p:nvPr/>
-        </p:nvSpPr>
-        <p:spPr>
-          <a:xfrm>
-            <a:off x="621792" y="1143000"/>
-            <a:ext cx="2194560" cy="36576"/>
-          </a:xfrm>
-          <a:prstGeom prst="rect">
-            <a:avLst/>
-          </a:prstGeom>
-          <a:solidFill>
-            <a:srgbClr val="DBE4F0"/>
-          </a:solidFill>
-          <a:ln>
-            <a:noFill/>
-          </a:ln>
-        </p:spPr>
-        <p:style>
-          <a:lnRef idx="1">
-            <a:schemeClr val="accent1"/>
-          </a:lnRef>
-          <a:fillRef idx="3">
-            <a:schemeClr val="accent1"/>
-          </a:fillRef>
-          <a:effectRef idx="2">
-            <a:schemeClr val="accent1"/>
-          </a:effectRef>
-          <a:fontRef idx="minor">
-            <a:schemeClr val="lt1"/>
-          </a:fontRef>
-        </p:style>
-        <p:txBody>
-          <a:bodyPr rtlCol="0" anchor="ctr"/>
-          <a:lstStyle/>
-          <a:p>
-            <a:pPr algn="ctr"/>
-          </a:p>
-        </p:txBody>
-      </p:sp>
-      <p:sp>
-        <p:nvSpPr>
-          <p:cNvPr id="4" name="TextBox 3"/>
-          <p:cNvSpPr txBox="1"/>
-          <p:nvPr/>
-        </p:nvSpPr>
-        <p:spPr>
-          <a:xfrm>
-            <a:off x="822960" y="1554480"/>
-            <a:ext cx="10058400" cy="4389120"/>
-          </a:xfrm>
-          <a:prstGeom prst="rect">
-            <a:avLst/>
-          </a:prstGeom>
-          <a:noFill/>
-        </p:spPr>
-        <p:txBody>
-          <a:bodyPr wrap="square" lIns="76200" rIns="76200" tIns="50800" bIns="50800">
-            <a:spAutoFit/>
-          </a:bodyPr>
-          <a:lstStyle/>
-          <a:p>
-            <a:pPr>
-              <a:spcAft>
-                <a:spcPts val="800"/>
-              </a:spcAft>
-            </a:pPr>
-            <a:r>
-              <a:rPr sz="2000" b="0">
-                <a:solidFill>
-                  <a:srgbClr val="1F2937"/>
-                </a:solidFill>
-                <a:latin typeface="PingFang SC"/>
-              </a:rPr>
-              <a:t>运行时至少有 microcompact、snip、context collapse、autocompact、reactive compact、/compact、session memory compact</a:t>
-            </a:r>
-          </a:p>
-          <a:p>
-            <a:pPr>
-              <a:spcAft>
-                <a:spcPts val="800"/>
-              </a:spcAft>
-            </a:pPr>
-            <a:r>
-              <a:rPr sz="2000" b="0">
-                <a:solidFill>
-                  <a:srgbClr val="1F2937"/>
-                </a:solidFill>
-                <a:latin typeface="PingFang SC"/>
-              </a:rPr>
-              <a:t>要按两条轴来理解：主动整理 vs 被动恢复；轻量缩减 vs full compact</a:t>
-            </a:r>
-          </a:p>
-          <a:p>
-            <a:pPr>
-              <a:spcAft>
-                <a:spcPts val="800"/>
-              </a:spcAft>
-            </a:pPr>
-            <a:r>
-              <a:rPr sz="2000" b="0">
-                <a:solidFill>
-                  <a:srgbClr val="1F2937"/>
-                </a:solidFill>
-                <a:latin typeface="PingFang SC"/>
-              </a:rPr>
-              <a:t>full compact 的目标也不是简单摘要，而是重建可继续工作的最小 context</a:t>
-            </a:r>
-          </a:p>
-        </p:txBody>
-      </p:sp>
-    </p:spTree>
-  </p:cSld>
-  <p:clrMapOvr>
-    <a:masterClrMapping/>
-  </p:clrMapOvr>
-</p:sld>
-</file>
-
-<file path=ppt/slides/slide18.xml><?xml version="1.0" encoding="utf-8"?>
-<p:sld xmlns:a="http://schemas.openxmlformats.org/drawingml/2006/main" xmlns:p="http://schemas.openxmlformats.org/presentationml/2006/main" xmlns:r="http://schemas.openxmlformats.org/officeDocument/2006/relationships">
-  <p:cSld>
-    <p:bg>
-      <p:bgPr>
-        <a:solidFill>
-          <a:srgbClr val="F8FAFC"/>
-        </a:solidFill>
-        <a:effectLst/>
-      </p:bgPr>
-    </p:bg>
-    <p:spTree>
-      <p:nvGrpSpPr>
-        <p:cNvPr id="1" name=""/>
-        <p:cNvGrpSpPr/>
-        <p:nvPr/>
-      </p:nvGrpSpPr>
-      <p:grpSpPr/>
-      <p:sp>
-        <p:nvSpPr>
-          <p:cNvPr id="2" name="TextBox 1"/>
-          <p:cNvSpPr txBox="1"/>
-          <p:nvPr/>
-        </p:nvSpPr>
-        <p:spPr>
-          <a:xfrm>
-            <a:off x="594360" y="411480"/>
-            <a:ext cx="10607040" cy="777240"/>
-          </a:xfrm>
-          <a:prstGeom prst="rect">
-            <a:avLst/>
-          </a:prstGeom>
-          <a:noFill/>
-        </p:spPr>
-        <p:txBody>
-          <a:bodyPr wrap="square" lIns="76200" rIns="76200" tIns="50800" bIns="50800">
-            <a:spAutoFit/>
-          </a:bodyPr>
-          <a:lstStyle/>
-          <a:p>
-            <a:pPr algn="l"/>
-            <a:r>
-              <a:rPr sz="2600" b="1">
-                <a:solidFill>
-                  <a:srgbClr val="0B1F44"/>
-                </a:solidFill>
-                <a:latin typeface="PingFang SC"/>
-              </a:rPr>
-              <a:t>compact 后到底保留什么</a:t>
-            </a:r>
-          </a:p>
-        </p:txBody>
-      </p:sp>
-      <p:sp>
-        <p:nvSpPr>
-          <p:cNvPr id="3" name="Rectangle 2"/>
-          <p:cNvSpPr/>
-          <p:nvPr/>
-        </p:nvSpPr>
-        <p:spPr>
-          <a:xfrm>
-            <a:off x="621792" y="1143000"/>
-            <a:ext cx="2194560" cy="36576"/>
-          </a:xfrm>
-          <a:prstGeom prst="rect">
-            <a:avLst/>
-          </a:prstGeom>
-          <a:solidFill>
-            <a:srgbClr val="DBE4F0"/>
-          </a:solidFill>
-          <a:ln>
-            <a:noFill/>
-          </a:ln>
-        </p:spPr>
-        <p:style>
-          <a:lnRef idx="1">
-            <a:schemeClr val="accent1"/>
-          </a:lnRef>
-          <a:fillRef idx="3">
-            <a:schemeClr val="accent1"/>
-          </a:fillRef>
-          <a:effectRef idx="2">
-            <a:schemeClr val="accent1"/>
-          </a:effectRef>
-          <a:fontRef idx="minor">
-            <a:schemeClr val="lt1"/>
-          </a:fontRef>
-        </p:style>
-        <p:txBody>
-          <a:bodyPr rtlCol="0" anchor="ctr"/>
-          <a:lstStyle/>
-          <a:p>
-            <a:pPr algn="ctr"/>
-          </a:p>
-        </p:txBody>
-      </p:sp>
-      <p:sp>
-        <p:nvSpPr>
-          <p:cNvPr id="4" name="TextBox 3"/>
-          <p:cNvSpPr txBox="1"/>
-          <p:nvPr/>
-        </p:nvSpPr>
-        <p:spPr>
-          <a:xfrm>
-            <a:off x="822960" y="1554480"/>
-            <a:ext cx="10058400" cy="4389120"/>
-          </a:xfrm>
-          <a:prstGeom prst="rect">
-            <a:avLst/>
-          </a:prstGeom>
-          <a:noFill/>
-        </p:spPr>
-        <p:txBody>
-          <a:bodyPr wrap="square" lIns="76200" rIns="76200" tIns="50800" bIns="50800">
-            <a:spAutoFit/>
-          </a:bodyPr>
-          <a:lstStyle/>
-          <a:p>
-            <a:pPr>
-              <a:spcAft>
-                <a:spcPts val="800"/>
-              </a:spcAft>
-            </a:pPr>
-            <a:r>
-              <a:rPr sz="2000" b="0">
-                <a:solidFill>
-                  <a:srgbClr val="1F2937"/>
-                </a:solidFill>
-                <a:latin typeface="PingFang SC"/>
-              </a:rPr>
-              <a:t>compact boundary</a:t>
-            </a:r>
-          </a:p>
-          <a:p>
-            <a:pPr>
-              <a:spcAft>
-                <a:spcPts val="800"/>
-              </a:spcAft>
-            </a:pPr>
-            <a:r>
-              <a:rPr sz="2000" b="0">
-                <a:solidFill>
-                  <a:srgbClr val="1F2937"/>
-                </a:solidFill>
-                <a:latin typeface="PingFang SC"/>
-              </a:rPr>
-              <a:t>summary</a:t>
-            </a:r>
-          </a:p>
-          <a:p>
-            <a:pPr>
-              <a:spcAft>
-                <a:spcPts val="800"/>
-              </a:spcAft>
-            </a:pPr>
-            <a:r>
-              <a:rPr sz="2000" b="0">
-                <a:solidFill>
-                  <a:srgbClr val="1F2937"/>
-                </a:solidFill>
-                <a:latin typeface="PingFang SC"/>
-              </a:rPr>
-              <a:t>messagesToKeep</a:t>
-            </a:r>
-          </a:p>
-          <a:p>
-            <a:pPr>
-              <a:spcAft>
-                <a:spcPts val="800"/>
-              </a:spcAft>
-            </a:pPr>
-            <a:r>
-              <a:rPr sz="2000" b="0">
-                <a:solidFill>
-                  <a:srgbClr val="1F2937"/>
-                </a:solidFill>
-                <a:latin typeface="PingFang SC"/>
-              </a:rPr>
-              <a:t>文件恢复 attachment</a:t>
-            </a:r>
-          </a:p>
-          <a:p>
-            <a:pPr>
-              <a:spcAft>
-                <a:spcPts val="800"/>
-              </a:spcAft>
-            </a:pPr>
-            <a:r>
-              <a:rPr sz="2000" b="0">
-                <a:solidFill>
-                  <a:srgbClr val="1F2937"/>
-                </a:solidFill>
-                <a:latin typeface="PingFang SC"/>
-              </a:rPr>
-              <a:t>plan_mode、invoked_skills、deferred tools / MCP delta、hook results</a:t>
-            </a:r>
-          </a:p>
-        </p:txBody>
-      </p:sp>
-      <p:sp>
-        <p:nvSpPr>
-          <p:cNvPr id="5" name="TextBox 4"/>
-          <p:cNvSpPr txBox="1"/>
-          <p:nvPr/>
-        </p:nvSpPr>
-        <p:spPr>
-          <a:xfrm>
-            <a:off x="868680" y="5120640"/>
-            <a:ext cx="9875520" cy="822960"/>
-          </a:xfrm>
-          <a:prstGeom prst="rect">
-            <a:avLst/>
-          </a:prstGeom>
-          <a:noFill/>
-        </p:spPr>
-        <p:txBody>
-          <a:bodyPr wrap="square" lIns="76200" rIns="76200" tIns="50800" bIns="50800">
-            <a:spAutoFit/>
-          </a:bodyPr>
-          <a:lstStyle/>
-          <a:p>
-            <a:r>
-              <a:rPr sz="1600" b="0">
-                <a:solidFill>
-                  <a:srgbClr val="475569"/>
-                </a:solidFill>
-                <a:latin typeface="PingFang SC"/>
-              </a:rPr>
-              <a:t>结论：compact 后不是只剩一段摘要，而是尽量保住当前工作面。</a:t>
-            </a:r>
-          </a:p>
-        </p:txBody>
-      </p:sp>
-    </p:spTree>
-  </p:cSld>
-  <p:clrMapOvr>
-    <a:masterClrMapping/>
-  </p:clrMapOvr>
-</p:sld>
-</file>
-
-<file path=ppt/slides/slide19.xml><?xml version="1.0" encoding="utf-8"?>
-<p:sld xmlns:a="http://schemas.openxmlformats.org/drawingml/2006/main" xmlns:p="http://schemas.openxmlformats.org/presentationml/2006/main" xmlns:r="http://schemas.openxmlformats.org/officeDocument/2006/relationships">
-  <p:cSld>
-    <p:bg>
-      <p:bgPr>
-        <a:solidFill>
-          <a:srgbClr val="F8FAFC"/>
-        </a:solidFill>
-        <a:effectLst/>
-      </p:bgPr>
-    </p:bg>
-    <p:spTree>
-      <p:nvGrpSpPr>
-        <p:cNvPr id="1" name=""/>
-        <p:cNvGrpSpPr/>
-        <p:nvPr/>
-      </p:nvGrpSpPr>
-      <p:grpSpPr/>
-      <p:sp>
-        <p:nvSpPr>
-          <p:cNvPr id="2" name="TextBox 1"/>
-          <p:cNvSpPr txBox="1"/>
-          <p:nvPr/>
-        </p:nvSpPr>
-        <p:spPr>
-          <a:xfrm>
-            <a:off x="594360" y="411480"/>
-            <a:ext cx="10607040" cy="777240"/>
-          </a:xfrm>
-          <a:prstGeom prst="rect">
-            <a:avLst/>
-          </a:prstGeom>
-          <a:noFill/>
-        </p:spPr>
-        <p:txBody>
-          <a:bodyPr wrap="square" lIns="76200" rIns="76200" tIns="50800" bIns="50800">
-            <a:spAutoFit/>
-          </a:bodyPr>
-          <a:lstStyle/>
-          <a:p>
-            <a:pPr algn="l"/>
-            <a:r>
-              <a:rPr sz="2600" b="1">
-                <a:solidFill>
-                  <a:srgbClr val="0B1F44"/>
-                </a:solidFill>
-                <a:latin typeface="PingFang SC"/>
-              </a:rPr>
-              <a:t>Skills 与 attachments 怎么进上下文</a:t>
-            </a:r>
-          </a:p>
-        </p:txBody>
-      </p:sp>
-      <p:sp>
-        <p:nvSpPr>
-          <p:cNvPr id="3" name="Rectangle 2"/>
-          <p:cNvSpPr/>
-          <p:nvPr/>
-        </p:nvSpPr>
-        <p:spPr>
-          <a:xfrm>
-            <a:off x="621792" y="1143000"/>
-            <a:ext cx="2194560" cy="36576"/>
-          </a:xfrm>
-          <a:prstGeom prst="rect">
-            <a:avLst/>
-          </a:prstGeom>
-          <a:solidFill>
-            <a:srgbClr val="DBE4F0"/>
-          </a:solidFill>
-          <a:ln>
-            <a:noFill/>
-          </a:ln>
-        </p:spPr>
-        <p:style>
-          <a:lnRef idx="1">
-            <a:schemeClr val="accent1"/>
-          </a:lnRef>
-          <a:fillRef idx="3">
-            <a:schemeClr val="accent1"/>
-          </a:fillRef>
-          <a:effectRef idx="2">
-            <a:schemeClr val="accent1"/>
-          </a:effectRef>
-          <a:fontRef idx="minor">
-            <a:schemeClr val="lt1"/>
-          </a:fontRef>
-        </p:style>
-        <p:txBody>
-          <a:bodyPr rtlCol="0" anchor="ctr"/>
-          <a:lstStyle/>
-          <a:p>
-            <a:pPr algn="ctr"/>
-          </a:p>
-        </p:txBody>
-      </p:sp>
-      <p:sp>
-        <p:nvSpPr>
-          <p:cNvPr id="4" name="TextBox 3"/>
-          <p:cNvSpPr txBox="1"/>
-          <p:nvPr/>
-        </p:nvSpPr>
-        <p:spPr>
-          <a:xfrm>
-            <a:off x="822960" y="1554480"/>
-            <a:ext cx="10058400" cy="4389120"/>
-          </a:xfrm>
-          <a:prstGeom prst="rect">
-            <a:avLst/>
-          </a:prstGeom>
-          <a:noFill/>
-        </p:spPr>
-        <p:txBody>
-          <a:bodyPr wrap="square" lIns="76200" rIns="76200" tIns="50800" bIns="50800">
-            <a:spAutoFit/>
-          </a:bodyPr>
-          <a:lstStyle/>
-          <a:p>
-            <a:pPr>
-              <a:spcAft>
-                <a:spcPts val="800"/>
-              </a:spcAft>
-            </a:pPr>
-            <a:r>
-              <a:rPr sz="2000" b="0">
-                <a:solidFill>
-                  <a:srgbClr val="1F2937"/>
-                </a:solidFill>
-                <a:latin typeface="PingFang SC"/>
-              </a:rPr>
-              <a:t>Skills 不是普通文档，而是结构化能力单元</a:t>
-            </a:r>
-          </a:p>
-          <a:p>
-            <a:pPr>
-              <a:spcAft>
-                <a:spcPts val="800"/>
-              </a:spcAft>
-            </a:pPr>
-            <a:r>
-              <a:rPr sz="2000" b="0">
-                <a:solidFill>
-                  <a:srgbClr val="1F2937"/>
-                </a:solidFill>
-                <a:latin typeface="PingFang SC"/>
-              </a:rPr>
-              <a:t>skill 被扫描到只是 capability 可见，真正调用时才把正文展开进 context</a:t>
-            </a:r>
-          </a:p>
-          <a:p>
-            <a:pPr>
-              <a:spcAft>
-                <a:spcPts val="800"/>
-              </a:spcAft>
-            </a:pPr>
-            <a:r>
-              <a:rPr sz="2000" b="0">
-                <a:solidFill>
-                  <a:srgbClr val="1F2937"/>
-                </a:solidFill>
-                <a:latin typeface="PingFang SC"/>
-              </a:rPr>
-              <a:t>attachments.ts 更像 context router，会按 turn 注入 memories、skills、plan_mode、mailbox、delta 等工作面信息</a:t>
-            </a:r>
-          </a:p>
-          <a:p>
-            <a:pPr>
-              <a:spcAft>
-                <a:spcPts val="800"/>
-              </a:spcAft>
-            </a:pPr>
-            <a:r>
-              <a:rPr sz="2000" b="0">
-                <a:solidFill>
-                  <a:srgbClr val="1F2937"/>
-                </a:solidFill>
-                <a:latin typeface="PingFang SC"/>
-              </a:rPr>
-              <a:t>不是所有关键上下文都常驻在 messages 中</a:t>
+            <a:r>
+              <a:rPr sz="1500" b="0">
+                <a:solidFill>
+                  <a:srgbClr val="FFFFFF"/>
+                </a:solidFill>
+                <a:latin typeface="Arial"/>
+              </a:rPr>
+              <a:t>这份源码最值得看的，不只是功能，而是它已经为长时间工作的 runtime 付过哪些工程账。</a:t>
             </a:r>
           </a:p>
         </p:txBody>
@@ -5052,8 +6291,8 @@
         </p:nvSpPr>
         <p:spPr>
           <a:xfrm>
-            <a:off x="594360" y="411480"/>
-            <a:ext cx="10607040" cy="777240"/>
+            <a:off x="594360" y="384048"/>
+            <a:ext cx="10789920" cy="685800"/>
           </a:xfrm>
           <a:prstGeom prst="rect">
             <a:avLst/>
@@ -5066,13 +6305,12 @@
           </a:bodyPr>
           <a:lstStyle/>
           <a:p>
-            <a:pPr algn="l"/>
             <a:r>
               <a:rPr sz="2600" b="1">
                 <a:solidFill>
                   <a:srgbClr val="0B1F44"/>
                 </a:solidFill>
-                <a:latin typeface="PingFang SC"/>
+                <a:latin typeface="Arial"/>
               </a:rPr>
               <a:t>分享目录</a:t>
             </a:r>
@@ -5087,8 +6325,8 @@
         </p:nvSpPr>
         <p:spPr>
           <a:xfrm>
-            <a:off x="621792" y="1143000"/>
-            <a:ext cx="2194560" cy="36576"/>
+            <a:off x="621792" y="1078992"/>
+            <a:ext cx="2011680" cy="27432"/>
           </a:xfrm>
           <a:prstGeom prst="rect">
             <a:avLst/>
@@ -5130,8 +6368,8 @@
         </p:nvSpPr>
         <p:spPr>
           <a:xfrm>
-            <a:off x="822960" y="1554480"/>
-            <a:ext cx="10058400" cy="4389120"/>
+            <a:off x="777240" y="1508760"/>
+            <a:ext cx="10241280" cy="4389120"/>
           </a:xfrm>
           <a:prstGeom prst="rect">
             <a:avLst/>
@@ -5150,11 +6388,11 @@
               </a:spcAft>
             </a:pPr>
             <a:r>
-              <a:rPr sz="2000" b="0">
+              <a:rPr sz="1900" b="0">
                 <a:solidFill>
                   <a:srgbClr val="1F2937"/>
                 </a:solidFill>
-                <a:latin typeface="PingFang SC"/>
+                <a:latin typeface="Arial"/>
               </a:rPr>
               <a:t>这份仓库本质上是什么</a:t>
             </a:r>
@@ -5166,11 +6404,11 @@
               </a:spcAft>
             </a:pPr>
             <a:r>
-              <a:rPr sz="2000" b="0">
+              <a:rPr sz="1900" b="0">
                 <a:solidFill>
                   <a:srgbClr val="1F2937"/>
                 </a:solidFill>
-                <a:latin typeface="PingFang SC"/>
+                <a:latin typeface="Arial"/>
               </a:rPr>
               <a:t>架构总览与主执行链路</a:t>
             </a:r>
@@ -5182,13 +6420,13 @@
               </a:spcAft>
             </a:pPr>
             <a:r>
-              <a:rPr sz="2000" b="0">
+              <a:rPr sz="1900" b="0">
                 <a:solidFill>
                   <a:srgbClr val="1F2937"/>
                 </a:solidFill>
-                <a:latin typeface="PingFang SC"/>
-              </a:rPr>
-              <a:t>turn loop 与 conversation host</a:t>
+                <a:latin typeface="Arial"/>
+              </a:rPr>
+              <a:t>turn loop、compact 与 context</a:t>
             </a:r>
           </a:p>
           <a:p>
@@ -5198,13 +6436,13 @@
               </a:spcAft>
             </a:pPr>
             <a:r>
-              <a:rPr sz="2000" b="0">
+              <a:rPr sz="1900" b="0">
                 <a:solidFill>
                   <a:srgbClr val="1F2937"/>
                 </a:solidFill>
-                <a:latin typeface="PingFang SC"/>
-              </a:rPr>
-              <a:t>recovery、compact 与 context 装配</a:t>
+                <a:latin typeface="Arial"/>
+              </a:rPr>
+              <a:t>tool pipeline、task runtime 与 mailbox</a:t>
             </a:r>
           </a:p>
           <a:p>
@@ -5214,13 +6452,13 @@
               </a:spcAft>
             </a:pPr>
             <a:r>
-              <a:rPr sz="2000" b="0">
+              <a:rPr sz="1900" b="0">
                 <a:solidFill>
                   <a:srgbClr val="1F2937"/>
                 </a:solidFill>
-                <a:latin typeface="PingFang SC"/>
-              </a:rPr>
-              <a:t>tool execution、task runtime 与 mailbox</a:t>
+                <a:latin typeface="Arial"/>
+              </a:rPr>
+              <a:t>认证、策略、扩展系统与可观测性</a:t>
             </a:r>
           </a:p>
           <a:p>
@@ -5230,27 +6468,11 @@
               </a:spcAft>
             </a:pPr>
             <a:r>
-              <a:rPr sz="2000" b="0">
+              <a:rPr sz="1900" b="0">
                 <a:solidFill>
                   <a:srgbClr val="1F2937"/>
                 </a:solidFill>
-                <a:latin typeface="PingFang SC"/>
-              </a:rPr>
-              <a:t>认证、策略、扩展系统与可观测性</a:t>
-            </a:r>
-          </a:p>
-          <a:p>
-            <a:pPr>
-              <a:spcAft>
-                <a:spcPts val="800"/>
-              </a:spcAft>
-            </a:pPr>
-            <a:r>
-              <a:rPr sz="2000" b="0">
-                <a:solidFill>
-                  <a:srgbClr val="1F2937"/>
-                </a:solidFill>
-                <a:latin typeface="PingFang SC"/>
+                <a:latin typeface="Arial"/>
               </a:rPr>
               <a:t>最后总结与阅读建议</a:t>
             </a:r>
@@ -5265,102 +6487,7 @@
 </p:sld>
 </file>
 
-<file path=ppt/slides/slide20.xml><?xml version="1.0" encoding="utf-8"?>
-<p:sld xmlns:a="http://schemas.openxmlformats.org/drawingml/2006/main" xmlns:p="http://schemas.openxmlformats.org/presentationml/2006/main" xmlns:r="http://schemas.openxmlformats.org/officeDocument/2006/relationships">
-  <p:cSld>
-    <p:bg>
-      <p:bgPr>
-        <a:solidFill>
-          <a:srgbClr val="101C3F"/>
-        </a:solidFill>
-        <a:effectLst/>
-      </p:bgPr>
-    </p:bg>
-    <p:spTree>
-      <p:nvGrpSpPr>
-        <p:cNvPr id="1" name=""/>
-        <p:cNvGrpSpPr/>
-        <p:nvPr/>
-      </p:nvGrpSpPr>
-      <p:grpSpPr/>
-      <p:sp>
-        <p:nvSpPr>
-          <p:cNvPr id="2" name="TextBox 1"/>
-          <p:cNvSpPr txBox="1"/>
-          <p:nvPr/>
-        </p:nvSpPr>
-        <p:spPr>
-          <a:xfrm>
-            <a:off x="594360" y="411480"/>
-            <a:ext cx="10607040" cy="777240"/>
-          </a:xfrm>
-          <a:prstGeom prst="rect">
-            <a:avLst/>
-          </a:prstGeom>
-          <a:noFill/>
-        </p:spPr>
-        <p:txBody>
-          <a:bodyPr wrap="square" lIns="76200" rIns="76200" tIns="50800" bIns="50800">
-            <a:spAutoFit/>
-          </a:bodyPr>
-          <a:lstStyle/>
-          <a:p>
-            <a:pPr algn="l"/>
-            <a:r>
-              <a:rPr sz="2800" b="1">
-                <a:solidFill>
-                  <a:srgbClr val="FFFFFF"/>
-                </a:solidFill>
-                <a:latin typeface="PingFang SC"/>
-              </a:rPr>
-              <a:t>五、执行能力并不只来自模型</a:t>
-            </a:r>
-          </a:p>
-        </p:txBody>
-      </p:sp>
-      <p:sp>
-        <p:nvSpPr>
-          <p:cNvPr id="3" name="TextBox 2"/>
-          <p:cNvSpPr txBox="1"/>
-          <p:nvPr/>
-        </p:nvSpPr>
-        <p:spPr>
-          <a:xfrm>
-            <a:off x="658368" y="1417320"/>
-            <a:ext cx="10241280" cy="822960"/>
-          </a:xfrm>
-          <a:prstGeom prst="rect">
-            <a:avLst/>
-          </a:prstGeom>
-          <a:noFill/>
-        </p:spPr>
-        <p:txBody>
-          <a:bodyPr wrap="square" lIns="76200" rIns="76200" tIns="50800" bIns="50800">
-            <a:spAutoFit/>
-          </a:bodyPr>
-          <a:lstStyle/>
-          <a:p>
-            <a:r>
-              <a:rPr sz="1600" b="0">
-                <a:solidFill>
-                  <a:srgbClr val="FFFFFF"/>
-                </a:solidFill>
-                <a:latin typeface="PingFang SC"/>
-              </a:rPr>
-              <a:t>Claude Code 的执行力来自 tool pipeline 和 async runtime。</a:t>
-            </a:r>
-          </a:p>
-        </p:txBody>
-      </p:sp>
-    </p:spTree>
-  </p:cSld>
-  <p:clrMapOvr>
-    <a:masterClrMapping/>
-  </p:clrMapOvr>
-</p:sld>
-</file>
-
-<file path=ppt/slides/slide21.xml><?xml version="1.0" encoding="utf-8"?>
+<file path=ppt/slides/slide3.xml><?xml version="1.0" encoding="utf-8"?>
 <p:sld xmlns:a="http://schemas.openxmlformats.org/drawingml/2006/main" xmlns:p="http://schemas.openxmlformats.org/presentationml/2006/main" xmlns:r="http://schemas.openxmlformats.org/officeDocument/2006/relationships">
   <p:cSld>
     <p:bg>
@@ -5386,8 +6513,8 @@
         </p:nvSpPr>
         <p:spPr>
           <a:xfrm>
-            <a:off x="594360" y="411480"/>
-            <a:ext cx="10607040" cy="777240"/>
+            <a:off x="594360" y="384048"/>
+            <a:ext cx="10789920" cy="685800"/>
           </a:xfrm>
           <a:prstGeom prst="rect">
             <a:avLst/>
@@ -5400,15 +6527,14 @@
           </a:bodyPr>
           <a:lstStyle/>
           <a:p>
-            <a:pPr algn="l"/>
             <a:r>
               <a:rPr sz="2600" b="1">
                 <a:solidFill>
                   <a:srgbClr val="0B1F44"/>
                 </a:solidFill>
-                <a:latin typeface="PingFang SC"/>
-              </a:rPr>
-              <a:t>tool call 不是直接执行</a:t>
+                <a:latin typeface="Arial"/>
+              </a:rPr>
+              <a:t>这份仓库本质上是什么</a:t>
             </a:r>
           </a:p>
         </p:txBody>
@@ -5421,8 +6547,8 @@
         </p:nvSpPr>
         <p:spPr>
           <a:xfrm>
-            <a:off x="621792" y="1143000"/>
-            <a:ext cx="2194560" cy="36576"/>
+            <a:off x="621792" y="1078992"/>
+            <a:ext cx="2011680" cy="27432"/>
           </a:xfrm>
           <a:prstGeom prst="rect">
             <a:avLst/>
@@ -5464,8 +6590,8 @@
         </p:nvSpPr>
         <p:spPr>
           <a:xfrm>
-            <a:off x="822960" y="1554480"/>
-            <a:ext cx="10058400" cy="4389120"/>
+            <a:off x="777240" y="1508760"/>
+            <a:ext cx="10241280" cy="4389120"/>
           </a:xfrm>
           <a:prstGeom prst="rect">
             <a:avLst/>
@@ -5484,13 +6610,13 @@
               </a:spcAft>
             </a:pPr>
             <a:r>
-              <a:rPr sz="2000" b="0">
+              <a:rPr sz="1900" b="0">
                 <a:solidFill>
                   <a:srgbClr val="1F2937"/>
                 </a:solidFill>
-                <a:latin typeface="PingFang SC"/>
-              </a:rPr>
-              <a:t>真实路径不是 findToolByName -&gt; tool.call 这么短</a:t>
+                <a:latin typeface="Arial"/>
+              </a:rPr>
+              <a:t>不是简单聊天 CLI，也不是薄薄的 SDK demo</a:t>
             </a:r>
           </a:p>
           <a:p>
@@ -5500,13 +6626,13 @@
               </a:spcAft>
             </a:pPr>
             <a:r>
-              <a:rPr sz="2000" b="0">
+              <a:rPr sz="1900" b="0">
                 <a:solidFill>
                   <a:srgbClr val="1F2937"/>
                 </a:solidFill>
-                <a:latin typeface="PingFang SC"/>
-              </a:rPr>
-              <a:t>前面还有 schema 校验、validateInput、speculative classifier、pre-tool hooks、permission 决策</a:t>
+                <a:latin typeface="Arial"/>
+              </a:rPr>
+              <a:t>更接近一个完整的本地 agent runtime</a:t>
             </a:r>
           </a:p>
           <a:p>
@@ -5516,13 +6642,13 @@
               </a:spcAft>
             </a:pPr>
             <a:r>
-              <a:rPr sz="2000" b="0">
+              <a:rPr sz="1900" b="0">
                 <a:solidFill>
                   <a:srgbClr val="1F2937"/>
                 </a:solidFill>
-                <a:latin typeface="PingFang SC"/>
-              </a:rPr>
-              <a:t>后面还有 result block 处理、content replacement、post-tool hooks、attachment/contextModifier</a:t>
+                <a:latin typeface="Arial"/>
+              </a:rPr>
+              <a:t>核心包括：CLI/TUI、会话状态、turn loop、认证/API、策略控制、扩展系统</a:t>
             </a:r>
           </a:p>
           <a:p>
@@ -5532,1951 +6658,13 @@
               </a:spcAft>
             </a:pPr>
             <a:r>
-              <a:rPr sz="2000" b="0">
+              <a:rPr sz="1900" b="0">
                 <a:solidFill>
                   <a:srgbClr val="1F2937"/>
                 </a:solidFill>
-                <a:latin typeface="PingFang SC"/>
-              </a:rPr>
-              <a:t>autonomy boundary 在 tool pipeline，而不是 UI 表面</a:t>
-            </a:r>
-          </a:p>
-        </p:txBody>
-      </p:sp>
-    </p:spTree>
-  </p:cSld>
-  <p:clrMapOvr>
-    <a:masterClrMapping/>
-  </p:clrMapOvr>
-</p:sld>
-</file>
-
-<file path=ppt/slides/slide22.xml><?xml version="1.0" encoding="utf-8"?>
-<p:sld xmlns:a="http://schemas.openxmlformats.org/drawingml/2006/main" xmlns:p="http://schemas.openxmlformats.org/presentationml/2006/main" xmlns:r="http://schemas.openxmlformats.org/officeDocument/2006/relationships">
-  <p:cSld>
-    <p:bg>
-      <p:bgPr>
-        <a:solidFill>
-          <a:srgbClr val="F8FAFC"/>
-        </a:solidFill>
-        <a:effectLst/>
-      </p:bgPr>
-    </p:bg>
-    <p:spTree>
-      <p:nvGrpSpPr>
-        <p:cNvPr id="1" name=""/>
-        <p:cNvGrpSpPr/>
-        <p:nvPr/>
-      </p:nvGrpSpPr>
-      <p:grpSpPr/>
-      <p:sp>
-        <p:nvSpPr>
-          <p:cNvPr id="2" name="TextBox 1"/>
-          <p:cNvSpPr txBox="1"/>
-          <p:nvPr/>
-        </p:nvSpPr>
-        <p:spPr>
-          <a:xfrm>
-            <a:off x="594360" y="411480"/>
-            <a:ext cx="10607040" cy="777240"/>
-          </a:xfrm>
-          <a:prstGeom prst="rect">
-            <a:avLst/>
-          </a:prstGeom>
-          <a:noFill/>
-        </p:spPr>
-        <p:txBody>
-          <a:bodyPr wrap="square" lIns="76200" rIns="76200" tIns="50800" bIns="50800">
-            <a:spAutoFit/>
-          </a:bodyPr>
-          <a:lstStyle/>
-          <a:p>
-            <a:pPr algn="l"/>
-            <a:r>
-              <a:rPr sz="2600" b="1">
-                <a:solidFill>
-                  <a:srgbClr val="0B1F44"/>
-                </a:solidFill>
-                <a:latin typeface="PingFang SC"/>
-              </a:rPr>
-              <a:t>task / subagent / mailbox 是异步执行底座</a:t>
-            </a:r>
-          </a:p>
-        </p:txBody>
-      </p:sp>
-      <p:sp>
-        <p:nvSpPr>
-          <p:cNvPr id="3" name="Rectangle 2"/>
-          <p:cNvSpPr/>
-          <p:nvPr/>
-        </p:nvSpPr>
-        <p:spPr>
-          <a:xfrm>
-            <a:off x="621792" y="1143000"/>
-            <a:ext cx="2194560" cy="36576"/>
-          </a:xfrm>
-          <a:prstGeom prst="rect">
-            <a:avLst/>
-          </a:prstGeom>
-          <a:solidFill>
-            <a:srgbClr val="DBE4F0"/>
-          </a:solidFill>
-          <a:ln>
-            <a:noFill/>
-          </a:ln>
-        </p:spPr>
-        <p:style>
-          <a:lnRef idx="1">
-            <a:schemeClr val="accent1"/>
-          </a:lnRef>
-          <a:fillRef idx="3">
-            <a:schemeClr val="accent1"/>
-          </a:fillRef>
-          <a:effectRef idx="2">
-            <a:schemeClr val="accent1"/>
-          </a:effectRef>
-          <a:fontRef idx="minor">
-            <a:schemeClr val="lt1"/>
-          </a:fontRef>
-        </p:style>
-        <p:txBody>
-          <a:bodyPr rtlCol="0" anchor="ctr"/>
-          <a:lstStyle/>
-          <a:p>
-            <a:pPr algn="ctr"/>
-          </a:p>
-        </p:txBody>
-      </p:sp>
-      <p:sp>
-        <p:nvSpPr>
-          <p:cNvPr id="4" name="TextBox 3"/>
-          <p:cNvSpPr txBox="1"/>
-          <p:nvPr/>
-        </p:nvSpPr>
-        <p:spPr>
-          <a:xfrm>
-            <a:off x="822960" y="1554480"/>
-            <a:ext cx="10058400" cy="4389120"/>
-          </a:xfrm>
-          <a:prstGeom prst="rect">
-            <a:avLst/>
-          </a:prstGeom>
-          <a:noFill/>
-        </p:spPr>
-        <p:txBody>
-          <a:bodyPr wrap="square" lIns="76200" rIns="76200" tIns="50800" bIns="50800">
-            <a:spAutoFit/>
-          </a:bodyPr>
-          <a:lstStyle/>
-          <a:p>
-            <a:pPr>
-              <a:spcAft>
-                <a:spcPts val="800"/>
-              </a:spcAft>
-            </a:pPr>
-            <a:r>
-              <a:rPr sz="2000" b="0">
-                <a:solidFill>
-                  <a:srgbClr val="1F2937"/>
-                </a:solidFill>
-                <a:latin typeface="PingFang SC"/>
-              </a:rPr>
-              <a:t>Task.ts 定义统一 task 类型与生命周期</a:t>
-            </a:r>
-          </a:p>
-          <a:p>
-            <a:pPr>
-              <a:spcAft>
-                <a:spcPts val="800"/>
-              </a:spcAft>
-            </a:pPr>
-            <a:r>
-              <a:rPr sz="2000" b="0">
-                <a:solidFill>
-                  <a:srgbClr val="1F2937"/>
-                </a:solidFill>
-                <a:latin typeface="PingFang SC"/>
-              </a:rPr>
-              <a:t>task/framework.ts 负责注册、轮询、GC、notification</a:t>
-            </a:r>
-          </a:p>
-          <a:p>
-            <a:pPr>
-              <a:spcAft>
-                <a:spcPts val="800"/>
-              </a:spcAft>
-            </a:pPr>
-            <a:r>
-              <a:rPr sz="2000" b="0">
-                <a:solidFill>
-                  <a:srgbClr val="1F2937"/>
-                </a:solidFill>
-                <a:latin typeface="PingFang SC"/>
-              </a:rPr>
-              <a:t>runAgent.ts 负责 subagent、sidechain transcript、metadata</a:t>
-            </a:r>
-          </a:p>
-          <a:p>
-            <a:pPr>
-              <a:spcAft>
-                <a:spcPts val="800"/>
-              </a:spcAft>
-            </a:pPr>
-            <a:r>
-              <a:rPr sz="2000" b="0">
-                <a:solidFill>
-                  <a:srgbClr val="1F2937"/>
-                </a:solidFill>
-                <a:latin typeface="PingFang SC"/>
-              </a:rPr>
-              <a:t>teammateMailbox.ts 提供显式 mailbox 协议</a:t>
-            </a:r>
-          </a:p>
-          <a:p>
-            <a:pPr>
-              <a:spcAft>
-                <a:spcPts val="800"/>
-              </a:spcAft>
-            </a:pPr>
-            <a:r>
-              <a:rPr sz="2000" b="0">
-                <a:solidFill>
-                  <a:srgbClr val="1F2937"/>
-                </a:solidFill>
-                <a:latin typeface="PingFang SC"/>
-              </a:rPr>
-              <a:t>agent / teammate 已经是有 identity、有 transcript、有恢复路径的执行体</a:t>
-            </a:r>
-          </a:p>
-        </p:txBody>
-      </p:sp>
-    </p:spTree>
-  </p:cSld>
-  <p:clrMapOvr>
-    <a:masterClrMapping/>
-  </p:clrMapOvr>
-</p:sld>
-</file>
-
-<file path=ppt/slides/slide23.xml><?xml version="1.0" encoding="utf-8"?>
-<p:sld xmlns:a="http://schemas.openxmlformats.org/drawingml/2006/main" xmlns:p="http://schemas.openxmlformats.org/presentationml/2006/main" xmlns:r="http://schemas.openxmlformats.org/officeDocument/2006/relationships">
-  <p:cSld>
-    <p:bg>
-      <p:bgPr>
-        <a:solidFill>
-          <a:srgbClr val="F8FAFC"/>
-        </a:solidFill>
-        <a:effectLst/>
-      </p:bgPr>
-    </p:bg>
-    <p:spTree>
-      <p:nvGrpSpPr>
-        <p:cNvPr id="1" name=""/>
-        <p:cNvGrpSpPr/>
-        <p:nvPr/>
-      </p:nvGrpSpPr>
-      <p:grpSpPr/>
-      <p:sp>
-        <p:nvSpPr>
-          <p:cNvPr id="2" name="TextBox 1"/>
-          <p:cNvSpPr txBox="1"/>
-          <p:nvPr/>
-        </p:nvSpPr>
-        <p:spPr>
-          <a:xfrm>
-            <a:off x="594360" y="411480"/>
-            <a:ext cx="10607040" cy="777240"/>
-          </a:xfrm>
-          <a:prstGeom prst="rect">
-            <a:avLst/>
-          </a:prstGeom>
-          <a:noFill/>
-        </p:spPr>
-        <p:txBody>
-          <a:bodyPr wrap="square" lIns="76200" rIns="76200" tIns="50800" bIns="50800">
-            <a:spAutoFit/>
-          </a:bodyPr>
-          <a:lstStyle/>
-          <a:p>
-            <a:pPr algn="l"/>
-            <a:r>
-              <a:rPr sz="2600" b="1">
-                <a:solidFill>
-                  <a:srgbClr val="0B1F44"/>
-                </a:solidFill>
-                <a:latin typeface="PingFang SC"/>
-              </a:rPr>
-              <a:t>为什么消息不是“即时打断式”到达</a:t>
-            </a:r>
-          </a:p>
-        </p:txBody>
-      </p:sp>
-      <p:sp>
-        <p:nvSpPr>
-          <p:cNvPr id="3" name="Rectangle 2"/>
-          <p:cNvSpPr/>
-          <p:nvPr/>
-        </p:nvSpPr>
-        <p:spPr>
-          <a:xfrm>
-            <a:off x="621792" y="1143000"/>
-            <a:ext cx="2194560" cy="36576"/>
-          </a:xfrm>
-          <a:prstGeom prst="rect">
-            <a:avLst/>
-          </a:prstGeom>
-          <a:solidFill>
-            <a:srgbClr val="DBE4F0"/>
-          </a:solidFill>
-          <a:ln>
-            <a:noFill/>
-          </a:ln>
-        </p:spPr>
-        <p:style>
-          <a:lnRef idx="1">
-            <a:schemeClr val="accent1"/>
-          </a:lnRef>
-          <a:fillRef idx="3">
-            <a:schemeClr val="accent1"/>
-          </a:fillRef>
-          <a:effectRef idx="2">
-            <a:schemeClr val="accent1"/>
-          </a:effectRef>
-          <a:fontRef idx="minor">
-            <a:schemeClr val="lt1"/>
-          </a:fontRef>
-        </p:style>
-        <p:txBody>
-          <a:bodyPr rtlCol="0" anchor="ctr"/>
-          <a:lstStyle/>
-          <a:p>
-            <a:pPr algn="ctr"/>
-          </a:p>
-        </p:txBody>
-      </p:sp>
-      <p:sp>
-        <p:nvSpPr>
-          <p:cNvPr id="4" name="TextBox 3"/>
-          <p:cNvSpPr txBox="1"/>
-          <p:nvPr/>
-        </p:nvSpPr>
-        <p:spPr>
-          <a:xfrm>
-            <a:off x="822960" y="1554480"/>
-            <a:ext cx="10058400" cy="4389120"/>
-          </a:xfrm>
-          <a:prstGeom prst="rect">
-            <a:avLst/>
-          </a:prstGeom>
-          <a:noFill/>
-        </p:spPr>
-        <p:txBody>
-          <a:bodyPr wrap="square" lIns="76200" rIns="76200" tIns="50800" bIns="50800">
-            <a:spAutoFit/>
-          </a:bodyPr>
-          <a:lstStyle/>
-          <a:p>
-            <a:pPr>
-              <a:spcAft>
-                <a:spcPts val="800"/>
-              </a:spcAft>
-            </a:pPr>
-            <a:r>
-              <a:rPr sz="2000" b="0">
-                <a:solidFill>
-                  <a:srgbClr val="1F2937"/>
-                </a:solidFill>
-                <a:latin typeface="PingFang SC"/>
-              </a:rPr>
-              <a:t>mailbox 与 pendingMessages 的投递发生在 turn 边界</a:t>
-            </a:r>
-          </a:p>
-          <a:p>
-            <a:pPr>
-              <a:spcAft>
-                <a:spcPts val="800"/>
-              </a:spcAft>
-            </a:pPr>
-            <a:r>
-              <a:rPr sz="2000" b="0">
-                <a:solidFill>
-                  <a:srgbClr val="1F2937"/>
-                </a:solidFill>
-                <a:latin typeface="PingFang SC"/>
-              </a:rPr>
-              <a:t>task-notification 也会在下一轮作为结构化事件进入主会话</a:t>
-            </a:r>
-          </a:p>
-          <a:p>
-            <a:pPr>
-              <a:spcAft>
-                <a:spcPts val="800"/>
-              </a:spcAft>
-            </a:pPr>
-            <a:r>
-              <a:rPr sz="2000" b="0">
-                <a:solidFill>
-                  <a:srgbClr val="1F2937"/>
-                </a:solidFill>
-                <a:latin typeface="PingFang SC"/>
-              </a:rPr>
-              <a:t>这牺牲了一点即时性，但换来了 turn 内状态一致性</a:t>
-            </a:r>
-          </a:p>
-          <a:p>
-            <a:pPr>
-              <a:spcAft>
-                <a:spcPts val="800"/>
-              </a:spcAft>
-            </a:pPr>
-            <a:r>
-              <a:rPr sz="2000" b="0">
-                <a:solidFill>
-                  <a:srgbClr val="1F2937"/>
-                </a:solidFill>
-                <a:latin typeface="PingFang SC"/>
-              </a:rPr>
-              <a:t>因此多 agent 协作更像 actor mailbox，而不是共享同一个 transcript</a:t>
-            </a:r>
-          </a:p>
-        </p:txBody>
-      </p:sp>
-    </p:spTree>
-  </p:cSld>
-  <p:clrMapOvr>
-    <a:masterClrMapping/>
-  </p:clrMapOvr>
-</p:sld>
-</file>
-
-<file path=ppt/slides/slide24.xml><?xml version="1.0" encoding="utf-8"?>
-<p:sld xmlns:a="http://schemas.openxmlformats.org/drawingml/2006/main" xmlns:p="http://schemas.openxmlformats.org/presentationml/2006/main" xmlns:r="http://schemas.openxmlformats.org/officeDocument/2006/relationships">
-  <p:cSld>
-    <p:bg>
-      <p:bgPr>
-        <a:solidFill>
-          <a:srgbClr val="F8FAFC"/>
-        </a:solidFill>
-        <a:effectLst/>
-      </p:bgPr>
-    </p:bg>
-    <p:spTree>
-      <p:nvGrpSpPr>
-        <p:cNvPr id="1" name=""/>
-        <p:cNvGrpSpPr/>
-        <p:nvPr/>
-      </p:nvGrpSpPr>
-      <p:grpSpPr/>
-      <p:sp>
-        <p:nvSpPr>
-          <p:cNvPr id="2" name="TextBox 1"/>
-          <p:cNvSpPr txBox="1"/>
-          <p:nvPr/>
-        </p:nvSpPr>
-        <p:spPr>
-          <a:xfrm>
-            <a:off x="594360" y="411480"/>
-            <a:ext cx="10607040" cy="777240"/>
-          </a:xfrm>
-          <a:prstGeom prst="rect">
-            <a:avLst/>
-          </a:prstGeom>
-          <a:noFill/>
-        </p:spPr>
-        <p:txBody>
-          <a:bodyPr wrap="square" lIns="76200" rIns="76200" tIns="50800" bIns="50800">
-            <a:spAutoFit/>
-          </a:bodyPr>
-          <a:lstStyle/>
-          <a:p>
-            <a:pPr algn="l"/>
-            <a:r>
-              <a:rPr sz="2600" b="1">
-                <a:solidFill>
-                  <a:srgbClr val="0B1F44"/>
-                </a:solidFill>
-                <a:latin typeface="PingFang SC"/>
-              </a:rPr>
-              <a:t>关键状态载体</a:t>
-            </a:r>
-          </a:p>
-        </p:txBody>
-      </p:sp>
-      <p:sp>
-        <p:nvSpPr>
-          <p:cNvPr id="3" name="Rectangle 2"/>
-          <p:cNvSpPr/>
-          <p:nvPr/>
-        </p:nvSpPr>
-        <p:spPr>
-          <a:xfrm>
-            <a:off x="621792" y="1143000"/>
-            <a:ext cx="2194560" cy="36576"/>
-          </a:xfrm>
-          <a:prstGeom prst="rect">
-            <a:avLst/>
-          </a:prstGeom>
-          <a:solidFill>
-            <a:srgbClr val="DBE4F0"/>
-          </a:solidFill>
-          <a:ln>
-            <a:noFill/>
-          </a:ln>
-        </p:spPr>
-        <p:style>
-          <a:lnRef idx="1">
-            <a:schemeClr val="accent1"/>
-          </a:lnRef>
-          <a:fillRef idx="3">
-            <a:schemeClr val="accent1"/>
-          </a:fillRef>
-          <a:effectRef idx="2">
-            <a:schemeClr val="accent1"/>
-          </a:effectRef>
-          <a:fontRef idx="minor">
-            <a:schemeClr val="lt1"/>
-          </a:fontRef>
-        </p:style>
-        <p:txBody>
-          <a:bodyPr rtlCol="0" anchor="ctr"/>
-          <a:lstStyle/>
-          <a:p>
-            <a:pPr algn="ctr"/>
-          </a:p>
-        </p:txBody>
-      </p:sp>
-      <p:sp>
-        <p:nvSpPr>
-          <p:cNvPr id="4" name="TextBox 3"/>
-          <p:cNvSpPr txBox="1"/>
-          <p:nvPr/>
-        </p:nvSpPr>
-        <p:spPr>
-          <a:xfrm>
-            <a:off x="822960" y="1554480"/>
-            <a:ext cx="10058400" cy="4389120"/>
-          </a:xfrm>
-          <a:prstGeom prst="rect">
-            <a:avLst/>
-          </a:prstGeom>
-          <a:noFill/>
-        </p:spPr>
-        <p:txBody>
-          <a:bodyPr wrap="square" lIns="76200" rIns="76200" tIns="50800" bIns="50800">
-            <a:spAutoFit/>
-          </a:bodyPr>
-          <a:lstStyle/>
-          <a:p>
-            <a:pPr>
-              <a:spcAft>
-                <a:spcPts val="800"/>
-              </a:spcAft>
-            </a:pPr>
-            <a:r>
-              <a:rPr sz="2000" b="0">
-                <a:solidFill>
-                  <a:srgbClr val="1F2937"/>
-                </a:solidFill>
-                <a:latin typeface="PingFang SC"/>
-              </a:rPr>
-              <a:t>messages：turn-local 工作面</a:t>
-            </a:r>
-          </a:p>
-          <a:p>
-            <a:pPr>
-              <a:spcAft>
-                <a:spcPts val="800"/>
-              </a:spcAft>
-            </a:pPr>
-            <a:r>
-              <a:rPr sz="2000" b="0">
-                <a:solidFill>
-                  <a:srgbClr val="1F2937"/>
-                </a:solidFill>
-                <a:latin typeface="PingFang SC"/>
-              </a:rPr>
-              <a:t>transcript / sidechain：durable history</a:t>
-            </a:r>
-          </a:p>
-          <a:p>
-            <a:pPr>
-              <a:spcAft>
-                <a:spcPts val="800"/>
-              </a:spcAft>
-            </a:pPr>
-            <a:r>
-              <a:rPr sz="2000" b="0">
-                <a:solidFill>
-                  <a:srgbClr val="1F2937"/>
-                </a:solidFill>
-                <a:latin typeface="PingFang SC"/>
-              </a:rPr>
-              <a:t>ToolUseContext：工具执行总线</a:t>
-            </a:r>
-          </a:p>
-          <a:p>
-            <a:pPr>
-              <a:spcAft>
-                <a:spcPts val="800"/>
-              </a:spcAft>
-            </a:pPr>
-            <a:r>
-              <a:rPr sz="2000" b="0">
-                <a:solidFill>
-                  <a:srgbClr val="1F2937"/>
-                </a:solidFill>
-                <a:latin typeface="PingFang SC"/>
-              </a:rPr>
-              <a:t>AppState：宿主共享状态</a:t>
-            </a:r>
-          </a:p>
-          <a:p>
-            <a:pPr>
-              <a:spcAft>
-                <a:spcPts val="800"/>
-              </a:spcAft>
-            </a:pPr>
-            <a:r>
-              <a:rPr sz="2000" b="0">
-                <a:solidFill>
-                  <a:srgbClr val="1F2937"/>
-                </a:solidFill>
-                <a:latin typeface="PingFang SC"/>
-              </a:rPr>
-              <a:t>attachments / sidecar artifacts：按需重注入的工作面</a:t>
-            </a:r>
-          </a:p>
-        </p:txBody>
-      </p:sp>
-      <p:sp>
-        <p:nvSpPr>
-          <p:cNvPr id="5" name="TextBox 4"/>
-          <p:cNvSpPr txBox="1"/>
-          <p:nvPr/>
-        </p:nvSpPr>
-        <p:spPr>
-          <a:xfrm>
-            <a:off x="868680" y="5120640"/>
-            <a:ext cx="9875520" cy="822960"/>
-          </a:xfrm>
-          <a:prstGeom prst="rect">
-            <a:avLst/>
-          </a:prstGeom>
-          <a:noFill/>
-        </p:spPr>
-        <p:txBody>
-          <a:bodyPr wrap="square" lIns="76200" rIns="76200" tIns="50800" bIns="50800">
-            <a:spAutoFit/>
-          </a:bodyPr>
-          <a:lstStyle/>
-          <a:p>
-            <a:r>
-              <a:rPr sz="1600" b="0">
-                <a:solidFill>
-                  <a:srgbClr val="475569"/>
-                </a:solidFill>
-                <a:latin typeface="PingFang SC"/>
-              </a:rPr>
-              <a:t>不要把系统简化成“只有消息数组”。</a:t>
-            </a:r>
-          </a:p>
-        </p:txBody>
-      </p:sp>
-    </p:spTree>
-  </p:cSld>
-  <p:clrMapOvr>
-    <a:masterClrMapping/>
-  </p:clrMapOvr>
-</p:sld>
-</file>
-
-<file path=ppt/slides/slide25.xml><?xml version="1.0" encoding="utf-8"?>
-<p:sld xmlns:a="http://schemas.openxmlformats.org/drawingml/2006/main" xmlns:p="http://schemas.openxmlformats.org/presentationml/2006/main" xmlns:r="http://schemas.openxmlformats.org/officeDocument/2006/relationships">
-  <p:cSld>
-    <p:bg>
-      <p:bgPr>
-        <a:solidFill>
-          <a:srgbClr val="101C3F"/>
-        </a:solidFill>
-        <a:effectLst/>
-      </p:bgPr>
-    </p:bg>
-    <p:spTree>
-      <p:nvGrpSpPr>
-        <p:cNvPr id="1" name=""/>
-        <p:cNvGrpSpPr/>
-        <p:nvPr/>
-      </p:nvGrpSpPr>
-      <p:grpSpPr/>
-      <p:sp>
-        <p:nvSpPr>
-          <p:cNvPr id="2" name="TextBox 1"/>
-          <p:cNvSpPr txBox="1"/>
-          <p:nvPr/>
-        </p:nvSpPr>
-        <p:spPr>
-          <a:xfrm>
-            <a:off x="594360" y="411480"/>
-            <a:ext cx="10607040" cy="777240"/>
-          </a:xfrm>
-          <a:prstGeom prst="rect">
-            <a:avLst/>
-          </a:prstGeom>
-          <a:noFill/>
-        </p:spPr>
-        <p:txBody>
-          <a:bodyPr wrap="square" lIns="76200" rIns="76200" tIns="50800" bIns="50800">
-            <a:spAutoFit/>
-          </a:bodyPr>
-          <a:lstStyle/>
-          <a:p>
-            <a:pPr algn="l"/>
-            <a:r>
-              <a:rPr sz="2800" b="1">
-                <a:solidFill>
-                  <a:srgbClr val="FFFFFF"/>
-                </a:solidFill>
-                <a:latin typeface="PingFang SC"/>
-              </a:rPr>
-              <a:t>六、为什么它更像产品化 runtime</a:t>
-            </a:r>
-          </a:p>
-        </p:txBody>
-      </p:sp>
-      <p:sp>
-        <p:nvSpPr>
-          <p:cNvPr id="3" name="TextBox 2"/>
-          <p:cNvSpPr txBox="1"/>
-          <p:nvPr/>
-        </p:nvSpPr>
-        <p:spPr>
-          <a:xfrm>
-            <a:off x="658368" y="1417320"/>
-            <a:ext cx="10241280" cy="822960"/>
-          </a:xfrm>
-          <a:prstGeom prst="rect">
-            <a:avLst/>
-          </a:prstGeom>
-          <a:noFill/>
-        </p:spPr>
-        <p:txBody>
-          <a:bodyPr wrap="square" lIns="76200" rIns="76200" tIns="50800" bIns="50800">
-            <a:spAutoFit/>
-          </a:bodyPr>
-          <a:lstStyle/>
-          <a:p>
-            <a:r>
-              <a:rPr sz="1600" b="0">
-                <a:solidFill>
-                  <a:srgbClr val="FFFFFF"/>
-                </a:solidFill>
-                <a:latin typeface="PingFang SC"/>
-              </a:rPr>
-              <a:t>最后再看控制面、扩展面和可观测性。</a:t>
-            </a:r>
-          </a:p>
-        </p:txBody>
-      </p:sp>
-    </p:spTree>
-  </p:cSld>
-  <p:clrMapOvr>
-    <a:masterClrMapping/>
-  </p:clrMapOvr>
-</p:sld>
-</file>
-
-<file path=ppt/slides/slide26.xml><?xml version="1.0" encoding="utf-8"?>
-<p:sld xmlns:a="http://schemas.openxmlformats.org/drawingml/2006/main" xmlns:p="http://schemas.openxmlformats.org/presentationml/2006/main" xmlns:r="http://schemas.openxmlformats.org/officeDocument/2006/relationships">
-  <p:cSld>
-    <p:bg>
-      <p:bgPr>
-        <a:solidFill>
-          <a:srgbClr val="F8FAFC"/>
-        </a:solidFill>
-        <a:effectLst/>
-      </p:bgPr>
-    </p:bg>
-    <p:spTree>
-      <p:nvGrpSpPr>
-        <p:cNvPr id="1" name=""/>
-        <p:cNvGrpSpPr/>
-        <p:nvPr/>
-      </p:nvGrpSpPr>
-      <p:grpSpPr/>
-      <p:sp>
-        <p:nvSpPr>
-          <p:cNvPr id="2" name="TextBox 1"/>
-          <p:cNvSpPr txBox="1"/>
-          <p:nvPr/>
-        </p:nvSpPr>
-        <p:spPr>
-          <a:xfrm>
-            <a:off x="594360" y="411480"/>
-            <a:ext cx="10607040" cy="777240"/>
-          </a:xfrm>
-          <a:prstGeom prst="rect">
-            <a:avLst/>
-          </a:prstGeom>
-          <a:noFill/>
-        </p:spPr>
-        <p:txBody>
-          <a:bodyPr wrap="square" lIns="76200" rIns="76200" tIns="50800" bIns="50800">
-            <a:spAutoFit/>
-          </a:bodyPr>
-          <a:lstStyle/>
-          <a:p>
-            <a:pPr algn="l"/>
-            <a:r>
-              <a:rPr sz="2600" b="1">
-                <a:solidFill>
-                  <a:srgbClr val="0B1F44"/>
-                </a:solidFill>
-                <a:latin typeface="PingFang SC"/>
-              </a:rPr>
-              <a:t>认证、策略和服务端控制</a:t>
-            </a:r>
-          </a:p>
-        </p:txBody>
-      </p:sp>
-      <p:sp>
-        <p:nvSpPr>
-          <p:cNvPr id="3" name="Rectangle 2"/>
-          <p:cNvSpPr/>
-          <p:nvPr/>
-        </p:nvSpPr>
-        <p:spPr>
-          <a:xfrm>
-            <a:off x="621792" y="1143000"/>
-            <a:ext cx="2194560" cy="36576"/>
-          </a:xfrm>
-          <a:prstGeom prst="rect">
-            <a:avLst/>
-          </a:prstGeom>
-          <a:solidFill>
-            <a:srgbClr val="DBE4F0"/>
-          </a:solidFill>
-          <a:ln>
-            <a:noFill/>
-          </a:ln>
-        </p:spPr>
-        <p:style>
-          <a:lnRef idx="1">
-            <a:schemeClr val="accent1"/>
-          </a:lnRef>
-          <a:fillRef idx="3">
-            <a:schemeClr val="accent1"/>
-          </a:fillRef>
-          <a:effectRef idx="2">
-            <a:schemeClr val="accent1"/>
-          </a:effectRef>
-          <a:fontRef idx="minor">
-            <a:schemeClr val="lt1"/>
-          </a:fontRef>
-        </p:style>
-        <p:txBody>
-          <a:bodyPr rtlCol="0" anchor="ctr"/>
-          <a:lstStyle/>
-          <a:p>
-            <a:pPr algn="ctr"/>
-          </a:p>
-        </p:txBody>
-      </p:sp>
-      <p:sp>
-        <p:nvSpPr>
-          <p:cNvPr id="4" name="TextBox 3"/>
-          <p:cNvSpPr txBox="1"/>
-          <p:nvPr/>
-        </p:nvSpPr>
-        <p:spPr>
-          <a:xfrm>
-            <a:off x="822960" y="1554480"/>
-            <a:ext cx="10058400" cy="4389120"/>
-          </a:xfrm>
-          <a:prstGeom prst="rect">
-            <a:avLst/>
-          </a:prstGeom>
-          <a:noFill/>
-        </p:spPr>
-        <p:txBody>
-          <a:bodyPr wrap="square" lIns="76200" rIns="76200" tIns="50800" bIns="50800">
-            <a:spAutoFit/>
-          </a:bodyPr>
-          <a:lstStyle/>
-          <a:p>
-            <a:pPr>
-              <a:spcAft>
-                <a:spcPts val="800"/>
-              </a:spcAft>
-            </a:pPr>
-            <a:r>
-              <a:rPr sz="2000" b="0">
-                <a:solidFill>
-                  <a:srgbClr val="1F2937"/>
-                </a:solidFill>
-                <a:latin typeface="PingFang SC"/>
-              </a:rPr>
-              <a:t>服务端负责裁决，客户端负责执行</a:t>
-            </a:r>
-          </a:p>
-          <a:p>
-            <a:pPr>
-              <a:spcAft>
-                <a:spcPts val="800"/>
-              </a:spcAft>
-            </a:pPr>
-            <a:r>
-              <a:rPr sz="2000" b="0">
-                <a:solidFill>
-                  <a:srgbClr val="1F2937"/>
-                </a:solidFill>
-                <a:latin typeface="PingFang SC"/>
-              </a:rPr>
-              <a:t>控制面包括 OAuth / API key、policy_limits、remote managed settings、forceLoginOrgUUID</a:t>
-            </a:r>
-          </a:p>
-          <a:p>
-            <a:pPr>
-              <a:spcAft>
-                <a:spcPts val="800"/>
-              </a:spcAft>
-            </a:pPr>
-            <a:r>
-              <a:rPr sz="2000" b="0">
-                <a:solidFill>
-                  <a:srgbClr val="1F2937"/>
-                </a:solidFill>
-                <a:latin typeface="PingFang SC"/>
-              </a:rPr>
-              <a:t>更准确地说，不是“客户端封用户”，而是“服务端决定，客户端落实”</a:t>
-            </a:r>
-          </a:p>
-        </p:txBody>
-      </p:sp>
-    </p:spTree>
-  </p:cSld>
-  <p:clrMapOvr>
-    <a:masterClrMapping/>
-  </p:clrMapOvr>
-</p:sld>
-</file>
-
-<file path=ppt/slides/slide27.xml><?xml version="1.0" encoding="utf-8"?>
-<p:sld xmlns:a="http://schemas.openxmlformats.org/drawingml/2006/main" xmlns:p="http://schemas.openxmlformats.org/presentationml/2006/main" xmlns:r="http://schemas.openxmlformats.org/officeDocument/2006/relationships">
-  <p:cSld>
-    <p:bg>
-      <p:bgPr>
-        <a:solidFill>
-          <a:srgbClr val="F8FAFC"/>
-        </a:solidFill>
-        <a:effectLst/>
-      </p:bgPr>
-    </p:bg>
-    <p:spTree>
-      <p:nvGrpSpPr>
-        <p:cNvPr id="1" name=""/>
-        <p:cNvGrpSpPr/>
-        <p:nvPr/>
-      </p:nvGrpSpPr>
-      <p:grpSpPr/>
-      <p:sp>
-        <p:nvSpPr>
-          <p:cNvPr id="2" name="TextBox 1"/>
-          <p:cNvSpPr txBox="1"/>
-          <p:nvPr/>
-        </p:nvSpPr>
-        <p:spPr>
-          <a:xfrm>
-            <a:off x="594360" y="411480"/>
-            <a:ext cx="10607040" cy="777240"/>
-          </a:xfrm>
-          <a:prstGeom prst="rect">
-            <a:avLst/>
-          </a:prstGeom>
-          <a:noFill/>
-        </p:spPr>
-        <p:txBody>
-          <a:bodyPr wrap="square" lIns="76200" rIns="76200" tIns="50800" bIns="50800">
-            <a:spAutoFit/>
-          </a:bodyPr>
-          <a:lstStyle/>
-          <a:p>
-            <a:pPr algn="l"/>
-            <a:r>
-              <a:rPr sz="2600" b="1">
-                <a:solidFill>
-                  <a:srgbClr val="0B1F44"/>
-                </a:solidFill>
-                <a:latin typeface="PingFang SC"/>
-              </a:rPr>
-              <a:t>API、Prompt 与扩展系统</a:t>
-            </a:r>
-          </a:p>
-        </p:txBody>
-      </p:sp>
-      <p:sp>
-        <p:nvSpPr>
-          <p:cNvPr id="3" name="Rectangle 2"/>
-          <p:cNvSpPr/>
-          <p:nvPr/>
-        </p:nvSpPr>
-        <p:spPr>
-          <a:xfrm>
-            <a:off x="621792" y="1143000"/>
-            <a:ext cx="2194560" cy="36576"/>
-          </a:xfrm>
-          <a:prstGeom prst="rect">
-            <a:avLst/>
-          </a:prstGeom>
-          <a:solidFill>
-            <a:srgbClr val="DBE4F0"/>
-          </a:solidFill>
-          <a:ln>
-            <a:noFill/>
-          </a:ln>
-        </p:spPr>
-        <p:style>
-          <a:lnRef idx="1">
-            <a:schemeClr val="accent1"/>
-          </a:lnRef>
-          <a:fillRef idx="3">
-            <a:schemeClr val="accent1"/>
-          </a:fillRef>
-          <a:effectRef idx="2">
-            <a:schemeClr val="accent1"/>
-          </a:effectRef>
-          <a:fontRef idx="minor">
-            <a:schemeClr val="lt1"/>
-          </a:fontRef>
-        </p:style>
-        <p:txBody>
-          <a:bodyPr rtlCol="0" anchor="ctr"/>
-          <a:lstStyle/>
-          <a:p>
-            <a:pPr algn="ctr"/>
-          </a:p>
-        </p:txBody>
-      </p:sp>
-      <p:sp>
-        <p:nvSpPr>
-          <p:cNvPr id="4" name="TextBox 3"/>
-          <p:cNvSpPr txBox="1"/>
-          <p:nvPr/>
-        </p:nvSpPr>
-        <p:spPr>
-          <a:xfrm>
-            <a:off x="822960" y="1554480"/>
-            <a:ext cx="10058400" cy="4389120"/>
-          </a:xfrm>
-          <a:prstGeom prst="rect">
-            <a:avLst/>
-          </a:prstGeom>
-          <a:noFill/>
-        </p:spPr>
-        <p:txBody>
-          <a:bodyPr wrap="square" lIns="76200" rIns="76200" tIns="50800" bIns="50800">
-            <a:spAutoFit/>
-          </a:bodyPr>
-          <a:lstStyle/>
-          <a:p>
-            <a:pPr>
-              <a:spcAft>
-                <a:spcPts val="800"/>
-              </a:spcAft>
-            </a:pPr>
-            <a:r>
-              <a:rPr sz="2000" b="0">
-                <a:solidFill>
-                  <a:srgbClr val="1F2937"/>
-                </a:solidFill>
-                <a:latin typeface="PingFang SC"/>
-              </a:rPr>
-              <a:t>client.ts / claude.ts 不是薄封装，而是多 provider 统一适配层</a:t>
-            </a:r>
-          </a:p>
-          <a:p>
-            <a:pPr>
-              <a:spcAft>
-                <a:spcPts val="800"/>
-              </a:spcAft>
-            </a:pPr>
-            <a:r>
-              <a:rPr sz="2000" b="0">
-                <a:solidFill>
-                  <a:srgbClr val="1F2937"/>
-                </a:solidFill>
-                <a:latin typeface="PingFang SC"/>
-              </a:rPr>
-              <a:t>prompt stack 在这里是一层 control plane</a:t>
-            </a:r>
-          </a:p>
-          <a:p>
-            <a:pPr>
-              <a:spcAft>
-                <a:spcPts val="800"/>
-              </a:spcAft>
-            </a:pPr>
-            <a:r>
-              <a:rPr sz="2000" b="0">
-                <a:solidFill>
-                  <a:srgbClr val="1F2937"/>
-                </a:solidFill>
-                <a:latin typeface="PingFang SC"/>
-              </a:rPr>
-              <a:t>MCP / plugins / commands / skills 都是一级扩展面</a:t>
-            </a:r>
-          </a:p>
-          <a:p>
-            <a:pPr>
-              <a:spcAft>
-                <a:spcPts val="800"/>
-              </a:spcAft>
-            </a:pPr>
-            <a:r>
-              <a:rPr sz="2000" b="0">
-                <a:solidFill>
-                  <a:srgbClr val="1F2937"/>
-                </a:solidFill>
-                <a:latin typeface="PingFang SC"/>
-              </a:rPr>
-              <a:t>这也是为什么它更像完整 runtime，而不是单点功能工具</a:t>
-            </a:r>
-          </a:p>
-        </p:txBody>
-      </p:sp>
-    </p:spTree>
-  </p:cSld>
-  <p:clrMapOvr>
-    <a:masterClrMapping/>
-  </p:clrMapOvr>
-</p:sld>
-</file>
-
-<file path=ppt/slides/slide28.xml><?xml version="1.0" encoding="utf-8"?>
-<p:sld xmlns:a="http://schemas.openxmlformats.org/drawingml/2006/main" xmlns:p="http://schemas.openxmlformats.org/presentationml/2006/main" xmlns:r="http://schemas.openxmlformats.org/officeDocument/2006/relationships">
-  <p:cSld>
-    <p:bg>
-      <p:bgPr>
-        <a:solidFill>
-          <a:srgbClr val="F8FAFC"/>
-        </a:solidFill>
-        <a:effectLst/>
-      </p:bgPr>
-    </p:bg>
-    <p:spTree>
-      <p:nvGrpSpPr>
-        <p:cNvPr id="1" name=""/>
-        <p:cNvGrpSpPr/>
-        <p:nvPr/>
-      </p:nvGrpSpPr>
-      <p:grpSpPr/>
-      <p:sp>
-        <p:nvSpPr>
-          <p:cNvPr id="2" name="TextBox 1"/>
-          <p:cNvSpPr txBox="1"/>
-          <p:nvPr/>
-        </p:nvSpPr>
-        <p:spPr>
-          <a:xfrm>
-            <a:off x="594360" y="411480"/>
-            <a:ext cx="10607040" cy="777240"/>
-          </a:xfrm>
-          <a:prstGeom prst="rect">
-            <a:avLst/>
-          </a:prstGeom>
-          <a:noFill/>
-        </p:spPr>
-        <p:txBody>
-          <a:bodyPr wrap="square" lIns="76200" rIns="76200" tIns="50800" bIns="50800">
-            <a:spAutoFit/>
-          </a:bodyPr>
-          <a:lstStyle/>
-          <a:p>
-            <a:pPr algn="l"/>
-            <a:r>
-              <a:rPr sz="2600" b="1">
-                <a:solidFill>
-                  <a:srgbClr val="0B1F44"/>
-                </a:solidFill>
-                <a:latin typeface="PingFang SC"/>
-              </a:rPr>
-              <a:t>可观测性为什么重要</a:t>
-            </a:r>
-          </a:p>
-        </p:txBody>
-      </p:sp>
-      <p:sp>
-        <p:nvSpPr>
-          <p:cNvPr id="3" name="Rectangle 2"/>
-          <p:cNvSpPr/>
-          <p:nvPr/>
-        </p:nvSpPr>
-        <p:spPr>
-          <a:xfrm>
-            <a:off x="621792" y="1143000"/>
-            <a:ext cx="2194560" cy="36576"/>
-          </a:xfrm>
-          <a:prstGeom prst="rect">
-            <a:avLst/>
-          </a:prstGeom>
-          <a:solidFill>
-            <a:srgbClr val="DBE4F0"/>
-          </a:solidFill>
-          <a:ln>
-            <a:noFill/>
-          </a:ln>
-        </p:spPr>
-        <p:style>
-          <a:lnRef idx="1">
-            <a:schemeClr val="accent1"/>
-          </a:lnRef>
-          <a:fillRef idx="3">
-            <a:schemeClr val="accent1"/>
-          </a:fillRef>
-          <a:effectRef idx="2">
-            <a:schemeClr val="accent1"/>
-          </a:effectRef>
-          <a:fontRef idx="minor">
-            <a:schemeClr val="lt1"/>
-          </a:fontRef>
-        </p:style>
-        <p:txBody>
-          <a:bodyPr rtlCol="0" anchor="ctr"/>
-          <a:lstStyle/>
-          <a:p>
-            <a:pPr algn="ctr"/>
-          </a:p>
-        </p:txBody>
-      </p:sp>
-      <p:sp>
-        <p:nvSpPr>
-          <p:cNvPr id="4" name="TextBox 3"/>
-          <p:cNvSpPr txBox="1"/>
-          <p:nvPr/>
-        </p:nvSpPr>
-        <p:spPr>
-          <a:xfrm>
-            <a:off x="822960" y="1554480"/>
-            <a:ext cx="10058400" cy="4389120"/>
-          </a:xfrm>
-          <a:prstGeom prst="rect">
-            <a:avLst/>
-          </a:prstGeom>
-          <a:noFill/>
-        </p:spPr>
-        <p:txBody>
-          <a:bodyPr wrap="square" lIns="76200" rIns="76200" tIns="50800" bIns="50800">
-            <a:spAutoFit/>
-          </a:bodyPr>
-          <a:lstStyle/>
-          <a:p>
-            <a:pPr>
-              <a:spcAft>
-                <a:spcPts val="800"/>
-              </a:spcAft>
-            </a:pPr>
-            <a:r>
-              <a:rPr sz="2000" b="0">
-                <a:solidFill>
-                  <a:srgbClr val="1F2937"/>
-                </a:solidFill>
-                <a:latin typeface="PingFang SC"/>
-              </a:rPr>
-              <a:t>queryProfiler.ts：慢在哪个阶段</a:t>
-            </a:r>
-          </a:p>
-          <a:p>
-            <a:pPr>
-              <a:spcAft>
-                <a:spcPts val="800"/>
-              </a:spcAft>
-            </a:pPr>
-            <a:r>
-              <a:rPr sz="2000" b="0">
-                <a:solidFill>
-                  <a:srgbClr val="1F2937"/>
-                </a:solidFill>
-                <a:latin typeface="PingFang SC"/>
-              </a:rPr>
-              <a:t>analyzeContext.ts：上下文是谁吃掉的</a:t>
-            </a:r>
-          </a:p>
-          <a:p>
-            <a:pPr>
-              <a:spcAft>
-                <a:spcPts val="800"/>
-              </a:spcAft>
-            </a:pPr>
-            <a:r>
-              <a:rPr sz="2000" b="0">
-                <a:solidFill>
-                  <a:srgbClr val="1F2937"/>
-                </a:solidFill>
-                <a:latin typeface="PingFang SC"/>
-              </a:rPr>
-              <a:t>promptCacheBreakDetection.ts：cache 为什么断了</a:t>
-            </a:r>
-          </a:p>
-          <a:p>
-            <a:pPr>
-              <a:spcAft>
-                <a:spcPts val="800"/>
-              </a:spcAft>
-            </a:pPr>
-            <a:r>
-              <a:rPr sz="2000" b="0">
-                <a:solidFill>
-                  <a:srgbClr val="1F2937"/>
-                </a:solidFill>
-                <a:latin typeface="PingFang SC"/>
-              </a:rPr>
-              <a:t>没有可观测性，就很难持续优化 harness</a:t>
-            </a:r>
-          </a:p>
-        </p:txBody>
-      </p:sp>
-    </p:spTree>
-  </p:cSld>
-  <p:clrMapOvr>
-    <a:masterClrMapping/>
-  </p:clrMapOvr>
-</p:sld>
-</file>
-
-<file path=ppt/slides/slide29.xml><?xml version="1.0" encoding="utf-8"?>
-<p:sld xmlns:a="http://schemas.openxmlformats.org/drawingml/2006/main" xmlns:p="http://schemas.openxmlformats.org/presentationml/2006/main" xmlns:r="http://schemas.openxmlformats.org/officeDocument/2006/relationships">
-  <p:cSld>
-    <p:bg>
-      <p:bgPr>
-        <a:solidFill>
-          <a:srgbClr val="101C3F"/>
-        </a:solidFill>
-        <a:effectLst/>
-      </p:bgPr>
-    </p:bg>
-    <p:spTree>
-      <p:nvGrpSpPr>
-        <p:cNvPr id="1" name=""/>
-        <p:cNvGrpSpPr/>
-        <p:nvPr/>
-      </p:nvGrpSpPr>
-      <p:grpSpPr/>
-      <p:sp>
-        <p:nvSpPr>
-          <p:cNvPr id="2" name="TextBox 1"/>
-          <p:cNvSpPr txBox="1"/>
-          <p:nvPr/>
-        </p:nvSpPr>
-        <p:spPr>
-          <a:xfrm>
-            <a:off x="594360" y="411480"/>
-            <a:ext cx="10607040" cy="777240"/>
-          </a:xfrm>
-          <a:prstGeom prst="rect">
-            <a:avLst/>
-          </a:prstGeom>
-          <a:noFill/>
-        </p:spPr>
-        <p:txBody>
-          <a:bodyPr wrap="square" lIns="76200" rIns="76200" tIns="50800" bIns="50800">
-            <a:spAutoFit/>
-          </a:bodyPr>
-          <a:lstStyle/>
-          <a:p>
-            <a:pPr algn="l"/>
-            <a:r>
-              <a:rPr sz="2800" b="1">
-                <a:solidFill>
-                  <a:srgbClr val="FFFFFF"/>
-                </a:solidFill>
-                <a:latin typeface="PingFang SC"/>
-              </a:rPr>
-              <a:t>七、给读者的落点</a:t>
-            </a:r>
-          </a:p>
-        </p:txBody>
-      </p:sp>
-      <p:sp>
-        <p:nvSpPr>
-          <p:cNvPr id="3" name="TextBox 2"/>
-          <p:cNvSpPr txBox="1"/>
-          <p:nvPr/>
-        </p:nvSpPr>
-        <p:spPr>
-          <a:xfrm>
-            <a:off x="658368" y="1417320"/>
-            <a:ext cx="10241280" cy="822960"/>
-          </a:xfrm>
-          <a:prstGeom prst="rect">
-            <a:avLst/>
-          </a:prstGeom>
-          <a:noFill/>
-        </p:spPr>
-        <p:txBody>
-          <a:bodyPr wrap="square" lIns="76200" rIns="76200" tIns="50800" bIns="50800">
-            <a:spAutoFit/>
-          </a:bodyPr>
-          <a:lstStyle/>
-          <a:p>
-            <a:r>
-              <a:rPr sz="1600" b="0">
-                <a:solidFill>
-                  <a:srgbClr val="FFFFFF"/>
-                </a:solidFill>
-                <a:latin typeface="PingFang SC"/>
-              </a:rPr>
-              <a:t>最后只保留最应该带走的结论。</a:t>
-            </a:r>
-          </a:p>
-        </p:txBody>
-      </p:sp>
-    </p:spTree>
-  </p:cSld>
-  <p:clrMapOvr>
-    <a:masterClrMapping/>
-  </p:clrMapOvr>
-</p:sld>
-</file>
-
-<file path=ppt/slides/slide3.xml><?xml version="1.0" encoding="utf-8"?>
-<p:sld xmlns:a="http://schemas.openxmlformats.org/drawingml/2006/main" xmlns:p="http://schemas.openxmlformats.org/presentationml/2006/main" xmlns:r="http://schemas.openxmlformats.org/officeDocument/2006/relationships">
-  <p:cSld>
-    <p:bg>
-      <p:bgPr>
-        <a:solidFill>
-          <a:srgbClr val="101C3F"/>
-        </a:solidFill>
-        <a:effectLst/>
-      </p:bgPr>
-    </p:bg>
-    <p:spTree>
-      <p:nvGrpSpPr>
-        <p:cNvPr id="1" name=""/>
-        <p:cNvGrpSpPr/>
-        <p:nvPr/>
-      </p:nvGrpSpPr>
-      <p:grpSpPr/>
-      <p:sp>
-        <p:nvSpPr>
-          <p:cNvPr id="2" name="TextBox 1"/>
-          <p:cNvSpPr txBox="1"/>
-          <p:nvPr/>
-        </p:nvSpPr>
-        <p:spPr>
-          <a:xfrm>
-            <a:off x="594360" y="411480"/>
-            <a:ext cx="10607040" cy="777240"/>
-          </a:xfrm>
-          <a:prstGeom prst="rect">
-            <a:avLst/>
-          </a:prstGeom>
-          <a:noFill/>
-        </p:spPr>
-        <p:txBody>
-          <a:bodyPr wrap="square" lIns="76200" rIns="76200" tIns="50800" bIns="50800">
-            <a:spAutoFit/>
-          </a:bodyPr>
-          <a:lstStyle/>
-          <a:p>
-            <a:pPr algn="l"/>
-            <a:r>
-              <a:rPr sz="2800" b="1">
-                <a:solidFill>
-                  <a:srgbClr val="FFFFFF"/>
-                </a:solidFill>
-                <a:latin typeface="PingFang SC"/>
-              </a:rPr>
-              <a:t>一、先建立整体模型</a:t>
-            </a:r>
-          </a:p>
-        </p:txBody>
-      </p:sp>
-      <p:sp>
-        <p:nvSpPr>
-          <p:cNvPr id="3" name="TextBox 2"/>
-          <p:cNvSpPr txBox="1"/>
-          <p:nvPr/>
-        </p:nvSpPr>
-        <p:spPr>
-          <a:xfrm>
-            <a:off x="658368" y="1417320"/>
-            <a:ext cx="10241280" cy="822960"/>
-          </a:xfrm>
-          <a:prstGeom prst="rect">
-            <a:avLst/>
-          </a:prstGeom>
-          <a:noFill/>
-        </p:spPr>
-        <p:txBody>
-          <a:bodyPr wrap="square" lIns="76200" rIns="76200" tIns="50800" bIns="50800">
-            <a:spAutoFit/>
-          </a:bodyPr>
-          <a:lstStyle/>
-          <a:p>
-            <a:r>
-              <a:rPr sz="1600" b="0">
-                <a:solidFill>
-                  <a:srgbClr val="FFFFFF"/>
-                </a:solidFill>
-                <a:latin typeface="PingFang SC"/>
-              </a:rPr>
-              <a:t>先回答：这份仓库到底是什么，以及应该先从哪几层开始读。</a:t>
-            </a:r>
-          </a:p>
-        </p:txBody>
-      </p:sp>
-    </p:spTree>
-  </p:cSld>
-  <p:clrMapOvr>
-    <a:masterClrMapping/>
-  </p:clrMapOvr>
-</p:sld>
-</file>
-
-<file path=ppt/slides/slide30.xml><?xml version="1.0" encoding="utf-8"?>
-<p:sld xmlns:a="http://schemas.openxmlformats.org/drawingml/2006/main" xmlns:p="http://schemas.openxmlformats.org/presentationml/2006/main" xmlns:r="http://schemas.openxmlformats.org/officeDocument/2006/relationships">
-  <p:cSld>
-    <p:bg>
-      <p:bgPr>
-        <a:solidFill>
-          <a:srgbClr val="F8FAFC"/>
-        </a:solidFill>
-        <a:effectLst/>
-      </p:bgPr>
-    </p:bg>
-    <p:spTree>
-      <p:nvGrpSpPr>
-        <p:cNvPr id="1" name=""/>
-        <p:cNvGrpSpPr/>
-        <p:nvPr/>
-      </p:nvGrpSpPr>
-      <p:grpSpPr/>
-      <p:sp>
-        <p:nvSpPr>
-          <p:cNvPr id="2" name="TextBox 1"/>
-          <p:cNvSpPr txBox="1"/>
-          <p:nvPr/>
-        </p:nvSpPr>
-        <p:spPr>
-          <a:xfrm>
-            <a:off x="685800" y="1554480"/>
-            <a:ext cx="4480560" cy="411480"/>
-          </a:xfrm>
-          <a:prstGeom prst="rect">
-            <a:avLst/>
-          </a:prstGeom>
-          <a:noFill/>
-        </p:spPr>
-        <p:txBody>
-          <a:bodyPr wrap="none">
-            <a:spAutoFit/>
-          </a:bodyPr>
-          <a:lstStyle/>
-          <a:p>
-            <a:r>
-              <a:rPr sz="1700" b="1">
-                <a:solidFill>
-                  <a:srgbClr val="205295"/>
-                </a:solidFill>
-                <a:latin typeface="PingFang SC"/>
-              </a:rPr>
-              <a:t>从源码提炼的使用建议</a:t>
-            </a:r>
-          </a:p>
-        </p:txBody>
-      </p:sp>
-      <p:sp>
-        <p:nvSpPr>
-          <p:cNvPr id="3" name="TextBox 2"/>
-          <p:cNvSpPr txBox="1"/>
-          <p:nvPr/>
-        </p:nvSpPr>
-        <p:spPr>
-          <a:xfrm>
-            <a:off x="685800" y="1965960"/>
-            <a:ext cx="4389120" cy="3657600"/>
-          </a:xfrm>
-          <a:prstGeom prst="rect">
-            <a:avLst/>
-          </a:prstGeom>
-          <a:noFill/>
-        </p:spPr>
-        <p:txBody>
-          <a:bodyPr wrap="square" lIns="76200" rIns="76200" tIns="50800" bIns="50800">
-            <a:spAutoFit/>
-          </a:bodyPr>
-          <a:lstStyle/>
-          <a:p>
-            <a:pPr>
-              <a:spcAft>
-                <a:spcPts val="800"/>
-              </a:spcAft>
-            </a:pPr>
-            <a:r>
-              <a:rPr sz="2000" b="0">
-                <a:solidFill>
-                  <a:srgbClr val="1F2937"/>
-                </a:solidFill>
-                <a:latin typeface="PingFang SC"/>
-              </a:rPr>
-              <a:t>高质量任务描述最好包含：目标、范围、约束、验证</a:t>
-            </a:r>
-          </a:p>
-          <a:p>
-            <a:pPr>
-              <a:spcAft>
-                <a:spcPts val="800"/>
-              </a:spcAft>
-            </a:pPr>
-            <a:r>
-              <a:rPr sz="2000" b="0">
-                <a:solidFill>
-                  <a:srgbClr val="1F2937"/>
-                </a:solidFill>
-                <a:latin typeface="PingFang SC"/>
-              </a:rPr>
-              <a:t>先读相关代码再改</a:t>
-            </a:r>
-          </a:p>
-          <a:p>
-            <a:pPr>
-              <a:spcAft>
-                <a:spcPts val="800"/>
-              </a:spcAft>
-            </a:pPr>
-            <a:r>
-              <a:rPr sz="2000" b="0">
-                <a:solidFill>
-                  <a:srgbClr val="1F2937"/>
-                </a:solidFill>
-                <a:latin typeface="PingFang SC"/>
-              </a:rPr>
-              <a:t>优先复用现有实现</a:t>
-            </a:r>
-          </a:p>
-          <a:p>
-            <a:pPr>
-              <a:spcAft>
-                <a:spcPts val="800"/>
-              </a:spcAft>
-            </a:pPr>
-            <a:r>
-              <a:rPr sz="2000" b="0">
-                <a:solidFill>
-                  <a:srgbClr val="1F2937"/>
-                </a:solidFill>
-                <a:latin typeface="PingFang SC"/>
-              </a:rPr>
-              <a:t>做最小必要改动</a:t>
-            </a:r>
-          </a:p>
-          <a:p>
-            <a:pPr>
-              <a:spcAft>
-                <a:spcPts val="800"/>
-              </a:spcAft>
-            </a:pPr>
-            <a:r>
-              <a:rPr sz="2000" b="0">
-                <a:solidFill>
-                  <a:srgbClr val="1F2937"/>
-                </a:solidFill>
-                <a:latin typeface="PingFang SC"/>
-              </a:rPr>
-              <a:t>验证后如实汇报</a:t>
-            </a:r>
-          </a:p>
-        </p:txBody>
-      </p:sp>
-      <p:sp>
-        <p:nvSpPr>
-          <p:cNvPr id="4" name="TextBox 3"/>
-          <p:cNvSpPr txBox="1"/>
-          <p:nvPr/>
-        </p:nvSpPr>
-        <p:spPr>
-          <a:xfrm>
-            <a:off x="5897880" y="1554480"/>
-            <a:ext cx="4480560" cy="411480"/>
-          </a:xfrm>
-          <a:prstGeom prst="rect">
-            <a:avLst/>
-          </a:prstGeom>
-          <a:noFill/>
-        </p:spPr>
-        <p:txBody>
-          <a:bodyPr wrap="none">
-            <a:spAutoFit/>
-          </a:bodyPr>
-          <a:lstStyle/>
-          <a:p>
-            <a:r>
-              <a:rPr sz="1700" b="1">
-                <a:solidFill>
-                  <a:srgbClr val="205295"/>
-                </a:solidFill>
-                <a:latin typeface="PingFang SC"/>
-              </a:rPr>
-              <a:t>最值得先抓住的三条线</a:t>
-            </a:r>
-          </a:p>
-        </p:txBody>
-      </p:sp>
-      <p:sp>
-        <p:nvSpPr>
-          <p:cNvPr id="5" name="TextBox 4"/>
-          <p:cNvSpPr txBox="1"/>
-          <p:nvPr/>
-        </p:nvSpPr>
-        <p:spPr>
-          <a:xfrm>
-            <a:off x="5897880" y="1965960"/>
-            <a:ext cx="4389120" cy="3657600"/>
-          </a:xfrm>
-          <a:prstGeom prst="rect">
-            <a:avLst/>
-          </a:prstGeom>
-          <a:noFill/>
-        </p:spPr>
-        <p:txBody>
-          <a:bodyPr wrap="square" lIns="76200" rIns="76200" tIns="50800" bIns="50800">
-            <a:spAutoFit/>
-          </a:bodyPr>
-          <a:lstStyle/>
-          <a:p>
-            <a:pPr>
-              <a:spcAft>
-                <a:spcPts val="800"/>
-              </a:spcAft>
-            </a:pPr>
-            <a:r>
-              <a:rPr sz="2000" b="0">
-                <a:solidFill>
-                  <a:srgbClr val="1F2937"/>
-                </a:solidFill>
-                <a:latin typeface="PingFang SC"/>
-              </a:rPr>
-              <a:t>main.tsx -&gt; query.ts -&gt; tools</a:t>
-            </a:r>
-          </a:p>
-          <a:p>
-            <a:pPr>
-              <a:spcAft>
-                <a:spcPts val="800"/>
-              </a:spcAft>
-            </a:pPr>
-            <a:r>
-              <a:rPr sz="2000" b="0">
-                <a:solidFill>
-                  <a:srgbClr val="1F2937"/>
-                </a:solidFill>
-                <a:latin typeface="PingFang SC"/>
-              </a:rPr>
-              <a:t>settings -&gt; auth -&gt; api client</a:t>
-            </a:r>
-          </a:p>
-          <a:p>
-            <a:pPr>
-              <a:spcAft>
-                <a:spcPts val="800"/>
-              </a:spcAft>
-            </a:pPr>
-            <a:r>
-              <a:rPr sz="2000" b="0">
-                <a:solidFill>
-                  <a:srgbClr val="1F2937"/>
-                </a:solidFill>
-                <a:latin typeface="PingFang SC"/>
-              </a:rPr>
-              <a:t>policy / managed settings -&gt; 本地执行</a:t>
-            </a:r>
-          </a:p>
-          <a:p>
-            <a:pPr>
-              <a:spcAft>
-                <a:spcPts val="800"/>
-              </a:spcAft>
-            </a:pPr>
-            <a:r>
-              <a:rPr sz="2000" b="0">
-                <a:solidFill>
-                  <a:srgbClr val="1F2937"/>
-                </a:solidFill>
-                <a:latin typeface="PingFang SC"/>
-              </a:rPr>
-              <a:t>先抓主链路，再看扩展面</a:t>
-            </a:r>
-          </a:p>
-        </p:txBody>
-      </p:sp>
-      <p:sp>
-        <p:nvSpPr>
-          <p:cNvPr id="6" name="TextBox 5"/>
-          <p:cNvSpPr txBox="1"/>
-          <p:nvPr/>
-        </p:nvSpPr>
-        <p:spPr>
-          <a:xfrm>
-            <a:off x="594360" y="411480"/>
-            <a:ext cx="10607040" cy="777240"/>
-          </a:xfrm>
-          <a:prstGeom prst="rect">
-            <a:avLst/>
-          </a:prstGeom>
-          <a:noFill/>
-        </p:spPr>
-        <p:txBody>
-          <a:bodyPr wrap="square" lIns="76200" rIns="76200" tIns="50800" bIns="50800">
-            <a:spAutoFit/>
-          </a:bodyPr>
-          <a:lstStyle/>
-          <a:p>
-            <a:pPr algn="l"/>
-            <a:r>
-              <a:rPr sz="2600" b="1">
-                <a:solidFill>
-                  <a:srgbClr val="0B1F44"/>
-                </a:solidFill>
-                <a:latin typeface="PingFang SC"/>
-              </a:rPr>
-              <a:t>最后总结</a:t>
-            </a:r>
-          </a:p>
-        </p:txBody>
-      </p:sp>
-      <p:sp>
-        <p:nvSpPr>
-          <p:cNvPr id="7" name="Rectangle 6"/>
-          <p:cNvSpPr/>
-          <p:nvPr/>
-        </p:nvSpPr>
-        <p:spPr>
-          <a:xfrm>
-            <a:off x="621792" y="1143000"/>
-            <a:ext cx="2194560" cy="36576"/>
-          </a:xfrm>
-          <a:prstGeom prst="rect">
-            <a:avLst/>
-          </a:prstGeom>
-          <a:solidFill>
-            <a:srgbClr val="DBE4F0"/>
-          </a:solidFill>
-          <a:ln>
-            <a:noFill/>
-          </a:ln>
-        </p:spPr>
-        <p:style>
-          <a:lnRef idx="1">
-            <a:schemeClr val="accent1"/>
-          </a:lnRef>
-          <a:fillRef idx="3">
-            <a:schemeClr val="accent1"/>
-          </a:fillRef>
-          <a:effectRef idx="2">
-            <a:schemeClr val="accent1"/>
-          </a:effectRef>
-          <a:fontRef idx="minor">
-            <a:schemeClr val="lt1"/>
-          </a:fontRef>
-        </p:style>
-        <p:txBody>
-          <a:bodyPr rtlCol="0" anchor="ctr"/>
-          <a:lstStyle/>
-          <a:p>
-            <a:pPr algn="ctr"/>
-          </a:p>
-        </p:txBody>
-      </p:sp>
-    </p:spTree>
-  </p:cSld>
-  <p:clrMapOvr>
-    <a:masterClrMapping/>
-  </p:clrMapOvr>
-</p:sld>
-</file>
-
-<file path=ppt/slides/slide31.xml><?xml version="1.0" encoding="utf-8"?>
-<p:sld xmlns:a="http://schemas.openxmlformats.org/drawingml/2006/main" xmlns:p="http://schemas.openxmlformats.org/presentationml/2006/main" xmlns:r="http://schemas.openxmlformats.org/officeDocument/2006/relationships">
-  <p:cSld>
-    <p:bg>
-      <p:bgPr>
-        <a:solidFill>
-          <a:srgbClr val="101C3F"/>
-        </a:solidFill>
-        <a:effectLst/>
-      </p:bgPr>
-    </p:bg>
-    <p:spTree>
-      <p:nvGrpSpPr>
-        <p:cNvPr id="1" name=""/>
-        <p:cNvGrpSpPr/>
-        <p:nvPr/>
-      </p:nvGrpSpPr>
-      <p:grpSpPr/>
-      <p:sp>
-        <p:nvSpPr>
-          <p:cNvPr id="2" name="TextBox 1"/>
-          <p:cNvSpPr txBox="1"/>
-          <p:nvPr/>
-        </p:nvSpPr>
-        <p:spPr>
-          <a:xfrm>
-            <a:off x="594360" y="411480"/>
-            <a:ext cx="10607040" cy="777240"/>
-          </a:xfrm>
-          <a:prstGeom prst="rect">
-            <a:avLst/>
-          </a:prstGeom>
-          <a:noFill/>
-        </p:spPr>
-        <p:txBody>
-          <a:bodyPr wrap="square" lIns="76200" rIns="76200" tIns="50800" bIns="50800">
-            <a:spAutoFit/>
-          </a:bodyPr>
-          <a:lstStyle/>
-          <a:p>
-            <a:pPr algn="l"/>
-            <a:r>
-              <a:rPr sz="2800" b="1">
-                <a:solidFill>
-                  <a:srgbClr val="FFFFFF"/>
-                </a:solidFill>
-                <a:latin typeface="PingFang SC"/>
-              </a:rPr>
-              <a:t>谢谢</a:t>
-            </a:r>
-          </a:p>
-        </p:txBody>
-      </p:sp>
-      <p:sp>
-        <p:nvSpPr>
-          <p:cNvPr id="3" name="TextBox 2"/>
-          <p:cNvSpPr txBox="1"/>
-          <p:nvPr/>
-        </p:nvSpPr>
-        <p:spPr>
-          <a:xfrm>
-            <a:off x="658368" y="1417320"/>
-            <a:ext cx="10241280" cy="822960"/>
-          </a:xfrm>
-          <a:prstGeom prst="rect">
-            <a:avLst/>
-          </a:prstGeom>
-          <a:noFill/>
-        </p:spPr>
-        <p:txBody>
-          <a:bodyPr wrap="square" lIns="76200" rIns="76200" tIns="50800" bIns="50800">
-            <a:spAutoFit/>
-          </a:bodyPr>
-          <a:lstStyle/>
-          <a:p>
-            <a:r>
-              <a:rPr sz="1600" b="0">
-                <a:solidFill>
-                  <a:srgbClr val="FFFFFF"/>
-                </a:solidFill>
-                <a:latin typeface="PingFang SC"/>
-              </a:rPr>
-              <a:t>这份源码最值得看的，不只是功能，而是它已经为长时间工作的 runtime 付过哪些工程账。</a:t>
+                <a:latin typeface="Arial"/>
+              </a:rPr>
+              <a:t>阅读时不要只把它理解成“调用模型 API 的壳”</a:t>
             </a:r>
           </a:p>
         </p:txBody>
@@ -7515,8 +6703,8 @@
         </p:nvSpPr>
         <p:spPr>
           <a:xfrm>
-            <a:off x="594360" y="411480"/>
-            <a:ext cx="10607040" cy="777240"/>
+            <a:off x="594360" y="384048"/>
+            <a:ext cx="10789920" cy="685800"/>
           </a:xfrm>
           <a:prstGeom prst="rect">
             <a:avLst/>
@@ -7529,15 +6717,14 @@
           </a:bodyPr>
           <a:lstStyle/>
           <a:p>
-            <a:pPr algn="l"/>
             <a:r>
               <a:rPr sz="2600" b="1">
                 <a:solidFill>
                   <a:srgbClr val="0B1F44"/>
                 </a:solidFill>
-                <a:latin typeface="PingFang SC"/>
-              </a:rPr>
-              <a:t>这份仓库本质上是什么</a:t>
+                <a:latin typeface="Arial"/>
+              </a:rPr>
+              <a:t>架构总览</a:t>
             </a:r>
           </a:p>
         </p:txBody>
@@ -7550,8 +6737,8 @@
         </p:nvSpPr>
         <p:spPr>
           <a:xfrm>
-            <a:off x="621792" y="1143000"/>
-            <a:ext cx="2194560" cy="36576"/>
+            <a:off x="621792" y="1078992"/>
+            <a:ext cx="2011680" cy="27432"/>
           </a:xfrm>
           <a:prstGeom prst="rect">
             <a:avLst/>
@@ -7587,14 +6774,888 @@
       </p:sp>
       <p:sp>
         <p:nvSpPr>
-          <p:cNvPr id="4" name="TextBox 3"/>
+          <p:cNvPr id="4" name="Rounded Rectangle 3"/>
+          <p:cNvSpPr/>
+          <p:nvPr/>
+        </p:nvSpPr>
+        <p:spPr>
+          <a:xfrm>
+            <a:off x="731520" y="1554480"/>
+            <a:ext cx="1828800" cy="640080"/>
+          </a:xfrm>
+          <a:prstGeom prst="roundRect">
+            <a:avLst/>
+          </a:prstGeom>
+          <a:solidFill>
+            <a:srgbClr val="DDEAFB"/>
+          </a:solidFill>
+          <a:ln>
+            <a:solidFill>
+              <a:srgbClr val="205295"/>
+            </a:solidFill>
+          </a:ln>
+        </p:spPr>
+        <p:style>
+          <a:lnRef idx="1">
+            <a:schemeClr val="accent1"/>
+          </a:lnRef>
+          <a:fillRef idx="3">
+            <a:schemeClr val="accent1"/>
+          </a:fillRef>
+          <a:effectRef idx="2">
+            <a:schemeClr val="accent1"/>
+          </a:effectRef>
+          <a:fontRef idx="minor">
+            <a:schemeClr val="lt1"/>
+          </a:fontRef>
+        </p:style>
+        <p:txBody>
+          <a:bodyPr rtlCol="0" anchor="ctr" wrap="square" lIns="76200" rIns="76200" tIns="50800" bIns="50800"/>
+          <a:lstStyle/>
+          <a:p>
+            <a:pPr algn="ctr"/>
+            <a:r>
+              <a:rPr sz="1600" b="1">
+                <a:solidFill>
+                  <a:srgbClr val="0B1F44"/>
+                </a:solidFill>
+                <a:latin typeface="Arial"/>
+              </a:rPr>
+              <a:t>main.tsx</a:t>
+            </a:r>
+          </a:p>
+        </p:txBody>
+      </p:sp>
+      <p:sp>
+        <p:nvSpPr>
+          <p:cNvPr id="5" name="Rounded Rectangle 4"/>
+          <p:cNvSpPr/>
+          <p:nvPr/>
+        </p:nvSpPr>
+        <p:spPr>
+          <a:xfrm>
+            <a:off x="3017520" y="1554480"/>
+            <a:ext cx="1920240" cy="640080"/>
+          </a:xfrm>
+          <a:prstGeom prst="roundRect">
+            <a:avLst/>
+          </a:prstGeom>
+          <a:solidFill>
+            <a:srgbClr val="FFFFFF"/>
+          </a:solidFill>
+          <a:ln>
+            <a:solidFill>
+              <a:srgbClr val="205295"/>
+            </a:solidFill>
+          </a:ln>
+        </p:spPr>
+        <p:style>
+          <a:lnRef idx="1">
+            <a:schemeClr val="accent1"/>
+          </a:lnRef>
+          <a:fillRef idx="3">
+            <a:schemeClr val="accent1"/>
+          </a:fillRef>
+          <a:effectRef idx="2">
+            <a:schemeClr val="accent1"/>
+          </a:effectRef>
+          <a:fontRef idx="minor">
+            <a:schemeClr val="lt1"/>
+          </a:fontRef>
+        </p:style>
+        <p:txBody>
+          <a:bodyPr rtlCol="0" anchor="ctr" wrap="square" lIns="76200" rIns="76200" tIns="50800" bIns="50800"/>
+          <a:lstStyle/>
+          <a:p>
+            <a:pPr algn="ctr"/>
+            <a:r>
+              <a:rPr sz="1600" b="1">
+                <a:solidFill>
+                  <a:srgbClr val="0B1F44"/>
+                </a:solidFill>
+                <a:latin typeface="Arial"/>
+              </a:rPr>
+              <a:t>Settings / Auth / Policy</a:t>
+            </a:r>
+          </a:p>
+        </p:txBody>
+      </p:sp>
+      <p:sp>
+        <p:nvSpPr>
+          <p:cNvPr id="6" name="Rounded Rectangle 5"/>
+          <p:cNvSpPr/>
+          <p:nvPr/>
+        </p:nvSpPr>
+        <p:spPr>
+          <a:xfrm>
+            <a:off x="5394960" y="1554480"/>
+            <a:ext cx="1371600" cy="640080"/>
+          </a:xfrm>
+          <a:prstGeom prst="roundRect">
+            <a:avLst/>
+          </a:prstGeom>
+          <a:solidFill>
+            <a:srgbClr val="FFFFFF"/>
+          </a:solidFill>
+          <a:ln>
+            <a:solidFill>
+              <a:srgbClr val="205295"/>
+            </a:solidFill>
+          </a:ln>
+        </p:spPr>
+        <p:style>
+          <a:lnRef idx="1">
+            <a:schemeClr val="accent1"/>
+          </a:lnRef>
+          <a:fillRef idx="3">
+            <a:schemeClr val="accent1"/>
+          </a:fillRef>
+          <a:effectRef idx="2">
+            <a:schemeClr val="accent1"/>
+          </a:effectRef>
+          <a:fontRef idx="minor">
+            <a:schemeClr val="lt1"/>
+          </a:fontRef>
+        </p:style>
+        <p:txBody>
+          <a:bodyPr rtlCol="0" anchor="ctr" wrap="square" lIns="76200" rIns="76200" tIns="50800" bIns="50800"/>
+          <a:lstStyle/>
+          <a:p>
+            <a:pPr algn="ctr"/>
+            <a:r>
+              <a:rPr sz="1600" b="1">
+                <a:solidFill>
+                  <a:srgbClr val="0B1F44"/>
+                </a:solidFill>
+                <a:latin typeface="Arial"/>
+              </a:rPr>
+              <a:t>Commands</a:t>
+            </a:r>
+          </a:p>
+        </p:txBody>
+      </p:sp>
+      <p:sp>
+        <p:nvSpPr>
+          <p:cNvPr id="7" name="Rounded Rectangle 6"/>
+          <p:cNvSpPr/>
+          <p:nvPr/>
+        </p:nvSpPr>
+        <p:spPr>
+          <a:xfrm>
+            <a:off x="7132320" y="1554480"/>
+            <a:ext cx="1188720" cy="640080"/>
+          </a:xfrm>
+          <a:prstGeom prst="roundRect">
+            <a:avLst/>
+          </a:prstGeom>
+          <a:solidFill>
+            <a:srgbClr val="FFFFFF"/>
+          </a:solidFill>
+          <a:ln>
+            <a:solidFill>
+              <a:srgbClr val="205295"/>
+            </a:solidFill>
+          </a:ln>
+        </p:spPr>
+        <p:style>
+          <a:lnRef idx="1">
+            <a:schemeClr val="accent1"/>
+          </a:lnRef>
+          <a:fillRef idx="3">
+            <a:schemeClr val="accent1"/>
+          </a:fillRef>
+          <a:effectRef idx="2">
+            <a:schemeClr val="accent1"/>
+          </a:effectRef>
+          <a:fontRef idx="minor">
+            <a:schemeClr val="lt1"/>
+          </a:fontRef>
+        </p:style>
+        <p:txBody>
+          <a:bodyPr rtlCol="0" anchor="ctr" wrap="square" lIns="76200" rIns="76200" tIns="50800" bIns="50800"/>
+          <a:lstStyle/>
+          <a:p>
+            <a:pPr algn="ctr"/>
+            <a:r>
+              <a:rPr sz="1600" b="1">
+                <a:solidFill>
+                  <a:srgbClr val="0B1F44"/>
+                </a:solidFill>
+                <a:latin typeface="Arial"/>
+              </a:rPr>
+              <a:t>Tools</a:t>
+            </a:r>
+          </a:p>
+        </p:txBody>
+      </p:sp>
+      <p:sp>
+        <p:nvSpPr>
+          <p:cNvPr id="8" name="Rounded Rectangle 7"/>
+          <p:cNvSpPr/>
+          <p:nvPr/>
+        </p:nvSpPr>
+        <p:spPr>
+          <a:xfrm>
+            <a:off x="8686800" y="1554480"/>
+            <a:ext cx="1828800" cy="640080"/>
+          </a:xfrm>
+          <a:prstGeom prst="roundRect">
+            <a:avLst/>
+          </a:prstGeom>
+          <a:solidFill>
+            <a:srgbClr val="FFFFFF"/>
+          </a:solidFill>
+          <a:ln>
+            <a:solidFill>
+              <a:srgbClr val="205295"/>
+            </a:solidFill>
+          </a:ln>
+        </p:spPr>
+        <p:style>
+          <a:lnRef idx="1">
+            <a:schemeClr val="accent1"/>
+          </a:lnRef>
+          <a:fillRef idx="3">
+            <a:schemeClr val="accent1"/>
+          </a:fillRef>
+          <a:effectRef idx="2">
+            <a:schemeClr val="accent1"/>
+          </a:effectRef>
+          <a:fontRef idx="minor">
+            <a:schemeClr val="lt1"/>
+          </a:fontRef>
+        </p:style>
+        <p:txBody>
+          <a:bodyPr rtlCol="0" anchor="ctr" wrap="square" lIns="76200" rIns="76200" tIns="50800" bIns="50800"/>
+          <a:lstStyle/>
+          <a:p>
+            <a:pPr algn="ctr"/>
+            <a:r>
+              <a:rPr sz="1600" b="1">
+                <a:solidFill>
+                  <a:srgbClr val="0B1F44"/>
+                </a:solidFill>
+                <a:latin typeface="Arial"/>
+              </a:rPr>
+              <a:t>REPL / QueryEngine</a:t>
+            </a:r>
+          </a:p>
+        </p:txBody>
+      </p:sp>
+      <p:sp>
+        <p:nvSpPr>
+          <p:cNvPr id="9" name="Rounded Rectangle 8"/>
+          <p:cNvSpPr/>
+          <p:nvPr/>
+        </p:nvSpPr>
+        <p:spPr>
+          <a:xfrm>
+            <a:off x="1828800" y="3108960"/>
+            <a:ext cx="1828800" cy="640080"/>
+          </a:xfrm>
+          <a:prstGeom prst="roundRect">
+            <a:avLst/>
+          </a:prstGeom>
+          <a:solidFill>
+            <a:srgbClr val="DDEAFB"/>
+          </a:solidFill>
+          <a:ln>
+            <a:solidFill>
+              <a:srgbClr val="205295"/>
+            </a:solidFill>
+          </a:ln>
+        </p:spPr>
+        <p:style>
+          <a:lnRef idx="1">
+            <a:schemeClr val="accent1"/>
+          </a:lnRef>
+          <a:fillRef idx="3">
+            <a:schemeClr val="accent1"/>
+          </a:fillRef>
+          <a:effectRef idx="2">
+            <a:schemeClr val="accent1"/>
+          </a:effectRef>
+          <a:fontRef idx="minor">
+            <a:schemeClr val="lt1"/>
+          </a:fontRef>
+        </p:style>
+        <p:txBody>
+          <a:bodyPr rtlCol="0" anchor="ctr" wrap="square" lIns="76200" rIns="76200" tIns="50800" bIns="50800"/>
+          <a:lstStyle/>
+          <a:p>
+            <a:pPr algn="ctr"/>
+            <a:r>
+              <a:rPr sz="1600" b="1">
+                <a:solidFill>
+                  <a:srgbClr val="0B1F44"/>
+                </a:solidFill>
+                <a:latin typeface="Arial"/>
+              </a:rPr>
+              <a:t>query.ts</a:t>
+            </a:r>
+          </a:p>
+        </p:txBody>
+      </p:sp>
+      <p:sp>
+        <p:nvSpPr>
+          <p:cNvPr id="10" name="Rounded Rectangle 9"/>
+          <p:cNvSpPr/>
+          <p:nvPr/>
+        </p:nvSpPr>
+        <p:spPr>
+          <a:xfrm>
+            <a:off x="4206240" y="3108960"/>
+            <a:ext cx="2011680" cy="640080"/>
+          </a:xfrm>
+          <a:prstGeom prst="roundRect">
+            <a:avLst/>
+          </a:prstGeom>
+          <a:solidFill>
+            <a:srgbClr val="FFFFFF"/>
+          </a:solidFill>
+          <a:ln>
+            <a:solidFill>
+              <a:srgbClr val="205295"/>
+            </a:solidFill>
+          </a:ln>
+        </p:spPr>
+        <p:style>
+          <a:lnRef idx="1">
+            <a:schemeClr val="accent1"/>
+          </a:lnRef>
+          <a:fillRef idx="3">
+            <a:schemeClr val="accent1"/>
+          </a:fillRef>
+          <a:effectRef idx="2">
+            <a:schemeClr val="accent1"/>
+          </a:effectRef>
+          <a:fontRef idx="minor">
+            <a:schemeClr val="lt1"/>
+          </a:fontRef>
+        </p:style>
+        <p:txBody>
+          <a:bodyPr rtlCol="0" anchor="ctr" wrap="square" lIns="76200" rIns="76200" tIns="50800" bIns="50800"/>
+          <a:lstStyle/>
+          <a:p>
+            <a:pPr algn="ctr"/>
+            <a:r>
+              <a:rPr sz="1600" b="1">
+                <a:solidFill>
+                  <a:srgbClr val="0B1F44"/>
+                </a:solidFill>
+                <a:latin typeface="Arial"/>
+              </a:rPr>
+              <a:t>API Layer</a:t>
+            </a:r>
+          </a:p>
+        </p:txBody>
+      </p:sp>
+      <p:sp>
+        <p:nvSpPr>
+          <p:cNvPr id="11" name="Rounded Rectangle 10"/>
+          <p:cNvSpPr/>
+          <p:nvPr/>
+        </p:nvSpPr>
+        <p:spPr>
+          <a:xfrm>
+            <a:off x="6766560" y="3108960"/>
+            <a:ext cx="2103120" cy="640080"/>
+          </a:xfrm>
+          <a:prstGeom prst="roundRect">
+            <a:avLst/>
+          </a:prstGeom>
+          <a:solidFill>
+            <a:srgbClr val="FFFFFF"/>
+          </a:solidFill>
+          <a:ln>
+            <a:solidFill>
+              <a:srgbClr val="205295"/>
+            </a:solidFill>
+          </a:ln>
+        </p:spPr>
+        <p:style>
+          <a:lnRef idx="1">
+            <a:schemeClr val="accent1"/>
+          </a:lnRef>
+          <a:fillRef idx="3">
+            <a:schemeClr val="accent1"/>
+          </a:fillRef>
+          <a:effectRef idx="2">
+            <a:schemeClr val="accent1"/>
+          </a:effectRef>
+          <a:fontRef idx="minor">
+            <a:schemeClr val="lt1"/>
+          </a:fontRef>
+        </p:style>
+        <p:txBody>
+          <a:bodyPr rtlCol="0" anchor="ctr" wrap="square" lIns="76200" rIns="76200" tIns="50800" bIns="50800"/>
+          <a:lstStyle/>
+          <a:p>
+            <a:pPr algn="ctr"/>
+            <a:r>
+              <a:rPr sz="1600" b="1">
+                <a:solidFill>
+                  <a:srgbClr val="0B1F44"/>
+                </a:solidFill>
+                <a:latin typeface="Arial"/>
+              </a:rPr>
+              <a:t>Tool Execution</a:t>
+            </a:r>
+          </a:p>
+        </p:txBody>
+      </p:sp>
+      <p:sp>
+        <p:nvSpPr>
+          <p:cNvPr id="12" name="Rounded Rectangle 11"/>
+          <p:cNvSpPr/>
+          <p:nvPr/>
+        </p:nvSpPr>
+        <p:spPr>
+          <a:xfrm>
+            <a:off x="2743200" y="4663440"/>
+            <a:ext cx="1828800" cy="640080"/>
+          </a:xfrm>
+          <a:prstGeom prst="roundRect">
+            <a:avLst/>
+          </a:prstGeom>
+          <a:solidFill>
+            <a:srgbClr val="FFFFFF"/>
+          </a:solidFill>
+          <a:ln>
+            <a:solidFill>
+              <a:srgbClr val="205295"/>
+            </a:solidFill>
+          </a:ln>
+        </p:spPr>
+        <p:style>
+          <a:lnRef idx="1">
+            <a:schemeClr val="accent1"/>
+          </a:lnRef>
+          <a:fillRef idx="3">
+            <a:schemeClr val="accent1"/>
+          </a:fillRef>
+          <a:effectRef idx="2">
+            <a:schemeClr val="accent1"/>
+          </a:effectRef>
+          <a:fontRef idx="minor">
+            <a:schemeClr val="lt1"/>
+          </a:fontRef>
+        </p:style>
+        <p:txBody>
+          <a:bodyPr rtlCol="0" anchor="ctr" wrap="square" lIns="76200" rIns="76200" tIns="50800" bIns="50800"/>
+          <a:lstStyle/>
+          <a:p>
+            <a:pPr algn="ctr"/>
+            <a:r>
+              <a:rPr sz="1600" b="1">
+                <a:solidFill>
+                  <a:srgbClr val="0B1F44"/>
+                </a:solidFill>
+                <a:latin typeface="Arial"/>
+              </a:rPr>
+              <a:t>MCP</a:t>
+            </a:r>
+          </a:p>
+        </p:txBody>
+      </p:sp>
+      <p:sp>
+        <p:nvSpPr>
+          <p:cNvPr id="13" name="Rounded Rectangle 12"/>
+          <p:cNvSpPr/>
+          <p:nvPr/>
+        </p:nvSpPr>
+        <p:spPr>
+          <a:xfrm>
+            <a:off x="5029200" y="4663440"/>
+            <a:ext cx="1828800" cy="640080"/>
+          </a:xfrm>
+          <a:prstGeom prst="roundRect">
+            <a:avLst/>
+          </a:prstGeom>
+          <a:solidFill>
+            <a:srgbClr val="FFFFFF"/>
+          </a:solidFill>
+          <a:ln>
+            <a:solidFill>
+              <a:srgbClr val="205295"/>
+            </a:solidFill>
+          </a:ln>
+        </p:spPr>
+        <p:style>
+          <a:lnRef idx="1">
+            <a:schemeClr val="accent1"/>
+          </a:lnRef>
+          <a:fillRef idx="3">
+            <a:schemeClr val="accent1"/>
+          </a:fillRef>
+          <a:effectRef idx="2">
+            <a:schemeClr val="accent1"/>
+          </a:effectRef>
+          <a:fontRef idx="minor">
+            <a:schemeClr val="lt1"/>
+          </a:fontRef>
+        </p:style>
+        <p:txBody>
+          <a:bodyPr rtlCol="0" anchor="ctr" wrap="square" lIns="76200" rIns="76200" tIns="50800" bIns="50800"/>
+          <a:lstStyle/>
+          <a:p>
+            <a:pPr algn="ctr"/>
+            <a:r>
+              <a:rPr sz="1600" b="1">
+                <a:solidFill>
+                  <a:srgbClr val="0B1F44"/>
+                </a:solidFill>
+                <a:latin typeface="Arial"/>
+              </a:rPr>
+              <a:t>Plugins</a:t>
+            </a:r>
+          </a:p>
+        </p:txBody>
+      </p:sp>
+      <p:sp>
+        <p:nvSpPr>
+          <p:cNvPr id="14" name="Rounded Rectangle 13"/>
+          <p:cNvSpPr/>
+          <p:nvPr/>
+        </p:nvSpPr>
+        <p:spPr>
+          <a:xfrm>
+            <a:off x="7315200" y="4663440"/>
+            <a:ext cx="1828800" cy="640080"/>
+          </a:xfrm>
+          <a:prstGeom prst="roundRect">
+            <a:avLst/>
+          </a:prstGeom>
+          <a:solidFill>
+            <a:srgbClr val="FFFFFF"/>
+          </a:solidFill>
+          <a:ln>
+            <a:solidFill>
+              <a:srgbClr val="205295"/>
+            </a:solidFill>
+          </a:ln>
+        </p:spPr>
+        <p:style>
+          <a:lnRef idx="1">
+            <a:schemeClr val="accent1"/>
+          </a:lnRef>
+          <a:fillRef idx="3">
+            <a:schemeClr val="accent1"/>
+          </a:fillRef>
+          <a:effectRef idx="2">
+            <a:schemeClr val="accent1"/>
+          </a:effectRef>
+          <a:fontRef idx="minor">
+            <a:schemeClr val="lt1"/>
+          </a:fontRef>
+        </p:style>
+        <p:txBody>
+          <a:bodyPr rtlCol="0" anchor="ctr" wrap="square" lIns="76200" rIns="76200" tIns="50800" bIns="50800"/>
+          <a:lstStyle/>
+          <a:p>
+            <a:pPr algn="ctr"/>
+            <a:r>
+              <a:rPr sz="1600" b="1">
+                <a:solidFill>
+                  <a:srgbClr val="0B1F44"/>
+                </a:solidFill>
+                <a:latin typeface="Arial"/>
+              </a:rPr>
+              <a:t>Skills</a:t>
+            </a:r>
+          </a:p>
+        </p:txBody>
+      </p:sp>
+      <p:cxnSp>
+        <p:nvCxnSpPr>
+          <p:cNvPr id="15" name="Connector 14"/>
+          <p:cNvCxnSpPr/>
+          <p:nvPr/>
+        </p:nvCxnSpPr>
+        <p:spPr>
+          <a:xfrm>
+            <a:off x="1645920" y="2194560"/>
+            <a:ext cx="1097280" cy="914400"/>
+          </a:xfrm>
+          <a:prstGeom prst="line">
+            <a:avLst/>
+          </a:prstGeom>
+          <a:ln w="25400">
+            <a:solidFill>
+              <a:srgbClr val="205295"/>
+            </a:solidFill>
+          </a:ln>
+        </p:spPr>
+        <p:style>
+          <a:lnRef idx="2">
+            <a:schemeClr val="accent1"/>
+          </a:lnRef>
+          <a:fillRef idx="0">
+            <a:schemeClr val="accent1"/>
+          </a:fillRef>
+          <a:effectRef idx="1">
+            <a:schemeClr val="accent1"/>
+          </a:effectRef>
+          <a:fontRef idx="minor">
+            <a:schemeClr val="tx1"/>
+          </a:fontRef>
+        </p:style>
+      </p:cxnSp>
+      <p:cxnSp>
+        <p:nvCxnSpPr>
+          <p:cNvPr id="16" name="Connector 15"/>
+          <p:cNvCxnSpPr/>
+          <p:nvPr/>
+        </p:nvCxnSpPr>
+        <p:spPr>
+          <a:xfrm flipH="1">
+            <a:off x="8229600" y="2194560"/>
+            <a:ext cx="1371600" cy="914400"/>
+          </a:xfrm>
+          <a:prstGeom prst="line">
+            <a:avLst/>
+          </a:prstGeom>
+          <a:ln w="25400">
+            <a:solidFill>
+              <a:srgbClr val="205295"/>
+            </a:solidFill>
+          </a:ln>
+        </p:spPr>
+        <p:style>
+          <a:lnRef idx="2">
+            <a:schemeClr val="accent1"/>
+          </a:lnRef>
+          <a:fillRef idx="0">
+            <a:schemeClr val="accent1"/>
+          </a:fillRef>
+          <a:effectRef idx="1">
+            <a:schemeClr val="accent1"/>
+          </a:effectRef>
+          <a:fontRef idx="minor">
+            <a:schemeClr val="tx1"/>
+          </a:fontRef>
+        </p:style>
+      </p:cxnSp>
+      <p:cxnSp>
+        <p:nvCxnSpPr>
+          <p:cNvPr id="17" name="Connector 16"/>
+          <p:cNvCxnSpPr/>
+          <p:nvPr/>
+        </p:nvCxnSpPr>
+        <p:spPr>
+          <a:xfrm>
+            <a:off x="3657600" y="3429000"/>
+            <a:ext cx="548640" cy="0"/>
+          </a:xfrm>
+          <a:prstGeom prst="line">
+            <a:avLst/>
+          </a:prstGeom>
+          <a:ln w="25400">
+            <a:solidFill>
+              <a:srgbClr val="205295"/>
+            </a:solidFill>
+          </a:ln>
+        </p:spPr>
+        <p:style>
+          <a:lnRef idx="2">
+            <a:schemeClr val="accent1"/>
+          </a:lnRef>
+          <a:fillRef idx="0">
+            <a:schemeClr val="accent1"/>
+          </a:fillRef>
+          <a:effectRef idx="1">
+            <a:schemeClr val="accent1"/>
+          </a:effectRef>
+          <a:fontRef idx="minor">
+            <a:schemeClr val="tx1"/>
+          </a:fontRef>
+        </p:style>
+      </p:cxnSp>
+      <p:cxnSp>
+        <p:nvCxnSpPr>
+          <p:cNvPr id="18" name="Connector 17"/>
+          <p:cNvCxnSpPr/>
+          <p:nvPr/>
+        </p:nvCxnSpPr>
+        <p:spPr>
+          <a:xfrm>
+            <a:off x="6217920" y="3429000"/>
+            <a:ext cx="548640" cy="0"/>
+          </a:xfrm>
+          <a:prstGeom prst="line">
+            <a:avLst/>
+          </a:prstGeom>
+          <a:ln w="25400">
+            <a:solidFill>
+              <a:srgbClr val="205295"/>
+            </a:solidFill>
+          </a:ln>
+        </p:spPr>
+        <p:style>
+          <a:lnRef idx="2">
+            <a:schemeClr val="accent1"/>
+          </a:lnRef>
+          <a:fillRef idx="0">
+            <a:schemeClr val="accent1"/>
+          </a:fillRef>
+          <a:effectRef idx="1">
+            <a:schemeClr val="accent1"/>
+          </a:effectRef>
+          <a:fontRef idx="minor">
+            <a:schemeClr val="tx1"/>
+          </a:fontRef>
+        </p:style>
+      </p:cxnSp>
+      <p:cxnSp>
+        <p:nvCxnSpPr>
+          <p:cNvPr id="19" name="Connector 18"/>
+          <p:cNvCxnSpPr/>
+          <p:nvPr/>
+        </p:nvCxnSpPr>
+        <p:spPr>
+          <a:xfrm>
+            <a:off x="7680960" y="2194560"/>
+            <a:ext cx="0" cy="914400"/>
+          </a:xfrm>
+          <a:prstGeom prst="line">
+            <a:avLst/>
+          </a:prstGeom>
+          <a:ln w="25400">
+            <a:solidFill>
+              <a:srgbClr val="205295"/>
+            </a:solidFill>
+          </a:ln>
+        </p:spPr>
+        <p:style>
+          <a:lnRef idx="2">
+            <a:schemeClr val="accent1"/>
+          </a:lnRef>
+          <a:fillRef idx="0">
+            <a:schemeClr val="accent1"/>
+          </a:fillRef>
+          <a:effectRef idx="1">
+            <a:schemeClr val="accent1"/>
+          </a:effectRef>
+          <a:fontRef idx="minor">
+            <a:schemeClr val="tx1"/>
+          </a:fontRef>
+        </p:style>
+      </p:cxnSp>
+      <p:cxnSp>
+        <p:nvCxnSpPr>
+          <p:cNvPr id="20" name="Connector 19"/>
+          <p:cNvCxnSpPr/>
+          <p:nvPr/>
+        </p:nvCxnSpPr>
+        <p:spPr>
+          <a:xfrm>
+            <a:off x="3657600" y="3749039"/>
+            <a:ext cx="0" cy="914401"/>
+          </a:xfrm>
+          <a:prstGeom prst="line">
+            <a:avLst/>
+          </a:prstGeom>
+          <a:ln w="25400">
+            <a:solidFill>
+              <a:srgbClr val="205295"/>
+            </a:solidFill>
+          </a:ln>
+        </p:spPr>
+        <p:style>
+          <a:lnRef idx="2">
+            <a:schemeClr val="accent1"/>
+          </a:lnRef>
+          <a:fillRef idx="0">
+            <a:schemeClr val="accent1"/>
+          </a:fillRef>
+          <a:effectRef idx="1">
+            <a:schemeClr val="accent1"/>
+          </a:effectRef>
+          <a:fontRef idx="minor">
+            <a:schemeClr val="tx1"/>
+          </a:fontRef>
+        </p:style>
+      </p:cxnSp>
+      <p:cxnSp>
+        <p:nvCxnSpPr>
+          <p:cNvPr id="21" name="Connector 20"/>
+          <p:cNvCxnSpPr/>
+          <p:nvPr/>
+        </p:nvCxnSpPr>
+        <p:spPr>
+          <a:xfrm>
+            <a:off x="5943600" y="3749039"/>
+            <a:ext cx="0" cy="914401"/>
+          </a:xfrm>
+          <a:prstGeom prst="line">
+            <a:avLst/>
+          </a:prstGeom>
+          <a:ln w="25400">
+            <a:solidFill>
+              <a:srgbClr val="205295"/>
+            </a:solidFill>
+          </a:ln>
+        </p:spPr>
+        <p:style>
+          <a:lnRef idx="2">
+            <a:schemeClr val="accent1"/>
+          </a:lnRef>
+          <a:fillRef idx="0">
+            <a:schemeClr val="accent1"/>
+          </a:fillRef>
+          <a:effectRef idx="1">
+            <a:schemeClr val="accent1"/>
+          </a:effectRef>
+          <a:fontRef idx="minor">
+            <a:schemeClr val="tx1"/>
+          </a:fontRef>
+        </p:style>
+      </p:cxnSp>
+      <p:cxnSp>
+        <p:nvCxnSpPr>
+          <p:cNvPr id="22" name="Connector 21"/>
+          <p:cNvCxnSpPr/>
+          <p:nvPr/>
+        </p:nvCxnSpPr>
+        <p:spPr>
+          <a:xfrm>
+            <a:off x="8229600" y="3749039"/>
+            <a:ext cx="0" cy="914401"/>
+          </a:xfrm>
+          <a:prstGeom prst="line">
+            <a:avLst/>
+          </a:prstGeom>
+          <a:ln w="25400">
+            <a:solidFill>
+              <a:srgbClr val="205295"/>
+            </a:solidFill>
+          </a:ln>
+        </p:spPr>
+        <p:style>
+          <a:lnRef idx="2">
+            <a:schemeClr val="accent1"/>
+          </a:lnRef>
+          <a:fillRef idx="0">
+            <a:schemeClr val="accent1"/>
+          </a:fillRef>
+          <a:effectRef idx="1">
+            <a:schemeClr val="accent1"/>
+          </a:effectRef>
+          <a:fontRef idx="minor">
+            <a:schemeClr val="tx1"/>
+          </a:fontRef>
+        </p:style>
+      </p:cxnSp>
+      <p:sp>
+        <p:nvSpPr>
+          <p:cNvPr id="23" name="TextBox 22"/>
           <p:cNvSpPr txBox="1"/>
           <p:nvPr/>
         </p:nvSpPr>
         <p:spPr>
           <a:xfrm>
-            <a:off x="822960" y="1554480"/>
-            <a:ext cx="10058400" cy="4389120"/>
+            <a:off x="841248" y="5532120"/>
+            <a:ext cx="10058400" cy="502920"/>
           </a:xfrm>
           <a:prstGeom prst="rect">
             <a:avLst/>
@@ -7607,67 +7668,14 @@
           </a:bodyPr>
           <a:lstStyle/>
           <a:p>
-            <a:pPr>
-              <a:spcAft>
-                <a:spcPts val="800"/>
-              </a:spcAft>
-            </a:pPr>
-            <a:r>
-              <a:rPr sz="2000" b="0">
-                <a:solidFill>
-                  <a:srgbClr val="1F2937"/>
-                </a:solidFill>
-                <a:latin typeface="PingFang SC"/>
-              </a:rPr>
-              <a:t>不是简单聊天 CLI，也不是薄薄的 SDK demo</a:t>
-            </a:r>
-          </a:p>
-          <a:p>
-            <a:pPr>
-              <a:spcAft>
-                <a:spcPts val="800"/>
-              </a:spcAft>
-            </a:pPr>
-            <a:r>
-              <a:rPr sz="2000" b="0">
-                <a:solidFill>
-                  <a:srgbClr val="1F2937"/>
-                </a:solidFill>
-                <a:latin typeface="PingFang SC"/>
-              </a:rPr>
-              <a:t>更接近一个完整的本地 agent runtime</a:t>
-            </a:r>
-          </a:p>
-          <a:p>
-            <a:pPr>
-              <a:spcAft>
-                <a:spcPts val="800"/>
-              </a:spcAft>
-            </a:pPr>
-            <a:r>
-              <a:rPr sz="2000" b="0">
-                <a:solidFill>
-                  <a:srgbClr val="1F2937"/>
-                </a:solidFill>
-                <a:latin typeface="PingFang SC"/>
-              </a:rPr>
-              <a:t>核心包括：CLI/TUI、会话状态、turn loop、认证/API、策略控制、扩展系统</a:t>
-            </a:r>
-          </a:p>
-          <a:p>
-            <a:pPr>
-              <a:spcAft>
-                <a:spcPts val="800"/>
-              </a:spcAft>
-            </a:pPr>
-            <a:r>
-              <a:rPr sz="2000" b="0">
-                <a:solidFill>
-                  <a:srgbClr val="1F2937"/>
-                </a:solidFill>
-                <a:latin typeface="PingFang SC"/>
-              </a:rPr>
-              <a:t>阅读时不要只把它理解成“调用模型 API 的壳”</a:t>
+            <a:r>
+              <a:rPr sz="1400" b="0">
+                <a:solidFill>
+                  <a:srgbClr val="475569"/>
+                </a:solidFill>
+                <a:latin typeface="Arial"/>
+              </a:rPr>
+              <a:t>结论：main.tsx 负责装配，query.ts 负责推进，其余模块提供能力、状态和约束。</a:t>
             </a:r>
           </a:p>
         </p:txBody>
@@ -7706,8 +7714,8 @@
         </p:nvSpPr>
         <p:spPr>
           <a:xfrm>
-            <a:off x="594360" y="411480"/>
-            <a:ext cx="10607040" cy="777240"/>
+            <a:off x="594360" y="384048"/>
+            <a:ext cx="10789920" cy="685800"/>
           </a:xfrm>
           <a:prstGeom prst="rect">
             <a:avLst/>
@@ -7720,15 +7728,14 @@
           </a:bodyPr>
           <a:lstStyle/>
           <a:p>
-            <a:pPr algn="l"/>
             <a:r>
               <a:rPr sz="2600" b="1">
                 <a:solidFill>
                   <a:srgbClr val="0B1F44"/>
                 </a:solidFill>
-                <a:latin typeface="PingFang SC"/>
-              </a:rPr>
-              <a:t>最值得先记住的入口文件</a:t>
+                <a:latin typeface="Arial"/>
+              </a:rPr>
+              <a:t>主执行链路</a:t>
             </a:r>
           </a:p>
         </p:txBody>
@@ -7741,8 +7748,8 @@
         </p:nvSpPr>
         <p:spPr>
           <a:xfrm>
-            <a:off x="621792" y="1143000"/>
-            <a:ext cx="2194560" cy="36576"/>
+            <a:off x="621792" y="1078992"/>
+            <a:ext cx="2011680" cy="27432"/>
           </a:xfrm>
           <a:prstGeom prst="rect">
             <a:avLst/>
@@ -7778,14 +7785,513 @@
       </p:sp>
       <p:sp>
         <p:nvSpPr>
-          <p:cNvPr id="4" name="TextBox 3"/>
+          <p:cNvPr id="4" name="Rounded Rectangle 3"/>
+          <p:cNvSpPr/>
+          <p:nvPr/>
+        </p:nvSpPr>
+        <p:spPr>
+          <a:xfrm>
+            <a:off x="640080" y="2743200"/>
+            <a:ext cx="1280160" cy="731520"/>
+          </a:xfrm>
+          <a:prstGeom prst="roundRect">
+            <a:avLst/>
+          </a:prstGeom>
+          <a:solidFill>
+            <a:srgbClr val="FFFFFF"/>
+          </a:solidFill>
+          <a:ln>
+            <a:solidFill>
+              <a:srgbClr val="205295"/>
+            </a:solidFill>
+          </a:ln>
+        </p:spPr>
+        <p:style>
+          <a:lnRef idx="1">
+            <a:schemeClr val="accent1"/>
+          </a:lnRef>
+          <a:fillRef idx="3">
+            <a:schemeClr val="accent1"/>
+          </a:fillRef>
+          <a:effectRef idx="2">
+            <a:schemeClr val="accent1"/>
+          </a:effectRef>
+          <a:fontRef idx="minor">
+            <a:schemeClr val="lt1"/>
+          </a:fontRef>
+        </p:style>
+        <p:txBody>
+          <a:bodyPr rtlCol="0" anchor="ctr" wrap="square" lIns="76200" rIns="76200" tIns="50800" bIns="50800"/>
+          <a:lstStyle/>
+          <a:p>
+            <a:pPr algn="ctr"/>
+            <a:r>
+              <a:rPr sz="1600" b="1">
+                <a:solidFill>
+                  <a:srgbClr val="0B1F44"/>
+                </a:solidFill>
+                <a:latin typeface="Arial"/>
+              </a:rPr>
+              <a:t>用户输入</a:t>
+            </a:r>
+          </a:p>
+        </p:txBody>
+      </p:sp>
+      <p:sp>
+        <p:nvSpPr>
+          <p:cNvPr id="5" name="Rounded Rectangle 4"/>
+          <p:cNvSpPr/>
+          <p:nvPr/>
+        </p:nvSpPr>
+        <p:spPr>
+          <a:xfrm>
+            <a:off x="2286000" y="2743200"/>
+            <a:ext cx="1371600" cy="731520"/>
+          </a:xfrm>
+          <a:prstGeom prst="roundRect">
+            <a:avLst/>
+          </a:prstGeom>
+          <a:solidFill>
+            <a:srgbClr val="DDEAFB"/>
+          </a:solidFill>
+          <a:ln>
+            <a:solidFill>
+              <a:srgbClr val="205295"/>
+            </a:solidFill>
+          </a:ln>
+        </p:spPr>
+        <p:style>
+          <a:lnRef idx="1">
+            <a:schemeClr val="accent1"/>
+          </a:lnRef>
+          <a:fillRef idx="3">
+            <a:schemeClr val="accent1"/>
+          </a:fillRef>
+          <a:effectRef idx="2">
+            <a:schemeClr val="accent1"/>
+          </a:effectRef>
+          <a:fontRef idx="minor">
+            <a:schemeClr val="lt1"/>
+          </a:fontRef>
+        </p:style>
+        <p:txBody>
+          <a:bodyPr rtlCol="0" anchor="ctr" wrap="square" lIns="76200" rIns="76200" tIns="50800" bIns="50800"/>
+          <a:lstStyle/>
+          <a:p>
+            <a:pPr algn="ctr"/>
+            <a:r>
+              <a:rPr sz="1600" b="1">
+                <a:solidFill>
+                  <a:srgbClr val="0B1F44"/>
+                </a:solidFill>
+                <a:latin typeface="Arial"/>
+              </a:rPr>
+              <a:t>main.tsx</a:t>
+            </a:r>
+          </a:p>
+        </p:txBody>
+      </p:sp>
+      <p:sp>
+        <p:nvSpPr>
+          <p:cNvPr id="6" name="Rounded Rectangle 5"/>
+          <p:cNvSpPr/>
+          <p:nvPr/>
+        </p:nvSpPr>
+        <p:spPr>
+          <a:xfrm>
+            <a:off x="4114800" y="2743200"/>
+            <a:ext cx="1463040" cy="731520"/>
+          </a:xfrm>
+          <a:prstGeom prst="roundRect">
+            <a:avLst/>
+          </a:prstGeom>
+          <a:solidFill>
+            <a:srgbClr val="FFFFFF"/>
+          </a:solidFill>
+          <a:ln>
+            <a:solidFill>
+              <a:srgbClr val="205295"/>
+            </a:solidFill>
+          </a:ln>
+        </p:spPr>
+        <p:style>
+          <a:lnRef idx="1">
+            <a:schemeClr val="accent1"/>
+          </a:lnRef>
+          <a:fillRef idx="3">
+            <a:schemeClr val="accent1"/>
+          </a:fillRef>
+          <a:effectRef idx="2">
+            <a:schemeClr val="accent1"/>
+          </a:effectRef>
+          <a:fontRef idx="minor">
+            <a:schemeClr val="lt1"/>
+          </a:fontRef>
+        </p:style>
+        <p:txBody>
+          <a:bodyPr rtlCol="0" anchor="ctr" wrap="square" lIns="76200" rIns="76200" tIns="50800" bIns="50800"/>
+          <a:lstStyle/>
+          <a:p>
+            <a:pPr algn="ctr"/>
+            <a:r>
+              <a:rPr sz="1600" b="1">
+                <a:solidFill>
+                  <a:srgbClr val="0B1F44"/>
+                </a:solidFill>
+                <a:latin typeface="Arial"/>
+              </a:rPr>
+              <a:t>QueryEngine</a:t>
+            </a:r>
+          </a:p>
+        </p:txBody>
+      </p:sp>
+      <p:sp>
+        <p:nvSpPr>
+          <p:cNvPr id="7" name="Rounded Rectangle 6"/>
+          <p:cNvSpPr/>
+          <p:nvPr/>
+        </p:nvSpPr>
+        <p:spPr>
+          <a:xfrm>
+            <a:off x="5943600" y="2743200"/>
+            <a:ext cx="1280160" cy="731520"/>
+          </a:xfrm>
+          <a:prstGeom prst="roundRect">
+            <a:avLst/>
+          </a:prstGeom>
+          <a:solidFill>
+            <a:srgbClr val="DDEAFB"/>
+          </a:solidFill>
+          <a:ln>
+            <a:solidFill>
+              <a:srgbClr val="205295"/>
+            </a:solidFill>
+          </a:ln>
+        </p:spPr>
+        <p:style>
+          <a:lnRef idx="1">
+            <a:schemeClr val="accent1"/>
+          </a:lnRef>
+          <a:fillRef idx="3">
+            <a:schemeClr val="accent1"/>
+          </a:fillRef>
+          <a:effectRef idx="2">
+            <a:schemeClr val="accent1"/>
+          </a:effectRef>
+          <a:fontRef idx="minor">
+            <a:schemeClr val="lt1"/>
+          </a:fontRef>
+        </p:style>
+        <p:txBody>
+          <a:bodyPr rtlCol="0" anchor="ctr" wrap="square" lIns="76200" rIns="76200" tIns="50800" bIns="50800"/>
+          <a:lstStyle/>
+          <a:p>
+            <a:pPr algn="ctr"/>
+            <a:r>
+              <a:rPr sz="1600" b="1">
+                <a:solidFill>
+                  <a:srgbClr val="0B1F44"/>
+                </a:solidFill>
+                <a:latin typeface="Arial"/>
+              </a:rPr>
+              <a:t>query.ts</a:t>
+            </a:r>
+          </a:p>
+        </p:txBody>
+      </p:sp>
+      <p:sp>
+        <p:nvSpPr>
+          <p:cNvPr id="8" name="Rounded Rectangle 7"/>
+          <p:cNvSpPr/>
+          <p:nvPr/>
+        </p:nvSpPr>
+        <p:spPr>
+          <a:xfrm>
+            <a:off x="7955279" y="2743200"/>
+            <a:ext cx="1371600" cy="731520"/>
+          </a:xfrm>
+          <a:prstGeom prst="roundRect">
+            <a:avLst/>
+          </a:prstGeom>
+          <a:solidFill>
+            <a:srgbClr val="FFFFFF"/>
+          </a:solidFill>
+          <a:ln>
+            <a:solidFill>
+              <a:srgbClr val="205295"/>
+            </a:solidFill>
+          </a:ln>
+        </p:spPr>
+        <p:style>
+          <a:lnRef idx="1">
+            <a:schemeClr val="accent1"/>
+          </a:lnRef>
+          <a:fillRef idx="3">
+            <a:schemeClr val="accent1"/>
+          </a:fillRef>
+          <a:effectRef idx="2">
+            <a:schemeClr val="accent1"/>
+          </a:effectRef>
+          <a:fontRef idx="minor">
+            <a:schemeClr val="lt1"/>
+          </a:fontRef>
+        </p:style>
+        <p:txBody>
+          <a:bodyPr rtlCol="0" anchor="ctr" wrap="square" lIns="76200" rIns="76200" tIns="50800" bIns="50800"/>
+          <a:lstStyle/>
+          <a:p>
+            <a:pPr algn="ctr"/>
+            <a:r>
+              <a:rPr sz="1600" b="1">
+                <a:solidFill>
+                  <a:srgbClr val="0B1F44"/>
+                </a:solidFill>
+                <a:latin typeface="Arial"/>
+              </a:rPr>
+              <a:t>tool exec</a:t>
+            </a:r>
+          </a:p>
+        </p:txBody>
+      </p:sp>
+      <p:sp>
+        <p:nvSpPr>
+          <p:cNvPr id="9" name="Rounded Rectangle 8"/>
+          <p:cNvSpPr/>
+          <p:nvPr/>
+        </p:nvSpPr>
+        <p:spPr>
+          <a:xfrm>
+            <a:off x="9601200" y="2743200"/>
+            <a:ext cx="1463040" cy="731520"/>
+          </a:xfrm>
+          <a:prstGeom prst="roundRect">
+            <a:avLst/>
+          </a:prstGeom>
+          <a:solidFill>
+            <a:srgbClr val="FFFFFF"/>
+          </a:solidFill>
+          <a:ln>
+            <a:solidFill>
+              <a:srgbClr val="205295"/>
+            </a:solidFill>
+          </a:ln>
+        </p:spPr>
+        <p:style>
+          <a:lnRef idx="1">
+            <a:schemeClr val="accent1"/>
+          </a:lnRef>
+          <a:fillRef idx="3">
+            <a:schemeClr val="accent1"/>
+          </a:fillRef>
+          <a:effectRef idx="2">
+            <a:schemeClr val="accent1"/>
+          </a:effectRef>
+          <a:fontRef idx="minor">
+            <a:schemeClr val="lt1"/>
+          </a:fontRef>
+        </p:style>
+        <p:txBody>
+          <a:bodyPr rtlCol="0" anchor="ctr" wrap="square" lIns="76200" rIns="76200" tIns="50800" bIns="50800"/>
+          <a:lstStyle/>
+          <a:p>
+            <a:pPr algn="ctr"/>
+            <a:r>
+              <a:rPr sz="1600" b="1">
+                <a:solidFill>
+                  <a:srgbClr val="0B1F44"/>
+                </a:solidFill>
+                <a:latin typeface="Arial"/>
+              </a:rPr>
+              <a:t>继续 / 输出</a:t>
+            </a:r>
+          </a:p>
+        </p:txBody>
+      </p:sp>
+      <p:cxnSp>
+        <p:nvCxnSpPr>
+          <p:cNvPr id="10" name="Connector 9"/>
+          <p:cNvCxnSpPr/>
+          <p:nvPr/>
+        </p:nvCxnSpPr>
+        <p:spPr>
+          <a:xfrm>
+            <a:off x="1920239" y="3108960"/>
+            <a:ext cx="365761" cy="0"/>
+          </a:xfrm>
+          <a:prstGeom prst="line">
+            <a:avLst/>
+          </a:prstGeom>
+          <a:ln w="25400">
+            <a:solidFill>
+              <a:srgbClr val="205295"/>
+            </a:solidFill>
+          </a:ln>
+        </p:spPr>
+        <p:style>
+          <a:lnRef idx="2">
+            <a:schemeClr val="accent1"/>
+          </a:lnRef>
+          <a:fillRef idx="0">
+            <a:schemeClr val="accent1"/>
+          </a:fillRef>
+          <a:effectRef idx="1">
+            <a:schemeClr val="accent1"/>
+          </a:effectRef>
+          <a:fontRef idx="minor">
+            <a:schemeClr val="tx1"/>
+          </a:fontRef>
+        </p:style>
+      </p:cxnSp>
+      <p:cxnSp>
+        <p:nvCxnSpPr>
+          <p:cNvPr id="11" name="Connector 10"/>
+          <p:cNvCxnSpPr/>
+          <p:nvPr/>
+        </p:nvCxnSpPr>
+        <p:spPr>
+          <a:xfrm>
+            <a:off x="3657600" y="3108960"/>
+            <a:ext cx="457200" cy="0"/>
+          </a:xfrm>
+          <a:prstGeom prst="line">
+            <a:avLst/>
+          </a:prstGeom>
+          <a:ln w="25400">
+            <a:solidFill>
+              <a:srgbClr val="205295"/>
+            </a:solidFill>
+          </a:ln>
+        </p:spPr>
+        <p:style>
+          <a:lnRef idx="2">
+            <a:schemeClr val="accent1"/>
+          </a:lnRef>
+          <a:fillRef idx="0">
+            <a:schemeClr val="accent1"/>
+          </a:fillRef>
+          <a:effectRef idx="1">
+            <a:schemeClr val="accent1"/>
+          </a:effectRef>
+          <a:fontRef idx="minor">
+            <a:schemeClr val="tx1"/>
+          </a:fontRef>
+        </p:style>
+      </p:cxnSp>
+      <p:cxnSp>
+        <p:nvCxnSpPr>
+          <p:cNvPr id="12" name="Connector 11"/>
+          <p:cNvCxnSpPr/>
+          <p:nvPr/>
+        </p:nvCxnSpPr>
+        <p:spPr>
+          <a:xfrm>
+            <a:off x="5577840" y="3108960"/>
+            <a:ext cx="365760" cy="0"/>
+          </a:xfrm>
+          <a:prstGeom prst="line">
+            <a:avLst/>
+          </a:prstGeom>
+          <a:ln w="25400">
+            <a:solidFill>
+              <a:srgbClr val="205295"/>
+            </a:solidFill>
+          </a:ln>
+        </p:spPr>
+        <p:style>
+          <a:lnRef idx="2">
+            <a:schemeClr val="accent1"/>
+          </a:lnRef>
+          <a:fillRef idx="0">
+            <a:schemeClr val="accent1"/>
+          </a:fillRef>
+          <a:effectRef idx="1">
+            <a:schemeClr val="accent1"/>
+          </a:effectRef>
+          <a:fontRef idx="minor">
+            <a:schemeClr val="tx1"/>
+          </a:fontRef>
+        </p:style>
+      </p:cxnSp>
+      <p:cxnSp>
+        <p:nvCxnSpPr>
+          <p:cNvPr id="13" name="Connector 12"/>
+          <p:cNvCxnSpPr/>
+          <p:nvPr/>
+        </p:nvCxnSpPr>
+        <p:spPr>
+          <a:xfrm>
+            <a:off x="7223760" y="3108960"/>
+            <a:ext cx="731519" cy="0"/>
+          </a:xfrm>
+          <a:prstGeom prst="line">
+            <a:avLst/>
+          </a:prstGeom>
+          <a:ln w="25400">
+            <a:solidFill>
+              <a:srgbClr val="205295"/>
+            </a:solidFill>
+          </a:ln>
+        </p:spPr>
+        <p:style>
+          <a:lnRef idx="2">
+            <a:schemeClr val="accent1"/>
+          </a:lnRef>
+          <a:fillRef idx="0">
+            <a:schemeClr val="accent1"/>
+          </a:fillRef>
+          <a:effectRef idx="1">
+            <a:schemeClr val="accent1"/>
+          </a:effectRef>
+          <a:fontRef idx="minor">
+            <a:schemeClr val="tx1"/>
+          </a:fontRef>
+        </p:style>
+      </p:cxnSp>
+      <p:cxnSp>
+        <p:nvCxnSpPr>
+          <p:cNvPr id="14" name="Connector 13"/>
+          <p:cNvCxnSpPr/>
+          <p:nvPr/>
+        </p:nvCxnSpPr>
+        <p:spPr>
+          <a:xfrm>
+            <a:off x="9326880" y="3108960"/>
+            <a:ext cx="274320" cy="0"/>
+          </a:xfrm>
+          <a:prstGeom prst="line">
+            <a:avLst/>
+          </a:prstGeom>
+          <a:ln w="25400">
+            <a:solidFill>
+              <a:srgbClr val="205295"/>
+            </a:solidFill>
+          </a:ln>
+        </p:spPr>
+        <p:style>
+          <a:lnRef idx="2">
+            <a:schemeClr val="accent1"/>
+          </a:lnRef>
+          <a:fillRef idx="0">
+            <a:schemeClr val="accent1"/>
+          </a:fillRef>
+          <a:effectRef idx="1">
+            <a:schemeClr val="accent1"/>
+          </a:effectRef>
+          <a:fontRef idx="minor">
+            <a:schemeClr val="tx1"/>
+          </a:fontRef>
+        </p:style>
+      </p:cxnSp>
+      <p:sp>
+        <p:nvSpPr>
+          <p:cNvPr id="15" name="TextBox 14"/>
           <p:cNvSpPr txBox="1"/>
           <p:nvPr/>
         </p:nvSpPr>
         <p:spPr>
           <a:xfrm>
-            <a:off x="822960" y="1554480"/>
-            <a:ext cx="10058400" cy="4389120"/>
+            <a:off x="841248" y="5532120"/>
+            <a:ext cx="10058400" cy="502920"/>
           </a:xfrm>
           <a:prstGeom prst="rect">
             <a:avLst/>
@@ -7798,83 +8304,14 @@
           </a:bodyPr>
           <a:lstStyle/>
           <a:p>
-            <a:pPr>
-              <a:spcAft>
-                <a:spcPts val="800"/>
-              </a:spcAft>
-            </a:pPr>
-            <a:r>
-              <a:rPr sz="2000" b="0">
-                <a:solidFill>
-                  <a:srgbClr val="1F2937"/>
-                </a:solidFill>
-                <a:latin typeface="PingFang SC"/>
-              </a:rPr>
-              <a:t>main.tsx：总入口与总装配</a:t>
-            </a:r>
-          </a:p>
-          <a:p>
-            <a:pPr>
-              <a:spcAft>
-                <a:spcPts val="800"/>
-              </a:spcAft>
-            </a:pPr>
-            <a:r>
-              <a:rPr sz="2000" b="0">
-                <a:solidFill>
-                  <a:srgbClr val="1F2937"/>
-                </a:solidFill>
-                <a:latin typeface="PingFang SC"/>
-              </a:rPr>
-              <a:t>query.ts：turn loop runtime kernel</a:t>
-            </a:r>
-          </a:p>
-          <a:p>
-            <a:pPr>
-              <a:spcAft>
-                <a:spcPts val="800"/>
-              </a:spcAft>
-            </a:pPr>
-            <a:r>
-              <a:rPr sz="2000" b="0">
-                <a:solidFill>
-                  <a:srgbClr val="1F2937"/>
-                </a:solidFill>
-                <a:latin typeface="PingFang SC"/>
-              </a:rPr>
-              <a:t>QueryEngine.ts：conversation host</a:t>
-            </a:r>
-          </a:p>
-          <a:p>
-            <a:pPr>
-              <a:spcAft>
-                <a:spcPts val="800"/>
-              </a:spcAft>
-            </a:pPr>
-            <a:r>
-              <a:rPr sz="2000" b="0">
-                <a:solidFill>
-                  <a:srgbClr val="1F2937"/>
-                </a:solidFill>
-                <a:latin typeface="PingFang SC"/>
-              </a:rPr>
-              <a:t>Tool.ts：工具协议与 ToolUseContext</a:t>
-            </a:r>
-          </a:p>
-          <a:p>
-            <a:pPr>
-              <a:spcAft>
-                <a:spcPts val="800"/>
-              </a:spcAft>
-            </a:pPr>
-            <a:r>
-              <a:rPr sz="2000" b="0">
-                <a:solidFill>
-                  <a:srgbClr val="1F2937"/>
-                </a:solidFill>
-                <a:latin typeface="PingFang SC"/>
-              </a:rPr>
-              <a:t>tools.ts：工具注册中心</a:t>
+            <a:r>
+              <a:rPr sz="1400" b="0">
+                <a:solidFill>
+                  <a:srgbClr val="475569"/>
+                </a:solidFill>
+                <a:latin typeface="Arial"/>
+              </a:rPr>
+              <a:t>这是一个“模型调用”和“工具调用”反复往返的闭环。</a:t>
             </a:r>
           </a:p>
         </p:txBody>
@@ -7893,7 +8330,7 @@
     <p:bg>
       <p:bgPr>
         <a:solidFill>
-          <a:srgbClr val="101C3F"/>
+          <a:srgbClr val="F8FAFC"/>
         </a:solidFill>
         <a:effectLst/>
       </p:bgPr>
@@ -7913,8 +8350,8 @@
         </p:nvSpPr>
         <p:spPr>
           <a:xfrm>
-            <a:off x="594360" y="411480"/>
-            <a:ext cx="10607040" cy="777240"/>
+            <a:off x="594360" y="384048"/>
+            <a:ext cx="10789920" cy="685800"/>
           </a:xfrm>
           <a:prstGeom prst="rect">
             <a:avLst/>
@@ -7927,29 +8364,71 @@
           </a:bodyPr>
           <a:lstStyle/>
           <a:p>
-            <a:pPr algn="l"/>
-            <a:r>
-              <a:rPr sz="2800" b="1">
-                <a:solidFill>
-                  <a:srgbClr val="FFFFFF"/>
-                </a:solidFill>
-                <a:latin typeface="PingFang SC"/>
-              </a:rPr>
-              <a:t>二、先看主链路</a:t>
-            </a:r>
-          </a:p>
-        </p:txBody>
-      </p:sp>
-      <p:sp>
-        <p:nvSpPr>
-          <p:cNvPr id="3" name="TextBox 2"/>
+            <a:r>
+              <a:rPr sz="2600" b="1">
+                <a:solidFill>
+                  <a:srgbClr val="0B1F44"/>
+                </a:solidFill>
+                <a:latin typeface="Arial"/>
+              </a:rPr>
+              <a:t>为什么 query.ts 是核心</a:t>
+            </a:r>
+          </a:p>
+        </p:txBody>
+      </p:sp>
+      <p:sp>
+        <p:nvSpPr>
+          <p:cNvPr id="3" name="Rectangle 2"/>
+          <p:cNvSpPr/>
+          <p:nvPr/>
+        </p:nvSpPr>
+        <p:spPr>
+          <a:xfrm>
+            <a:off x="621792" y="1078992"/>
+            <a:ext cx="2011680" cy="27432"/>
+          </a:xfrm>
+          <a:prstGeom prst="rect">
+            <a:avLst/>
+          </a:prstGeom>
+          <a:solidFill>
+            <a:srgbClr val="DBE4F0"/>
+          </a:solidFill>
+          <a:ln>
+            <a:noFill/>
+          </a:ln>
+        </p:spPr>
+        <p:style>
+          <a:lnRef idx="1">
+            <a:schemeClr val="accent1"/>
+          </a:lnRef>
+          <a:fillRef idx="3">
+            <a:schemeClr val="accent1"/>
+          </a:fillRef>
+          <a:effectRef idx="2">
+            <a:schemeClr val="accent1"/>
+          </a:effectRef>
+          <a:fontRef idx="minor">
+            <a:schemeClr val="lt1"/>
+          </a:fontRef>
+        </p:style>
+        <p:txBody>
+          <a:bodyPr rtlCol="0" anchor="ctr"/>
+          <a:lstStyle/>
+          <a:p>
+            <a:pPr algn="ctr"/>
+          </a:p>
+        </p:txBody>
+      </p:sp>
+      <p:sp>
+        <p:nvSpPr>
+          <p:cNvPr id="4" name="TextBox 3"/>
           <p:cNvSpPr txBox="1"/>
           <p:nvPr/>
         </p:nvSpPr>
         <p:spPr>
           <a:xfrm>
-            <a:off x="658368" y="1417320"/>
-            <a:ext cx="10241280" cy="822960"/>
+            <a:off x="777240" y="1508760"/>
+            <a:ext cx="10241280" cy="4389120"/>
           </a:xfrm>
           <a:prstGeom prst="rect">
             <a:avLst/>
@@ -7962,14 +8441,67 @@
           </a:bodyPr>
           <a:lstStyle/>
           <a:p>
-            <a:r>
-              <a:rPr sz="1600" b="0">
-                <a:solidFill>
-                  <a:srgbClr val="FFFFFF"/>
-                </a:solidFill>
-                <a:latin typeface="PingFang SC"/>
-              </a:rPr>
-              <a:t>从启动到一次完整 turn，先把系统怎么跑起来看清。</a:t>
+            <a:pPr>
+              <a:spcAft>
+                <a:spcPts val="800"/>
+              </a:spcAft>
+            </a:pPr>
+            <a:r>
+              <a:rPr sz="1900" b="0">
+                <a:solidFill>
+                  <a:srgbClr val="1F2937"/>
+                </a:solidFill>
+                <a:latin typeface="Arial"/>
+              </a:rPr>
+              <a:t>它不是一次 API 调用的包装层，而是 runtime kernel</a:t>
+            </a:r>
+          </a:p>
+          <a:p>
+            <a:pPr>
+              <a:spcAft>
+                <a:spcPts val="800"/>
+              </a:spcAft>
+            </a:pPr>
+            <a:r>
+              <a:rPr sz="1900" b="0">
+                <a:solidFill>
+                  <a:srgbClr val="1F2937"/>
+                </a:solidFill>
+                <a:latin typeface="Arial"/>
+              </a:rPr>
+              <a:t>负责准备 messages、context 治理、模型请求、streaming 输出</a:t>
+            </a:r>
+          </a:p>
+          <a:p>
+            <a:pPr>
+              <a:spcAft>
+                <a:spcPts val="800"/>
+              </a:spcAft>
+            </a:pPr>
+            <a:r>
+              <a:rPr sz="1900" b="0">
+                <a:solidFill>
+                  <a:srgbClr val="1F2937"/>
+                </a:solidFill>
+                <a:latin typeface="Arial"/>
+              </a:rPr>
+              <a:t>负责处理 tool_use / tool_result</a:t>
+            </a:r>
+          </a:p>
+          <a:p>
+            <a:pPr>
+              <a:spcAft>
+                <a:spcPts val="800"/>
+              </a:spcAft>
+            </a:pPr>
+            <a:r>
+              <a:rPr sz="1900" b="0">
+                <a:solidFill>
+                  <a:srgbClr val="1F2937"/>
+                </a:solidFill>
+                <a:latin typeface="Arial"/>
+              </a:rPr>
+              <a:t>负责决定 continue / retry / compact / stop</a:t>
             </a:r>
           </a:p>
         </p:txBody>
@@ -8008,8 +8540,8 @@
         </p:nvSpPr>
         <p:spPr>
           <a:xfrm>
-            <a:off x="594360" y="411480"/>
-            <a:ext cx="10607040" cy="777240"/>
+            <a:off x="594360" y="384048"/>
+            <a:ext cx="10789920" cy="685800"/>
           </a:xfrm>
           <a:prstGeom prst="rect">
             <a:avLst/>
@@ -8022,15 +8554,14 @@
           </a:bodyPr>
           <a:lstStyle/>
           <a:p>
-            <a:pPr algn="l"/>
             <a:r>
               <a:rPr sz="2600" b="1">
                 <a:solidFill>
                   <a:srgbClr val="0B1F44"/>
                 </a:solidFill>
-                <a:latin typeface="PingFang SC"/>
-              </a:rPr>
-              <a:t>架构总览</a:t>
+                <a:latin typeface="Arial"/>
+              </a:rPr>
+              <a:t>turn loop：核心结构</a:t>
             </a:r>
           </a:p>
         </p:txBody>
@@ -8043,8 +8574,8 @@
         </p:nvSpPr>
         <p:spPr>
           <a:xfrm>
-            <a:off x="621792" y="1143000"/>
-            <a:ext cx="2194560" cy="36576"/>
+            <a:off x="621792" y="1078992"/>
+            <a:ext cx="2011680" cy="27432"/>
           </a:xfrm>
           <a:prstGeom prst="rect">
             <a:avLst/>
@@ -8080,14 +8611,459 @@
       </p:sp>
       <p:sp>
         <p:nvSpPr>
-          <p:cNvPr id="4" name="TextBox 3"/>
+          <p:cNvPr id="4" name="Rounded Rectangle 3"/>
+          <p:cNvSpPr/>
+          <p:nvPr/>
+        </p:nvSpPr>
+        <p:spPr>
+          <a:xfrm>
+            <a:off x="731520" y="1828800"/>
+            <a:ext cx="1828800" cy="731520"/>
+          </a:xfrm>
+          <a:prstGeom prst="roundRect">
+            <a:avLst/>
+          </a:prstGeom>
+          <a:solidFill>
+            <a:srgbClr val="FFFFFF"/>
+          </a:solidFill>
+          <a:ln>
+            <a:solidFill>
+              <a:srgbClr val="205295"/>
+            </a:solidFill>
+          </a:ln>
+        </p:spPr>
+        <p:style>
+          <a:lnRef idx="1">
+            <a:schemeClr val="accent1"/>
+          </a:lnRef>
+          <a:fillRef idx="3">
+            <a:schemeClr val="accent1"/>
+          </a:fillRef>
+          <a:effectRef idx="2">
+            <a:schemeClr val="accent1"/>
+          </a:effectRef>
+          <a:fontRef idx="minor">
+            <a:schemeClr val="lt1"/>
+          </a:fontRef>
+        </p:style>
+        <p:txBody>
+          <a:bodyPr rtlCol="0" anchor="ctr" wrap="square" lIns="76200" rIns="76200" tIns="50800" bIns="50800"/>
+          <a:lstStyle/>
+          <a:p>
+            <a:pPr algn="ctr"/>
+            <a:r>
+              <a:rPr sz="1600" b="1">
+                <a:solidFill>
+                  <a:srgbClr val="0B1F44"/>
+                </a:solidFill>
+                <a:latin typeface="Arial"/>
+              </a:rPr>
+              <a:t>messages</a:t>
+            </a:r>
+          </a:p>
+        </p:txBody>
+      </p:sp>
+      <p:sp>
+        <p:nvSpPr>
+          <p:cNvPr id="5" name="Rounded Rectangle 4"/>
+          <p:cNvSpPr/>
+          <p:nvPr/>
+        </p:nvSpPr>
+        <p:spPr>
+          <a:xfrm>
+            <a:off x="3017520" y="1828800"/>
+            <a:ext cx="2103120" cy="731520"/>
+          </a:xfrm>
+          <a:prstGeom prst="roundRect">
+            <a:avLst/>
+          </a:prstGeom>
+          <a:solidFill>
+            <a:srgbClr val="FFFFFF"/>
+          </a:solidFill>
+          <a:ln>
+            <a:solidFill>
+              <a:srgbClr val="205295"/>
+            </a:solidFill>
+          </a:ln>
+        </p:spPr>
+        <p:style>
+          <a:lnRef idx="1">
+            <a:schemeClr val="accent1"/>
+          </a:lnRef>
+          <a:fillRef idx="3">
+            <a:schemeClr val="accent1"/>
+          </a:fillRef>
+          <a:effectRef idx="2">
+            <a:schemeClr val="accent1"/>
+          </a:effectRef>
+          <a:fontRef idx="minor">
+            <a:schemeClr val="lt1"/>
+          </a:fontRef>
+        </p:style>
+        <p:txBody>
+          <a:bodyPr rtlCol="0" anchor="ctr" wrap="square" lIns="76200" rIns="76200" tIns="50800" bIns="50800"/>
+          <a:lstStyle/>
+          <a:p>
+            <a:pPr algn="ctr"/>
+            <a:r>
+              <a:rPr sz="1600" b="1">
+                <a:solidFill>
+                  <a:srgbClr val="0B1F44"/>
+                </a:solidFill>
+                <a:latin typeface="Arial"/>
+              </a:rPr>
+              <a:t>context shaping</a:t>
+            </a:r>
+          </a:p>
+        </p:txBody>
+      </p:sp>
+      <p:sp>
+        <p:nvSpPr>
+          <p:cNvPr id="6" name="Rounded Rectangle 5"/>
+          <p:cNvSpPr/>
+          <p:nvPr/>
+        </p:nvSpPr>
+        <p:spPr>
+          <a:xfrm>
+            <a:off x="5486400" y="1828800"/>
+            <a:ext cx="1828800" cy="731520"/>
+          </a:xfrm>
+          <a:prstGeom prst="roundRect">
+            <a:avLst/>
+          </a:prstGeom>
+          <a:solidFill>
+            <a:srgbClr val="FFFFFF"/>
+          </a:solidFill>
+          <a:ln>
+            <a:solidFill>
+              <a:srgbClr val="205295"/>
+            </a:solidFill>
+          </a:ln>
+        </p:spPr>
+        <p:style>
+          <a:lnRef idx="1">
+            <a:schemeClr val="accent1"/>
+          </a:lnRef>
+          <a:fillRef idx="3">
+            <a:schemeClr val="accent1"/>
+          </a:fillRef>
+          <a:effectRef idx="2">
+            <a:schemeClr val="accent1"/>
+          </a:effectRef>
+          <a:fontRef idx="minor">
+            <a:schemeClr val="lt1"/>
+          </a:fontRef>
+        </p:style>
+        <p:txBody>
+          <a:bodyPr rtlCol="0" anchor="ctr" wrap="square" lIns="76200" rIns="76200" tIns="50800" bIns="50800"/>
+          <a:lstStyle/>
+          <a:p>
+            <a:pPr algn="ctr"/>
+            <a:r>
+              <a:rPr sz="1600" b="1">
+                <a:solidFill>
+                  <a:srgbClr val="0B1F44"/>
+                </a:solidFill>
+                <a:latin typeface="Arial"/>
+              </a:rPr>
+              <a:t>API request</a:t>
+            </a:r>
+          </a:p>
+        </p:txBody>
+      </p:sp>
+      <p:sp>
+        <p:nvSpPr>
+          <p:cNvPr id="7" name="Rounded Rectangle 6"/>
+          <p:cNvSpPr/>
+          <p:nvPr/>
+        </p:nvSpPr>
+        <p:spPr>
+          <a:xfrm>
+            <a:off x="7772400" y="1828800"/>
+            <a:ext cx="1828800" cy="731520"/>
+          </a:xfrm>
+          <a:prstGeom prst="roundRect">
+            <a:avLst/>
+          </a:prstGeom>
+          <a:solidFill>
+            <a:srgbClr val="FFFFFF"/>
+          </a:solidFill>
+          <a:ln>
+            <a:solidFill>
+              <a:srgbClr val="205295"/>
+            </a:solidFill>
+          </a:ln>
+        </p:spPr>
+        <p:style>
+          <a:lnRef idx="1">
+            <a:schemeClr val="accent1"/>
+          </a:lnRef>
+          <a:fillRef idx="3">
+            <a:schemeClr val="accent1"/>
+          </a:fillRef>
+          <a:effectRef idx="2">
+            <a:schemeClr val="accent1"/>
+          </a:effectRef>
+          <a:fontRef idx="minor">
+            <a:schemeClr val="lt1"/>
+          </a:fontRef>
+        </p:style>
+        <p:txBody>
+          <a:bodyPr rtlCol="0" anchor="ctr" wrap="square" lIns="76200" rIns="76200" tIns="50800" bIns="50800"/>
+          <a:lstStyle/>
+          <a:p>
+            <a:pPr algn="ctr"/>
+            <a:r>
+              <a:rPr sz="1600" b="1">
+                <a:solidFill>
+                  <a:srgbClr val="0B1F44"/>
+                </a:solidFill>
+                <a:latin typeface="Arial"/>
+              </a:rPr>
+              <a:t>assistant / tool_use</a:t>
+            </a:r>
+          </a:p>
+        </p:txBody>
+      </p:sp>
+      <p:sp>
+        <p:nvSpPr>
+          <p:cNvPr id="8" name="Rounded Rectangle 7"/>
+          <p:cNvSpPr/>
+          <p:nvPr/>
+        </p:nvSpPr>
+        <p:spPr>
+          <a:xfrm>
+            <a:off x="5394960" y="3840480"/>
+            <a:ext cx="2194560" cy="731520"/>
+          </a:xfrm>
+          <a:prstGeom prst="roundRect">
+            <a:avLst/>
+          </a:prstGeom>
+          <a:solidFill>
+            <a:srgbClr val="DDEAFB"/>
+          </a:solidFill>
+          <a:ln>
+            <a:solidFill>
+              <a:srgbClr val="205295"/>
+            </a:solidFill>
+          </a:ln>
+        </p:spPr>
+        <p:style>
+          <a:lnRef idx="1">
+            <a:schemeClr val="accent1"/>
+          </a:lnRef>
+          <a:fillRef idx="3">
+            <a:schemeClr val="accent1"/>
+          </a:fillRef>
+          <a:effectRef idx="2">
+            <a:schemeClr val="accent1"/>
+          </a:effectRef>
+          <a:fontRef idx="minor">
+            <a:schemeClr val="lt1"/>
+          </a:fontRef>
+        </p:style>
+        <p:txBody>
+          <a:bodyPr rtlCol="0" anchor="ctr" wrap="square" lIns="76200" rIns="76200" tIns="50800" bIns="50800"/>
+          <a:lstStyle/>
+          <a:p>
+            <a:pPr algn="ctr"/>
+            <a:r>
+              <a:rPr sz="1600" b="1">
+                <a:solidFill>
+                  <a:srgbClr val="0B1F44"/>
+                </a:solidFill>
+                <a:latin typeface="Arial"/>
+              </a:rPr>
+              <a:t>tool_result 回灌</a:t>
+            </a:r>
+          </a:p>
+        </p:txBody>
+      </p:sp>
+      <p:cxnSp>
+        <p:nvCxnSpPr>
+          <p:cNvPr id="9" name="Connector 8"/>
+          <p:cNvCxnSpPr/>
+          <p:nvPr/>
+        </p:nvCxnSpPr>
+        <p:spPr>
+          <a:xfrm>
+            <a:off x="2560320" y="2194560"/>
+            <a:ext cx="457200" cy="0"/>
+          </a:xfrm>
+          <a:prstGeom prst="line">
+            <a:avLst/>
+          </a:prstGeom>
+          <a:ln w="25400">
+            <a:solidFill>
+              <a:srgbClr val="205295"/>
+            </a:solidFill>
+          </a:ln>
+        </p:spPr>
+        <p:style>
+          <a:lnRef idx="2">
+            <a:schemeClr val="accent1"/>
+          </a:lnRef>
+          <a:fillRef idx="0">
+            <a:schemeClr val="accent1"/>
+          </a:fillRef>
+          <a:effectRef idx="1">
+            <a:schemeClr val="accent1"/>
+          </a:effectRef>
+          <a:fontRef idx="minor">
+            <a:schemeClr val="tx1"/>
+          </a:fontRef>
+        </p:style>
+      </p:cxnSp>
+      <p:cxnSp>
+        <p:nvCxnSpPr>
+          <p:cNvPr id="10" name="Connector 9"/>
+          <p:cNvCxnSpPr/>
+          <p:nvPr/>
+        </p:nvCxnSpPr>
+        <p:spPr>
+          <a:xfrm>
+            <a:off x="5120640" y="2194560"/>
+            <a:ext cx="365760" cy="0"/>
+          </a:xfrm>
+          <a:prstGeom prst="line">
+            <a:avLst/>
+          </a:prstGeom>
+          <a:ln w="25400">
+            <a:solidFill>
+              <a:srgbClr val="205295"/>
+            </a:solidFill>
+          </a:ln>
+        </p:spPr>
+        <p:style>
+          <a:lnRef idx="2">
+            <a:schemeClr val="accent1"/>
+          </a:lnRef>
+          <a:fillRef idx="0">
+            <a:schemeClr val="accent1"/>
+          </a:fillRef>
+          <a:effectRef idx="1">
+            <a:schemeClr val="accent1"/>
+          </a:effectRef>
+          <a:fontRef idx="minor">
+            <a:schemeClr val="tx1"/>
+          </a:fontRef>
+        </p:style>
+      </p:cxnSp>
+      <p:cxnSp>
+        <p:nvCxnSpPr>
+          <p:cNvPr id="11" name="Connector 10"/>
+          <p:cNvCxnSpPr/>
+          <p:nvPr/>
+        </p:nvCxnSpPr>
+        <p:spPr>
+          <a:xfrm>
+            <a:off x="7315200" y="2194560"/>
+            <a:ext cx="457200" cy="0"/>
+          </a:xfrm>
+          <a:prstGeom prst="line">
+            <a:avLst/>
+          </a:prstGeom>
+          <a:ln w="25400">
+            <a:solidFill>
+              <a:srgbClr val="205295"/>
+            </a:solidFill>
+          </a:ln>
+        </p:spPr>
+        <p:style>
+          <a:lnRef idx="2">
+            <a:schemeClr val="accent1"/>
+          </a:lnRef>
+          <a:fillRef idx="0">
+            <a:schemeClr val="accent1"/>
+          </a:fillRef>
+          <a:effectRef idx="1">
+            <a:schemeClr val="accent1"/>
+          </a:effectRef>
+          <a:fontRef idx="minor">
+            <a:schemeClr val="tx1"/>
+          </a:fontRef>
+        </p:style>
+      </p:cxnSp>
+      <p:cxnSp>
+        <p:nvCxnSpPr>
+          <p:cNvPr id="12" name="Connector 11"/>
+          <p:cNvCxnSpPr/>
+          <p:nvPr/>
+        </p:nvCxnSpPr>
+        <p:spPr>
+          <a:xfrm flipH="1">
+            <a:off x="6492240" y="2560320"/>
+            <a:ext cx="2194560" cy="1280160"/>
+          </a:xfrm>
+          <a:prstGeom prst="line">
+            <a:avLst/>
+          </a:prstGeom>
+          <a:ln w="25400">
+            <a:solidFill>
+              <a:srgbClr val="205295"/>
+            </a:solidFill>
+          </a:ln>
+        </p:spPr>
+        <p:style>
+          <a:lnRef idx="2">
+            <a:schemeClr val="accent1"/>
+          </a:lnRef>
+          <a:fillRef idx="0">
+            <a:schemeClr val="accent1"/>
+          </a:fillRef>
+          <a:effectRef idx="1">
+            <a:schemeClr val="accent1"/>
+          </a:effectRef>
+          <a:fontRef idx="minor">
+            <a:schemeClr val="tx1"/>
+          </a:fontRef>
+        </p:style>
+      </p:cxnSp>
+      <p:cxnSp>
+        <p:nvCxnSpPr>
+          <p:cNvPr id="13" name="Connector 12"/>
+          <p:cNvCxnSpPr/>
+          <p:nvPr/>
+        </p:nvCxnSpPr>
+        <p:spPr>
+          <a:xfrm flipH="1" flipV="1">
+            <a:off x="1645920" y="2560320"/>
+            <a:ext cx="3749040" cy="1645920"/>
+          </a:xfrm>
+          <a:prstGeom prst="line">
+            <a:avLst/>
+          </a:prstGeom>
+          <a:ln w="25400">
+            <a:solidFill>
+              <a:srgbClr val="205295"/>
+            </a:solidFill>
+          </a:ln>
+        </p:spPr>
+        <p:style>
+          <a:lnRef idx="2">
+            <a:schemeClr val="accent1"/>
+          </a:lnRef>
+          <a:fillRef idx="0">
+            <a:schemeClr val="accent1"/>
+          </a:fillRef>
+          <a:effectRef idx="1">
+            <a:schemeClr val="accent1"/>
+          </a:effectRef>
+          <a:fontRef idx="minor">
+            <a:schemeClr val="tx1"/>
+          </a:fontRef>
+        </p:style>
+      </p:cxnSp>
+      <p:sp>
+        <p:nvSpPr>
+          <p:cNvPr id="14" name="TextBox 13"/>
           <p:cNvSpPr txBox="1"/>
           <p:nvPr/>
         </p:nvSpPr>
         <p:spPr>
           <a:xfrm>
-            <a:off x="822960" y="1554480"/>
-            <a:ext cx="10058400" cy="4389120"/>
+            <a:off x="822960" y="4663440"/>
+            <a:ext cx="10241280" cy="1280160"/>
           </a:xfrm>
           <a:prstGeom prst="rect">
             <a:avLst/>
@@ -8106,13 +9082,13 @@
               </a:spcAft>
             </a:pPr>
             <a:r>
-              <a:rPr sz="2000" b="0">
+              <a:rPr sz="1600" b="0">
                 <a:solidFill>
                   <a:srgbClr val="1F2937"/>
                 </a:solidFill>
-                <a:latin typeface="PingFang SC"/>
-              </a:rPr>
-              <a:t>main.tsx 把系统装起来</a:t>
+                <a:latin typeface="Arial"/>
+              </a:rPr>
+              <a:t>先做 tool result budget、snip、microcompact、collapse、autocompact</a:t>
             </a:r>
           </a:p>
           <a:p>
@@ -8122,13 +9098,13 @@
               </a:spcAft>
             </a:pPr>
             <a:r>
-              <a:rPr sz="2000" b="0">
+              <a:rPr sz="1600" b="0">
                 <a:solidFill>
                   <a:srgbClr val="1F2937"/>
                 </a:solidFill>
-                <a:latin typeface="PingFang SC"/>
-              </a:rPr>
-              <a:t>query.ts 让系统跑起来</a:t>
+                <a:latin typeface="Arial"/>
+              </a:rPr>
+              <a:t>再发请求并接收 streaming 输出</a:t>
             </a:r>
           </a:p>
           <a:p>
@@ -8138,13 +9114,13 @@
               </a:spcAft>
             </a:pPr>
             <a:r>
-              <a:rPr sz="2000" b="0">
+              <a:rPr sz="1600" b="0">
                 <a:solidFill>
                   <a:srgbClr val="1F2937"/>
                 </a:solidFill>
-                <a:latin typeface="PingFang SC"/>
-              </a:rPr>
-              <a:t>API 层负责模型适配</a:t>
+                <a:latin typeface="Arial"/>
+              </a:rPr>
+              <a:t>如果出现 tool_use，就执行工具并把 tool_result 回写</a:t>
             </a:r>
           </a:p>
           <a:p>
@@ -8154,63 +9130,13 @@
               </a:spcAft>
             </a:pPr>
             <a:r>
-              <a:rPr sz="2000" b="0">
+              <a:rPr sz="1600" b="0">
                 <a:solidFill>
                   <a:srgbClr val="1F2937"/>
                 </a:solidFill>
-                <a:latin typeface="PingFang SC"/>
-              </a:rPr>
-              <a:t>tools / MCP / plugins / skills 提供能力面</a:t>
-            </a:r>
-          </a:p>
-          <a:p>
-            <a:pPr>
-              <a:spcAft>
-                <a:spcPts val="800"/>
-              </a:spcAft>
-            </a:pPr>
-            <a:r>
-              <a:rPr sz="2000" b="0">
-                <a:solidFill>
-                  <a:srgbClr val="1F2937"/>
-                </a:solidFill>
-                <a:latin typeface="PingFang SC"/>
-              </a:rPr>
-              <a:t>settings / auth / policy 决定约束边界</a:t>
-            </a:r>
-          </a:p>
-        </p:txBody>
-      </p:sp>
-      <p:sp>
-        <p:nvSpPr>
-          <p:cNvPr id="5" name="TextBox 4"/>
-          <p:cNvSpPr txBox="1"/>
-          <p:nvPr/>
-        </p:nvSpPr>
-        <p:spPr>
-          <a:xfrm>
-            <a:off x="868680" y="5120640"/>
-            <a:ext cx="9875520" cy="822960"/>
-          </a:xfrm>
-          <a:prstGeom prst="rect">
-            <a:avLst/>
-          </a:prstGeom>
-          <a:noFill/>
-        </p:spPr>
-        <p:txBody>
-          <a:bodyPr wrap="square" lIns="76200" rIns="76200" tIns="50800" bIns="50800">
-            <a:spAutoFit/>
-          </a:bodyPr>
-          <a:lstStyle/>
-          <a:p>
-            <a:r>
-              <a:rPr sz="1600" b="0">
-                <a:solidFill>
-                  <a:srgbClr val="475569"/>
-                </a:solidFill>
-                <a:latin typeface="PingFang SC"/>
-              </a:rPr>
-              <a:t>一句话：main.tsx 负责装配，query.ts 负责推进，其余模块提供能力、状态和约束。</a:t>
+                <a:latin typeface="Arial"/>
+              </a:rPr>
+              <a:t>因此它更像带 recovery 分支的 state machine，而不是线性 pipeline</a:t>
             </a:r>
           </a:p>
         </p:txBody>
@@ -8249,8 +9175,8 @@
         </p:nvSpPr>
         <p:spPr>
           <a:xfrm>
-            <a:off x="594360" y="411480"/>
-            <a:ext cx="10607040" cy="777240"/>
+            <a:off x="594360" y="384048"/>
+            <a:ext cx="10789920" cy="685800"/>
           </a:xfrm>
           <a:prstGeom prst="rect">
             <a:avLst/>
@@ -8263,15 +9189,14 @@
           </a:bodyPr>
           <a:lstStyle/>
           <a:p>
-            <a:pPr algn="l"/>
             <a:r>
               <a:rPr sz="2600" b="1">
                 <a:solidFill>
                   <a:srgbClr val="0B1F44"/>
                 </a:solidFill>
-                <a:latin typeface="PingFang SC"/>
-              </a:rPr>
-              <a:t>主执行链路</a:t>
+                <a:latin typeface="Arial"/>
+              </a:rPr>
+              <a:t>QueryEngine.ts：conversation host</a:t>
             </a:r>
           </a:p>
         </p:txBody>
@@ -8284,8 +9209,8 @@
         </p:nvSpPr>
         <p:spPr>
           <a:xfrm>
-            <a:off x="621792" y="1143000"/>
-            <a:ext cx="2194560" cy="36576"/>
+            <a:off x="621792" y="1078992"/>
+            <a:ext cx="2011680" cy="27432"/>
           </a:xfrm>
           <a:prstGeom prst="rect">
             <a:avLst/>
@@ -8327,8 +9252,8 @@
         </p:nvSpPr>
         <p:spPr>
           <a:xfrm>
-            <a:off x="822960" y="1554480"/>
-            <a:ext cx="10058400" cy="4389120"/>
+            <a:off x="777240" y="1508760"/>
+            <a:ext cx="10241280" cy="4389120"/>
           </a:xfrm>
           <a:prstGeom prst="rect">
             <a:avLst/>
@@ -8347,13 +9272,13 @@
               </a:spcAft>
             </a:pPr>
             <a:r>
-              <a:rPr sz="2000" b="0">
+              <a:rPr sz="1900" b="0">
                 <a:solidFill>
                   <a:srgbClr val="1F2937"/>
                 </a:solidFill>
-                <a:latin typeface="PingFang SC"/>
-              </a:rPr>
-              <a:t>用户输入进入 main.tsx</a:t>
+                <a:latin typeface="Arial"/>
+              </a:rPr>
+              <a:t>不是内核本身，而是会话宿主</a:t>
             </a:r>
           </a:p>
           <a:p>
@@ -8363,13 +9288,13 @@
               </a:spcAft>
             </a:pPr>
             <a:r>
-              <a:rPr sz="2000" b="0">
+              <a:rPr sz="1900" b="0">
                 <a:solidFill>
                   <a:srgbClr val="1F2937"/>
                 </a:solidFill>
-                <a:latin typeface="PingFang SC"/>
-              </a:rPr>
-              <a:t>构造 commands / tools / app state / QueryEngine</a:t>
+                <a:latin typeface="Arial"/>
+              </a:rPr>
+              <a:t>负责保持多轮消息历史、聚合 usage、维护 permission denial</a:t>
             </a:r>
           </a:p>
           <a:p>
@@ -8379,13 +9304,13 @@
               </a:spcAft>
             </a:pPr>
             <a:r>
-              <a:rPr sz="2000" b="0">
+              <a:rPr sz="1900" b="0">
                 <a:solidFill>
                   <a:srgbClr val="1F2937"/>
                 </a:solidFill>
-                <a:latin typeface="PingFang SC"/>
-              </a:rPr>
-              <a:t>query.ts 发起模型请求</a:t>
+                <a:latin typeface="Arial"/>
+              </a:rPr>
+              <a:t>持有 readFileState、预落盘 transcript、做 SDK/headless 输出投影</a:t>
             </a:r>
           </a:p>
           <a:p>
@@ -8395,63 +9320,13 @@
               </a:spcAft>
             </a:pPr>
             <a:r>
-              <a:rPr sz="2000" b="0">
+              <a:rPr sz="1900" b="0">
                 <a:solidFill>
                   <a:srgbClr val="1F2937"/>
                 </a:solidFill>
-                <a:latin typeface="PingFang SC"/>
-              </a:rPr>
-              <a:t>若出现 tool_use，进入 tool orchestration</a:t>
-            </a:r>
-          </a:p>
-          <a:p>
-            <a:pPr>
-              <a:spcAft>
-                <a:spcPts val="800"/>
-              </a:spcAft>
-            </a:pPr>
-            <a:r>
-              <a:rPr sz="2000" b="0">
-                <a:solidFill>
-                  <a:srgbClr val="1F2937"/>
-                </a:solidFill>
-                <a:latin typeface="PingFang SC"/>
-              </a:rPr>
-              <a:t>tool_result 回灌后继续下一轮</a:t>
-            </a:r>
-          </a:p>
-        </p:txBody>
-      </p:sp>
-      <p:sp>
-        <p:nvSpPr>
-          <p:cNvPr id="5" name="TextBox 4"/>
-          <p:cNvSpPr txBox="1"/>
-          <p:nvPr/>
-        </p:nvSpPr>
-        <p:spPr>
-          <a:xfrm>
-            <a:off x="868680" y="5120640"/>
-            <a:ext cx="9875520" cy="822960"/>
-          </a:xfrm>
-          <a:prstGeom prst="rect">
-            <a:avLst/>
-          </a:prstGeom>
-          <a:noFill/>
-        </p:spPr>
-        <p:txBody>
-          <a:bodyPr wrap="square" lIns="76200" rIns="76200" tIns="50800" bIns="50800">
-            <a:spAutoFit/>
-          </a:bodyPr>
-          <a:lstStyle/>
-          <a:p>
-            <a:r>
-              <a:rPr sz="1600" b="0">
-                <a:solidFill>
-                  <a:srgbClr val="475569"/>
-                </a:solidFill>
-                <a:latin typeface="PingFang SC"/>
-              </a:rPr>
-              <a:t>这是一个“模型调用”和“工具调用”反复往返的闭环。</a:t>
+                <a:latin typeface="Arial"/>
+              </a:rPr>
+              <a:t>可以简单记成：query.ts 负责一轮怎么跑，QueryEngine.ts 负责一段会话怎么活</a:t>
             </a:r>
           </a:p>
         </p:txBody>
@@ -8490,8 +9365,8 @@
         </p:nvSpPr>
         <p:spPr>
           <a:xfrm>
-            <a:off x="594360" y="411480"/>
-            <a:ext cx="10607040" cy="777240"/>
+            <a:off x="594360" y="384048"/>
+            <a:ext cx="10789920" cy="685800"/>
           </a:xfrm>
           <a:prstGeom prst="rect">
             <a:avLst/>
@@ -8504,15 +9379,14 @@
           </a:bodyPr>
           <a:lstStyle/>
           <a:p>
-            <a:pPr algn="l"/>
             <a:r>
               <a:rPr sz="2600" b="1">
                 <a:solidFill>
                   <a:srgbClr val="0B1F44"/>
                 </a:solidFill>
-                <a:latin typeface="PingFang SC"/>
-              </a:rPr>
-              <a:t>启动阶段：先把 runtime surface 装好</a:t>
+                <a:latin typeface="Arial"/>
+              </a:rPr>
+              <a:t>为什么长会话还能稳定工作</a:t>
             </a:r>
           </a:p>
         </p:txBody>
@@ -8525,8 +9399,8 @@
         </p:nvSpPr>
         <p:spPr>
           <a:xfrm>
-            <a:off x="621792" y="1143000"/>
-            <a:ext cx="2194560" cy="36576"/>
+            <a:off x="621792" y="1078992"/>
+            <a:ext cx="2011680" cy="27432"/>
           </a:xfrm>
           <a:prstGeom prst="rect">
             <a:avLst/>
@@ -8568,8 +9442,8 @@
         </p:nvSpPr>
         <p:spPr>
           <a:xfrm>
-            <a:off x="822960" y="1554480"/>
-            <a:ext cx="10058400" cy="4389120"/>
+            <a:off x="777240" y="1508760"/>
+            <a:ext cx="10241280" cy="4389120"/>
           </a:xfrm>
           <a:prstGeom prst="rect">
             <a:avLst/>
@@ -8588,13 +9462,13 @@
               </a:spcAft>
             </a:pPr>
             <a:r>
-              <a:rPr sz="2000" b="0">
+              <a:rPr sz="1900" b="0">
                 <a:solidFill>
                   <a:srgbClr val="1F2937"/>
                 </a:solidFill>
-                <a:latin typeface="PingFang SC"/>
-              </a:rPr>
-              <a:t>参数解析与认证预热</a:t>
+                <a:latin typeface="Arial"/>
+              </a:rPr>
+              <a:t>sessionStorage.ts 维护 durable transcript</a:t>
             </a:r>
           </a:p>
           <a:p>
@@ -8604,13 +9478,13 @@
               </a:spcAft>
             </a:pPr>
             <a:r>
-              <a:rPr sz="2000" b="0">
+              <a:rPr sz="1900" b="0">
                 <a:solidFill>
                   <a:srgbClr val="1F2937"/>
                 </a:solidFill>
-                <a:latin typeface="PingFang SC"/>
-              </a:rPr>
-              <a:t>settings 合并、GrowthBook / telemetry 初始化</a:t>
+                <a:latin typeface="Arial"/>
+              </a:rPr>
+              <a:t>conversationRecovery.ts 会过滤坏消息并补 continuation</a:t>
             </a:r>
           </a:p>
           <a:p>
@@ -8620,13 +9494,13 @@
               </a:spcAft>
             </a:pPr>
             <a:r>
-              <a:rPr sz="2000" b="0">
+              <a:rPr sz="1900" b="0">
                 <a:solidFill>
                   <a:srgbClr val="1F2937"/>
                 </a:solidFill>
-                <a:latin typeface="PingFang SC"/>
-              </a:rPr>
-              <a:t>remote managed settings 与 policy limits 初始化</a:t>
+                <a:latin typeface="Arial"/>
+              </a:rPr>
+              <a:t>tool result budget / content replacement 保护 prompt cache prefix</a:t>
             </a:r>
           </a:p>
           <a:p>
@@ -8636,29 +9510,13 @@
               </a:spcAft>
             </a:pPr>
             <a:r>
-              <a:rPr sz="2000" b="0">
+              <a:rPr sz="1900" b="0">
                 <a:solidFill>
                   <a:srgbClr val="1F2937"/>
                 </a:solidFill>
-                <a:latin typeface="PingFang SC"/>
-              </a:rPr>
-              <a:t>commands / tools / MCP / skills 注册</a:t>
-            </a:r>
-          </a:p>
-          <a:p>
-            <a:pPr>
-              <a:spcAft>
-                <a:spcPts val="800"/>
-              </a:spcAft>
-            </a:pPr>
-            <a:r>
-              <a:rPr sz="2000" b="0">
-                <a:solidFill>
-                  <a:srgbClr val="1F2937"/>
-                </a:solidFill>
-                <a:latin typeface="PingFang SC"/>
-              </a:rPr>
-              <a:t>重点不是“启动聊天”，而是把整套运行时表面装配完成</a:t>
+                <a:latin typeface="Arial"/>
+              </a:rPr>
+              <a:t>compact 的目标不是简单摘要，而是重建可继续工作的最小 context</a:t>
             </a:r>
           </a:p>
         </p:txBody>

--- a/docs/zh/00-代码总览与运行时走读-WPS兼容版.pptx
+++ b/docs/zh/00-代码总览与运行时走读-WPS兼容版.pptx
@@ -21,6 +21,11 @@
     <p:sldId id="269" r:id="rId20"/>
     <p:sldId id="270" r:id="rId21"/>
     <p:sldId id="271" r:id="rId22"/>
+    <p:sldId id="272" r:id="rId23"/>
+    <p:sldId id="273" r:id="rId24"/>
+    <p:sldId id="274" r:id="rId25"/>
+    <p:sldId id="275" r:id="rId26"/>
+    <p:sldId id="276" r:id="rId27"/>
   </p:sldIdLst>
   <p:sldSz cx="12191695" cy="6858000" type="screen4x3"/>
   <p:notesSz cx="6858000" cy="9144000"/>
@@ -3289,7 +3294,7 @@
                 </a:solidFill>
                 <a:latin typeface="Arial"/>
               </a:rPr>
-              <a:t>compact：分层整理，不是一刀切摘要</a:t>
+              <a:t>tool result budget / content replacement 很关键</a:t>
             </a:r>
           </a:p>
         </p:txBody>
@@ -3339,424 +3344,14 @@
       </p:sp>
       <p:sp>
         <p:nvSpPr>
-          <p:cNvPr id="4" name="Rounded Rectangle 3"/>
-          <p:cNvSpPr/>
-          <p:nvPr/>
-        </p:nvSpPr>
-        <p:spPr>
-          <a:xfrm>
-            <a:off x="731520" y="1828800"/>
-            <a:ext cx="1371600" cy="640080"/>
-          </a:xfrm>
-          <a:prstGeom prst="roundRect">
-            <a:avLst/>
-          </a:prstGeom>
-          <a:solidFill>
-            <a:srgbClr val="FFFFFF"/>
-          </a:solidFill>
-          <a:ln>
-            <a:solidFill>
-              <a:srgbClr val="205295"/>
-            </a:solidFill>
-          </a:ln>
-        </p:spPr>
-        <p:style>
-          <a:lnRef idx="1">
-            <a:schemeClr val="accent1"/>
-          </a:lnRef>
-          <a:fillRef idx="3">
-            <a:schemeClr val="accent1"/>
-          </a:fillRef>
-          <a:effectRef idx="2">
-            <a:schemeClr val="accent1"/>
-          </a:effectRef>
-          <a:fontRef idx="minor">
-            <a:schemeClr val="lt1"/>
-          </a:fontRef>
-        </p:style>
-        <p:txBody>
-          <a:bodyPr rtlCol="0" anchor="ctr" wrap="square" lIns="76200" rIns="76200" tIns="50800" bIns="50800"/>
-          <a:lstStyle/>
-          <a:p>
-            <a:pPr algn="ctr"/>
-            <a:r>
-              <a:rPr sz="1600" b="1">
-                <a:solidFill>
-                  <a:srgbClr val="0B1F44"/>
-                </a:solidFill>
-                <a:latin typeface="Arial"/>
-              </a:rPr>
-              <a:t>snip</a:t>
-            </a:r>
-          </a:p>
-        </p:txBody>
-      </p:sp>
-      <p:sp>
-        <p:nvSpPr>
-          <p:cNvPr id="5" name="Rounded Rectangle 4"/>
-          <p:cNvSpPr/>
-          <p:nvPr/>
-        </p:nvSpPr>
-        <p:spPr>
-          <a:xfrm>
-            <a:off x="2468880" y="1828800"/>
-            <a:ext cx="1645920" cy="640080"/>
-          </a:xfrm>
-          <a:prstGeom prst="roundRect">
-            <a:avLst/>
-          </a:prstGeom>
-          <a:solidFill>
-            <a:srgbClr val="FFFFFF"/>
-          </a:solidFill>
-          <a:ln>
-            <a:solidFill>
-              <a:srgbClr val="205295"/>
-            </a:solidFill>
-          </a:ln>
-        </p:spPr>
-        <p:style>
-          <a:lnRef idx="1">
-            <a:schemeClr val="accent1"/>
-          </a:lnRef>
-          <a:fillRef idx="3">
-            <a:schemeClr val="accent1"/>
-          </a:fillRef>
-          <a:effectRef idx="2">
-            <a:schemeClr val="accent1"/>
-          </a:effectRef>
-          <a:fontRef idx="minor">
-            <a:schemeClr val="lt1"/>
-          </a:fontRef>
-        </p:style>
-        <p:txBody>
-          <a:bodyPr rtlCol="0" anchor="ctr" wrap="square" lIns="76200" rIns="76200" tIns="50800" bIns="50800"/>
-          <a:lstStyle/>
-          <a:p>
-            <a:pPr algn="ctr"/>
-            <a:r>
-              <a:rPr sz="1600" b="1">
-                <a:solidFill>
-                  <a:srgbClr val="0B1F44"/>
-                </a:solidFill>
-                <a:latin typeface="Arial"/>
-              </a:rPr>
-              <a:t>microcompact</a:t>
-            </a:r>
-          </a:p>
-        </p:txBody>
-      </p:sp>
-      <p:sp>
-        <p:nvSpPr>
-          <p:cNvPr id="6" name="Rounded Rectangle 5"/>
-          <p:cNvSpPr/>
-          <p:nvPr/>
-        </p:nvSpPr>
-        <p:spPr>
-          <a:xfrm>
-            <a:off x="4480560" y="1828800"/>
-            <a:ext cx="1737360" cy="640080"/>
-          </a:xfrm>
-          <a:prstGeom prst="roundRect">
-            <a:avLst/>
-          </a:prstGeom>
-          <a:solidFill>
-            <a:srgbClr val="FFFFFF"/>
-          </a:solidFill>
-          <a:ln>
-            <a:solidFill>
-              <a:srgbClr val="205295"/>
-            </a:solidFill>
-          </a:ln>
-        </p:spPr>
-        <p:style>
-          <a:lnRef idx="1">
-            <a:schemeClr val="accent1"/>
-          </a:lnRef>
-          <a:fillRef idx="3">
-            <a:schemeClr val="accent1"/>
-          </a:fillRef>
-          <a:effectRef idx="2">
-            <a:schemeClr val="accent1"/>
-          </a:effectRef>
-          <a:fontRef idx="minor">
-            <a:schemeClr val="lt1"/>
-          </a:fontRef>
-        </p:style>
-        <p:txBody>
-          <a:bodyPr rtlCol="0" anchor="ctr" wrap="square" lIns="76200" rIns="76200" tIns="50800" bIns="50800"/>
-          <a:lstStyle/>
-          <a:p>
-            <a:pPr algn="ctr"/>
-            <a:r>
-              <a:rPr sz="1600" b="1">
-                <a:solidFill>
-                  <a:srgbClr val="0B1F44"/>
-                </a:solidFill>
-                <a:latin typeface="Arial"/>
-              </a:rPr>
-              <a:t>collapse</a:t>
-            </a:r>
-          </a:p>
-        </p:txBody>
-      </p:sp>
-      <p:sp>
-        <p:nvSpPr>
-          <p:cNvPr id="7" name="Rounded Rectangle 6"/>
-          <p:cNvSpPr/>
-          <p:nvPr/>
-        </p:nvSpPr>
-        <p:spPr>
-          <a:xfrm>
-            <a:off x="6583680" y="1828800"/>
-            <a:ext cx="1645920" cy="640080"/>
-          </a:xfrm>
-          <a:prstGeom prst="roundRect">
-            <a:avLst/>
-          </a:prstGeom>
-          <a:solidFill>
-            <a:srgbClr val="FFFFFF"/>
-          </a:solidFill>
-          <a:ln>
-            <a:solidFill>
-              <a:srgbClr val="205295"/>
-            </a:solidFill>
-          </a:ln>
-        </p:spPr>
-        <p:style>
-          <a:lnRef idx="1">
-            <a:schemeClr val="accent1"/>
-          </a:lnRef>
-          <a:fillRef idx="3">
-            <a:schemeClr val="accent1"/>
-          </a:fillRef>
-          <a:effectRef idx="2">
-            <a:schemeClr val="accent1"/>
-          </a:effectRef>
-          <a:fontRef idx="minor">
-            <a:schemeClr val="lt1"/>
-          </a:fontRef>
-        </p:style>
-        <p:txBody>
-          <a:bodyPr rtlCol="0" anchor="ctr" wrap="square" lIns="76200" rIns="76200" tIns="50800" bIns="50800"/>
-          <a:lstStyle/>
-          <a:p>
-            <a:pPr algn="ctr"/>
-            <a:r>
-              <a:rPr sz="1600" b="1">
-                <a:solidFill>
-                  <a:srgbClr val="0B1F44"/>
-                </a:solidFill>
-                <a:latin typeface="Arial"/>
-              </a:rPr>
-              <a:t>autocompact</a:t>
-            </a:r>
-          </a:p>
-        </p:txBody>
-      </p:sp>
-      <p:sp>
-        <p:nvSpPr>
-          <p:cNvPr id="8" name="Rounded Rectangle 7"/>
-          <p:cNvSpPr/>
-          <p:nvPr/>
-        </p:nvSpPr>
-        <p:spPr>
-          <a:xfrm>
-            <a:off x="8595360" y="1828800"/>
-            <a:ext cx="2011680" cy="640080"/>
-          </a:xfrm>
-          <a:prstGeom prst="roundRect">
-            <a:avLst/>
-          </a:prstGeom>
-          <a:solidFill>
-            <a:srgbClr val="FFFFFF"/>
-          </a:solidFill>
-          <a:ln>
-            <a:solidFill>
-              <a:srgbClr val="205295"/>
-            </a:solidFill>
-          </a:ln>
-        </p:spPr>
-        <p:style>
-          <a:lnRef idx="1">
-            <a:schemeClr val="accent1"/>
-          </a:lnRef>
-          <a:fillRef idx="3">
-            <a:schemeClr val="accent1"/>
-          </a:fillRef>
-          <a:effectRef idx="2">
-            <a:schemeClr val="accent1"/>
-          </a:effectRef>
-          <a:fontRef idx="minor">
-            <a:schemeClr val="lt1"/>
-          </a:fontRef>
-        </p:style>
-        <p:txBody>
-          <a:bodyPr rtlCol="0" anchor="ctr" wrap="square" lIns="76200" rIns="76200" tIns="50800" bIns="50800"/>
-          <a:lstStyle/>
-          <a:p>
-            <a:pPr algn="ctr"/>
-            <a:r>
-              <a:rPr sz="1600" b="1">
-                <a:solidFill>
-                  <a:srgbClr val="0B1F44"/>
-                </a:solidFill>
-                <a:latin typeface="Arial"/>
-              </a:rPr>
-              <a:t>reactive compact</a:t>
-            </a:r>
-          </a:p>
-        </p:txBody>
-      </p:sp>
-      <p:cxnSp>
-        <p:nvCxnSpPr>
-          <p:cNvPr id="9" name="Connector 8"/>
-          <p:cNvCxnSpPr/>
-          <p:nvPr/>
-        </p:nvCxnSpPr>
-        <p:spPr>
-          <a:xfrm>
-            <a:off x="2103120" y="2148840"/>
-            <a:ext cx="365760" cy="0"/>
-          </a:xfrm>
-          <a:prstGeom prst="line">
-            <a:avLst/>
-          </a:prstGeom>
-          <a:ln w="25400">
-            <a:solidFill>
-              <a:srgbClr val="205295"/>
-            </a:solidFill>
-          </a:ln>
-        </p:spPr>
-        <p:style>
-          <a:lnRef idx="2">
-            <a:schemeClr val="accent1"/>
-          </a:lnRef>
-          <a:fillRef idx="0">
-            <a:schemeClr val="accent1"/>
-          </a:fillRef>
-          <a:effectRef idx="1">
-            <a:schemeClr val="accent1"/>
-          </a:effectRef>
-          <a:fontRef idx="minor">
-            <a:schemeClr val="tx1"/>
-          </a:fontRef>
-        </p:style>
-      </p:cxnSp>
-      <p:cxnSp>
-        <p:nvCxnSpPr>
-          <p:cNvPr id="10" name="Connector 9"/>
-          <p:cNvCxnSpPr/>
-          <p:nvPr/>
-        </p:nvCxnSpPr>
-        <p:spPr>
-          <a:xfrm>
-            <a:off x="4114800" y="2148840"/>
-            <a:ext cx="365760" cy="0"/>
-          </a:xfrm>
-          <a:prstGeom prst="line">
-            <a:avLst/>
-          </a:prstGeom>
-          <a:ln w="25400">
-            <a:solidFill>
-              <a:srgbClr val="205295"/>
-            </a:solidFill>
-          </a:ln>
-        </p:spPr>
-        <p:style>
-          <a:lnRef idx="2">
-            <a:schemeClr val="accent1"/>
-          </a:lnRef>
-          <a:fillRef idx="0">
-            <a:schemeClr val="accent1"/>
-          </a:fillRef>
-          <a:effectRef idx="1">
-            <a:schemeClr val="accent1"/>
-          </a:effectRef>
-          <a:fontRef idx="minor">
-            <a:schemeClr val="tx1"/>
-          </a:fontRef>
-        </p:style>
-      </p:cxnSp>
-      <p:cxnSp>
-        <p:nvCxnSpPr>
-          <p:cNvPr id="11" name="Connector 10"/>
-          <p:cNvCxnSpPr/>
-          <p:nvPr/>
-        </p:nvCxnSpPr>
-        <p:spPr>
-          <a:xfrm>
-            <a:off x="6217920" y="2148840"/>
-            <a:ext cx="365760" cy="0"/>
-          </a:xfrm>
-          <a:prstGeom prst="line">
-            <a:avLst/>
-          </a:prstGeom>
-          <a:ln w="25400">
-            <a:solidFill>
-              <a:srgbClr val="205295"/>
-            </a:solidFill>
-          </a:ln>
-        </p:spPr>
-        <p:style>
-          <a:lnRef idx="2">
-            <a:schemeClr val="accent1"/>
-          </a:lnRef>
-          <a:fillRef idx="0">
-            <a:schemeClr val="accent1"/>
-          </a:fillRef>
-          <a:effectRef idx="1">
-            <a:schemeClr val="accent1"/>
-          </a:effectRef>
-          <a:fontRef idx="minor">
-            <a:schemeClr val="tx1"/>
-          </a:fontRef>
-        </p:style>
-      </p:cxnSp>
-      <p:cxnSp>
-        <p:nvCxnSpPr>
-          <p:cNvPr id="12" name="Connector 11"/>
-          <p:cNvCxnSpPr/>
-          <p:nvPr/>
-        </p:nvCxnSpPr>
-        <p:spPr>
-          <a:xfrm>
-            <a:off x="8229600" y="2148840"/>
-            <a:ext cx="365760" cy="0"/>
-          </a:xfrm>
-          <a:prstGeom prst="line">
-            <a:avLst/>
-          </a:prstGeom>
-          <a:ln w="25400">
-            <a:solidFill>
-              <a:srgbClr val="205295"/>
-            </a:solidFill>
-          </a:ln>
-        </p:spPr>
-        <p:style>
-          <a:lnRef idx="2">
-            <a:schemeClr val="accent1"/>
-          </a:lnRef>
-          <a:fillRef idx="0">
-            <a:schemeClr val="accent1"/>
-          </a:fillRef>
-          <a:effectRef idx="1">
-            <a:schemeClr val="accent1"/>
-          </a:effectRef>
-          <a:fontRef idx="minor">
-            <a:schemeClr val="tx1"/>
-          </a:fontRef>
-        </p:style>
-      </p:cxnSp>
-      <p:sp>
-        <p:nvSpPr>
-          <p:cNvPr id="13" name="TextBox 12"/>
+          <p:cNvPr id="4" name="TextBox 3"/>
           <p:cNvSpPr txBox="1"/>
           <p:nvPr/>
         </p:nvSpPr>
         <p:spPr>
           <a:xfrm>
-            <a:off x="822960" y="3291840"/>
-            <a:ext cx="10149840" cy="1828800"/>
+            <a:off x="777240" y="1645920"/>
+            <a:ext cx="10241280" cy="3108960"/>
           </a:xfrm>
           <a:prstGeom prst="rect">
             <a:avLst/>
@@ -3775,13 +3370,13 @@
               </a:spcAft>
             </a:pPr>
             <a:r>
-              <a:rPr sz="1700" b="0">
+              <a:rPr sz="1900" b="0">
                 <a:solidFill>
                   <a:srgbClr val="1F2937"/>
                 </a:solidFill>
                 <a:latin typeface="Arial"/>
               </a:rPr>
-              <a:t>要按两条轴来理解：主动整理 vs 被动恢复；轻量缩减 vs full compact</a:t>
+              <a:t>它解决的不是“截断输出”，而是“冻结输出命运”</a:t>
             </a:r>
           </a:p>
           <a:p>
@@ -3791,13 +3386,13 @@
               </a:spcAft>
             </a:pPr>
             <a:r>
-              <a:rPr sz="1700" b="0">
+              <a:rPr sz="1900" b="0">
                 <a:solidFill>
                   <a:srgbClr val="1F2937"/>
                 </a:solidFill>
                 <a:latin typeface="Arial"/>
               </a:rPr>
-              <a:t>full compact 后保留的不是只有 summary，还包括 boundary、文件恢复、plan_mode、invoked_skills、deferred delta</a:t>
+              <a:t>某个 tool_use_id 一旦决定替换，后面必须始终复用同一 replacement string</a:t>
             </a:r>
           </a:p>
           <a:p>
@@ -3807,13 +3402,63 @@
               </a:spcAft>
             </a:pPr>
             <a:r>
-              <a:rPr sz="1700" b="0">
+              <a:rPr sz="1900" b="0">
                 <a:solidFill>
                   <a:srgbClr val="1F2937"/>
                 </a:solidFill>
                 <a:latin typeface="Arial"/>
               </a:rPr>
-              <a:t>本质上是在重建可继续工作的最小 context</a:t>
+              <a:t>大输出先外化到磁盘，再用稳定 preview 进入 context</a:t>
+            </a:r>
+          </a:p>
+          <a:p>
+            <a:pPr>
+              <a:spcAft>
+                <a:spcPts val="800"/>
+              </a:spcAft>
+            </a:pPr>
+            <a:r>
+              <a:rPr sz="1900" b="0">
+                <a:solidFill>
+                  <a:srgbClr val="1F2937"/>
+                </a:solidFill>
+                <a:latin typeface="Arial"/>
+              </a:rPr>
+              <a:t>恢复后还要重放相同 replacement，才能保住 prompt cache prefix</a:t>
+            </a:r>
+          </a:p>
+        </p:txBody>
+      </p:sp>
+      <p:sp>
+        <p:nvSpPr>
+          <p:cNvPr id="5" name="TextBox 4"/>
+          <p:cNvSpPr txBox="1"/>
+          <p:nvPr/>
+        </p:nvSpPr>
+        <p:spPr>
+          <a:xfrm>
+            <a:off x="841248" y="5532120"/>
+            <a:ext cx="10058400" cy="502920"/>
+          </a:xfrm>
+          <a:prstGeom prst="rect">
+            <a:avLst/>
+          </a:prstGeom>
+          <a:noFill/>
+        </p:spPr>
+        <p:txBody>
+          <a:bodyPr wrap="square" lIns="76200" rIns="76200" tIns="50800" bIns="50800">
+            <a:spAutoFit/>
+          </a:bodyPr>
+          <a:lstStyle/>
+          <a:p>
+            <a:r>
+              <a:rPr sz="1400" b="0">
+                <a:solidFill>
+                  <a:srgbClr val="475569"/>
+                </a:solidFill>
+                <a:latin typeface="Arial"/>
+              </a:rPr>
+              <a:t>这层是 Claude Code 和很多 demo agent 最大的差别之一。</a:t>
             </a:r>
           </a:p>
         </p:txBody>
@@ -3873,7 +3518,7 @@
                 </a:solidFill>
                 <a:latin typeface="Arial"/>
               </a:rPr>
-              <a:t>context 不是只靠 messages</a:t>
+              <a:t>compact：分层整理，不是一刀切摘要</a:t>
             </a:r>
           </a:p>
         </p:txBody>
@@ -3923,48 +3568,424 @@
       </p:sp>
       <p:sp>
         <p:nvSpPr>
-          <p:cNvPr id="4" name="TextBox 3"/>
+          <p:cNvPr id="4" name="Rounded Rectangle 3"/>
+          <p:cNvSpPr/>
+          <p:nvPr/>
+        </p:nvSpPr>
+        <p:spPr>
+          <a:xfrm>
+            <a:off x="731520" y="1828800"/>
+            <a:ext cx="1371600" cy="640080"/>
+          </a:xfrm>
+          <a:prstGeom prst="roundRect">
+            <a:avLst/>
+          </a:prstGeom>
+          <a:solidFill>
+            <a:srgbClr val="FFFFFF"/>
+          </a:solidFill>
+          <a:ln>
+            <a:solidFill>
+              <a:srgbClr val="205295"/>
+            </a:solidFill>
+          </a:ln>
+        </p:spPr>
+        <p:style>
+          <a:lnRef idx="1">
+            <a:schemeClr val="accent1"/>
+          </a:lnRef>
+          <a:fillRef idx="3">
+            <a:schemeClr val="accent1"/>
+          </a:fillRef>
+          <a:effectRef idx="2">
+            <a:schemeClr val="accent1"/>
+          </a:effectRef>
+          <a:fontRef idx="minor">
+            <a:schemeClr val="lt1"/>
+          </a:fontRef>
+        </p:style>
+        <p:txBody>
+          <a:bodyPr rtlCol="0" anchor="ctr" wrap="square" lIns="76200" rIns="76200" tIns="50800" bIns="50800"/>
+          <a:lstStyle/>
+          <a:p>
+            <a:pPr algn="ctr"/>
+            <a:r>
+              <a:rPr sz="1600" b="1">
+                <a:solidFill>
+                  <a:srgbClr val="0B1F44"/>
+                </a:solidFill>
+                <a:latin typeface="Arial"/>
+              </a:rPr>
+              <a:t>snip</a:t>
+            </a:r>
+          </a:p>
+        </p:txBody>
+      </p:sp>
+      <p:sp>
+        <p:nvSpPr>
+          <p:cNvPr id="5" name="Rounded Rectangle 4"/>
+          <p:cNvSpPr/>
+          <p:nvPr/>
+        </p:nvSpPr>
+        <p:spPr>
+          <a:xfrm>
+            <a:off x="2468880" y="1828800"/>
+            <a:ext cx="1645920" cy="640080"/>
+          </a:xfrm>
+          <a:prstGeom prst="roundRect">
+            <a:avLst/>
+          </a:prstGeom>
+          <a:solidFill>
+            <a:srgbClr val="FFFFFF"/>
+          </a:solidFill>
+          <a:ln>
+            <a:solidFill>
+              <a:srgbClr val="205295"/>
+            </a:solidFill>
+          </a:ln>
+        </p:spPr>
+        <p:style>
+          <a:lnRef idx="1">
+            <a:schemeClr val="accent1"/>
+          </a:lnRef>
+          <a:fillRef idx="3">
+            <a:schemeClr val="accent1"/>
+          </a:fillRef>
+          <a:effectRef idx="2">
+            <a:schemeClr val="accent1"/>
+          </a:effectRef>
+          <a:fontRef idx="minor">
+            <a:schemeClr val="lt1"/>
+          </a:fontRef>
+        </p:style>
+        <p:txBody>
+          <a:bodyPr rtlCol="0" anchor="ctr" wrap="square" lIns="76200" rIns="76200" tIns="50800" bIns="50800"/>
+          <a:lstStyle/>
+          <a:p>
+            <a:pPr algn="ctr"/>
+            <a:r>
+              <a:rPr sz="1600" b="1">
+                <a:solidFill>
+                  <a:srgbClr val="0B1F44"/>
+                </a:solidFill>
+                <a:latin typeface="Arial"/>
+              </a:rPr>
+              <a:t>microcompact</a:t>
+            </a:r>
+          </a:p>
+        </p:txBody>
+      </p:sp>
+      <p:sp>
+        <p:nvSpPr>
+          <p:cNvPr id="6" name="Rounded Rectangle 5"/>
+          <p:cNvSpPr/>
+          <p:nvPr/>
+        </p:nvSpPr>
+        <p:spPr>
+          <a:xfrm>
+            <a:off x="4480560" y="1828800"/>
+            <a:ext cx="1737360" cy="640080"/>
+          </a:xfrm>
+          <a:prstGeom prst="roundRect">
+            <a:avLst/>
+          </a:prstGeom>
+          <a:solidFill>
+            <a:srgbClr val="FFFFFF"/>
+          </a:solidFill>
+          <a:ln>
+            <a:solidFill>
+              <a:srgbClr val="205295"/>
+            </a:solidFill>
+          </a:ln>
+        </p:spPr>
+        <p:style>
+          <a:lnRef idx="1">
+            <a:schemeClr val="accent1"/>
+          </a:lnRef>
+          <a:fillRef idx="3">
+            <a:schemeClr val="accent1"/>
+          </a:fillRef>
+          <a:effectRef idx="2">
+            <a:schemeClr val="accent1"/>
+          </a:effectRef>
+          <a:fontRef idx="minor">
+            <a:schemeClr val="lt1"/>
+          </a:fontRef>
+        </p:style>
+        <p:txBody>
+          <a:bodyPr rtlCol="0" anchor="ctr" wrap="square" lIns="76200" rIns="76200" tIns="50800" bIns="50800"/>
+          <a:lstStyle/>
+          <a:p>
+            <a:pPr algn="ctr"/>
+            <a:r>
+              <a:rPr sz="1600" b="1">
+                <a:solidFill>
+                  <a:srgbClr val="0B1F44"/>
+                </a:solidFill>
+                <a:latin typeface="Arial"/>
+              </a:rPr>
+              <a:t>collapse</a:t>
+            </a:r>
+          </a:p>
+        </p:txBody>
+      </p:sp>
+      <p:sp>
+        <p:nvSpPr>
+          <p:cNvPr id="7" name="Rounded Rectangle 6"/>
+          <p:cNvSpPr/>
+          <p:nvPr/>
+        </p:nvSpPr>
+        <p:spPr>
+          <a:xfrm>
+            <a:off x="6583680" y="1828800"/>
+            <a:ext cx="1645920" cy="640080"/>
+          </a:xfrm>
+          <a:prstGeom prst="roundRect">
+            <a:avLst/>
+          </a:prstGeom>
+          <a:solidFill>
+            <a:srgbClr val="FFFFFF"/>
+          </a:solidFill>
+          <a:ln>
+            <a:solidFill>
+              <a:srgbClr val="205295"/>
+            </a:solidFill>
+          </a:ln>
+        </p:spPr>
+        <p:style>
+          <a:lnRef idx="1">
+            <a:schemeClr val="accent1"/>
+          </a:lnRef>
+          <a:fillRef idx="3">
+            <a:schemeClr val="accent1"/>
+          </a:fillRef>
+          <a:effectRef idx="2">
+            <a:schemeClr val="accent1"/>
+          </a:effectRef>
+          <a:fontRef idx="minor">
+            <a:schemeClr val="lt1"/>
+          </a:fontRef>
+        </p:style>
+        <p:txBody>
+          <a:bodyPr rtlCol="0" anchor="ctr" wrap="square" lIns="76200" rIns="76200" tIns="50800" bIns="50800"/>
+          <a:lstStyle/>
+          <a:p>
+            <a:pPr algn="ctr"/>
+            <a:r>
+              <a:rPr sz="1600" b="1">
+                <a:solidFill>
+                  <a:srgbClr val="0B1F44"/>
+                </a:solidFill>
+                <a:latin typeface="Arial"/>
+              </a:rPr>
+              <a:t>autocompact</a:t>
+            </a:r>
+          </a:p>
+        </p:txBody>
+      </p:sp>
+      <p:sp>
+        <p:nvSpPr>
+          <p:cNvPr id="8" name="Rounded Rectangle 7"/>
+          <p:cNvSpPr/>
+          <p:nvPr/>
+        </p:nvSpPr>
+        <p:spPr>
+          <a:xfrm>
+            <a:off x="8595360" y="1828800"/>
+            <a:ext cx="2011680" cy="640080"/>
+          </a:xfrm>
+          <a:prstGeom prst="roundRect">
+            <a:avLst/>
+          </a:prstGeom>
+          <a:solidFill>
+            <a:srgbClr val="FFFFFF"/>
+          </a:solidFill>
+          <a:ln>
+            <a:solidFill>
+              <a:srgbClr val="205295"/>
+            </a:solidFill>
+          </a:ln>
+        </p:spPr>
+        <p:style>
+          <a:lnRef idx="1">
+            <a:schemeClr val="accent1"/>
+          </a:lnRef>
+          <a:fillRef idx="3">
+            <a:schemeClr val="accent1"/>
+          </a:fillRef>
+          <a:effectRef idx="2">
+            <a:schemeClr val="accent1"/>
+          </a:effectRef>
+          <a:fontRef idx="minor">
+            <a:schemeClr val="lt1"/>
+          </a:fontRef>
+        </p:style>
+        <p:txBody>
+          <a:bodyPr rtlCol="0" anchor="ctr" wrap="square" lIns="76200" rIns="76200" tIns="50800" bIns="50800"/>
+          <a:lstStyle/>
+          <a:p>
+            <a:pPr algn="ctr"/>
+            <a:r>
+              <a:rPr sz="1600" b="1">
+                <a:solidFill>
+                  <a:srgbClr val="0B1F44"/>
+                </a:solidFill>
+                <a:latin typeface="Arial"/>
+              </a:rPr>
+              <a:t>reactive compact</a:t>
+            </a:r>
+          </a:p>
+        </p:txBody>
+      </p:sp>
+      <p:cxnSp>
+        <p:nvCxnSpPr>
+          <p:cNvPr id="9" name="Connector 8"/>
+          <p:cNvCxnSpPr/>
+          <p:nvPr/>
+        </p:nvCxnSpPr>
+        <p:spPr>
+          <a:xfrm>
+            <a:off x="2103120" y="2148840"/>
+            <a:ext cx="365760" cy="0"/>
+          </a:xfrm>
+          <a:prstGeom prst="line">
+            <a:avLst/>
+          </a:prstGeom>
+          <a:ln w="25400">
+            <a:solidFill>
+              <a:srgbClr val="205295"/>
+            </a:solidFill>
+          </a:ln>
+        </p:spPr>
+        <p:style>
+          <a:lnRef idx="2">
+            <a:schemeClr val="accent1"/>
+          </a:lnRef>
+          <a:fillRef idx="0">
+            <a:schemeClr val="accent1"/>
+          </a:fillRef>
+          <a:effectRef idx="1">
+            <a:schemeClr val="accent1"/>
+          </a:effectRef>
+          <a:fontRef idx="minor">
+            <a:schemeClr val="tx1"/>
+          </a:fontRef>
+        </p:style>
+      </p:cxnSp>
+      <p:cxnSp>
+        <p:nvCxnSpPr>
+          <p:cNvPr id="10" name="Connector 9"/>
+          <p:cNvCxnSpPr/>
+          <p:nvPr/>
+        </p:nvCxnSpPr>
+        <p:spPr>
+          <a:xfrm>
+            <a:off x="4114800" y="2148840"/>
+            <a:ext cx="365760" cy="0"/>
+          </a:xfrm>
+          <a:prstGeom prst="line">
+            <a:avLst/>
+          </a:prstGeom>
+          <a:ln w="25400">
+            <a:solidFill>
+              <a:srgbClr val="205295"/>
+            </a:solidFill>
+          </a:ln>
+        </p:spPr>
+        <p:style>
+          <a:lnRef idx="2">
+            <a:schemeClr val="accent1"/>
+          </a:lnRef>
+          <a:fillRef idx="0">
+            <a:schemeClr val="accent1"/>
+          </a:fillRef>
+          <a:effectRef idx="1">
+            <a:schemeClr val="accent1"/>
+          </a:effectRef>
+          <a:fontRef idx="minor">
+            <a:schemeClr val="tx1"/>
+          </a:fontRef>
+        </p:style>
+      </p:cxnSp>
+      <p:cxnSp>
+        <p:nvCxnSpPr>
+          <p:cNvPr id="11" name="Connector 10"/>
+          <p:cNvCxnSpPr/>
+          <p:nvPr/>
+        </p:nvCxnSpPr>
+        <p:spPr>
+          <a:xfrm>
+            <a:off x="6217920" y="2148840"/>
+            <a:ext cx="365760" cy="0"/>
+          </a:xfrm>
+          <a:prstGeom prst="line">
+            <a:avLst/>
+          </a:prstGeom>
+          <a:ln w="25400">
+            <a:solidFill>
+              <a:srgbClr val="205295"/>
+            </a:solidFill>
+          </a:ln>
+        </p:spPr>
+        <p:style>
+          <a:lnRef idx="2">
+            <a:schemeClr val="accent1"/>
+          </a:lnRef>
+          <a:fillRef idx="0">
+            <a:schemeClr val="accent1"/>
+          </a:fillRef>
+          <a:effectRef idx="1">
+            <a:schemeClr val="accent1"/>
+          </a:effectRef>
+          <a:fontRef idx="minor">
+            <a:schemeClr val="tx1"/>
+          </a:fontRef>
+        </p:style>
+      </p:cxnSp>
+      <p:cxnSp>
+        <p:nvCxnSpPr>
+          <p:cNvPr id="12" name="Connector 11"/>
+          <p:cNvCxnSpPr/>
+          <p:nvPr/>
+        </p:nvCxnSpPr>
+        <p:spPr>
+          <a:xfrm>
+            <a:off x="8229600" y="2148840"/>
+            <a:ext cx="365760" cy="0"/>
+          </a:xfrm>
+          <a:prstGeom prst="line">
+            <a:avLst/>
+          </a:prstGeom>
+          <a:ln w="25400">
+            <a:solidFill>
+              <a:srgbClr val="205295"/>
+            </a:solidFill>
+          </a:ln>
+        </p:spPr>
+        <p:style>
+          <a:lnRef idx="2">
+            <a:schemeClr val="accent1"/>
+          </a:lnRef>
+          <a:fillRef idx="0">
+            <a:schemeClr val="accent1"/>
+          </a:fillRef>
+          <a:effectRef idx="1">
+            <a:schemeClr val="accent1"/>
+          </a:effectRef>
+          <a:fontRef idx="minor">
+            <a:schemeClr val="tx1"/>
+          </a:fontRef>
+        </p:style>
+      </p:cxnSp>
+      <p:sp>
+        <p:nvSpPr>
+          <p:cNvPr id="13" name="TextBox 12"/>
           <p:cNvSpPr txBox="1"/>
           <p:nvPr/>
         </p:nvSpPr>
         <p:spPr>
           <a:xfrm>
-            <a:off x="731520" y="1600200"/>
-            <a:ext cx="4389120" cy="457200"/>
-          </a:xfrm>
-          <a:prstGeom prst="rect">
-            <a:avLst/>
-          </a:prstGeom>
-          <a:noFill/>
-        </p:spPr>
-        <p:txBody>
-          <a:bodyPr wrap="none">
-            <a:spAutoFit/>
-          </a:bodyPr>
-          <a:lstStyle/>
-          <a:p>
-            <a:r>
-              <a:rPr sz="1800" b="1">
-                <a:solidFill>
-                  <a:srgbClr val="205295"/>
-                </a:solidFill>
-                <a:latin typeface="Arial"/>
-              </a:rPr>
-              <a:t>Skills / attachments</a:t>
-            </a:r>
-          </a:p>
-        </p:txBody>
-      </p:sp>
-      <p:sp>
-        <p:nvSpPr>
-          <p:cNvPr id="5" name="TextBox 4"/>
-          <p:cNvSpPr txBox="1"/>
-          <p:nvPr/>
-        </p:nvSpPr>
-        <p:spPr>
-          <a:xfrm>
-            <a:off x="731520" y="2011680"/>
-            <a:ext cx="4389120" cy="3200400"/>
+            <a:off x="822960" y="3291840"/>
+            <a:ext cx="10149840" cy="1828800"/>
           </a:xfrm>
           <a:prstGeom prst="rect">
             <a:avLst/>
@@ -3989,7 +4010,7 @@
                 </a:solidFill>
                 <a:latin typeface="Arial"/>
               </a:rPr>
-              <a:t>skill 被扫描到只是 capability 可见</a:t>
+              <a:t>要按两条轴来理解：主动整理 vs 被动恢复；轻量缩减 vs full compact</a:t>
             </a:r>
           </a:p>
           <a:p>
@@ -4005,7 +4026,7 @@
                 </a:solidFill>
                 <a:latin typeface="Arial"/>
               </a:rPr>
-              <a:t>真正调用 skill 时，正文才进入 context</a:t>
+              <a:t>full compact 后保留的不是只有 summary，还包括 boundary、文件恢复、plan_mode、invoked_skills、deferred delta</a:t>
             </a:r>
           </a:p>
           <a:p>
@@ -4021,128 +4042,7 @@
                 </a:solidFill>
                 <a:latin typeface="Arial"/>
               </a:rPr>
-              <a:t>attachments.ts 会按 turn 注入 memories、plan_mode、mailbox、delta 等工作面信息</a:t>
-            </a:r>
-          </a:p>
-        </p:txBody>
-      </p:sp>
-      <p:sp>
-        <p:nvSpPr>
-          <p:cNvPr id="6" name="TextBox 5"/>
-          <p:cNvSpPr txBox="1"/>
-          <p:nvPr/>
-        </p:nvSpPr>
-        <p:spPr>
-          <a:xfrm>
-            <a:off x="6217920" y="1600200"/>
-            <a:ext cx="4389120" cy="457200"/>
-          </a:xfrm>
-          <a:prstGeom prst="rect">
-            <a:avLst/>
-          </a:prstGeom>
-          <a:noFill/>
-        </p:spPr>
-        <p:txBody>
-          <a:bodyPr wrap="none">
-            <a:spAutoFit/>
-          </a:bodyPr>
-          <a:lstStyle/>
-          <a:p>
-            <a:r>
-              <a:rPr sz="1800" b="1">
-                <a:solidFill>
-                  <a:srgbClr val="205295"/>
-                </a:solidFill>
-                <a:latin typeface="Arial"/>
-              </a:rPr>
-              <a:t>关键状态载体</a:t>
-            </a:r>
-          </a:p>
-        </p:txBody>
-      </p:sp>
-      <p:sp>
-        <p:nvSpPr>
-          <p:cNvPr id="7" name="TextBox 6"/>
-          <p:cNvSpPr txBox="1"/>
-          <p:nvPr/>
-        </p:nvSpPr>
-        <p:spPr>
-          <a:xfrm>
-            <a:off x="6217920" y="2011680"/>
-            <a:ext cx="4389120" cy="3200400"/>
-          </a:xfrm>
-          <a:prstGeom prst="rect">
-            <a:avLst/>
-          </a:prstGeom>
-          <a:noFill/>
-        </p:spPr>
-        <p:txBody>
-          <a:bodyPr wrap="square" lIns="76200" rIns="76200" tIns="50800" bIns="50800">
-            <a:spAutoFit/>
-          </a:bodyPr>
-          <a:lstStyle/>
-          <a:p>
-            <a:pPr>
-              <a:spcAft>
-                <a:spcPts val="800"/>
-              </a:spcAft>
-            </a:pPr>
-            <a:r>
-              <a:rPr sz="1700" b="0">
-                <a:solidFill>
-                  <a:srgbClr val="1F2937"/>
-                </a:solidFill>
-                <a:latin typeface="Arial"/>
-              </a:rPr>
-              <a:t>messages：turn-local 工作面</a:t>
-            </a:r>
-          </a:p>
-          <a:p>
-            <a:pPr>
-              <a:spcAft>
-                <a:spcPts val="800"/>
-              </a:spcAft>
-            </a:pPr>
-            <a:r>
-              <a:rPr sz="1700" b="0">
-                <a:solidFill>
-                  <a:srgbClr val="1F2937"/>
-                </a:solidFill>
-                <a:latin typeface="Arial"/>
-              </a:rPr>
-              <a:t>transcript / sidechain：durable history</a:t>
-            </a:r>
-          </a:p>
-          <a:p>
-            <a:pPr>
-              <a:spcAft>
-                <a:spcPts val="800"/>
-              </a:spcAft>
-            </a:pPr>
-            <a:r>
-              <a:rPr sz="1700" b="0">
-                <a:solidFill>
-                  <a:srgbClr val="1F2937"/>
-                </a:solidFill>
-                <a:latin typeface="Arial"/>
-              </a:rPr>
-              <a:t>ToolUseContext：工具执行总线</a:t>
-            </a:r>
-          </a:p>
-          <a:p>
-            <a:pPr>
-              <a:spcAft>
-                <a:spcPts val="800"/>
-              </a:spcAft>
-            </a:pPr>
-            <a:r>
-              <a:rPr sz="1700" b="0">
-                <a:solidFill>
-                  <a:srgbClr val="1F2937"/>
-                </a:solidFill>
-                <a:latin typeface="Arial"/>
-              </a:rPr>
-              <a:t>AppState：宿主共享状态</a:t>
+              <a:t>本质上是在重建可继续工作的最小 context</a:t>
             </a:r>
           </a:p>
         </p:txBody>
@@ -4202,7 +4102,7 @@
                 </a:solidFill>
                 <a:latin typeface="Arial"/>
               </a:rPr>
-              <a:t>tool call 不是直接执行</a:t>
+              <a:t>compact 的价值不是“做摘要”</a:t>
             </a:r>
           </a:p>
         </p:txBody>
@@ -4252,513 +4152,48 @@
       </p:sp>
       <p:sp>
         <p:nvSpPr>
-          <p:cNvPr id="4" name="Rounded Rectangle 3"/>
-          <p:cNvSpPr/>
-          <p:nvPr/>
-        </p:nvSpPr>
-        <p:spPr>
-          <a:xfrm>
-            <a:off x="548640" y="2468880"/>
-            <a:ext cx="1645920" cy="731520"/>
-          </a:xfrm>
-          <a:prstGeom prst="roundRect">
-            <a:avLst/>
-          </a:prstGeom>
-          <a:solidFill>
-            <a:srgbClr val="FFFFFF"/>
-          </a:solidFill>
-          <a:ln>
-            <a:solidFill>
-              <a:srgbClr val="205295"/>
-            </a:solidFill>
-          </a:ln>
-        </p:spPr>
-        <p:style>
-          <a:lnRef idx="1">
-            <a:schemeClr val="accent1"/>
-          </a:lnRef>
-          <a:fillRef idx="3">
-            <a:schemeClr val="accent1"/>
-          </a:fillRef>
-          <a:effectRef idx="2">
-            <a:schemeClr val="accent1"/>
-          </a:effectRef>
-          <a:fontRef idx="minor">
-            <a:schemeClr val="lt1"/>
-          </a:fontRef>
-        </p:style>
-        <p:txBody>
-          <a:bodyPr rtlCol="0" anchor="ctr" wrap="square" lIns="76200" rIns="76200" tIns="50800" bIns="50800"/>
-          <a:lstStyle/>
-          <a:p>
-            <a:pPr algn="ctr"/>
-            <a:r>
-              <a:rPr sz="1600" b="1">
-                <a:solidFill>
-                  <a:srgbClr val="0B1F44"/>
-                </a:solidFill>
-                <a:latin typeface="Arial"/>
-              </a:rPr>
-              <a:t>schema</a:t>
-            </a:r>
-          </a:p>
-        </p:txBody>
-      </p:sp>
-      <p:cxnSp>
-        <p:nvCxnSpPr>
-          <p:cNvPr id="5" name="Connector 4"/>
-          <p:cNvCxnSpPr/>
-          <p:nvPr/>
-        </p:nvCxnSpPr>
-        <p:spPr>
-          <a:xfrm>
-            <a:off x="2194560" y="2834640"/>
-            <a:ext cx="182880" cy="0"/>
-          </a:xfrm>
-          <a:prstGeom prst="line">
-            <a:avLst/>
-          </a:prstGeom>
-          <a:ln w="25400">
-            <a:solidFill>
-              <a:srgbClr val="205295"/>
-            </a:solidFill>
-          </a:ln>
-        </p:spPr>
-        <p:style>
-          <a:lnRef idx="2">
-            <a:schemeClr val="accent1"/>
-          </a:lnRef>
-          <a:fillRef idx="0">
-            <a:schemeClr val="accent1"/>
-          </a:fillRef>
-          <a:effectRef idx="1">
-            <a:schemeClr val="accent1"/>
-          </a:effectRef>
-          <a:fontRef idx="minor">
-            <a:schemeClr val="tx1"/>
-          </a:fontRef>
-        </p:style>
-      </p:cxnSp>
-      <p:sp>
-        <p:nvSpPr>
-          <p:cNvPr id="6" name="Rounded Rectangle 5"/>
-          <p:cNvSpPr/>
-          <p:nvPr/>
-        </p:nvSpPr>
-        <p:spPr>
-          <a:xfrm>
-            <a:off x="2560320" y="2468880"/>
-            <a:ext cx="1645920" cy="731520"/>
-          </a:xfrm>
-          <a:prstGeom prst="roundRect">
-            <a:avLst/>
-          </a:prstGeom>
-          <a:solidFill>
-            <a:srgbClr val="FFFFFF"/>
-          </a:solidFill>
-          <a:ln>
-            <a:solidFill>
-              <a:srgbClr val="205295"/>
-            </a:solidFill>
-          </a:ln>
-        </p:spPr>
-        <p:style>
-          <a:lnRef idx="1">
-            <a:schemeClr val="accent1"/>
-          </a:lnRef>
-          <a:fillRef idx="3">
-            <a:schemeClr val="accent1"/>
-          </a:fillRef>
-          <a:effectRef idx="2">
-            <a:schemeClr val="accent1"/>
-          </a:effectRef>
-          <a:fontRef idx="minor">
-            <a:schemeClr val="lt1"/>
-          </a:fontRef>
-        </p:style>
-        <p:txBody>
-          <a:bodyPr rtlCol="0" anchor="ctr" wrap="square" lIns="76200" rIns="76200" tIns="50800" bIns="50800"/>
-          <a:lstStyle/>
-          <a:p>
-            <a:pPr algn="ctr"/>
-            <a:r>
-              <a:rPr sz="1600" b="1">
-                <a:solidFill>
-                  <a:srgbClr val="0B1F44"/>
-                </a:solidFill>
-                <a:latin typeface="Arial"/>
-              </a:rPr>
-              <a:t>validateInput</a:t>
-            </a:r>
-          </a:p>
-        </p:txBody>
-      </p:sp>
-      <p:cxnSp>
-        <p:nvCxnSpPr>
-          <p:cNvPr id="7" name="Connector 6"/>
-          <p:cNvCxnSpPr/>
-          <p:nvPr/>
-        </p:nvCxnSpPr>
-        <p:spPr>
-          <a:xfrm>
-            <a:off x="4206240" y="2834640"/>
-            <a:ext cx="182880" cy="0"/>
-          </a:xfrm>
-          <a:prstGeom prst="line">
-            <a:avLst/>
-          </a:prstGeom>
-          <a:ln w="25400">
-            <a:solidFill>
-              <a:srgbClr val="205295"/>
-            </a:solidFill>
-          </a:ln>
-        </p:spPr>
-        <p:style>
-          <a:lnRef idx="2">
-            <a:schemeClr val="accent1"/>
-          </a:lnRef>
-          <a:fillRef idx="0">
-            <a:schemeClr val="accent1"/>
-          </a:fillRef>
-          <a:effectRef idx="1">
-            <a:schemeClr val="accent1"/>
-          </a:effectRef>
-          <a:fontRef idx="minor">
-            <a:schemeClr val="tx1"/>
-          </a:fontRef>
-        </p:style>
-      </p:cxnSp>
-      <p:sp>
-        <p:nvSpPr>
-          <p:cNvPr id="8" name="Rounded Rectangle 7"/>
-          <p:cNvSpPr/>
-          <p:nvPr/>
-        </p:nvSpPr>
-        <p:spPr>
-          <a:xfrm>
-            <a:off x="4572000" y="2468880"/>
-            <a:ext cx="1920240" cy="731520"/>
-          </a:xfrm>
-          <a:prstGeom prst="roundRect">
-            <a:avLst/>
-          </a:prstGeom>
-          <a:solidFill>
-            <a:srgbClr val="FFFFFF"/>
-          </a:solidFill>
-          <a:ln>
-            <a:solidFill>
-              <a:srgbClr val="205295"/>
-            </a:solidFill>
-          </a:ln>
-        </p:spPr>
-        <p:style>
-          <a:lnRef idx="1">
-            <a:schemeClr val="accent1"/>
-          </a:lnRef>
-          <a:fillRef idx="3">
-            <a:schemeClr val="accent1"/>
-          </a:fillRef>
-          <a:effectRef idx="2">
-            <a:schemeClr val="accent1"/>
-          </a:effectRef>
-          <a:fontRef idx="minor">
-            <a:schemeClr val="lt1"/>
-          </a:fontRef>
-        </p:style>
-        <p:txBody>
-          <a:bodyPr rtlCol="0" anchor="ctr" wrap="square" lIns="76200" rIns="76200" tIns="50800" bIns="50800"/>
-          <a:lstStyle/>
-          <a:p>
-            <a:pPr algn="ctr"/>
-            <a:r>
-              <a:rPr sz="1600" b="1">
-                <a:solidFill>
-                  <a:srgbClr val="0B1F44"/>
-                </a:solidFill>
-                <a:latin typeface="Arial"/>
-              </a:rPr>
-              <a:t>classifier / hooks</a:t>
-            </a:r>
-          </a:p>
-        </p:txBody>
-      </p:sp>
-      <p:cxnSp>
-        <p:nvCxnSpPr>
-          <p:cNvPr id="9" name="Connector 8"/>
-          <p:cNvCxnSpPr/>
-          <p:nvPr/>
-        </p:nvCxnSpPr>
-        <p:spPr>
-          <a:xfrm>
-            <a:off x="6492240" y="2834640"/>
-            <a:ext cx="182880" cy="0"/>
-          </a:xfrm>
-          <a:prstGeom prst="line">
-            <a:avLst/>
-          </a:prstGeom>
-          <a:ln w="25400">
-            <a:solidFill>
-              <a:srgbClr val="205295"/>
-            </a:solidFill>
-          </a:ln>
-        </p:spPr>
-        <p:style>
-          <a:lnRef idx="2">
-            <a:schemeClr val="accent1"/>
-          </a:lnRef>
-          <a:fillRef idx="0">
-            <a:schemeClr val="accent1"/>
-          </a:fillRef>
-          <a:effectRef idx="1">
-            <a:schemeClr val="accent1"/>
-          </a:effectRef>
-          <a:fontRef idx="minor">
-            <a:schemeClr val="tx1"/>
-          </a:fontRef>
-        </p:style>
-      </p:cxnSp>
-      <p:sp>
-        <p:nvSpPr>
-          <p:cNvPr id="10" name="Rounded Rectangle 9"/>
-          <p:cNvSpPr/>
-          <p:nvPr/>
-        </p:nvSpPr>
-        <p:spPr>
-          <a:xfrm>
-            <a:off x="6858000" y="2468880"/>
-            <a:ext cx="1645920" cy="731520"/>
-          </a:xfrm>
-          <a:prstGeom prst="roundRect">
-            <a:avLst/>
-          </a:prstGeom>
-          <a:solidFill>
-            <a:srgbClr val="FFFFFF"/>
-          </a:solidFill>
-          <a:ln>
-            <a:solidFill>
-              <a:srgbClr val="205295"/>
-            </a:solidFill>
-          </a:ln>
-        </p:spPr>
-        <p:style>
-          <a:lnRef idx="1">
-            <a:schemeClr val="accent1"/>
-          </a:lnRef>
-          <a:fillRef idx="3">
-            <a:schemeClr val="accent1"/>
-          </a:fillRef>
-          <a:effectRef idx="2">
-            <a:schemeClr val="accent1"/>
-          </a:effectRef>
-          <a:fontRef idx="minor">
-            <a:schemeClr val="lt1"/>
-          </a:fontRef>
-        </p:style>
-        <p:txBody>
-          <a:bodyPr rtlCol="0" anchor="ctr" wrap="square" lIns="76200" rIns="76200" tIns="50800" bIns="50800"/>
-          <a:lstStyle/>
-          <a:p>
-            <a:pPr algn="ctr"/>
-            <a:r>
-              <a:rPr sz="1600" b="1">
-                <a:solidFill>
-                  <a:srgbClr val="0B1F44"/>
-                </a:solidFill>
-                <a:latin typeface="Arial"/>
-              </a:rPr>
-              <a:t>permission</a:t>
-            </a:r>
-          </a:p>
-        </p:txBody>
-      </p:sp>
-      <p:cxnSp>
-        <p:nvCxnSpPr>
-          <p:cNvPr id="11" name="Connector 10"/>
-          <p:cNvCxnSpPr/>
-          <p:nvPr/>
-        </p:nvCxnSpPr>
-        <p:spPr>
-          <a:xfrm>
-            <a:off x="8503920" y="2834640"/>
-            <a:ext cx="182880" cy="0"/>
-          </a:xfrm>
-          <a:prstGeom prst="line">
-            <a:avLst/>
-          </a:prstGeom>
-          <a:ln w="25400">
-            <a:solidFill>
-              <a:srgbClr val="205295"/>
-            </a:solidFill>
-          </a:ln>
-        </p:spPr>
-        <p:style>
-          <a:lnRef idx="2">
-            <a:schemeClr val="accent1"/>
-          </a:lnRef>
-          <a:fillRef idx="0">
-            <a:schemeClr val="accent1"/>
-          </a:fillRef>
-          <a:effectRef idx="1">
-            <a:schemeClr val="accent1"/>
-          </a:effectRef>
-          <a:fontRef idx="minor">
-            <a:schemeClr val="tx1"/>
-          </a:fontRef>
-        </p:style>
-      </p:cxnSp>
-      <p:sp>
-        <p:nvSpPr>
-          <p:cNvPr id="12" name="Rounded Rectangle 11"/>
-          <p:cNvSpPr/>
-          <p:nvPr/>
-        </p:nvSpPr>
-        <p:spPr>
-          <a:xfrm>
-            <a:off x="8869680" y="2468880"/>
-            <a:ext cx="1645920" cy="731520"/>
-          </a:xfrm>
-          <a:prstGeom prst="roundRect">
-            <a:avLst/>
-          </a:prstGeom>
-          <a:solidFill>
-            <a:srgbClr val="DDEAFB"/>
-          </a:solidFill>
-          <a:ln>
-            <a:solidFill>
-              <a:srgbClr val="205295"/>
-            </a:solidFill>
-          </a:ln>
-        </p:spPr>
-        <p:style>
-          <a:lnRef idx="1">
-            <a:schemeClr val="accent1"/>
-          </a:lnRef>
-          <a:fillRef idx="3">
-            <a:schemeClr val="accent1"/>
-          </a:fillRef>
-          <a:effectRef idx="2">
-            <a:schemeClr val="accent1"/>
-          </a:effectRef>
-          <a:fontRef idx="minor">
-            <a:schemeClr val="lt1"/>
-          </a:fontRef>
-        </p:style>
-        <p:txBody>
-          <a:bodyPr rtlCol="0" anchor="ctr" wrap="square" lIns="76200" rIns="76200" tIns="50800" bIns="50800"/>
-          <a:lstStyle/>
-          <a:p>
-            <a:pPr algn="ctr"/>
-            <a:r>
-              <a:rPr sz="1600" b="1">
-                <a:solidFill>
-                  <a:srgbClr val="0B1F44"/>
-                </a:solidFill>
-                <a:latin typeface="Arial"/>
-              </a:rPr>
-              <a:t>tool.call()</a:t>
-            </a:r>
-          </a:p>
-        </p:txBody>
-      </p:sp>
-      <p:cxnSp>
-        <p:nvCxnSpPr>
-          <p:cNvPr id="13" name="Connector 12"/>
-          <p:cNvCxnSpPr/>
-          <p:nvPr/>
-        </p:nvCxnSpPr>
-        <p:spPr>
-          <a:xfrm>
-            <a:off x="10515600" y="2834640"/>
-            <a:ext cx="182880" cy="0"/>
-          </a:xfrm>
-          <a:prstGeom prst="line">
-            <a:avLst/>
-          </a:prstGeom>
-          <a:ln w="25400">
-            <a:solidFill>
-              <a:srgbClr val="205295"/>
-            </a:solidFill>
-          </a:ln>
-        </p:spPr>
-        <p:style>
-          <a:lnRef idx="2">
-            <a:schemeClr val="accent1"/>
-          </a:lnRef>
-          <a:fillRef idx="0">
-            <a:schemeClr val="accent1"/>
-          </a:fillRef>
-          <a:effectRef idx="1">
-            <a:schemeClr val="accent1"/>
-          </a:effectRef>
-          <a:fontRef idx="minor">
-            <a:schemeClr val="tx1"/>
-          </a:fontRef>
-        </p:style>
-      </p:cxnSp>
-      <p:sp>
-        <p:nvSpPr>
-          <p:cNvPr id="14" name="Rounded Rectangle 13"/>
-          <p:cNvSpPr/>
-          <p:nvPr/>
-        </p:nvSpPr>
-        <p:spPr>
-          <a:xfrm>
-            <a:off x="10881359" y="2468880"/>
-            <a:ext cx="1645920" cy="731520"/>
-          </a:xfrm>
-          <a:prstGeom prst="roundRect">
-            <a:avLst/>
-          </a:prstGeom>
-          <a:solidFill>
-            <a:srgbClr val="FFFFFF"/>
-          </a:solidFill>
-          <a:ln>
-            <a:solidFill>
-              <a:srgbClr val="205295"/>
-            </a:solidFill>
-          </a:ln>
-        </p:spPr>
-        <p:style>
-          <a:lnRef idx="1">
-            <a:schemeClr val="accent1"/>
-          </a:lnRef>
-          <a:fillRef idx="3">
-            <a:schemeClr val="accent1"/>
-          </a:fillRef>
-          <a:effectRef idx="2">
-            <a:schemeClr val="accent1"/>
-          </a:effectRef>
-          <a:fontRef idx="minor">
-            <a:schemeClr val="lt1"/>
-          </a:fontRef>
-        </p:style>
-        <p:txBody>
-          <a:bodyPr rtlCol="0" anchor="ctr" wrap="square" lIns="76200" rIns="76200" tIns="50800" bIns="50800"/>
-          <a:lstStyle/>
-          <a:p>
-            <a:pPr algn="ctr"/>
-            <a:r>
-              <a:rPr sz="1600" b="1">
-                <a:solidFill>
-                  <a:srgbClr val="0B1F44"/>
-                </a:solidFill>
-                <a:latin typeface="Arial"/>
-              </a:rPr>
-              <a:t>result processing</a:t>
-            </a:r>
-          </a:p>
-        </p:txBody>
-      </p:sp>
-      <p:sp>
-        <p:nvSpPr>
-          <p:cNvPr id="15" name="TextBox 14"/>
+          <p:cNvPr id="4" name="TextBox 3"/>
           <p:cNvSpPr txBox="1"/>
           <p:nvPr/>
         </p:nvSpPr>
         <p:spPr>
           <a:xfrm>
-            <a:off x="822960" y="4023360"/>
-            <a:ext cx="10149840" cy="1645920"/>
+            <a:off x="731520" y="1600200"/>
+            <a:ext cx="4389120" cy="457200"/>
+          </a:xfrm>
+          <a:prstGeom prst="rect">
+            <a:avLst/>
+          </a:prstGeom>
+          <a:noFill/>
+        </p:spPr>
+        <p:txBody>
+          <a:bodyPr wrap="none">
+            <a:spAutoFit/>
+          </a:bodyPr>
+          <a:lstStyle/>
+          <a:p>
+            <a:r>
+              <a:rPr sz="1800" b="1">
+                <a:solidFill>
+                  <a:srgbClr val="205295"/>
+                </a:solidFill>
+                <a:latin typeface="Arial"/>
+              </a:rPr>
+              <a:t>触发层次</a:t>
+            </a:r>
+          </a:p>
+        </p:txBody>
+      </p:sp>
+      <p:sp>
+        <p:nvSpPr>
+          <p:cNvPr id="5" name="TextBox 4"/>
+          <p:cNvSpPr txBox="1"/>
+          <p:nvPr/>
+        </p:nvSpPr>
+        <p:spPr>
+          <a:xfrm>
+            <a:off x="731520" y="2011680"/>
+            <a:ext cx="4389120" cy="3200400"/>
           </a:xfrm>
           <a:prstGeom prst="rect">
             <a:avLst/>
@@ -4783,7 +4218,7 @@
                 </a:solidFill>
                 <a:latin typeface="Arial"/>
               </a:rPr>
-              <a:t>真实路径不是 findToolByName -&gt; tool.call 这么短</a:t>
+              <a:t>microcompact</a:t>
             </a:r>
           </a:p>
           <a:p>
@@ -4799,7 +4234,7 @@
                 </a:solidFill>
                 <a:latin typeface="Arial"/>
               </a:rPr>
-              <a:t>前面有 schema、hooks、classifier、permission 决策</a:t>
+              <a:t>snip</a:t>
             </a:r>
           </a:p>
           <a:p>
@@ -4815,7 +4250,7 @@
                 </a:solidFill>
                 <a:latin typeface="Arial"/>
               </a:rPr>
-              <a:t>后面还有 result block、content replacement、post-tool hooks、attachments</a:t>
+              <a:t>context collapse</a:t>
             </a:r>
           </a:p>
           <a:p>
@@ -4831,7 +4266,178 @@
                 </a:solidFill>
                 <a:latin typeface="Arial"/>
               </a:rPr>
-              <a:t>autonomy boundary 在 tool pipeline，而不是 UI 表面</a:t>
+              <a:t>autocompact</a:t>
+            </a:r>
+          </a:p>
+          <a:p>
+            <a:pPr>
+              <a:spcAft>
+                <a:spcPts val="800"/>
+              </a:spcAft>
+            </a:pPr>
+            <a:r>
+              <a:rPr sz="1700" b="0">
+                <a:solidFill>
+                  <a:srgbClr val="1F2937"/>
+                </a:solidFill>
+                <a:latin typeface="Arial"/>
+              </a:rPr>
+              <a:t>reactive compact</a:t>
+            </a:r>
+          </a:p>
+        </p:txBody>
+      </p:sp>
+      <p:sp>
+        <p:nvSpPr>
+          <p:cNvPr id="6" name="TextBox 5"/>
+          <p:cNvSpPr txBox="1"/>
+          <p:nvPr/>
+        </p:nvSpPr>
+        <p:spPr>
+          <a:xfrm>
+            <a:off x="6217920" y="1600200"/>
+            <a:ext cx="4389120" cy="457200"/>
+          </a:xfrm>
+          <a:prstGeom prst="rect">
+            <a:avLst/>
+          </a:prstGeom>
+          <a:noFill/>
+        </p:spPr>
+        <p:txBody>
+          <a:bodyPr wrap="none">
+            <a:spAutoFit/>
+          </a:bodyPr>
+          <a:lstStyle/>
+          <a:p>
+            <a:r>
+              <a:rPr sz="1800" b="1">
+                <a:solidFill>
+                  <a:srgbClr val="205295"/>
+                </a:solidFill>
+                <a:latin typeface="Arial"/>
+              </a:rPr>
+              <a:t>compact 后保留什么</a:t>
+            </a:r>
+          </a:p>
+        </p:txBody>
+      </p:sp>
+      <p:sp>
+        <p:nvSpPr>
+          <p:cNvPr id="7" name="TextBox 6"/>
+          <p:cNvSpPr txBox="1"/>
+          <p:nvPr/>
+        </p:nvSpPr>
+        <p:spPr>
+          <a:xfrm>
+            <a:off x="6217920" y="2011680"/>
+            <a:ext cx="4389120" cy="3200400"/>
+          </a:xfrm>
+          <a:prstGeom prst="rect">
+            <a:avLst/>
+          </a:prstGeom>
+          <a:noFill/>
+        </p:spPr>
+        <p:txBody>
+          <a:bodyPr wrap="square" lIns="76200" rIns="76200" tIns="50800" bIns="50800">
+            <a:spAutoFit/>
+          </a:bodyPr>
+          <a:lstStyle/>
+          <a:p>
+            <a:pPr>
+              <a:spcAft>
+                <a:spcPts val="800"/>
+              </a:spcAft>
+            </a:pPr>
+            <a:r>
+              <a:rPr sz="1700" b="0">
+                <a:solidFill>
+                  <a:srgbClr val="1F2937"/>
+                </a:solidFill>
+                <a:latin typeface="Arial"/>
+              </a:rPr>
+              <a:t>boundary + summary</a:t>
+            </a:r>
+          </a:p>
+          <a:p>
+            <a:pPr>
+              <a:spcAft>
+                <a:spcPts val="800"/>
+              </a:spcAft>
+            </a:pPr>
+            <a:r>
+              <a:rPr sz="1700" b="0">
+                <a:solidFill>
+                  <a:srgbClr val="1F2937"/>
+                </a:solidFill>
+                <a:latin typeface="Arial"/>
+              </a:rPr>
+              <a:t>messagesToKeep</a:t>
+            </a:r>
+          </a:p>
+          <a:p>
+            <a:pPr>
+              <a:spcAft>
+                <a:spcPts val="800"/>
+              </a:spcAft>
+            </a:pPr>
+            <a:r>
+              <a:rPr sz="1700" b="0">
+                <a:solidFill>
+                  <a:srgbClr val="1F2937"/>
+                </a:solidFill>
+                <a:latin typeface="Arial"/>
+              </a:rPr>
+              <a:t>文件恢复 attachment</a:t>
+            </a:r>
+          </a:p>
+          <a:p>
+            <a:pPr>
+              <a:spcAft>
+                <a:spcPts val="800"/>
+              </a:spcAft>
+            </a:pPr>
+            <a:r>
+              <a:rPr sz="1700" b="0">
+                <a:solidFill>
+                  <a:srgbClr val="1F2937"/>
+                </a:solidFill>
+                <a:latin typeface="Arial"/>
+              </a:rPr>
+              <a:t>plan_mode / invoked_skills / deferred delta</a:t>
+            </a:r>
+          </a:p>
+        </p:txBody>
+      </p:sp>
+      <p:sp>
+        <p:nvSpPr>
+          <p:cNvPr id="8" name="TextBox 7"/>
+          <p:cNvSpPr txBox="1"/>
+          <p:nvPr/>
+        </p:nvSpPr>
+        <p:spPr>
+          <a:xfrm>
+            <a:off x="841248" y="5532120"/>
+            <a:ext cx="10058400" cy="502920"/>
+          </a:xfrm>
+          <a:prstGeom prst="rect">
+            <a:avLst/>
+          </a:prstGeom>
+          <a:noFill/>
+        </p:spPr>
+        <p:txBody>
+          <a:bodyPr wrap="square" lIns="76200" rIns="76200" tIns="50800" bIns="50800">
+            <a:spAutoFit/>
+          </a:bodyPr>
+          <a:lstStyle/>
+          <a:p>
+            <a:r>
+              <a:rPr sz="1400" b="0">
+                <a:solidFill>
+                  <a:srgbClr val="475569"/>
+                </a:solidFill>
+                <a:latin typeface="Arial"/>
+              </a:rPr>
+              <a:t>结论：compact 更像“重建可继续工作的最小 context”，不是只留一段总结。</a:t>
             </a:r>
           </a:p>
         </p:txBody>
@@ -4891,7 +4497,7 @@
                 </a:solidFill>
                 <a:latin typeface="Arial"/>
               </a:rPr>
-              <a:t>task runtime 与 mailbox</a:t>
+              <a:t>attachments.ts 是 context router</a:t>
             </a:r>
           </a:p>
         </p:txBody>
@@ -4941,459 +4547,14 @@
       </p:sp>
       <p:sp>
         <p:nvSpPr>
-          <p:cNvPr id="4" name="Rounded Rectangle 3"/>
-          <p:cNvSpPr/>
-          <p:nvPr/>
-        </p:nvSpPr>
-        <p:spPr>
-          <a:xfrm>
-            <a:off x="822960" y="2011680"/>
-            <a:ext cx="1645920" cy="731520"/>
-          </a:xfrm>
-          <a:prstGeom prst="roundRect">
-            <a:avLst/>
-          </a:prstGeom>
-          <a:solidFill>
-            <a:srgbClr val="FFFFFF"/>
-          </a:solidFill>
-          <a:ln>
-            <a:solidFill>
-              <a:srgbClr val="205295"/>
-            </a:solidFill>
-          </a:ln>
-        </p:spPr>
-        <p:style>
-          <a:lnRef idx="1">
-            <a:schemeClr val="accent1"/>
-          </a:lnRef>
-          <a:fillRef idx="3">
-            <a:schemeClr val="accent1"/>
-          </a:fillRef>
-          <a:effectRef idx="2">
-            <a:schemeClr val="accent1"/>
-          </a:effectRef>
-          <a:fontRef idx="minor">
-            <a:schemeClr val="lt1"/>
-          </a:fontRef>
-        </p:style>
-        <p:txBody>
-          <a:bodyPr rtlCol="0" anchor="ctr" wrap="square" lIns="76200" rIns="76200" tIns="50800" bIns="50800"/>
-          <a:lstStyle/>
-          <a:p>
-            <a:pPr algn="ctr"/>
-            <a:r>
-              <a:rPr sz="1600" b="1">
-                <a:solidFill>
-                  <a:srgbClr val="0B1F44"/>
-                </a:solidFill>
-                <a:latin typeface="Arial"/>
-              </a:rPr>
-              <a:t>User / Main</a:t>
-            </a:r>
-          </a:p>
-        </p:txBody>
-      </p:sp>
-      <p:sp>
-        <p:nvSpPr>
-          <p:cNvPr id="5" name="Rounded Rectangle 4"/>
-          <p:cNvSpPr/>
-          <p:nvPr/>
-        </p:nvSpPr>
-        <p:spPr>
-          <a:xfrm>
-            <a:off x="3017520" y="2011680"/>
-            <a:ext cx="1828800" cy="731520"/>
-          </a:xfrm>
-          <a:prstGeom prst="roundRect">
-            <a:avLst/>
-          </a:prstGeom>
-          <a:solidFill>
-            <a:srgbClr val="FFFFFF"/>
-          </a:solidFill>
-          <a:ln>
-            <a:solidFill>
-              <a:srgbClr val="205295"/>
-            </a:solidFill>
-          </a:ln>
-        </p:spPr>
-        <p:style>
-          <a:lnRef idx="1">
-            <a:schemeClr val="accent1"/>
-          </a:lnRef>
-          <a:fillRef idx="3">
-            <a:schemeClr val="accent1"/>
-          </a:fillRef>
-          <a:effectRef idx="2">
-            <a:schemeClr val="accent1"/>
-          </a:effectRef>
-          <a:fontRef idx="minor">
-            <a:schemeClr val="lt1"/>
-          </a:fontRef>
-        </p:style>
-        <p:txBody>
-          <a:bodyPr rtlCol="0" anchor="ctr" wrap="square" lIns="76200" rIns="76200" tIns="50800" bIns="50800"/>
-          <a:lstStyle/>
-          <a:p>
-            <a:pPr algn="ctr"/>
-            <a:r>
-              <a:rPr sz="1600" b="1">
-                <a:solidFill>
-                  <a:srgbClr val="0B1F44"/>
-                </a:solidFill>
-                <a:latin typeface="Arial"/>
-              </a:rPr>
-              <a:t>task runtime</a:t>
-            </a:r>
-          </a:p>
-        </p:txBody>
-      </p:sp>
-      <p:sp>
-        <p:nvSpPr>
-          <p:cNvPr id="6" name="Rounded Rectangle 5"/>
-          <p:cNvSpPr/>
-          <p:nvPr/>
-        </p:nvSpPr>
-        <p:spPr>
-          <a:xfrm>
-            <a:off x="5394960" y="2011680"/>
-            <a:ext cx="1828800" cy="731520"/>
-          </a:xfrm>
-          <a:prstGeom prst="roundRect">
-            <a:avLst/>
-          </a:prstGeom>
-          <a:solidFill>
-            <a:srgbClr val="FFFFFF"/>
-          </a:solidFill>
-          <a:ln>
-            <a:solidFill>
-              <a:srgbClr val="205295"/>
-            </a:solidFill>
-          </a:ln>
-        </p:spPr>
-        <p:style>
-          <a:lnRef idx="1">
-            <a:schemeClr val="accent1"/>
-          </a:lnRef>
-          <a:fillRef idx="3">
-            <a:schemeClr val="accent1"/>
-          </a:fillRef>
-          <a:effectRef idx="2">
-            <a:schemeClr val="accent1"/>
-          </a:effectRef>
-          <a:fontRef idx="minor">
-            <a:schemeClr val="lt1"/>
-          </a:fontRef>
-        </p:style>
-        <p:txBody>
-          <a:bodyPr rtlCol="0" anchor="ctr" wrap="square" lIns="76200" rIns="76200" tIns="50800" bIns="50800"/>
-          <a:lstStyle/>
-          <a:p>
-            <a:pPr algn="ctr"/>
-            <a:r>
-              <a:rPr sz="1600" b="1">
-                <a:solidFill>
-                  <a:srgbClr val="0B1F44"/>
-                </a:solidFill>
-                <a:latin typeface="Arial"/>
-              </a:rPr>
-              <a:t>subagent</a:t>
-            </a:r>
-          </a:p>
-        </p:txBody>
-      </p:sp>
-      <p:sp>
-        <p:nvSpPr>
-          <p:cNvPr id="7" name="Rounded Rectangle 6"/>
-          <p:cNvSpPr/>
-          <p:nvPr/>
-        </p:nvSpPr>
-        <p:spPr>
-          <a:xfrm>
-            <a:off x="7772400" y="2011680"/>
-            <a:ext cx="1920240" cy="731520"/>
-          </a:xfrm>
-          <a:prstGeom prst="roundRect">
-            <a:avLst/>
-          </a:prstGeom>
-          <a:solidFill>
-            <a:srgbClr val="FFFFFF"/>
-          </a:solidFill>
-          <a:ln>
-            <a:solidFill>
-              <a:srgbClr val="205295"/>
-            </a:solidFill>
-          </a:ln>
-        </p:spPr>
-        <p:style>
-          <a:lnRef idx="1">
-            <a:schemeClr val="accent1"/>
-          </a:lnRef>
-          <a:fillRef idx="3">
-            <a:schemeClr val="accent1"/>
-          </a:fillRef>
-          <a:effectRef idx="2">
-            <a:schemeClr val="accent1"/>
-          </a:effectRef>
-          <a:fontRef idx="minor">
-            <a:schemeClr val="lt1"/>
-          </a:fontRef>
-        </p:style>
-        <p:txBody>
-          <a:bodyPr rtlCol="0" anchor="ctr" wrap="square" lIns="76200" rIns="76200" tIns="50800" bIns="50800"/>
-          <a:lstStyle/>
-          <a:p>
-            <a:pPr algn="ctr"/>
-            <a:r>
-              <a:rPr sz="1600" b="1">
-                <a:solidFill>
-                  <a:srgbClr val="0B1F44"/>
-                </a:solidFill>
-                <a:latin typeface="Arial"/>
-              </a:rPr>
-              <a:t>mailbox / queue</a:t>
-            </a:r>
-          </a:p>
-        </p:txBody>
-      </p:sp>
-      <p:sp>
-        <p:nvSpPr>
-          <p:cNvPr id="8" name="Rounded Rectangle 7"/>
-          <p:cNvSpPr/>
-          <p:nvPr/>
-        </p:nvSpPr>
-        <p:spPr>
-          <a:xfrm>
-            <a:off x="5303520" y="4023360"/>
-            <a:ext cx="2103120" cy="731520"/>
-          </a:xfrm>
-          <a:prstGeom prst="roundRect">
-            <a:avLst/>
-          </a:prstGeom>
-          <a:solidFill>
-            <a:srgbClr val="DDEAFB"/>
-          </a:solidFill>
-          <a:ln>
-            <a:solidFill>
-              <a:srgbClr val="205295"/>
-            </a:solidFill>
-          </a:ln>
-        </p:spPr>
-        <p:style>
-          <a:lnRef idx="1">
-            <a:schemeClr val="accent1"/>
-          </a:lnRef>
-          <a:fillRef idx="3">
-            <a:schemeClr val="accent1"/>
-          </a:fillRef>
-          <a:effectRef idx="2">
-            <a:schemeClr val="accent1"/>
-          </a:effectRef>
-          <a:fontRef idx="minor">
-            <a:schemeClr val="lt1"/>
-          </a:fontRef>
-        </p:style>
-        <p:txBody>
-          <a:bodyPr rtlCol="0" anchor="ctr" wrap="square" lIns="76200" rIns="76200" tIns="50800" bIns="50800"/>
-          <a:lstStyle/>
-          <a:p>
-            <a:pPr algn="ctr"/>
-            <a:r>
-              <a:rPr sz="1600" b="1">
-                <a:solidFill>
-                  <a:srgbClr val="0B1F44"/>
-                </a:solidFill>
-                <a:latin typeface="Arial"/>
-              </a:rPr>
-              <a:t>task-notification</a:t>
-            </a:r>
-          </a:p>
-        </p:txBody>
-      </p:sp>
-      <p:cxnSp>
-        <p:nvCxnSpPr>
-          <p:cNvPr id="9" name="Connector 8"/>
-          <p:cNvCxnSpPr/>
-          <p:nvPr/>
-        </p:nvCxnSpPr>
-        <p:spPr>
-          <a:xfrm>
-            <a:off x="2468880" y="2377440"/>
-            <a:ext cx="548640" cy="0"/>
-          </a:xfrm>
-          <a:prstGeom prst="line">
-            <a:avLst/>
-          </a:prstGeom>
-          <a:ln w="25400">
-            <a:solidFill>
-              <a:srgbClr val="205295"/>
-            </a:solidFill>
-          </a:ln>
-        </p:spPr>
-        <p:style>
-          <a:lnRef idx="2">
-            <a:schemeClr val="accent1"/>
-          </a:lnRef>
-          <a:fillRef idx="0">
-            <a:schemeClr val="accent1"/>
-          </a:fillRef>
-          <a:effectRef idx="1">
-            <a:schemeClr val="accent1"/>
-          </a:effectRef>
-          <a:fontRef idx="minor">
-            <a:schemeClr val="tx1"/>
-          </a:fontRef>
-        </p:style>
-      </p:cxnSp>
-      <p:cxnSp>
-        <p:nvCxnSpPr>
-          <p:cNvPr id="10" name="Connector 9"/>
-          <p:cNvCxnSpPr/>
-          <p:nvPr/>
-        </p:nvCxnSpPr>
-        <p:spPr>
-          <a:xfrm>
-            <a:off x="4846320" y="2377440"/>
-            <a:ext cx="548640" cy="0"/>
-          </a:xfrm>
-          <a:prstGeom prst="line">
-            <a:avLst/>
-          </a:prstGeom>
-          <a:ln w="25400">
-            <a:solidFill>
-              <a:srgbClr val="205295"/>
-            </a:solidFill>
-          </a:ln>
-        </p:spPr>
-        <p:style>
-          <a:lnRef idx="2">
-            <a:schemeClr val="accent1"/>
-          </a:lnRef>
-          <a:fillRef idx="0">
-            <a:schemeClr val="accent1"/>
-          </a:fillRef>
-          <a:effectRef idx="1">
-            <a:schemeClr val="accent1"/>
-          </a:effectRef>
-          <a:fontRef idx="minor">
-            <a:schemeClr val="tx1"/>
-          </a:fontRef>
-        </p:style>
-      </p:cxnSp>
-      <p:cxnSp>
-        <p:nvCxnSpPr>
-          <p:cNvPr id="11" name="Connector 10"/>
-          <p:cNvCxnSpPr/>
-          <p:nvPr/>
-        </p:nvCxnSpPr>
-        <p:spPr>
-          <a:xfrm>
-            <a:off x="7223760" y="2377440"/>
-            <a:ext cx="548640" cy="0"/>
-          </a:xfrm>
-          <a:prstGeom prst="line">
-            <a:avLst/>
-          </a:prstGeom>
-          <a:ln w="25400">
-            <a:solidFill>
-              <a:srgbClr val="205295"/>
-            </a:solidFill>
-          </a:ln>
-        </p:spPr>
-        <p:style>
-          <a:lnRef idx="2">
-            <a:schemeClr val="accent1"/>
-          </a:lnRef>
-          <a:fillRef idx="0">
-            <a:schemeClr val="accent1"/>
-          </a:fillRef>
-          <a:effectRef idx="1">
-            <a:schemeClr val="accent1"/>
-          </a:effectRef>
-          <a:fontRef idx="minor">
-            <a:schemeClr val="tx1"/>
-          </a:fontRef>
-        </p:style>
-      </p:cxnSp>
-      <p:cxnSp>
-        <p:nvCxnSpPr>
-          <p:cNvPr id="12" name="Connector 11"/>
-          <p:cNvCxnSpPr/>
-          <p:nvPr/>
-        </p:nvCxnSpPr>
-        <p:spPr>
-          <a:xfrm flipH="1">
-            <a:off x="6309360" y="2743200"/>
-            <a:ext cx="1463040" cy="1280160"/>
-          </a:xfrm>
-          <a:prstGeom prst="line">
-            <a:avLst/>
-          </a:prstGeom>
-          <a:ln w="25400">
-            <a:solidFill>
-              <a:srgbClr val="205295"/>
-            </a:solidFill>
-          </a:ln>
-        </p:spPr>
-        <p:style>
-          <a:lnRef idx="2">
-            <a:schemeClr val="accent1"/>
-          </a:lnRef>
-          <a:fillRef idx="0">
-            <a:schemeClr val="accent1"/>
-          </a:fillRef>
-          <a:effectRef idx="1">
-            <a:schemeClr val="accent1"/>
-          </a:effectRef>
-          <a:fontRef idx="minor">
-            <a:schemeClr val="tx1"/>
-          </a:fontRef>
-        </p:style>
-      </p:cxnSp>
-      <p:cxnSp>
-        <p:nvCxnSpPr>
-          <p:cNvPr id="13" name="Connector 12"/>
-          <p:cNvCxnSpPr/>
-          <p:nvPr/>
-        </p:nvCxnSpPr>
-        <p:spPr>
-          <a:xfrm flipH="1" flipV="1">
-            <a:off x="1737360" y="2743200"/>
-            <a:ext cx="3566160" cy="1645920"/>
-          </a:xfrm>
-          <a:prstGeom prst="line">
-            <a:avLst/>
-          </a:prstGeom>
-          <a:ln w="25400">
-            <a:solidFill>
-              <a:srgbClr val="205295"/>
-            </a:solidFill>
-          </a:ln>
-        </p:spPr>
-        <p:style>
-          <a:lnRef idx="2">
-            <a:schemeClr val="accent1"/>
-          </a:lnRef>
-          <a:fillRef idx="0">
-            <a:schemeClr val="accent1"/>
-          </a:fillRef>
-          <a:effectRef idx="1">
-            <a:schemeClr val="accent1"/>
-          </a:effectRef>
-          <a:fontRef idx="minor">
-            <a:schemeClr val="tx1"/>
-          </a:fontRef>
-        </p:style>
-      </p:cxnSp>
-      <p:sp>
-        <p:nvSpPr>
-          <p:cNvPr id="14" name="TextBox 13"/>
+          <p:cNvPr id="4" name="TextBox 3"/>
           <p:cNvSpPr txBox="1"/>
           <p:nvPr/>
         </p:nvSpPr>
         <p:spPr>
           <a:xfrm>
-            <a:off x="822960" y="4846320"/>
-            <a:ext cx="10149840" cy="1097280"/>
+            <a:off x="777240" y="1645920"/>
+            <a:ext cx="10241280" cy="3200400"/>
           </a:xfrm>
           <a:prstGeom prst="rect">
             <a:avLst/>
@@ -5412,13 +4573,13 @@
               </a:spcAft>
             </a:pPr>
             <a:r>
-              <a:rPr sz="1600" b="0">
+              <a:rPr sz="1900" b="0">
                 <a:solidFill>
                   <a:srgbClr val="1F2937"/>
                 </a:solidFill>
                 <a:latin typeface="Arial"/>
               </a:rPr>
-              <a:t>task/framework.ts 负责注册、轮询、GC、notification</a:t>
+              <a:t>每轮真正送给模型的 context，不只是 messages + system prompt</a:t>
             </a:r>
           </a:p>
           <a:p>
@@ -5428,13 +4589,13 @@
               </a:spcAft>
             </a:pPr>
             <a:r>
-              <a:rPr sz="1600" b="0">
+              <a:rPr sz="1900" b="0">
                 <a:solidFill>
                   <a:srgbClr val="1F2937"/>
                 </a:solidFill>
                 <a:latin typeface="Arial"/>
               </a:rPr>
-              <a:t>runAgent.ts 负责 subagent、sidechain transcript、metadata</a:t>
+              <a:t>attachments.ts 会按 turn 注入 memories、dynamic skills、plan_mode、deferred_tools_delta、teammate_mailbox 等</a:t>
             </a:r>
           </a:p>
           <a:p>
@@ -5444,13 +4605,13 @@
               </a:spcAft>
             </a:pPr>
             <a:r>
-              <a:rPr sz="1600" b="0">
+              <a:rPr sz="1900" b="0">
                 <a:solidFill>
                   <a:srgbClr val="1F2937"/>
                 </a:solidFill>
                 <a:latin typeface="Arial"/>
               </a:rPr>
-              <a:t>mailbox / pendingMessages 的投递发生在 turn 边界</a:t>
+              <a:t>很多运行时信息不是常驻消息，而是按 turn 临时重建工作面</a:t>
             </a:r>
           </a:p>
           <a:p>
@@ -5460,13 +4621,13 @@
               </a:spcAft>
             </a:pPr>
             <a:r>
-              <a:rPr sz="1600" b="0">
+              <a:rPr sz="1900" b="0">
                 <a:solidFill>
                   <a:srgbClr val="1F2937"/>
                 </a:solidFill>
                 <a:latin typeface="Arial"/>
               </a:rPr>
-              <a:t>这牺牲了一点即时性，但换来了 turn 内状态一致性</a:t>
+              <a:t>这就是为什么它更像“第二调度层”，而不是附件工具箱</a:t>
             </a:r>
           </a:p>
         </p:txBody>
@@ -5526,7 +4687,7 @@
                 </a:solidFill>
                 <a:latin typeface="Arial"/>
               </a:rPr>
-              <a:t>为什么它更像产品化 runtime</a:t>
+              <a:t>真正的 autonomy boundary 在 tool pipeline</a:t>
             </a:r>
           </a:p>
         </p:txBody>
@@ -5576,48 +4737,513 @@
       </p:sp>
       <p:sp>
         <p:nvSpPr>
-          <p:cNvPr id="4" name="TextBox 3"/>
+          <p:cNvPr id="4" name="Rounded Rectangle 3"/>
+          <p:cNvSpPr/>
+          <p:nvPr/>
+        </p:nvSpPr>
+        <p:spPr>
+          <a:xfrm>
+            <a:off x="502920" y="2240280"/>
+            <a:ext cx="1280160" cy="713232"/>
+          </a:xfrm>
+          <a:prstGeom prst="roundRect">
+            <a:avLst/>
+          </a:prstGeom>
+          <a:solidFill>
+            <a:srgbClr val="FFFFFF"/>
+          </a:solidFill>
+          <a:ln>
+            <a:solidFill>
+              <a:srgbClr val="205295"/>
+            </a:solidFill>
+          </a:ln>
+        </p:spPr>
+        <p:style>
+          <a:lnRef idx="1">
+            <a:schemeClr val="accent1"/>
+          </a:lnRef>
+          <a:fillRef idx="3">
+            <a:schemeClr val="accent1"/>
+          </a:fillRef>
+          <a:effectRef idx="2">
+            <a:schemeClr val="accent1"/>
+          </a:effectRef>
+          <a:fontRef idx="minor">
+            <a:schemeClr val="lt1"/>
+          </a:fontRef>
+        </p:style>
+        <p:txBody>
+          <a:bodyPr rtlCol="0" anchor="ctr" wrap="square" lIns="76200" rIns="76200" tIns="50800" bIns="50800"/>
+          <a:lstStyle/>
+          <a:p>
+            <a:pPr algn="ctr"/>
+            <a:r>
+              <a:rPr sz="1600" b="1">
+                <a:solidFill>
+                  <a:srgbClr val="0B1F44"/>
+                </a:solidFill>
+                <a:latin typeface="Arial"/>
+              </a:rPr>
+              <a:t>schema</a:t>
+            </a:r>
+          </a:p>
+        </p:txBody>
+      </p:sp>
+      <p:sp>
+        <p:nvSpPr>
+          <p:cNvPr id="5" name="Rounded Rectangle 4"/>
+          <p:cNvSpPr/>
+          <p:nvPr/>
+        </p:nvSpPr>
+        <p:spPr>
+          <a:xfrm>
+            <a:off x="2075688" y="2240280"/>
+            <a:ext cx="1280160" cy="713232"/>
+          </a:xfrm>
+          <a:prstGeom prst="roundRect">
+            <a:avLst/>
+          </a:prstGeom>
+          <a:solidFill>
+            <a:srgbClr val="FFFFFF"/>
+          </a:solidFill>
+          <a:ln>
+            <a:solidFill>
+              <a:srgbClr val="205295"/>
+            </a:solidFill>
+          </a:ln>
+        </p:spPr>
+        <p:style>
+          <a:lnRef idx="1">
+            <a:schemeClr val="accent1"/>
+          </a:lnRef>
+          <a:fillRef idx="3">
+            <a:schemeClr val="accent1"/>
+          </a:fillRef>
+          <a:effectRef idx="2">
+            <a:schemeClr val="accent1"/>
+          </a:effectRef>
+          <a:fontRef idx="minor">
+            <a:schemeClr val="lt1"/>
+          </a:fontRef>
+        </p:style>
+        <p:txBody>
+          <a:bodyPr rtlCol="0" anchor="ctr" wrap="square" lIns="76200" rIns="76200" tIns="50800" bIns="50800"/>
+          <a:lstStyle/>
+          <a:p>
+            <a:pPr algn="ctr"/>
+            <a:r>
+              <a:rPr sz="1600" b="1">
+                <a:solidFill>
+                  <a:srgbClr val="0B1F44"/>
+                </a:solidFill>
+                <a:latin typeface="Arial"/>
+              </a:rPr>
+              <a:t>hooks</a:t>
+            </a:r>
+          </a:p>
+        </p:txBody>
+      </p:sp>
+      <p:sp>
+        <p:nvSpPr>
+          <p:cNvPr id="6" name="Rounded Rectangle 5"/>
+          <p:cNvSpPr/>
+          <p:nvPr/>
+        </p:nvSpPr>
+        <p:spPr>
+          <a:xfrm>
+            <a:off x="3648456" y="2240280"/>
+            <a:ext cx="1463040" cy="713232"/>
+          </a:xfrm>
+          <a:prstGeom prst="roundRect">
+            <a:avLst/>
+          </a:prstGeom>
+          <a:solidFill>
+            <a:srgbClr val="FFFFFF"/>
+          </a:solidFill>
+          <a:ln>
+            <a:solidFill>
+              <a:srgbClr val="205295"/>
+            </a:solidFill>
+          </a:ln>
+        </p:spPr>
+        <p:style>
+          <a:lnRef idx="1">
+            <a:schemeClr val="accent1"/>
+          </a:lnRef>
+          <a:fillRef idx="3">
+            <a:schemeClr val="accent1"/>
+          </a:fillRef>
+          <a:effectRef idx="2">
+            <a:schemeClr val="accent1"/>
+          </a:effectRef>
+          <a:fontRef idx="minor">
+            <a:schemeClr val="lt1"/>
+          </a:fontRef>
+        </p:style>
+        <p:txBody>
+          <a:bodyPr rtlCol="0" anchor="ctr" wrap="square" lIns="76200" rIns="76200" tIns="50800" bIns="50800"/>
+          <a:lstStyle/>
+          <a:p>
+            <a:pPr algn="ctr"/>
+            <a:r>
+              <a:rPr sz="1600" b="1">
+                <a:solidFill>
+                  <a:srgbClr val="0B1F44"/>
+                </a:solidFill>
+                <a:latin typeface="Arial"/>
+              </a:rPr>
+              <a:t>classifier</a:t>
+            </a:r>
+          </a:p>
+        </p:txBody>
+      </p:sp>
+      <p:sp>
+        <p:nvSpPr>
+          <p:cNvPr id="7" name="Rounded Rectangle 6"/>
+          <p:cNvSpPr/>
+          <p:nvPr/>
+        </p:nvSpPr>
+        <p:spPr>
+          <a:xfrm>
+            <a:off x="5404104" y="2240280"/>
+            <a:ext cx="1463040" cy="713232"/>
+          </a:xfrm>
+          <a:prstGeom prst="roundRect">
+            <a:avLst/>
+          </a:prstGeom>
+          <a:solidFill>
+            <a:srgbClr val="FFFFFF"/>
+          </a:solidFill>
+          <a:ln>
+            <a:solidFill>
+              <a:srgbClr val="205295"/>
+            </a:solidFill>
+          </a:ln>
+        </p:spPr>
+        <p:style>
+          <a:lnRef idx="1">
+            <a:schemeClr val="accent1"/>
+          </a:lnRef>
+          <a:fillRef idx="3">
+            <a:schemeClr val="accent1"/>
+          </a:fillRef>
+          <a:effectRef idx="2">
+            <a:schemeClr val="accent1"/>
+          </a:effectRef>
+          <a:fontRef idx="minor">
+            <a:schemeClr val="lt1"/>
+          </a:fontRef>
+        </p:style>
+        <p:txBody>
+          <a:bodyPr rtlCol="0" anchor="ctr" wrap="square" lIns="76200" rIns="76200" tIns="50800" bIns="50800"/>
+          <a:lstStyle/>
+          <a:p>
+            <a:pPr algn="ctr"/>
+            <a:r>
+              <a:rPr sz="1600" b="1">
+                <a:solidFill>
+                  <a:srgbClr val="0B1F44"/>
+                </a:solidFill>
+                <a:latin typeface="Arial"/>
+              </a:rPr>
+              <a:t>permission</a:t>
+            </a:r>
+          </a:p>
+        </p:txBody>
+      </p:sp>
+      <p:sp>
+        <p:nvSpPr>
+          <p:cNvPr id="8" name="Rounded Rectangle 7"/>
+          <p:cNvSpPr/>
+          <p:nvPr/>
+        </p:nvSpPr>
+        <p:spPr>
+          <a:xfrm>
+            <a:off x="7159752" y="2240280"/>
+            <a:ext cx="1371600" cy="713232"/>
+          </a:xfrm>
+          <a:prstGeom prst="roundRect">
+            <a:avLst/>
+          </a:prstGeom>
+          <a:solidFill>
+            <a:srgbClr val="DDEAFB"/>
+          </a:solidFill>
+          <a:ln>
+            <a:solidFill>
+              <a:srgbClr val="205295"/>
+            </a:solidFill>
+          </a:ln>
+        </p:spPr>
+        <p:style>
+          <a:lnRef idx="1">
+            <a:schemeClr val="accent1"/>
+          </a:lnRef>
+          <a:fillRef idx="3">
+            <a:schemeClr val="accent1"/>
+          </a:fillRef>
+          <a:effectRef idx="2">
+            <a:schemeClr val="accent1"/>
+          </a:effectRef>
+          <a:fontRef idx="minor">
+            <a:schemeClr val="lt1"/>
+          </a:fontRef>
+        </p:style>
+        <p:txBody>
+          <a:bodyPr rtlCol="0" anchor="ctr" wrap="square" lIns="76200" rIns="76200" tIns="50800" bIns="50800"/>
+          <a:lstStyle/>
+          <a:p>
+            <a:pPr algn="ctr"/>
+            <a:r>
+              <a:rPr sz="1600" b="1">
+                <a:solidFill>
+                  <a:srgbClr val="0B1F44"/>
+                </a:solidFill>
+                <a:latin typeface="Arial"/>
+              </a:rPr>
+              <a:t>tool.call</a:t>
+            </a:r>
+          </a:p>
+        </p:txBody>
+      </p:sp>
+      <p:sp>
+        <p:nvSpPr>
+          <p:cNvPr id="9" name="Rounded Rectangle 8"/>
+          <p:cNvSpPr/>
+          <p:nvPr/>
+        </p:nvSpPr>
+        <p:spPr>
+          <a:xfrm>
+            <a:off x="8823960" y="2240280"/>
+            <a:ext cx="1463040" cy="713232"/>
+          </a:xfrm>
+          <a:prstGeom prst="roundRect">
+            <a:avLst/>
+          </a:prstGeom>
+          <a:solidFill>
+            <a:srgbClr val="FFFFFF"/>
+          </a:solidFill>
+          <a:ln>
+            <a:solidFill>
+              <a:srgbClr val="205295"/>
+            </a:solidFill>
+          </a:ln>
+        </p:spPr>
+        <p:style>
+          <a:lnRef idx="1">
+            <a:schemeClr val="accent1"/>
+          </a:lnRef>
+          <a:fillRef idx="3">
+            <a:schemeClr val="accent1"/>
+          </a:fillRef>
+          <a:effectRef idx="2">
+            <a:schemeClr val="accent1"/>
+          </a:effectRef>
+          <a:fontRef idx="minor">
+            <a:schemeClr val="lt1"/>
+          </a:fontRef>
+        </p:style>
+        <p:txBody>
+          <a:bodyPr rtlCol="0" anchor="ctr" wrap="square" lIns="76200" rIns="76200" tIns="50800" bIns="50800"/>
+          <a:lstStyle/>
+          <a:p>
+            <a:pPr algn="ctr"/>
+            <a:r>
+              <a:rPr sz="1600" b="1">
+                <a:solidFill>
+                  <a:srgbClr val="0B1F44"/>
+                </a:solidFill>
+                <a:latin typeface="Arial"/>
+              </a:rPr>
+              <a:t>post-hooks</a:t>
+            </a:r>
+          </a:p>
+        </p:txBody>
+      </p:sp>
+      <p:cxnSp>
+        <p:nvCxnSpPr>
+          <p:cNvPr id="10" name="Connector 9"/>
+          <p:cNvCxnSpPr/>
+          <p:nvPr/>
+        </p:nvCxnSpPr>
+        <p:spPr>
+          <a:xfrm>
+            <a:off x="1783080" y="2596896"/>
+            <a:ext cx="292608" cy="0"/>
+          </a:xfrm>
+          <a:prstGeom prst="line">
+            <a:avLst/>
+          </a:prstGeom>
+          <a:ln w="25400">
+            <a:solidFill>
+              <a:srgbClr val="205295"/>
+            </a:solidFill>
+          </a:ln>
+        </p:spPr>
+        <p:style>
+          <a:lnRef idx="2">
+            <a:schemeClr val="accent1"/>
+          </a:lnRef>
+          <a:fillRef idx="0">
+            <a:schemeClr val="accent1"/>
+          </a:fillRef>
+          <a:effectRef idx="1">
+            <a:schemeClr val="accent1"/>
+          </a:effectRef>
+          <a:fontRef idx="minor">
+            <a:schemeClr val="tx1"/>
+          </a:fontRef>
+        </p:style>
+      </p:cxnSp>
+      <p:cxnSp>
+        <p:nvCxnSpPr>
+          <p:cNvPr id="11" name="Connector 10"/>
+          <p:cNvCxnSpPr/>
+          <p:nvPr/>
+        </p:nvCxnSpPr>
+        <p:spPr>
+          <a:xfrm>
+            <a:off x="3355848" y="2596896"/>
+            <a:ext cx="292608" cy="0"/>
+          </a:xfrm>
+          <a:prstGeom prst="line">
+            <a:avLst/>
+          </a:prstGeom>
+          <a:ln w="25400">
+            <a:solidFill>
+              <a:srgbClr val="205295"/>
+            </a:solidFill>
+          </a:ln>
+        </p:spPr>
+        <p:style>
+          <a:lnRef idx="2">
+            <a:schemeClr val="accent1"/>
+          </a:lnRef>
+          <a:fillRef idx="0">
+            <a:schemeClr val="accent1"/>
+          </a:fillRef>
+          <a:effectRef idx="1">
+            <a:schemeClr val="accent1"/>
+          </a:effectRef>
+          <a:fontRef idx="minor">
+            <a:schemeClr val="tx1"/>
+          </a:fontRef>
+        </p:style>
+      </p:cxnSp>
+      <p:cxnSp>
+        <p:nvCxnSpPr>
+          <p:cNvPr id="12" name="Connector 11"/>
+          <p:cNvCxnSpPr/>
+          <p:nvPr/>
+        </p:nvCxnSpPr>
+        <p:spPr>
+          <a:xfrm>
+            <a:off x="5111496" y="2596896"/>
+            <a:ext cx="292608" cy="0"/>
+          </a:xfrm>
+          <a:prstGeom prst="line">
+            <a:avLst/>
+          </a:prstGeom>
+          <a:ln w="25400">
+            <a:solidFill>
+              <a:srgbClr val="205295"/>
+            </a:solidFill>
+          </a:ln>
+        </p:spPr>
+        <p:style>
+          <a:lnRef idx="2">
+            <a:schemeClr val="accent1"/>
+          </a:lnRef>
+          <a:fillRef idx="0">
+            <a:schemeClr val="accent1"/>
+          </a:fillRef>
+          <a:effectRef idx="1">
+            <a:schemeClr val="accent1"/>
+          </a:effectRef>
+          <a:fontRef idx="minor">
+            <a:schemeClr val="tx1"/>
+          </a:fontRef>
+        </p:style>
+      </p:cxnSp>
+      <p:cxnSp>
+        <p:nvCxnSpPr>
+          <p:cNvPr id="13" name="Connector 12"/>
+          <p:cNvCxnSpPr/>
+          <p:nvPr/>
+        </p:nvCxnSpPr>
+        <p:spPr>
+          <a:xfrm>
+            <a:off x="6867144" y="2596896"/>
+            <a:ext cx="292608" cy="0"/>
+          </a:xfrm>
+          <a:prstGeom prst="line">
+            <a:avLst/>
+          </a:prstGeom>
+          <a:ln w="25400">
+            <a:solidFill>
+              <a:srgbClr val="205295"/>
+            </a:solidFill>
+          </a:ln>
+        </p:spPr>
+        <p:style>
+          <a:lnRef idx="2">
+            <a:schemeClr val="accent1"/>
+          </a:lnRef>
+          <a:fillRef idx="0">
+            <a:schemeClr val="accent1"/>
+          </a:fillRef>
+          <a:effectRef idx="1">
+            <a:schemeClr val="accent1"/>
+          </a:effectRef>
+          <a:fontRef idx="minor">
+            <a:schemeClr val="tx1"/>
+          </a:fontRef>
+        </p:style>
+      </p:cxnSp>
+      <p:cxnSp>
+        <p:nvCxnSpPr>
+          <p:cNvPr id="14" name="Connector 13"/>
+          <p:cNvCxnSpPr/>
+          <p:nvPr/>
+        </p:nvCxnSpPr>
+        <p:spPr>
+          <a:xfrm>
+            <a:off x="8531352" y="2596896"/>
+            <a:ext cx="292608" cy="0"/>
+          </a:xfrm>
+          <a:prstGeom prst="line">
+            <a:avLst/>
+          </a:prstGeom>
+          <a:ln w="25400">
+            <a:solidFill>
+              <a:srgbClr val="205295"/>
+            </a:solidFill>
+          </a:ln>
+        </p:spPr>
+        <p:style>
+          <a:lnRef idx="2">
+            <a:schemeClr val="accent1"/>
+          </a:lnRef>
+          <a:fillRef idx="0">
+            <a:schemeClr val="accent1"/>
+          </a:fillRef>
+          <a:effectRef idx="1">
+            <a:schemeClr val="accent1"/>
+          </a:effectRef>
+          <a:fontRef idx="minor">
+            <a:schemeClr val="tx1"/>
+          </a:fontRef>
+        </p:style>
+      </p:cxnSp>
+      <p:sp>
+        <p:nvSpPr>
+          <p:cNvPr id="15" name="TextBox 14"/>
           <p:cNvSpPr txBox="1"/>
           <p:nvPr/>
         </p:nvSpPr>
         <p:spPr>
           <a:xfrm>
-            <a:off x="731520" y="1600200"/>
-            <a:ext cx="4389120" cy="457200"/>
-          </a:xfrm>
-          <a:prstGeom prst="rect">
-            <a:avLst/>
-          </a:prstGeom>
-          <a:noFill/>
-        </p:spPr>
-        <p:txBody>
-          <a:bodyPr wrap="none">
-            <a:spAutoFit/>
-          </a:bodyPr>
-          <a:lstStyle/>
-          <a:p>
-            <a:r>
-              <a:rPr sz="1800" b="1">
-                <a:solidFill>
-                  <a:srgbClr val="205295"/>
-                </a:solidFill>
-                <a:latin typeface="Arial"/>
-              </a:rPr>
-              <a:t>控制面</a:t>
-            </a:r>
-          </a:p>
-        </p:txBody>
-      </p:sp>
-      <p:sp>
-        <p:nvSpPr>
-          <p:cNvPr id="5" name="TextBox 4"/>
-          <p:cNvSpPr txBox="1"/>
-          <p:nvPr/>
-        </p:nvSpPr>
-        <p:spPr>
-          <a:xfrm>
-            <a:off x="731520" y="2011680"/>
-            <a:ext cx="4389120" cy="3200400"/>
+            <a:off x="822960" y="3794760"/>
+            <a:ext cx="10058400" cy="1554480"/>
           </a:xfrm>
           <a:prstGeom prst="rect">
             <a:avLst/>
@@ -5636,13 +5262,13 @@
               </a:spcAft>
             </a:pPr>
             <a:r>
-              <a:rPr sz="1700" b="0">
+              <a:rPr sz="1600" b="0">
                 <a:solidFill>
                   <a:srgbClr val="1F2937"/>
                 </a:solidFill>
                 <a:latin typeface="Arial"/>
               </a:rPr>
-              <a:t>认证：OAuth / API key / third-party provider</a:t>
+              <a:t>tool call 不是 findToolByName -&gt; tool.call 这么短</a:t>
             </a:r>
           </a:p>
           <a:p>
@@ -5652,13 +5278,13 @@
               </a:spcAft>
             </a:pPr>
             <a:r>
-              <a:rPr sz="1700" b="0">
+              <a:rPr sz="1600" b="0">
                 <a:solidFill>
                   <a:srgbClr val="1F2937"/>
                 </a:solidFill>
                 <a:latin typeface="Arial"/>
               </a:rPr>
-              <a:t>策略：policy_limits、remote managed settings、forceLoginOrgUUID</a:t>
+              <a:t>permissions、hooks、classifier 在这里不是附属模块，而是同一条执行链</a:t>
             </a:r>
           </a:p>
           <a:p>
@@ -5668,134 +5294,13 @@
               </a:spcAft>
             </a:pPr>
             <a:r>
-              <a:rPr sz="1700" b="0">
+              <a:rPr sz="1600" b="0">
                 <a:solidFill>
                   <a:srgbClr val="1F2937"/>
                 </a:solidFill>
                 <a:latin typeface="Arial"/>
               </a:rPr>
-              <a:t>结论：服务端负责裁决，客户端负责执行</a:t>
-            </a:r>
-          </a:p>
-        </p:txBody>
-      </p:sp>
-      <p:sp>
-        <p:nvSpPr>
-          <p:cNvPr id="6" name="TextBox 5"/>
-          <p:cNvSpPr txBox="1"/>
-          <p:nvPr/>
-        </p:nvSpPr>
-        <p:spPr>
-          <a:xfrm>
-            <a:off x="6217920" y="1600200"/>
-            <a:ext cx="4389120" cy="457200"/>
-          </a:xfrm>
-          <a:prstGeom prst="rect">
-            <a:avLst/>
-          </a:prstGeom>
-          <a:noFill/>
-        </p:spPr>
-        <p:txBody>
-          <a:bodyPr wrap="none">
-            <a:spAutoFit/>
-          </a:bodyPr>
-          <a:lstStyle/>
-          <a:p>
-            <a:r>
-              <a:rPr sz="1800" b="1">
-                <a:solidFill>
-                  <a:srgbClr val="205295"/>
-                </a:solidFill>
-                <a:latin typeface="Arial"/>
-              </a:rPr>
-              <a:t>扩展面与观测</a:t>
-            </a:r>
-          </a:p>
-        </p:txBody>
-      </p:sp>
-      <p:sp>
-        <p:nvSpPr>
-          <p:cNvPr id="7" name="TextBox 6"/>
-          <p:cNvSpPr txBox="1"/>
-          <p:nvPr/>
-        </p:nvSpPr>
-        <p:spPr>
-          <a:xfrm>
-            <a:off x="6217920" y="2011680"/>
-            <a:ext cx="4389120" cy="3200400"/>
-          </a:xfrm>
-          <a:prstGeom prst="rect">
-            <a:avLst/>
-          </a:prstGeom>
-          <a:noFill/>
-        </p:spPr>
-        <p:txBody>
-          <a:bodyPr wrap="square" lIns="76200" rIns="76200" tIns="50800" bIns="50800">
-            <a:spAutoFit/>
-          </a:bodyPr>
-          <a:lstStyle/>
-          <a:p>
-            <a:pPr>
-              <a:spcAft>
-                <a:spcPts val="800"/>
-              </a:spcAft>
-            </a:pPr>
-            <a:r>
-              <a:rPr sz="1700" b="0">
-                <a:solidFill>
-                  <a:srgbClr val="1F2937"/>
-                </a:solidFill>
-                <a:latin typeface="Arial"/>
-              </a:rPr>
-              <a:t>API 层是多 provider 统一适配层</a:t>
-            </a:r>
-          </a:p>
-          <a:p>
-            <a:pPr>
-              <a:spcAft>
-                <a:spcPts val="800"/>
-              </a:spcAft>
-            </a:pPr>
-            <a:r>
-              <a:rPr sz="1700" b="0">
-                <a:solidFill>
-                  <a:srgbClr val="1F2937"/>
-                </a:solidFill>
-                <a:latin typeface="Arial"/>
-              </a:rPr>
-              <a:t>prompt stack 是一层 control plane</a:t>
-            </a:r>
-          </a:p>
-          <a:p>
-            <a:pPr>
-              <a:spcAft>
-                <a:spcPts val="800"/>
-              </a:spcAft>
-            </a:pPr>
-            <a:r>
-              <a:rPr sz="1700" b="0">
-                <a:solidFill>
-                  <a:srgbClr val="1F2937"/>
-                </a:solidFill>
-                <a:latin typeface="Arial"/>
-              </a:rPr>
-              <a:t>MCP / plugins / commands / skills 都是一级扩展面</a:t>
-            </a:r>
-          </a:p>
-          <a:p>
-            <a:pPr>
-              <a:spcAft>
-                <a:spcPts val="800"/>
-              </a:spcAft>
-            </a:pPr>
-            <a:r>
-              <a:rPr sz="1700" b="0">
-                <a:solidFill>
-                  <a:srgbClr val="1F2937"/>
-                </a:solidFill>
-                <a:latin typeface="Arial"/>
-              </a:rPr>
-              <a:t>queryProfiler / analyzeContext / cacheBreakDetection 负责解释系统为何变慢或变贵</a:t>
+              <a:t>这决定了 Claude Code 的 autonomy boundary 不在 UI，而在 runtime pipeline 本身</a:t>
             </a:r>
           </a:p>
         </p:txBody>
@@ -5855,7 +5360,7 @@
                 </a:solidFill>
                 <a:latin typeface="Arial"/>
               </a:rPr>
-              <a:t>最后只保留最重要的结论</a:t>
+              <a:t>task runtime 与 mailbox</a:t>
             </a:r>
           </a:p>
         </p:txBody>
@@ -5905,48 +5410,459 @@
       </p:sp>
       <p:sp>
         <p:nvSpPr>
-          <p:cNvPr id="4" name="TextBox 3"/>
+          <p:cNvPr id="4" name="Rounded Rectangle 3"/>
+          <p:cNvSpPr/>
+          <p:nvPr/>
+        </p:nvSpPr>
+        <p:spPr>
+          <a:xfrm>
+            <a:off x="822960" y="2011680"/>
+            <a:ext cx="1645920" cy="731520"/>
+          </a:xfrm>
+          <a:prstGeom prst="roundRect">
+            <a:avLst/>
+          </a:prstGeom>
+          <a:solidFill>
+            <a:srgbClr val="FFFFFF"/>
+          </a:solidFill>
+          <a:ln>
+            <a:solidFill>
+              <a:srgbClr val="205295"/>
+            </a:solidFill>
+          </a:ln>
+        </p:spPr>
+        <p:style>
+          <a:lnRef idx="1">
+            <a:schemeClr val="accent1"/>
+          </a:lnRef>
+          <a:fillRef idx="3">
+            <a:schemeClr val="accent1"/>
+          </a:fillRef>
+          <a:effectRef idx="2">
+            <a:schemeClr val="accent1"/>
+          </a:effectRef>
+          <a:fontRef idx="minor">
+            <a:schemeClr val="lt1"/>
+          </a:fontRef>
+        </p:style>
+        <p:txBody>
+          <a:bodyPr rtlCol="0" anchor="ctr" wrap="square" lIns="76200" rIns="76200" tIns="50800" bIns="50800"/>
+          <a:lstStyle/>
+          <a:p>
+            <a:pPr algn="ctr"/>
+            <a:r>
+              <a:rPr sz="1600" b="1">
+                <a:solidFill>
+                  <a:srgbClr val="0B1F44"/>
+                </a:solidFill>
+                <a:latin typeface="Arial"/>
+              </a:rPr>
+              <a:t>User / Main</a:t>
+            </a:r>
+          </a:p>
+        </p:txBody>
+      </p:sp>
+      <p:sp>
+        <p:nvSpPr>
+          <p:cNvPr id="5" name="Rounded Rectangle 4"/>
+          <p:cNvSpPr/>
+          <p:nvPr/>
+        </p:nvSpPr>
+        <p:spPr>
+          <a:xfrm>
+            <a:off x="3017520" y="2011680"/>
+            <a:ext cx="1828800" cy="731520"/>
+          </a:xfrm>
+          <a:prstGeom prst="roundRect">
+            <a:avLst/>
+          </a:prstGeom>
+          <a:solidFill>
+            <a:srgbClr val="FFFFFF"/>
+          </a:solidFill>
+          <a:ln>
+            <a:solidFill>
+              <a:srgbClr val="205295"/>
+            </a:solidFill>
+          </a:ln>
+        </p:spPr>
+        <p:style>
+          <a:lnRef idx="1">
+            <a:schemeClr val="accent1"/>
+          </a:lnRef>
+          <a:fillRef idx="3">
+            <a:schemeClr val="accent1"/>
+          </a:fillRef>
+          <a:effectRef idx="2">
+            <a:schemeClr val="accent1"/>
+          </a:effectRef>
+          <a:fontRef idx="minor">
+            <a:schemeClr val="lt1"/>
+          </a:fontRef>
+        </p:style>
+        <p:txBody>
+          <a:bodyPr rtlCol="0" anchor="ctr" wrap="square" lIns="76200" rIns="76200" tIns="50800" bIns="50800"/>
+          <a:lstStyle/>
+          <a:p>
+            <a:pPr algn="ctr"/>
+            <a:r>
+              <a:rPr sz="1600" b="1">
+                <a:solidFill>
+                  <a:srgbClr val="0B1F44"/>
+                </a:solidFill>
+                <a:latin typeface="Arial"/>
+              </a:rPr>
+              <a:t>task runtime</a:t>
+            </a:r>
+          </a:p>
+        </p:txBody>
+      </p:sp>
+      <p:sp>
+        <p:nvSpPr>
+          <p:cNvPr id="6" name="Rounded Rectangle 5"/>
+          <p:cNvSpPr/>
+          <p:nvPr/>
+        </p:nvSpPr>
+        <p:spPr>
+          <a:xfrm>
+            <a:off x="5394960" y="2011680"/>
+            <a:ext cx="1828800" cy="731520"/>
+          </a:xfrm>
+          <a:prstGeom prst="roundRect">
+            <a:avLst/>
+          </a:prstGeom>
+          <a:solidFill>
+            <a:srgbClr val="FFFFFF"/>
+          </a:solidFill>
+          <a:ln>
+            <a:solidFill>
+              <a:srgbClr val="205295"/>
+            </a:solidFill>
+          </a:ln>
+        </p:spPr>
+        <p:style>
+          <a:lnRef idx="1">
+            <a:schemeClr val="accent1"/>
+          </a:lnRef>
+          <a:fillRef idx="3">
+            <a:schemeClr val="accent1"/>
+          </a:fillRef>
+          <a:effectRef idx="2">
+            <a:schemeClr val="accent1"/>
+          </a:effectRef>
+          <a:fontRef idx="minor">
+            <a:schemeClr val="lt1"/>
+          </a:fontRef>
+        </p:style>
+        <p:txBody>
+          <a:bodyPr rtlCol="0" anchor="ctr" wrap="square" lIns="76200" rIns="76200" tIns="50800" bIns="50800"/>
+          <a:lstStyle/>
+          <a:p>
+            <a:pPr algn="ctr"/>
+            <a:r>
+              <a:rPr sz="1600" b="1">
+                <a:solidFill>
+                  <a:srgbClr val="0B1F44"/>
+                </a:solidFill>
+                <a:latin typeface="Arial"/>
+              </a:rPr>
+              <a:t>subagent</a:t>
+            </a:r>
+          </a:p>
+        </p:txBody>
+      </p:sp>
+      <p:sp>
+        <p:nvSpPr>
+          <p:cNvPr id="7" name="Rounded Rectangle 6"/>
+          <p:cNvSpPr/>
+          <p:nvPr/>
+        </p:nvSpPr>
+        <p:spPr>
+          <a:xfrm>
+            <a:off x="7772400" y="2011680"/>
+            <a:ext cx="1920240" cy="731520"/>
+          </a:xfrm>
+          <a:prstGeom prst="roundRect">
+            <a:avLst/>
+          </a:prstGeom>
+          <a:solidFill>
+            <a:srgbClr val="FFFFFF"/>
+          </a:solidFill>
+          <a:ln>
+            <a:solidFill>
+              <a:srgbClr val="205295"/>
+            </a:solidFill>
+          </a:ln>
+        </p:spPr>
+        <p:style>
+          <a:lnRef idx="1">
+            <a:schemeClr val="accent1"/>
+          </a:lnRef>
+          <a:fillRef idx="3">
+            <a:schemeClr val="accent1"/>
+          </a:fillRef>
+          <a:effectRef idx="2">
+            <a:schemeClr val="accent1"/>
+          </a:effectRef>
+          <a:fontRef idx="minor">
+            <a:schemeClr val="lt1"/>
+          </a:fontRef>
+        </p:style>
+        <p:txBody>
+          <a:bodyPr rtlCol="0" anchor="ctr" wrap="square" lIns="76200" rIns="76200" tIns="50800" bIns="50800"/>
+          <a:lstStyle/>
+          <a:p>
+            <a:pPr algn="ctr"/>
+            <a:r>
+              <a:rPr sz="1600" b="1">
+                <a:solidFill>
+                  <a:srgbClr val="0B1F44"/>
+                </a:solidFill>
+                <a:latin typeface="Arial"/>
+              </a:rPr>
+              <a:t>mailbox / queue</a:t>
+            </a:r>
+          </a:p>
+        </p:txBody>
+      </p:sp>
+      <p:sp>
+        <p:nvSpPr>
+          <p:cNvPr id="8" name="Rounded Rectangle 7"/>
+          <p:cNvSpPr/>
+          <p:nvPr/>
+        </p:nvSpPr>
+        <p:spPr>
+          <a:xfrm>
+            <a:off x="5303520" y="4023360"/>
+            <a:ext cx="2103120" cy="731520"/>
+          </a:xfrm>
+          <a:prstGeom prst="roundRect">
+            <a:avLst/>
+          </a:prstGeom>
+          <a:solidFill>
+            <a:srgbClr val="DDEAFB"/>
+          </a:solidFill>
+          <a:ln>
+            <a:solidFill>
+              <a:srgbClr val="205295"/>
+            </a:solidFill>
+          </a:ln>
+        </p:spPr>
+        <p:style>
+          <a:lnRef idx="1">
+            <a:schemeClr val="accent1"/>
+          </a:lnRef>
+          <a:fillRef idx="3">
+            <a:schemeClr val="accent1"/>
+          </a:fillRef>
+          <a:effectRef idx="2">
+            <a:schemeClr val="accent1"/>
+          </a:effectRef>
+          <a:fontRef idx="minor">
+            <a:schemeClr val="lt1"/>
+          </a:fontRef>
+        </p:style>
+        <p:txBody>
+          <a:bodyPr rtlCol="0" anchor="ctr" wrap="square" lIns="76200" rIns="76200" tIns="50800" bIns="50800"/>
+          <a:lstStyle/>
+          <a:p>
+            <a:pPr algn="ctr"/>
+            <a:r>
+              <a:rPr sz="1600" b="1">
+                <a:solidFill>
+                  <a:srgbClr val="0B1F44"/>
+                </a:solidFill>
+                <a:latin typeface="Arial"/>
+              </a:rPr>
+              <a:t>task-notification</a:t>
+            </a:r>
+          </a:p>
+        </p:txBody>
+      </p:sp>
+      <p:cxnSp>
+        <p:nvCxnSpPr>
+          <p:cNvPr id="9" name="Connector 8"/>
+          <p:cNvCxnSpPr/>
+          <p:nvPr/>
+        </p:nvCxnSpPr>
+        <p:spPr>
+          <a:xfrm>
+            <a:off x="2468880" y="2377440"/>
+            <a:ext cx="548640" cy="0"/>
+          </a:xfrm>
+          <a:prstGeom prst="line">
+            <a:avLst/>
+          </a:prstGeom>
+          <a:ln w="25400">
+            <a:solidFill>
+              <a:srgbClr val="205295"/>
+            </a:solidFill>
+          </a:ln>
+        </p:spPr>
+        <p:style>
+          <a:lnRef idx="2">
+            <a:schemeClr val="accent1"/>
+          </a:lnRef>
+          <a:fillRef idx="0">
+            <a:schemeClr val="accent1"/>
+          </a:fillRef>
+          <a:effectRef idx="1">
+            <a:schemeClr val="accent1"/>
+          </a:effectRef>
+          <a:fontRef idx="minor">
+            <a:schemeClr val="tx1"/>
+          </a:fontRef>
+        </p:style>
+      </p:cxnSp>
+      <p:cxnSp>
+        <p:nvCxnSpPr>
+          <p:cNvPr id="10" name="Connector 9"/>
+          <p:cNvCxnSpPr/>
+          <p:nvPr/>
+        </p:nvCxnSpPr>
+        <p:spPr>
+          <a:xfrm>
+            <a:off x="4846320" y="2377440"/>
+            <a:ext cx="548640" cy="0"/>
+          </a:xfrm>
+          <a:prstGeom prst="line">
+            <a:avLst/>
+          </a:prstGeom>
+          <a:ln w="25400">
+            <a:solidFill>
+              <a:srgbClr val="205295"/>
+            </a:solidFill>
+          </a:ln>
+        </p:spPr>
+        <p:style>
+          <a:lnRef idx="2">
+            <a:schemeClr val="accent1"/>
+          </a:lnRef>
+          <a:fillRef idx="0">
+            <a:schemeClr val="accent1"/>
+          </a:fillRef>
+          <a:effectRef idx="1">
+            <a:schemeClr val="accent1"/>
+          </a:effectRef>
+          <a:fontRef idx="minor">
+            <a:schemeClr val="tx1"/>
+          </a:fontRef>
+        </p:style>
+      </p:cxnSp>
+      <p:cxnSp>
+        <p:nvCxnSpPr>
+          <p:cNvPr id="11" name="Connector 10"/>
+          <p:cNvCxnSpPr/>
+          <p:nvPr/>
+        </p:nvCxnSpPr>
+        <p:spPr>
+          <a:xfrm>
+            <a:off x="7223760" y="2377440"/>
+            <a:ext cx="548640" cy="0"/>
+          </a:xfrm>
+          <a:prstGeom prst="line">
+            <a:avLst/>
+          </a:prstGeom>
+          <a:ln w="25400">
+            <a:solidFill>
+              <a:srgbClr val="205295"/>
+            </a:solidFill>
+          </a:ln>
+        </p:spPr>
+        <p:style>
+          <a:lnRef idx="2">
+            <a:schemeClr val="accent1"/>
+          </a:lnRef>
+          <a:fillRef idx="0">
+            <a:schemeClr val="accent1"/>
+          </a:fillRef>
+          <a:effectRef idx="1">
+            <a:schemeClr val="accent1"/>
+          </a:effectRef>
+          <a:fontRef idx="minor">
+            <a:schemeClr val="tx1"/>
+          </a:fontRef>
+        </p:style>
+      </p:cxnSp>
+      <p:cxnSp>
+        <p:nvCxnSpPr>
+          <p:cNvPr id="12" name="Connector 11"/>
+          <p:cNvCxnSpPr/>
+          <p:nvPr/>
+        </p:nvCxnSpPr>
+        <p:spPr>
+          <a:xfrm flipH="1">
+            <a:off x="6309360" y="2743200"/>
+            <a:ext cx="1463040" cy="1280160"/>
+          </a:xfrm>
+          <a:prstGeom prst="line">
+            <a:avLst/>
+          </a:prstGeom>
+          <a:ln w="25400">
+            <a:solidFill>
+              <a:srgbClr val="205295"/>
+            </a:solidFill>
+          </a:ln>
+        </p:spPr>
+        <p:style>
+          <a:lnRef idx="2">
+            <a:schemeClr val="accent1"/>
+          </a:lnRef>
+          <a:fillRef idx="0">
+            <a:schemeClr val="accent1"/>
+          </a:fillRef>
+          <a:effectRef idx="1">
+            <a:schemeClr val="accent1"/>
+          </a:effectRef>
+          <a:fontRef idx="minor">
+            <a:schemeClr val="tx1"/>
+          </a:fontRef>
+        </p:style>
+      </p:cxnSp>
+      <p:cxnSp>
+        <p:nvCxnSpPr>
+          <p:cNvPr id="13" name="Connector 12"/>
+          <p:cNvCxnSpPr/>
+          <p:nvPr/>
+        </p:nvCxnSpPr>
+        <p:spPr>
+          <a:xfrm flipH="1" flipV="1">
+            <a:off x="1737360" y="2743200"/>
+            <a:ext cx="3566160" cy="1645920"/>
+          </a:xfrm>
+          <a:prstGeom prst="line">
+            <a:avLst/>
+          </a:prstGeom>
+          <a:ln w="25400">
+            <a:solidFill>
+              <a:srgbClr val="205295"/>
+            </a:solidFill>
+          </a:ln>
+        </p:spPr>
+        <p:style>
+          <a:lnRef idx="2">
+            <a:schemeClr val="accent1"/>
+          </a:lnRef>
+          <a:fillRef idx="0">
+            <a:schemeClr val="accent1"/>
+          </a:fillRef>
+          <a:effectRef idx="1">
+            <a:schemeClr val="accent1"/>
+          </a:effectRef>
+          <a:fontRef idx="minor">
+            <a:schemeClr val="tx1"/>
+          </a:fontRef>
+        </p:style>
+      </p:cxnSp>
+      <p:sp>
+        <p:nvSpPr>
+          <p:cNvPr id="14" name="TextBox 13"/>
           <p:cNvSpPr txBox="1"/>
           <p:nvPr/>
         </p:nvSpPr>
         <p:spPr>
           <a:xfrm>
-            <a:off x="731520" y="1600200"/>
-            <a:ext cx="4389120" cy="457200"/>
-          </a:xfrm>
-          <a:prstGeom prst="rect">
-            <a:avLst/>
-          </a:prstGeom>
-          <a:noFill/>
-        </p:spPr>
-        <p:txBody>
-          <a:bodyPr wrap="none">
-            <a:spAutoFit/>
-          </a:bodyPr>
-          <a:lstStyle/>
-          <a:p>
-            <a:r>
-              <a:rPr sz="1800" b="1">
-                <a:solidFill>
-                  <a:srgbClr val="205295"/>
-                </a:solidFill>
-                <a:latin typeface="Arial"/>
-              </a:rPr>
-              <a:t>读源码时先抓</a:t>
-            </a:r>
-          </a:p>
-        </p:txBody>
-      </p:sp>
-      <p:sp>
-        <p:nvSpPr>
-          <p:cNvPr id="5" name="TextBox 4"/>
-          <p:cNvSpPr txBox="1"/>
-          <p:nvPr/>
-        </p:nvSpPr>
-        <p:spPr>
-          <a:xfrm>
-            <a:off x="731520" y="2011680"/>
-            <a:ext cx="4389120" cy="3200400"/>
+            <a:off x="822960" y="4846320"/>
+            <a:ext cx="10149840" cy="1097280"/>
           </a:xfrm>
           <a:prstGeom prst="rect">
             <a:avLst/>
@@ -5965,13 +5881,13 @@
               </a:spcAft>
             </a:pPr>
             <a:r>
-              <a:rPr sz="1700" b="0">
+              <a:rPr sz="1600" b="0">
                 <a:solidFill>
                   <a:srgbClr val="1F2937"/>
                 </a:solidFill>
                 <a:latin typeface="Arial"/>
               </a:rPr>
-              <a:t>main.tsx -&gt; query.ts -&gt; tools</a:t>
+              <a:t>task/framework.ts 负责注册、轮询、GC、notification</a:t>
             </a:r>
           </a:p>
           <a:p>
@@ -5981,13 +5897,13 @@
               </a:spcAft>
             </a:pPr>
             <a:r>
-              <a:rPr sz="1700" b="0">
+              <a:rPr sz="1600" b="0">
                 <a:solidFill>
                   <a:srgbClr val="1F2937"/>
                 </a:solidFill>
                 <a:latin typeface="Arial"/>
               </a:rPr>
-              <a:t>settings -&gt; auth -&gt; api client</a:t>
+              <a:t>runAgent.ts 负责 subagent、sidechain transcript、metadata</a:t>
             </a:r>
           </a:p>
           <a:p>
@@ -5997,72 +5913,15 @@
               </a:spcAft>
             </a:pPr>
             <a:r>
-              <a:rPr sz="1700" b="0">
+              <a:rPr sz="1600" b="0">
                 <a:solidFill>
                   <a:srgbClr val="1F2937"/>
                 </a:solidFill>
                 <a:latin typeface="Arial"/>
               </a:rPr>
-              <a:t>policy / managed settings -&gt; 本地执行</a:t>
-            </a:r>
-          </a:p>
-        </p:txBody>
-      </p:sp>
-      <p:sp>
-        <p:nvSpPr>
-          <p:cNvPr id="6" name="TextBox 5"/>
-          <p:cNvSpPr txBox="1"/>
-          <p:nvPr/>
-        </p:nvSpPr>
-        <p:spPr>
-          <a:xfrm>
-            <a:off x="6217920" y="1600200"/>
-            <a:ext cx="4389120" cy="457200"/>
-          </a:xfrm>
-          <a:prstGeom prst="rect">
-            <a:avLst/>
-          </a:prstGeom>
-          <a:noFill/>
-        </p:spPr>
-        <p:txBody>
-          <a:bodyPr wrap="none">
-            <a:spAutoFit/>
-          </a:bodyPr>
-          <a:lstStyle/>
-          <a:p>
-            <a:r>
-              <a:rPr sz="1800" b="1">
-                <a:solidFill>
-                  <a:srgbClr val="205295"/>
-                </a:solidFill>
-                <a:latin typeface="Arial"/>
-              </a:rPr>
-              <a:t>从源码提炼的使用建议</a:t>
-            </a:r>
-          </a:p>
-        </p:txBody>
-      </p:sp>
-      <p:sp>
-        <p:nvSpPr>
-          <p:cNvPr id="7" name="TextBox 6"/>
-          <p:cNvSpPr txBox="1"/>
-          <p:nvPr/>
-        </p:nvSpPr>
-        <p:spPr>
-          <a:xfrm>
-            <a:off x="6217920" y="2011680"/>
-            <a:ext cx="4389120" cy="3200400"/>
-          </a:xfrm>
-          <a:prstGeom prst="rect">
-            <a:avLst/>
-          </a:prstGeom>
-          <a:noFill/>
-        </p:spPr>
-        <p:txBody>
-          <a:bodyPr wrap="square" lIns="76200" rIns="76200" tIns="50800" bIns="50800">
-            <a:spAutoFit/>
-          </a:bodyPr>
-          <a:lstStyle/>
+              <a:t>mailbox / pendingMessages 的投递发生在 turn 边界</a:t>
+            </a:r>
+          </a:p>
           <a:p>
             <a:pPr>
               <a:spcAft>
@@ -6070,95 +5929,13 @@
               </a:spcAft>
             </a:pPr>
             <a:r>
-              <a:rPr sz="1700" b="0">
+              <a:rPr sz="1600" b="0">
                 <a:solidFill>
                   <a:srgbClr val="1F2937"/>
                 </a:solidFill>
                 <a:latin typeface="Arial"/>
               </a:rPr>
-              <a:t>先读相关代码再改</a:t>
-            </a:r>
-          </a:p>
-          <a:p>
-            <a:pPr>
-              <a:spcAft>
-                <a:spcPts val="800"/>
-              </a:spcAft>
-            </a:pPr>
-            <a:r>
-              <a:rPr sz="1700" b="0">
-                <a:solidFill>
-                  <a:srgbClr val="1F2937"/>
-                </a:solidFill>
-                <a:latin typeface="Arial"/>
-              </a:rPr>
-              <a:t>优先复用现有实现</a:t>
-            </a:r>
-          </a:p>
-          <a:p>
-            <a:pPr>
-              <a:spcAft>
-                <a:spcPts val="800"/>
-              </a:spcAft>
-            </a:pPr>
-            <a:r>
-              <a:rPr sz="1700" b="0">
-                <a:solidFill>
-                  <a:srgbClr val="1F2937"/>
-                </a:solidFill>
-                <a:latin typeface="Arial"/>
-              </a:rPr>
-              <a:t>做最小必要改动</a:t>
-            </a:r>
-          </a:p>
-          <a:p>
-            <a:pPr>
-              <a:spcAft>
-                <a:spcPts val="800"/>
-              </a:spcAft>
-            </a:pPr>
-            <a:r>
-              <a:rPr sz="1700" b="0">
-                <a:solidFill>
-                  <a:srgbClr val="1F2937"/>
-                </a:solidFill>
-                <a:latin typeface="Arial"/>
-              </a:rPr>
-              <a:t>验证后如实汇报</a:t>
-            </a:r>
-          </a:p>
-        </p:txBody>
-      </p:sp>
-      <p:sp>
-        <p:nvSpPr>
-          <p:cNvPr id="8" name="TextBox 7"/>
-          <p:cNvSpPr txBox="1"/>
-          <p:nvPr/>
-        </p:nvSpPr>
-        <p:spPr>
-          <a:xfrm>
-            <a:off x="841248" y="5532120"/>
-            <a:ext cx="10058400" cy="502920"/>
-          </a:xfrm>
-          <a:prstGeom prst="rect">
-            <a:avLst/>
-          </a:prstGeom>
-          <a:noFill/>
-        </p:spPr>
-        <p:txBody>
-          <a:bodyPr wrap="square" lIns="76200" rIns="76200" tIns="50800" bIns="50800">
-            <a:spAutoFit/>
-          </a:bodyPr>
-          <a:lstStyle/>
-          <a:p>
-            <a:r>
-              <a:rPr sz="1400" b="0">
-                <a:solidFill>
-                  <a:srgbClr val="475569"/>
-                </a:solidFill>
-                <a:latin typeface="Arial"/>
-              </a:rPr>
-              <a:t>一句话：Claude Code 本质上是一个围绕 turn loop 构建的、可被企业管理的终端 agent runtime。</a:t>
+              <a:t>这牺牲了一点即时性，但换来了 turn 内状态一致性</a:t>
             </a:r>
           </a:p>
         </p:txBody>
@@ -6177,7 +5954,7 @@
     <p:bg>
       <p:bgPr>
         <a:solidFill>
-          <a:srgbClr val="101C3F"/>
+          <a:srgbClr val="F8FAFC"/>
         </a:solidFill>
         <a:effectLst/>
       </p:bgPr>
@@ -6212,27 +5989,104 @@
           <a:lstStyle/>
           <a:p>
             <a:r>
-              <a:rPr sz="2800" b="1">
-                <a:solidFill>
-                  <a:srgbClr val="FFFFFF"/>
-                </a:solidFill>
-                <a:latin typeface="Arial"/>
-              </a:rPr>
-              <a:t>谢谢</a:t>
-            </a:r>
-          </a:p>
-        </p:txBody>
-      </p:sp>
-      <p:sp>
-        <p:nvSpPr>
-          <p:cNvPr id="3" name="TextBox 2"/>
+              <a:rPr sz="2600" b="1">
+                <a:solidFill>
+                  <a:srgbClr val="0B1F44"/>
+                </a:solidFill>
+                <a:latin typeface="Arial"/>
+              </a:rPr>
+              <a:t>文档里最重要的一组判断：状态载体分层</a:t>
+            </a:r>
+          </a:p>
+        </p:txBody>
+      </p:sp>
+      <p:sp>
+        <p:nvSpPr>
+          <p:cNvPr id="3" name="Rectangle 2"/>
+          <p:cNvSpPr/>
+          <p:nvPr/>
+        </p:nvSpPr>
+        <p:spPr>
+          <a:xfrm>
+            <a:off x="621792" y="1078992"/>
+            <a:ext cx="2011680" cy="27432"/>
+          </a:xfrm>
+          <a:prstGeom prst="rect">
+            <a:avLst/>
+          </a:prstGeom>
+          <a:solidFill>
+            <a:srgbClr val="DBE4F0"/>
+          </a:solidFill>
+          <a:ln>
+            <a:noFill/>
+          </a:ln>
+        </p:spPr>
+        <p:style>
+          <a:lnRef idx="1">
+            <a:schemeClr val="accent1"/>
+          </a:lnRef>
+          <a:fillRef idx="3">
+            <a:schemeClr val="accent1"/>
+          </a:fillRef>
+          <a:effectRef idx="2">
+            <a:schemeClr val="accent1"/>
+          </a:effectRef>
+          <a:fontRef idx="minor">
+            <a:schemeClr val="lt1"/>
+          </a:fontRef>
+        </p:style>
+        <p:txBody>
+          <a:bodyPr rtlCol="0" anchor="ctr"/>
+          <a:lstStyle/>
+          <a:p>
+            <a:pPr algn="ctr"/>
+          </a:p>
+        </p:txBody>
+      </p:sp>
+      <p:sp>
+        <p:nvSpPr>
+          <p:cNvPr id="4" name="TextBox 3"/>
           <p:cNvSpPr txBox="1"/>
           <p:nvPr/>
         </p:nvSpPr>
         <p:spPr>
           <a:xfrm>
-            <a:off x="658368" y="1280160"/>
-            <a:ext cx="10241280" cy="640080"/>
+            <a:off x="731520" y="1600200"/>
+            <a:ext cx="4389120" cy="457200"/>
+          </a:xfrm>
+          <a:prstGeom prst="rect">
+            <a:avLst/>
+          </a:prstGeom>
+          <a:noFill/>
+        </p:spPr>
+        <p:txBody>
+          <a:bodyPr wrap="none">
+            <a:spAutoFit/>
+          </a:bodyPr>
+          <a:lstStyle/>
+          <a:p>
+            <a:r>
+              <a:rPr sz="1800" b="1">
+                <a:solidFill>
+                  <a:srgbClr val="205295"/>
+                </a:solidFill>
+                <a:latin typeface="Arial"/>
+              </a:rPr>
+              <a:t>turn-local / host-wide</a:t>
+            </a:r>
+          </a:p>
+        </p:txBody>
+      </p:sp>
+      <p:sp>
+        <p:nvSpPr>
+          <p:cNvPr id="5" name="TextBox 4"/>
+          <p:cNvSpPr txBox="1"/>
+          <p:nvPr/>
+        </p:nvSpPr>
+        <p:spPr>
+          <a:xfrm>
+            <a:off x="731520" y="2011680"/>
+            <a:ext cx="4389120" cy="3200400"/>
           </a:xfrm>
           <a:prstGeom prst="rect">
             <a:avLst/>
@@ -6245,14 +6099,1127 @@
           </a:bodyPr>
           <a:lstStyle/>
           <a:p>
-            <a:r>
-              <a:rPr sz="1500" b="0">
-                <a:solidFill>
-                  <a:srgbClr val="FFFFFF"/>
-                </a:solidFill>
-                <a:latin typeface="Arial"/>
-              </a:rPr>
-              <a:t>这份源码最值得看的，不只是功能，而是它已经为长时间工作的 runtime 付过哪些工程账。</a:t>
+            <a:pPr>
+              <a:spcAft>
+                <a:spcPts val="800"/>
+              </a:spcAft>
+            </a:pPr>
+            <a:r>
+              <a:rPr sz="1700" b="0">
+                <a:solidFill>
+                  <a:srgbClr val="1F2937"/>
+                </a:solidFill>
+                <a:latin typeface="Arial"/>
+              </a:rPr>
+              <a:t>messages：turn-local 工作面</a:t>
+            </a:r>
+          </a:p>
+          <a:p>
+            <a:pPr>
+              <a:spcAft>
+                <a:spcPts val="800"/>
+              </a:spcAft>
+            </a:pPr>
+            <a:r>
+              <a:rPr sz="1700" b="0">
+                <a:solidFill>
+                  <a:srgbClr val="1F2937"/>
+                </a:solidFill>
+                <a:latin typeface="Arial"/>
+              </a:rPr>
+              <a:t>ToolUseContext：工具执行总线</a:t>
+            </a:r>
+          </a:p>
+          <a:p>
+            <a:pPr>
+              <a:spcAft>
+                <a:spcPts val="800"/>
+              </a:spcAft>
+            </a:pPr>
+            <a:r>
+              <a:rPr sz="1700" b="0">
+                <a:solidFill>
+                  <a:srgbClr val="1F2937"/>
+                </a:solidFill>
+                <a:latin typeface="Arial"/>
+              </a:rPr>
+              <a:t>AppState：宿主共享状态</a:t>
+            </a:r>
+          </a:p>
+        </p:txBody>
+      </p:sp>
+      <p:sp>
+        <p:nvSpPr>
+          <p:cNvPr id="6" name="TextBox 5"/>
+          <p:cNvSpPr txBox="1"/>
+          <p:nvPr/>
+        </p:nvSpPr>
+        <p:spPr>
+          <a:xfrm>
+            <a:off x="6217920" y="1600200"/>
+            <a:ext cx="4389120" cy="457200"/>
+          </a:xfrm>
+          <a:prstGeom prst="rect">
+            <a:avLst/>
+          </a:prstGeom>
+          <a:noFill/>
+        </p:spPr>
+        <p:txBody>
+          <a:bodyPr wrap="none">
+            <a:spAutoFit/>
+          </a:bodyPr>
+          <a:lstStyle/>
+          <a:p>
+            <a:r>
+              <a:rPr sz="1800" b="1">
+                <a:solidFill>
+                  <a:srgbClr val="205295"/>
+                </a:solidFill>
+                <a:latin typeface="Arial"/>
+              </a:rPr>
+              <a:t>durable / on-demand</a:t>
+            </a:r>
+          </a:p>
+        </p:txBody>
+      </p:sp>
+      <p:sp>
+        <p:nvSpPr>
+          <p:cNvPr id="7" name="TextBox 6"/>
+          <p:cNvSpPr txBox="1"/>
+          <p:nvPr/>
+        </p:nvSpPr>
+        <p:spPr>
+          <a:xfrm>
+            <a:off x="6217920" y="2011680"/>
+            <a:ext cx="4389120" cy="3200400"/>
+          </a:xfrm>
+          <a:prstGeom prst="rect">
+            <a:avLst/>
+          </a:prstGeom>
+          <a:noFill/>
+        </p:spPr>
+        <p:txBody>
+          <a:bodyPr wrap="square" lIns="76200" rIns="76200" tIns="50800" bIns="50800">
+            <a:spAutoFit/>
+          </a:bodyPr>
+          <a:lstStyle/>
+          <a:p>
+            <a:pPr>
+              <a:spcAft>
+                <a:spcPts val="800"/>
+              </a:spcAft>
+            </a:pPr>
+            <a:r>
+              <a:rPr sz="1700" b="0">
+                <a:solidFill>
+                  <a:srgbClr val="1F2937"/>
+                </a:solidFill>
+                <a:latin typeface="Arial"/>
+              </a:rPr>
+              <a:t>transcript / sidechain：durable history</a:t>
+            </a:r>
+          </a:p>
+          <a:p>
+            <a:pPr>
+              <a:spcAft>
+                <a:spcPts val="800"/>
+              </a:spcAft>
+            </a:pPr>
+            <a:r>
+              <a:rPr sz="1700" b="0">
+                <a:solidFill>
+                  <a:srgbClr val="1F2937"/>
+                </a:solidFill>
+                <a:latin typeface="Arial"/>
+              </a:rPr>
+              <a:t>attachments / sidecar artifacts：按需重注入</a:t>
+            </a:r>
+          </a:p>
+          <a:p>
+            <a:pPr>
+              <a:spcAft>
+                <a:spcPts val="800"/>
+              </a:spcAft>
+            </a:pPr>
+            <a:r>
+              <a:rPr sz="1700" b="0">
+                <a:solidFill>
+                  <a:srgbClr val="1F2937"/>
+                </a:solidFill>
+                <a:latin typeface="Arial"/>
+              </a:rPr>
+              <a:t>不要把系统简化成“只有消息数组”</a:t>
+            </a:r>
+          </a:p>
+        </p:txBody>
+      </p:sp>
+    </p:spTree>
+  </p:cSld>
+  <p:clrMapOvr>
+    <a:masterClrMapping/>
+  </p:clrMapOvr>
+</p:sld>
+</file>
+
+<file path=ppt/slides/slide17.xml><?xml version="1.0" encoding="utf-8"?>
+<p:sld xmlns:a="http://schemas.openxmlformats.org/drawingml/2006/main" xmlns:p="http://schemas.openxmlformats.org/presentationml/2006/main" xmlns:r="http://schemas.openxmlformats.org/officeDocument/2006/relationships">
+  <p:cSld>
+    <p:bg>
+      <p:bgPr>
+        <a:solidFill>
+          <a:srgbClr val="F8FAFC"/>
+        </a:solidFill>
+        <a:effectLst/>
+      </p:bgPr>
+    </p:bg>
+    <p:spTree>
+      <p:nvGrpSpPr>
+        <p:cNvPr id="1" name=""/>
+        <p:cNvGrpSpPr/>
+        <p:nvPr/>
+      </p:nvGrpSpPr>
+      <p:grpSpPr/>
+      <p:sp>
+        <p:nvSpPr>
+          <p:cNvPr id="2" name="TextBox 1"/>
+          <p:cNvSpPr txBox="1"/>
+          <p:nvPr/>
+        </p:nvSpPr>
+        <p:spPr>
+          <a:xfrm>
+            <a:off x="594360" y="384048"/>
+            <a:ext cx="10789920" cy="685800"/>
+          </a:xfrm>
+          <a:prstGeom prst="rect">
+            <a:avLst/>
+          </a:prstGeom>
+          <a:noFill/>
+        </p:spPr>
+        <p:txBody>
+          <a:bodyPr wrap="square" lIns="76200" rIns="76200" tIns="50800" bIns="50800">
+            <a:spAutoFit/>
+          </a:bodyPr>
+          <a:lstStyle/>
+          <a:p>
+            <a:r>
+              <a:rPr sz="2600" b="1">
+                <a:solidFill>
+                  <a:srgbClr val="0B1F44"/>
+                </a:solidFill>
+                <a:latin typeface="Arial"/>
+              </a:rPr>
+              <a:t>文档里的另一个高价值产出：调试入口</a:t>
+            </a:r>
+          </a:p>
+        </p:txBody>
+      </p:sp>
+      <p:sp>
+        <p:nvSpPr>
+          <p:cNvPr id="3" name="Rectangle 2"/>
+          <p:cNvSpPr/>
+          <p:nvPr/>
+        </p:nvSpPr>
+        <p:spPr>
+          <a:xfrm>
+            <a:off x="621792" y="1078992"/>
+            <a:ext cx="2011680" cy="27432"/>
+          </a:xfrm>
+          <a:prstGeom prst="rect">
+            <a:avLst/>
+          </a:prstGeom>
+          <a:solidFill>
+            <a:srgbClr val="DBE4F0"/>
+          </a:solidFill>
+          <a:ln>
+            <a:noFill/>
+          </a:ln>
+        </p:spPr>
+        <p:style>
+          <a:lnRef idx="1">
+            <a:schemeClr val="accent1"/>
+          </a:lnRef>
+          <a:fillRef idx="3">
+            <a:schemeClr val="accent1"/>
+          </a:fillRef>
+          <a:effectRef idx="2">
+            <a:schemeClr val="accent1"/>
+          </a:effectRef>
+          <a:fontRef idx="minor">
+            <a:schemeClr val="lt1"/>
+          </a:fontRef>
+        </p:style>
+        <p:txBody>
+          <a:bodyPr rtlCol="0" anchor="ctr"/>
+          <a:lstStyle/>
+          <a:p>
+            <a:pPr algn="ctr"/>
+          </a:p>
+        </p:txBody>
+      </p:sp>
+      <p:sp>
+        <p:nvSpPr>
+          <p:cNvPr id="4" name="TextBox 3"/>
+          <p:cNvSpPr txBox="1"/>
+          <p:nvPr/>
+        </p:nvSpPr>
+        <p:spPr>
+          <a:xfrm>
+            <a:off x="731520" y="1600200"/>
+            <a:ext cx="4389120" cy="457200"/>
+          </a:xfrm>
+          <a:prstGeom prst="rect">
+            <a:avLst/>
+          </a:prstGeom>
+          <a:noFill/>
+        </p:spPr>
+        <p:txBody>
+          <a:bodyPr wrap="none">
+            <a:spAutoFit/>
+          </a:bodyPr>
+          <a:lstStyle/>
+          <a:p>
+            <a:r>
+              <a:rPr sz="1800" b="1">
+                <a:solidFill>
+                  <a:srgbClr val="205295"/>
+                </a:solidFill>
+                <a:latin typeface="Arial"/>
+              </a:rPr>
+              <a:t>遇到问题先看哪里</a:t>
+            </a:r>
+          </a:p>
+        </p:txBody>
+      </p:sp>
+      <p:sp>
+        <p:nvSpPr>
+          <p:cNvPr id="5" name="TextBox 4"/>
+          <p:cNvSpPr txBox="1"/>
+          <p:nvPr/>
+        </p:nvSpPr>
+        <p:spPr>
+          <a:xfrm>
+            <a:off x="731520" y="2011680"/>
+            <a:ext cx="4389120" cy="3200400"/>
+          </a:xfrm>
+          <a:prstGeom prst="rect">
+            <a:avLst/>
+          </a:prstGeom>
+          <a:noFill/>
+        </p:spPr>
+        <p:txBody>
+          <a:bodyPr wrap="square" lIns="76200" rIns="76200" tIns="50800" bIns="50800">
+            <a:spAutoFit/>
+          </a:bodyPr>
+          <a:lstStyle/>
+          <a:p>
+            <a:pPr>
+              <a:spcAft>
+                <a:spcPts val="800"/>
+              </a:spcAft>
+            </a:pPr>
+            <a:r>
+              <a:rPr sz="1700" b="0">
+                <a:solidFill>
+                  <a:srgbClr val="1F2937"/>
+                </a:solidFill>
+                <a:latin typeface="Arial"/>
+              </a:rPr>
+              <a:t>turn loop：query.ts / QueryEngine.ts</a:t>
+            </a:r>
+          </a:p>
+          <a:p>
+            <a:pPr>
+              <a:spcAft>
+                <a:spcPts val="800"/>
+              </a:spcAft>
+            </a:pPr>
+            <a:r>
+              <a:rPr sz="1700" b="0">
+                <a:solidFill>
+                  <a:srgbClr val="1F2937"/>
+                </a:solidFill>
+                <a:latin typeface="Arial"/>
+              </a:rPr>
+              <a:t>context 过大：compact.ts / microCompact.ts / analyzeContext.ts</a:t>
+            </a:r>
+          </a:p>
+          <a:p>
+            <a:pPr>
+              <a:spcAft>
+                <a:spcPts val="800"/>
+              </a:spcAft>
+            </a:pPr>
+            <a:r>
+              <a:rPr sz="1700" b="0">
+                <a:solidFill>
+                  <a:srgbClr val="1F2937"/>
+                </a:solidFill>
+                <a:latin typeface="Arial"/>
+              </a:rPr>
+              <a:t>工具被拒绝：toolExecution.ts / permissions / hooks</a:t>
+            </a:r>
+          </a:p>
+        </p:txBody>
+      </p:sp>
+      <p:sp>
+        <p:nvSpPr>
+          <p:cNvPr id="6" name="TextBox 5"/>
+          <p:cNvSpPr txBox="1"/>
+          <p:nvPr/>
+        </p:nvSpPr>
+        <p:spPr>
+          <a:xfrm>
+            <a:off x="6217920" y="1600200"/>
+            <a:ext cx="4389120" cy="457200"/>
+          </a:xfrm>
+          <a:prstGeom prst="rect">
+            <a:avLst/>
+          </a:prstGeom>
+          <a:noFill/>
+        </p:spPr>
+        <p:txBody>
+          <a:bodyPr wrap="none">
+            <a:spAutoFit/>
+          </a:bodyPr>
+          <a:lstStyle/>
+          <a:p>
+            <a:r>
+              <a:rPr sz="1800" b="1">
+                <a:solidFill>
+                  <a:srgbClr val="205295"/>
+                </a:solidFill>
+                <a:latin typeface="Arial"/>
+              </a:rPr>
+              <a:t>排障价值</a:t>
+            </a:r>
+          </a:p>
+        </p:txBody>
+      </p:sp>
+      <p:sp>
+        <p:nvSpPr>
+          <p:cNvPr id="7" name="TextBox 6"/>
+          <p:cNvSpPr txBox="1"/>
+          <p:nvPr/>
+        </p:nvSpPr>
+        <p:spPr>
+          <a:xfrm>
+            <a:off x="6217920" y="2011680"/>
+            <a:ext cx="4389120" cy="3200400"/>
+          </a:xfrm>
+          <a:prstGeom prst="rect">
+            <a:avLst/>
+          </a:prstGeom>
+          <a:noFill/>
+        </p:spPr>
+        <p:txBody>
+          <a:bodyPr wrap="square" lIns="76200" rIns="76200" tIns="50800" bIns="50800">
+            <a:spAutoFit/>
+          </a:bodyPr>
+          <a:lstStyle/>
+          <a:p>
+            <a:pPr>
+              <a:spcAft>
+                <a:spcPts val="800"/>
+              </a:spcAft>
+            </a:pPr>
+            <a:r>
+              <a:rPr sz="1700" b="0">
+                <a:solidFill>
+                  <a:srgbClr val="1F2937"/>
+                </a:solidFill>
+                <a:latin typeface="Arial"/>
+              </a:rPr>
+              <a:t>它把“读源码”变成“可直接排障”</a:t>
+            </a:r>
+          </a:p>
+          <a:p>
+            <a:pPr>
+              <a:spcAft>
+                <a:spcPts val="800"/>
+              </a:spcAft>
+            </a:pPr>
+            <a:r>
+              <a:rPr sz="1700" b="0">
+                <a:solidFill>
+                  <a:srgbClr val="1F2937"/>
+                </a:solidFill>
+                <a:latin typeface="Arial"/>
+              </a:rPr>
+              <a:t>能快速定位：为什么继续、为什么 compact、为什么拒绝、为什么变慢</a:t>
+            </a:r>
+          </a:p>
+          <a:p>
+            <a:pPr>
+              <a:spcAft>
+                <a:spcPts val="800"/>
+              </a:spcAft>
+            </a:pPr>
+            <a:r>
+              <a:rPr sz="1700" b="0">
+                <a:solidFill>
+                  <a:srgbClr val="1F2937"/>
+                </a:solidFill>
+                <a:latin typeface="Arial"/>
+              </a:rPr>
+              <a:t>这也是走读文档区别于普通目录介绍的地方</a:t>
+            </a:r>
+          </a:p>
+        </p:txBody>
+      </p:sp>
+    </p:spTree>
+  </p:cSld>
+  <p:clrMapOvr>
+    <a:masterClrMapping/>
+  </p:clrMapOvr>
+</p:sld>
+</file>
+
+<file path=ppt/slides/slide18.xml><?xml version="1.0" encoding="utf-8"?>
+<p:sld xmlns:a="http://schemas.openxmlformats.org/drawingml/2006/main" xmlns:p="http://schemas.openxmlformats.org/presentationml/2006/main" xmlns:r="http://schemas.openxmlformats.org/officeDocument/2006/relationships">
+  <p:cSld>
+    <p:bg>
+      <p:bgPr>
+        <a:solidFill>
+          <a:srgbClr val="F8FAFC"/>
+        </a:solidFill>
+        <a:effectLst/>
+      </p:bgPr>
+    </p:bg>
+    <p:spTree>
+      <p:nvGrpSpPr>
+        <p:cNvPr id="1" name=""/>
+        <p:cNvGrpSpPr/>
+        <p:nvPr/>
+      </p:nvGrpSpPr>
+      <p:grpSpPr/>
+      <p:sp>
+        <p:nvSpPr>
+          <p:cNvPr id="2" name="TextBox 1"/>
+          <p:cNvSpPr txBox="1"/>
+          <p:nvPr/>
+        </p:nvSpPr>
+        <p:spPr>
+          <a:xfrm>
+            <a:off x="594360" y="384048"/>
+            <a:ext cx="10789920" cy="685800"/>
+          </a:xfrm>
+          <a:prstGeom prst="rect">
+            <a:avLst/>
+          </a:prstGeom>
+          <a:noFill/>
+        </p:spPr>
+        <p:txBody>
+          <a:bodyPr wrap="square" lIns="76200" rIns="76200" tIns="50800" bIns="50800">
+            <a:spAutoFit/>
+          </a:bodyPr>
+          <a:lstStyle/>
+          <a:p>
+            <a:r>
+              <a:rPr sz="2600" b="1">
+                <a:solidFill>
+                  <a:srgbClr val="0B1F44"/>
+                </a:solidFill>
+                <a:latin typeface="Arial"/>
+              </a:rPr>
+              <a:t>为什么它更像产品化 runtime</a:t>
+            </a:r>
+          </a:p>
+        </p:txBody>
+      </p:sp>
+      <p:sp>
+        <p:nvSpPr>
+          <p:cNvPr id="3" name="Rectangle 2"/>
+          <p:cNvSpPr/>
+          <p:nvPr/>
+        </p:nvSpPr>
+        <p:spPr>
+          <a:xfrm>
+            <a:off x="621792" y="1078992"/>
+            <a:ext cx="2011680" cy="27432"/>
+          </a:xfrm>
+          <a:prstGeom prst="rect">
+            <a:avLst/>
+          </a:prstGeom>
+          <a:solidFill>
+            <a:srgbClr val="DBE4F0"/>
+          </a:solidFill>
+          <a:ln>
+            <a:noFill/>
+          </a:ln>
+        </p:spPr>
+        <p:style>
+          <a:lnRef idx="1">
+            <a:schemeClr val="accent1"/>
+          </a:lnRef>
+          <a:fillRef idx="3">
+            <a:schemeClr val="accent1"/>
+          </a:fillRef>
+          <a:effectRef idx="2">
+            <a:schemeClr val="accent1"/>
+          </a:effectRef>
+          <a:fontRef idx="minor">
+            <a:schemeClr val="lt1"/>
+          </a:fontRef>
+        </p:style>
+        <p:txBody>
+          <a:bodyPr rtlCol="0" anchor="ctr"/>
+          <a:lstStyle/>
+          <a:p>
+            <a:pPr algn="ctr"/>
+          </a:p>
+        </p:txBody>
+      </p:sp>
+      <p:sp>
+        <p:nvSpPr>
+          <p:cNvPr id="4" name="TextBox 3"/>
+          <p:cNvSpPr txBox="1"/>
+          <p:nvPr/>
+        </p:nvSpPr>
+        <p:spPr>
+          <a:xfrm>
+            <a:off x="731520" y="1600200"/>
+            <a:ext cx="4389120" cy="457200"/>
+          </a:xfrm>
+          <a:prstGeom prst="rect">
+            <a:avLst/>
+          </a:prstGeom>
+          <a:noFill/>
+        </p:spPr>
+        <p:txBody>
+          <a:bodyPr wrap="none">
+            <a:spAutoFit/>
+          </a:bodyPr>
+          <a:lstStyle/>
+          <a:p>
+            <a:r>
+              <a:rPr sz="1800" b="1">
+                <a:solidFill>
+                  <a:srgbClr val="205295"/>
+                </a:solidFill>
+                <a:latin typeface="Arial"/>
+              </a:rPr>
+              <a:t>控制面</a:t>
+            </a:r>
+          </a:p>
+        </p:txBody>
+      </p:sp>
+      <p:sp>
+        <p:nvSpPr>
+          <p:cNvPr id="5" name="TextBox 4"/>
+          <p:cNvSpPr txBox="1"/>
+          <p:nvPr/>
+        </p:nvSpPr>
+        <p:spPr>
+          <a:xfrm>
+            <a:off x="731520" y="2011680"/>
+            <a:ext cx="4389120" cy="3200400"/>
+          </a:xfrm>
+          <a:prstGeom prst="rect">
+            <a:avLst/>
+          </a:prstGeom>
+          <a:noFill/>
+        </p:spPr>
+        <p:txBody>
+          <a:bodyPr wrap="square" lIns="76200" rIns="76200" tIns="50800" bIns="50800">
+            <a:spAutoFit/>
+          </a:bodyPr>
+          <a:lstStyle/>
+          <a:p>
+            <a:pPr>
+              <a:spcAft>
+                <a:spcPts val="800"/>
+              </a:spcAft>
+            </a:pPr>
+            <a:r>
+              <a:rPr sz="1700" b="0">
+                <a:solidFill>
+                  <a:srgbClr val="1F2937"/>
+                </a:solidFill>
+                <a:latin typeface="Arial"/>
+              </a:rPr>
+              <a:t>认证：OAuth / API key / third-party provider</a:t>
+            </a:r>
+          </a:p>
+          <a:p>
+            <a:pPr>
+              <a:spcAft>
+                <a:spcPts val="800"/>
+              </a:spcAft>
+            </a:pPr>
+            <a:r>
+              <a:rPr sz="1700" b="0">
+                <a:solidFill>
+                  <a:srgbClr val="1F2937"/>
+                </a:solidFill>
+                <a:latin typeface="Arial"/>
+              </a:rPr>
+              <a:t>策略：policy_limits、remote managed settings、forceLoginOrgUUID</a:t>
+            </a:r>
+          </a:p>
+          <a:p>
+            <a:pPr>
+              <a:spcAft>
+                <a:spcPts val="800"/>
+              </a:spcAft>
+            </a:pPr>
+            <a:r>
+              <a:rPr sz="1700" b="0">
+                <a:solidFill>
+                  <a:srgbClr val="1F2937"/>
+                </a:solidFill>
+                <a:latin typeface="Arial"/>
+              </a:rPr>
+              <a:t>结论：服务端负责裁决，客户端负责执行</a:t>
+            </a:r>
+          </a:p>
+        </p:txBody>
+      </p:sp>
+      <p:sp>
+        <p:nvSpPr>
+          <p:cNvPr id="6" name="TextBox 5"/>
+          <p:cNvSpPr txBox="1"/>
+          <p:nvPr/>
+        </p:nvSpPr>
+        <p:spPr>
+          <a:xfrm>
+            <a:off x="6217920" y="1600200"/>
+            <a:ext cx="4389120" cy="457200"/>
+          </a:xfrm>
+          <a:prstGeom prst="rect">
+            <a:avLst/>
+          </a:prstGeom>
+          <a:noFill/>
+        </p:spPr>
+        <p:txBody>
+          <a:bodyPr wrap="none">
+            <a:spAutoFit/>
+          </a:bodyPr>
+          <a:lstStyle/>
+          <a:p>
+            <a:r>
+              <a:rPr sz="1800" b="1">
+                <a:solidFill>
+                  <a:srgbClr val="205295"/>
+                </a:solidFill>
+                <a:latin typeface="Arial"/>
+              </a:rPr>
+              <a:t>扩展面与观测</a:t>
+            </a:r>
+          </a:p>
+        </p:txBody>
+      </p:sp>
+      <p:sp>
+        <p:nvSpPr>
+          <p:cNvPr id="7" name="TextBox 6"/>
+          <p:cNvSpPr txBox="1"/>
+          <p:nvPr/>
+        </p:nvSpPr>
+        <p:spPr>
+          <a:xfrm>
+            <a:off x="6217920" y="2011680"/>
+            <a:ext cx="4389120" cy="3200400"/>
+          </a:xfrm>
+          <a:prstGeom prst="rect">
+            <a:avLst/>
+          </a:prstGeom>
+          <a:noFill/>
+        </p:spPr>
+        <p:txBody>
+          <a:bodyPr wrap="square" lIns="76200" rIns="76200" tIns="50800" bIns="50800">
+            <a:spAutoFit/>
+          </a:bodyPr>
+          <a:lstStyle/>
+          <a:p>
+            <a:pPr>
+              <a:spcAft>
+                <a:spcPts val="800"/>
+              </a:spcAft>
+            </a:pPr>
+            <a:r>
+              <a:rPr sz="1700" b="0">
+                <a:solidFill>
+                  <a:srgbClr val="1F2937"/>
+                </a:solidFill>
+                <a:latin typeface="Arial"/>
+              </a:rPr>
+              <a:t>API 层是多 provider 统一适配层</a:t>
+            </a:r>
+          </a:p>
+          <a:p>
+            <a:pPr>
+              <a:spcAft>
+                <a:spcPts val="800"/>
+              </a:spcAft>
+            </a:pPr>
+            <a:r>
+              <a:rPr sz="1700" b="0">
+                <a:solidFill>
+                  <a:srgbClr val="1F2937"/>
+                </a:solidFill>
+                <a:latin typeface="Arial"/>
+              </a:rPr>
+              <a:t>prompt stack 是一层 control plane</a:t>
+            </a:r>
+          </a:p>
+          <a:p>
+            <a:pPr>
+              <a:spcAft>
+                <a:spcPts val="800"/>
+              </a:spcAft>
+            </a:pPr>
+            <a:r>
+              <a:rPr sz="1700" b="0">
+                <a:solidFill>
+                  <a:srgbClr val="1F2937"/>
+                </a:solidFill>
+                <a:latin typeface="Arial"/>
+              </a:rPr>
+              <a:t>MCP / plugins / commands / skills 都是一级扩展面</a:t>
+            </a:r>
+          </a:p>
+          <a:p>
+            <a:pPr>
+              <a:spcAft>
+                <a:spcPts val="800"/>
+              </a:spcAft>
+            </a:pPr>
+            <a:r>
+              <a:rPr sz="1700" b="0">
+                <a:solidFill>
+                  <a:srgbClr val="1F2937"/>
+                </a:solidFill>
+                <a:latin typeface="Arial"/>
+              </a:rPr>
+              <a:t>queryProfiler / analyzeContext / cacheBreakDetection 负责解释系统为何变慢或变贵</a:t>
+            </a:r>
+          </a:p>
+        </p:txBody>
+      </p:sp>
+    </p:spTree>
+  </p:cSld>
+  <p:clrMapOvr>
+    <a:masterClrMapping/>
+  </p:clrMapOvr>
+</p:sld>
+</file>
+
+<file path=ppt/slides/slide19.xml><?xml version="1.0" encoding="utf-8"?>
+<p:sld xmlns:a="http://schemas.openxmlformats.org/drawingml/2006/main" xmlns:p="http://schemas.openxmlformats.org/presentationml/2006/main" xmlns:r="http://schemas.openxmlformats.org/officeDocument/2006/relationships">
+  <p:cSld>
+    <p:bg>
+      <p:bgPr>
+        <a:solidFill>
+          <a:srgbClr val="F8FAFC"/>
+        </a:solidFill>
+        <a:effectLst/>
+      </p:bgPr>
+    </p:bg>
+    <p:spTree>
+      <p:nvGrpSpPr>
+        <p:cNvPr id="1" name=""/>
+        <p:cNvGrpSpPr/>
+        <p:nvPr/>
+      </p:nvGrpSpPr>
+      <p:grpSpPr/>
+      <p:sp>
+        <p:nvSpPr>
+          <p:cNvPr id="2" name="TextBox 1"/>
+          <p:cNvSpPr txBox="1"/>
+          <p:nvPr/>
+        </p:nvSpPr>
+        <p:spPr>
+          <a:xfrm>
+            <a:off x="594360" y="384048"/>
+            <a:ext cx="10789920" cy="685800"/>
+          </a:xfrm>
+          <a:prstGeom prst="rect">
+            <a:avLst/>
+          </a:prstGeom>
+          <a:noFill/>
+        </p:spPr>
+        <p:txBody>
+          <a:bodyPr wrap="square" lIns="76200" rIns="76200" tIns="50800" bIns="50800">
+            <a:spAutoFit/>
+          </a:bodyPr>
+          <a:lstStyle/>
+          <a:p>
+            <a:r>
+              <a:rPr sz="2600" b="1">
+                <a:solidFill>
+                  <a:srgbClr val="0B1F44"/>
+                </a:solidFill>
+                <a:latin typeface="Arial"/>
+              </a:rPr>
+              <a:t>代码质量判断也需要进 PPT</a:t>
+            </a:r>
+          </a:p>
+        </p:txBody>
+      </p:sp>
+      <p:sp>
+        <p:nvSpPr>
+          <p:cNvPr id="3" name="Rectangle 2"/>
+          <p:cNvSpPr/>
+          <p:nvPr/>
+        </p:nvSpPr>
+        <p:spPr>
+          <a:xfrm>
+            <a:off x="621792" y="1078992"/>
+            <a:ext cx="2011680" cy="27432"/>
+          </a:xfrm>
+          <a:prstGeom prst="rect">
+            <a:avLst/>
+          </a:prstGeom>
+          <a:solidFill>
+            <a:srgbClr val="DBE4F0"/>
+          </a:solidFill>
+          <a:ln>
+            <a:noFill/>
+          </a:ln>
+        </p:spPr>
+        <p:style>
+          <a:lnRef idx="1">
+            <a:schemeClr val="accent1"/>
+          </a:lnRef>
+          <a:fillRef idx="3">
+            <a:schemeClr val="accent1"/>
+          </a:fillRef>
+          <a:effectRef idx="2">
+            <a:schemeClr val="accent1"/>
+          </a:effectRef>
+          <a:fontRef idx="minor">
+            <a:schemeClr val="lt1"/>
+          </a:fontRef>
+        </p:style>
+        <p:txBody>
+          <a:bodyPr rtlCol="0" anchor="ctr"/>
+          <a:lstStyle/>
+          <a:p>
+            <a:pPr algn="ctr"/>
+          </a:p>
+        </p:txBody>
+      </p:sp>
+      <p:sp>
+        <p:nvSpPr>
+          <p:cNvPr id="4" name="TextBox 3"/>
+          <p:cNvSpPr txBox="1"/>
+          <p:nvPr/>
+        </p:nvSpPr>
+        <p:spPr>
+          <a:xfrm>
+            <a:off x="731520" y="1600200"/>
+            <a:ext cx="4389120" cy="457200"/>
+          </a:xfrm>
+          <a:prstGeom prst="rect">
+            <a:avLst/>
+          </a:prstGeom>
+          <a:noFill/>
+        </p:spPr>
+        <p:txBody>
+          <a:bodyPr wrap="none">
+            <a:spAutoFit/>
+          </a:bodyPr>
+          <a:lstStyle/>
+          <a:p>
+            <a:r>
+              <a:rPr sz="1800" b="1">
+                <a:solidFill>
+                  <a:srgbClr val="205295"/>
+                </a:solidFill>
+                <a:latin typeface="Arial"/>
+              </a:rPr>
+              <a:t>优点</a:t>
+            </a:r>
+          </a:p>
+        </p:txBody>
+      </p:sp>
+      <p:sp>
+        <p:nvSpPr>
+          <p:cNvPr id="5" name="TextBox 4"/>
+          <p:cNvSpPr txBox="1"/>
+          <p:nvPr/>
+        </p:nvSpPr>
+        <p:spPr>
+          <a:xfrm>
+            <a:off x="731520" y="2011680"/>
+            <a:ext cx="4389120" cy="3200400"/>
+          </a:xfrm>
+          <a:prstGeom prst="rect">
+            <a:avLst/>
+          </a:prstGeom>
+          <a:noFill/>
+        </p:spPr>
+        <p:txBody>
+          <a:bodyPr wrap="square" lIns="76200" rIns="76200" tIns="50800" bIns="50800">
+            <a:spAutoFit/>
+          </a:bodyPr>
+          <a:lstStyle/>
+          <a:p>
+            <a:pPr>
+              <a:spcAft>
+                <a:spcPts val="800"/>
+              </a:spcAft>
+            </a:pPr>
+            <a:r>
+              <a:rPr sz="1700" b="0">
+                <a:solidFill>
+                  <a:srgbClr val="1F2937"/>
+                </a:solidFill>
+                <a:latin typeface="Arial"/>
+              </a:rPr>
+              <a:t>工程成熟度高，很多细节来自线上问题</a:t>
+            </a:r>
+          </a:p>
+          <a:p>
+            <a:pPr>
+              <a:spcAft>
+                <a:spcPts val="800"/>
+              </a:spcAft>
+            </a:pPr>
+            <a:r>
+              <a:rPr sz="1700" b="0">
+                <a:solidFill>
+                  <a:srgbClr val="1F2937"/>
+                </a:solidFill>
+                <a:latin typeface="Arial"/>
+              </a:rPr>
+              <a:t>auth、settings、tools、mcp、query 分层总体清楚</a:t>
+            </a:r>
+          </a:p>
+          <a:p>
+            <a:pPr>
+              <a:spcAft>
+                <a:spcPts val="800"/>
+              </a:spcAft>
+            </a:pPr>
+            <a:r>
+              <a:rPr sz="1700" b="0">
+                <a:solidFill>
+                  <a:srgbClr val="1F2937"/>
+                </a:solidFill>
+                <a:latin typeface="Arial"/>
+              </a:rPr>
+              <a:t>对 shell 安全、缓存、401、多进程锁处理扎实</a:t>
+            </a:r>
+          </a:p>
+        </p:txBody>
+      </p:sp>
+      <p:sp>
+        <p:nvSpPr>
+          <p:cNvPr id="6" name="TextBox 5"/>
+          <p:cNvSpPr txBox="1"/>
+          <p:nvPr/>
+        </p:nvSpPr>
+        <p:spPr>
+          <a:xfrm>
+            <a:off x="6217920" y="1600200"/>
+            <a:ext cx="4389120" cy="457200"/>
+          </a:xfrm>
+          <a:prstGeom prst="rect">
+            <a:avLst/>
+          </a:prstGeom>
+          <a:noFill/>
+        </p:spPr>
+        <p:txBody>
+          <a:bodyPr wrap="none">
+            <a:spAutoFit/>
+          </a:bodyPr>
+          <a:lstStyle/>
+          <a:p>
+            <a:r>
+              <a:rPr sz="1800" b="1">
+                <a:solidFill>
+                  <a:srgbClr val="205295"/>
+                </a:solidFill>
+                <a:latin typeface="Arial"/>
+              </a:rPr>
+              <a:t>主要结构债</a:t>
+            </a:r>
+          </a:p>
+        </p:txBody>
+      </p:sp>
+      <p:sp>
+        <p:nvSpPr>
+          <p:cNvPr id="7" name="TextBox 6"/>
+          <p:cNvSpPr txBox="1"/>
+          <p:nvPr/>
+        </p:nvSpPr>
+        <p:spPr>
+          <a:xfrm>
+            <a:off x="6217920" y="2011680"/>
+            <a:ext cx="4389120" cy="3200400"/>
+          </a:xfrm>
+          <a:prstGeom prst="rect">
+            <a:avLst/>
+          </a:prstGeom>
+          <a:noFill/>
+        </p:spPr>
+        <p:txBody>
+          <a:bodyPr wrap="square" lIns="76200" rIns="76200" tIns="50800" bIns="50800">
+            <a:spAutoFit/>
+          </a:bodyPr>
+          <a:lstStyle/>
+          <a:p>
+            <a:pPr>
+              <a:spcAft>
+                <a:spcPts val="800"/>
+              </a:spcAft>
+            </a:pPr>
+            <a:r>
+              <a:rPr sz="1700" b="0">
+                <a:solidFill>
+                  <a:srgbClr val="1F2937"/>
+                </a:solidFill>
+                <a:latin typeface="Arial"/>
+              </a:rPr>
+              <a:t>query.ts 接近 God Loop</a:t>
+            </a:r>
+          </a:p>
+          <a:p>
+            <a:pPr>
+              <a:spcAft>
+                <a:spcPts val="800"/>
+              </a:spcAft>
+            </a:pPr>
+            <a:r>
+              <a:rPr sz="1700" b="0">
+                <a:solidFill>
+                  <a:srgbClr val="1F2937"/>
+                </a:solidFill>
+                <a:latin typeface="Arial"/>
+              </a:rPr>
+              <a:t>ToolUseContext 过胖</a:t>
+            </a:r>
+          </a:p>
+          <a:p>
+            <a:pPr>
+              <a:spcAft>
+                <a:spcPts val="800"/>
+              </a:spcAft>
+            </a:pPr>
+            <a:r>
+              <a:rPr sz="1700" b="0">
+                <a:solidFill>
+                  <a:srgbClr val="1F2937"/>
+                </a:solidFill>
+                <a:latin typeface="Arial"/>
+              </a:rPr>
+              <a:t>cache invariants 分散</a:t>
+            </a:r>
+          </a:p>
+          <a:p>
+            <a:pPr>
+              <a:spcAft>
+                <a:spcPts val="800"/>
+              </a:spcAft>
+            </a:pPr>
+            <a:r>
+              <a:rPr sz="1700" b="0">
+                <a:solidFill>
+                  <a:srgbClr val="1F2937"/>
+                </a:solidFill>
+                <a:latin typeface="Arial"/>
+              </a:rPr>
+              <a:t>permissions / tasks / remote execution 已经上升成 control plane，但 owner 仍分散</a:t>
             </a:r>
           </a:p>
         </p:txBody>
@@ -6487,6 +7454,463 @@
 </p:sld>
 </file>
 
+<file path=ppt/slides/slide20.xml><?xml version="1.0" encoding="utf-8"?>
+<p:sld xmlns:a="http://schemas.openxmlformats.org/drawingml/2006/main" xmlns:p="http://schemas.openxmlformats.org/presentationml/2006/main" xmlns:r="http://schemas.openxmlformats.org/officeDocument/2006/relationships">
+  <p:cSld>
+    <p:bg>
+      <p:bgPr>
+        <a:solidFill>
+          <a:srgbClr val="F8FAFC"/>
+        </a:solidFill>
+        <a:effectLst/>
+      </p:bgPr>
+    </p:bg>
+    <p:spTree>
+      <p:nvGrpSpPr>
+        <p:cNvPr id="1" name=""/>
+        <p:cNvGrpSpPr/>
+        <p:nvPr/>
+      </p:nvGrpSpPr>
+      <p:grpSpPr/>
+      <p:sp>
+        <p:nvSpPr>
+          <p:cNvPr id="2" name="TextBox 1"/>
+          <p:cNvSpPr txBox="1"/>
+          <p:nvPr/>
+        </p:nvSpPr>
+        <p:spPr>
+          <a:xfrm>
+            <a:off x="594360" y="384048"/>
+            <a:ext cx="10789920" cy="685800"/>
+          </a:xfrm>
+          <a:prstGeom prst="rect">
+            <a:avLst/>
+          </a:prstGeom>
+          <a:noFill/>
+        </p:spPr>
+        <p:txBody>
+          <a:bodyPr wrap="square" lIns="76200" rIns="76200" tIns="50800" bIns="50800">
+            <a:spAutoFit/>
+          </a:bodyPr>
+          <a:lstStyle/>
+          <a:p>
+            <a:r>
+              <a:rPr sz="2600" b="1">
+                <a:solidFill>
+                  <a:srgbClr val="0B1F44"/>
+                </a:solidFill>
+                <a:latin typeface="Arial"/>
+              </a:rPr>
+              <a:t>最后只保留最重要的结论</a:t>
+            </a:r>
+          </a:p>
+        </p:txBody>
+      </p:sp>
+      <p:sp>
+        <p:nvSpPr>
+          <p:cNvPr id="3" name="Rectangle 2"/>
+          <p:cNvSpPr/>
+          <p:nvPr/>
+        </p:nvSpPr>
+        <p:spPr>
+          <a:xfrm>
+            <a:off x="621792" y="1078992"/>
+            <a:ext cx="2011680" cy="27432"/>
+          </a:xfrm>
+          <a:prstGeom prst="rect">
+            <a:avLst/>
+          </a:prstGeom>
+          <a:solidFill>
+            <a:srgbClr val="DBE4F0"/>
+          </a:solidFill>
+          <a:ln>
+            <a:noFill/>
+          </a:ln>
+        </p:spPr>
+        <p:style>
+          <a:lnRef idx="1">
+            <a:schemeClr val="accent1"/>
+          </a:lnRef>
+          <a:fillRef idx="3">
+            <a:schemeClr val="accent1"/>
+          </a:fillRef>
+          <a:effectRef idx="2">
+            <a:schemeClr val="accent1"/>
+          </a:effectRef>
+          <a:fontRef idx="minor">
+            <a:schemeClr val="lt1"/>
+          </a:fontRef>
+        </p:style>
+        <p:txBody>
+          <a:bodyPr rtlCol="0" anchor="ctr"/>
+          <a:lstStyle/>
+          <a:p>
+            <a:pPr algn="ctr"/>
+          </a:p>
+        </p:txBody>
+      </p:sp>
+      <p:sp>
+        <p:nvSpPr>
+          <p:cNvPr id="4" name="TextBox 3"/>
+          <p:cNvSpPr txBox="1"/>
+          <p:nvPr/>
+        </p:nvSpPr>
+        <p:spPr>
+          <a:xfrm>
+            <a:off x="731520" y="1600200"/>
+            <a:ext cx="4389120" cy="457200"/>
+          </a:xfrm>
+          <a:prstGeom prst="rect">
+            <a:avLst/>
+          </a:prstGeom>
+          <a:noFill/>
+        </p:spPr>
+        <p:txBody>
+          <a:bodyPr wrap="none">
+            <a:spAutoFit/>
+          </a:bodyPr>
+          <a:lstStyle/>
+          <a:p>
+            <a:r>
+              <a:rPr sz="1800" b="1">
+                <a:solidFill>
+                  <a:srgbClr val="205295"/>
+                </a:solidFill>
+                <a:latin typeface="Arial"/>
+              </a:rPr>
+              <a:t>读源码时先抓</a:t>
+            </a:r>
+          </a:p>
+        </p:txBody>
+      </p:sp>
+      <p:sp>
+        <p:nvSpPr>
+          <p:cNvPr id="5" name="TextBox 4"/>
+          <p:cNvSpPr txBox="1"/>
+          <p:nvPr/>
+        </p:nvSpPr>
+        <p:spPr>
+          <a:xfrm>
+            <a:off x="731520" y="2011680"/>
+            <a:ext cx="4389120" cy="3200400"/>
+          </a:xfrm>
+          <a:prstGeom prst="rect">
+            <a:avLst/>
+          </a:prstGeom>
+          <a:noFill/>
+        </p:spPr>
+        <p:txBody>
+          <a:bodyPr wrap="square" lIns="76200" rIns="76200" tIns="50800" bIns="50800">
+            <a:spAutoFit/>
+          </a:bodyPr>
+          <a:lstStyle/>
+          <a:p>
+            <a:pPr>
+              <a:spcAft>
+                <a:spcPts val="800"/>
+              </a:spcAft>
+            </a:pPr>
+            <a:r>
+              <a:rPr sz="1700" b="0">
+                <a:solidFill>
+                  <a:srgbClr val="1F2937"/>
+                </a:solidFill>
+                <a:latin typeface="Arial"/>
+              </a:rPr>
+              <a:t>main.tsx -&gt; query.ts -&gt; tools</a:t>
+            </a:r>
+          </a:p>
+          <a:p>
+            <a:pPr>
+              <a:spcAft>
+                <a:spcPts val="800"/>
+              </a:spcAft>
+            </a:pPr>
+            <a:r>
+              <a:rPr sz="1700" b="0">
+                <a:solidFill>
+                  <a:srgbClr val="1F2937"/>
+                </a:solidFill>
+                <a:latin typeface="Arial"/>
+              </a:rPr>
+              <a:t>settings -&gt; auth -&gt; api client</a:t>
+            </a:r>
+          </a:p>
+          <a:p>
+            <a:pPr>
+              <a:spcAft>
+                <a:spcPts val="800"/>
+              </a:spcAft>
+            </a:pPr>
+            <a:r>
+              <a:rPr sz="1700" b="0">
+                <a:solidFill>
+                  <a:srgbClr val="1F2937"/>
+                </a:solidFill>
+                <a:latin typeface="Arial"/>
+              </a:rPr>
+              <a:t>policy / managed settings -&gt; 本地执行</a:t>
+            </a:r>
+          </a:p>
+        </p:txBody>
+      </p:sp>
+      <p:sp>
+        <p:nvSpPr>
+          <p:cNvPr id="6" name="TextBox 5"/>
+          <p:cNvSpPr txBox="1"/>
+          <p:nvPr/>
+        </p:nvSpPr>
+        <p:spPr>
+          <a:xfrm>
+            <a:off x="6217920" y="1600200"/>
+            <a:ext cx="4389120" cy="457200"/>
+          </a:xfrm>
+          <a:prstGeom prst="rect">
+            <a:avLst/>
+          </a:prstGeom>
+          <a:noFill/>
+        </p:spPr>
+        <p:txBody>
+          <a:bodyPr wrap="none">
+            <a:spAutoFit/>
+          </a:bodyPr>
+          <a:lstStyle/>
+          <a:p>
+            <a:r>
+              <a:rPr sz="1800" b="1">
+                <a:solidFill>
+                  <a:srgbClr val="205295"/>
+                </a:solidFill>
+                <a:latin typeface="Arial"/>
+              </a:rPr>
+              <a:t>从源码提炼的使用建议</a:t>
+            </a:r>
+          </a:p>
+        </p:txBody>
+      </p:sp>
+      <p:sp>
+        <p:nvSpPr>
+          <p:cNvPr id="7" name="TextBox 6"/>
+          <p:cNvSpPr txBox="1"/>
+          <p:nvPr/>
+        </p:nvSpPr>
+        <p:spPr>
+          <a:xfrm>
+            <a:off x="6217920" y="2011680"/>
+            <a:ext cx="4389120" cy="3200400"/>
+          </a:xfrm>
+          <a:prstGeom prst="rect">
+            <a:avLst/>
+          </a:prstGeom>
+          <a:noFill/>
+        </p:spPr>
+        <p:txBody>
+          <a:bodyPr wrap="square" lIns="76200" rIns="76200" tIns="50800" bIns="50800">
+            <a:spAutoFit/>
+          </a:bodyPr>
+          <a:lstStyle/>
+          <a:p>
+            <a:pPr>
+              <a:spcAft>
+                <a:spcPts val="800"/>
+              </a:spcAft>
+            </a:pPr>
+            <a:r>
+              <a:rPr sz="1700" b="0">
+                <a:solidFill>
+                  <a:srgbClr val="1F2937"/>
+                </a:solidFill>
+                <a:latin typeface="Arial"/>
+              </a:rPr>
+              <a:t>先读相关代码再改</a:t>
+            </a:r>
+          </a:p>
+          <a:p>
+            <a:pPr>
+              <a:spcAft>
+                <a:spcPts val="800"/>
+              </a:spcAft>
+            </a:pPr>
+            <a:r>
+              <a:rPr sz="1700" b="0">
+                <a:solidFill>
+                  <a:srgbClr val="1F2937"/>
+                </a:solidFill>
+                <a:latin typeface="Arial"/>
+              </a:rPr>
+              <a:t>优先复用现有实现</a:t>
+            </a:r>
+          </a:p>
+          <a:p>
+            <a:pPr>
+              <a:spcAft>
+                <a:spcPts val="800"/>
+              </a:spcAft>
+            </a:pPr>
+            <a:r>
+              <a:rPr sz="1700" b="0">
+                <a:solidFill>
+                  <a:srgbClr val="1F2937"/>
+                </a:solidFill>
+                <a:latin typeface="Arial"/>
+              </a:rPr>
+              <a:t>做最小必要改动</a:t>
+            </a:r>
+          </a:p>
+          <a:p>
+            <a:pPr>
+              <a:spcAft>
+                <a:spcPts val="800"/>
+              </a:spcAft>
+            </a:pPr>
+            <a:r>
+              <a:rPr sz="1700" b="0">
+                <a:solidFill>
+                  <a:srgbClr val="1F2937"/>
+                </a:solidFill>
+                <a:latin typeface="Arial"/>
+              </a:rPr>
+              <a:t>验证后如实汇报</a:t>
+            </a:r>
+          </a:p>
+        </p:txBody>
+      </p:sp>
+      <p:sp>
+        <p:nvSpPr>
+          <p:cNvPr id="8" name="TextBox 7"/>
+          <p:cNvSpPr txBox="1"/>
+          <p:nvPr/>
+        </p:nvSpPr>
+        <p:spPr>
+          <a:xfrm>
+            <a:off x="841248" y="5532120"/>
+            <a:ext cx="10058400" cy="502920"/>
+          </a:xfrm>
+          <a:prstGeom prst="rect">
+            <a:avLst/>
+          </a:prstGeom>
+          <a:noFill/>
+        </p:spPr>
+        <p:txBody>
+          <a:bodyPr wrap="square" lIns="76200" rIns="76200" tIns="50800" bIns="50800">
+            <a:spAutoFit/>
+          </a:bodyPr>
+          <a:lstStyle/>
+          <a:p>
+            <a:r>
+              <a:rPr sz="1400" b="0">
+                <a:solidFill>
+                  <a:srgbClr val="475569"/>
+                </a:solidFill>
+                <a:latin typeface="Arial"/>
+              </a:rPr>
+              <a:t>一句话：Claude Code 本质上是一个围绕 turn loop 构建的、可被企业管理的终端 agent runtime。</a:t>
+            </a:r>
+          </a:p>
+        </p:txBody>
+      </p:sp>
+    </p:spTree>
+  </p:cSld>
+  <p:clrMapOvr>
+    <a:masterClrMapping/>
+  </p:clrMapOvr>
+</p:sld>
+</file>
+
+<file path=ppt/slides/slide21.xml><?xml version="1.0" encoding="utf-8"?>
+<p:sld xmlns:a="http://schemas.openxmlformats.org/drawingml/2006/main" xmlns:p="http://schemas.openxmlformats.org/presentationml/2006/main" xmlns:r="http://schemas.openxmlformats.org/officeDocument/2006/relationships">
+  <p:cSld>
+    <p:bg>
+      <p:bgPr>
+        <a:solidFill>
+          <a:srgbClr val="101C3F"/>
+        </a:solidFill>
+        <a:effectLst/>
+      </p:bgPr>
+    </p:bg>
+    <p:spTree>
+      <p:nvGrpSpPr>
+        <p:cNvPr id="1" name=""/>
+        <p:cNvGrpSpPr/>
+        <p:nvPr/>
+      </p:nvGrpSpPr>
+      <p:grpSpPr/>
+      <p:sp>
+        <p:nvSpPr>
+          <p:cNvPr id="2" name="TextBox 1"/>
+          <p:cNvSpPr txBox="1"/>
+          <p:nvPr/>
+        </p:nvSpPr>
+        <p:spPr>
+          <a:xfrm>
+            <a:off x="594360" y="384048"/>
+            <a:ext cx="10789920" cy="685800"/>
+          </a:xfrm>
+          <a:prstGeom prst="rect">
+            <a:avLst/>
+          </a:prstGeom>
+          <a:noFill/>
+        </p:spPr>
+        <p:txBody>
+          <a:bodyPr wrap="square" lIns="76200" rIns="76200" tIns="50800" bIns="50800">
+            <a:spAutoFit/>
+          </a:bodyPr>
+          <a:lstStyle/>
+          <a:p>
+            <a:r>
+              <a:rPr sz="2800" b="1">
+                <a:solidFill>
+                  <a:srgbClr val="FFFFFF"/>
+                </a:solidFill>
+                <a:latin typeface="Arial"/>
+              </a:rPr>
+              <a:t>谢谢</a:t>
+            </a:r>
+          </a:p>
+        </p:txBody>
+      </p:sp>
+      <p:sp>
+        <p:nvSpPr>
+          <p:cNvPr id="3" name="TextBox 2"/>
+          <p:cNvSpPr txBox="1"/>
+          <p:nvPr/>
+        </p:nvSpPr>
+        <p:spPr>
+          <a:xfrm>
+            <a:off x="658368" y="1280160"/>
+            <a:ext cx="10241280" cy="640080"/>
+          </a:xfrm>
+          <a:prstGeom prst="rect">
+            <a:avLst/>
+          </a:prstGeom>
+          <a:noFill/>
+        </p:spPr>
+        <p:txBody>
+          <a:bodyPr wrap="square" lIns="76200" rIns="76200" tIns="50800" bIns="50800">
+            <a:spAutoFit/>
+          </a:bodyPr>
+          <a:lstStyle/>
+          <a:p>
+            <a:r>
+              <a:rPr sz="1500" b="0">
+                <a:solidFill>
+                  <a:srgbClr val="FFFFFF"/>
+                </a:solidFill>
+                <a:latin typeface="Arial"/>
+              </a:rPr>
+              <a:t>这份源码最值得看的，不只是功能，而是它已经为长时间工作的 runtime 付过哪些工程账。</a:t>
+            </a:r>
+          </a:p>
+        </p:txBody>
+      </p:sp>
+    </p:spTree>
+  </p:cSld>
+  <p:clrMapOvr>
+    <a:masterClrMapping/>
+  </p:clrMapOvr>
+</p:sld>
+</file>
+
 <file path=ppt/slides/slide3.xml><?xml version="1.0" encoding="utf-8"?>
 <p:sld xmlns:a="http://schemas.openxmlformats.org/drawingml/2006/main" xmlns:p="http://schemas.openxmlformats.org/presentationml/2006/main" xmlns:r="http://schemas.openxmlformats.org/officeDocument/2006/relationships">
   <p:cSld>
@@ -8371,7 +9795,7 @@
                 </a:solidFill>
                 <a:latin typeface="Arial"/>
               </a:rPr>
-              <a:t>为什么 query.ts 是核心</a:t>
+              <a:t>不是一个内核，而是两层</a:t>
             </a:r>
           </a:p>
         </p:txBody>
@@ -8427,8 +9851,42 @@
         </p:nvSpPr>
         <p:spPr>
           <a:xfrm>
-            <a:off x="777240" y="1508760"/>
-            <a:ext cx="10241280" cy="4389120"/>
+            <a:off x="731520" y="1600200"/>
+            <a:ext cx="4389120" cy="457200"/>
+          </a:xfrm>
+          <a:prstGeom prst="rect">
+            <a:avLst/>
+          </a:prstGeom>
+          <a:noFill/>
+        </p:spPr>
+        <p:txBody>
+          <a:bodyPr wrap="none">
+            <a:spAutoFit/>
+          </a:bodyPr>
+          <a:lstStyle/>
+          <a:p>
+            <a:r>
+              <a:rPr sz="1800" b="1">
+                <a:solidFill>
+                  <a:srgbClr val="205295"/>
+                </a:solidFill>
+                <a:latin typeface="Arial"/>
+              </a:rPr>
+              <a:t>query.ts = runtime kernel</a:t>
+            </a:r>
+          </a:p>
+        </p:txBody>
+      </p:sp>
+      <p:sp>
+        <p:nvSpPr>
+          <p:cNvPr id="5" name="TextBox 4"/>
+          <p:cNvSpPr txBox="1"/>
+          <p:nvPr/>
+        </p:nvSpPr>
+        <p:spPr>
+          <a:xfrm>
+            <a:off x="731520" y="2011680"/>
+            <a:ext cx="4389120" cy="3200400"/>
           </a:xfrm>
           <a:prstGeom prst="rect">
             <a:avLst/>
@@ -8447,13 +9905,13 @@
               </a:spcAft>
             </a:pPr>
             <a:r>
-              <a:rPr sz="1900" b="0">
+              <a:rPr sz="1700" b="0">
                 <a:solidFill>
                   <a:srgbClr val="1F2937"/>
                 </a:solidFill>
                 <a:latin typeface="Arial"/>
               </a:rPr>
-              <a:t>它不是一次 API 调用的包装层，而是 runtime kernel</a:t>
+              <a:t>负责一轮怎么跑</a:t>
             </a:r>
           </a:p>
           <a:p>
@@ -8463,13 +9921,13 @@
               </a:spcAft>
             </a:pPr>
             <a:r>
-              <a:rPr sz="1900" b="0">
+              <a:rPr sz="1700" b="0">
                 <a:solidFill>
                   <a:srgbClr val="1F2937"/>
                 </a:solidFill>
                 <a:latin typeface="Arial"/>
               </a:rPr>
-              <a:t>负责准备 messages、context 治理、模型请求、streaming 输出</a:t>
+              <a:t>推进 model -&gt; tool -&gt; model 闭环</a:t>
             </a:r>
           </a:p>
           <a:p>
@@ -8479,13 +9937,13 @@
               </a:spcAft>
             </a:pPr>
             <a:r>
-              <a:rPr sz="1900" b="0">
+              <a:rPr sz="1700" b="0">
                 <a:solidFill>
                   <a:srgbClr val="1F2937"/>
                 </a:solidFill>
                 <a:latin typeface="Arial"/>
               </a:rPr>
-              <a:t>负责处理 tool_use / tool_result</a:t>
+              <a:t>处理 continue / retry / compact / stop</a:t>
             </a:r>
           </a:p>
           <a:p>
@@ -8495,13 +9953,134 @@
               </a:spcAft>
             </a:pPr>
             <a:r>
-              <a:rPr sz="1900" b="0">
+              <a:rPr sz="1700" b="0">
                 <a:solidFill>
                   <a:srgbClr val="1F2937"/>
                 </a:solidFill>
                 <a:latin typeface="Arial"/>
               </a:rPr>
-              <a:t>负责决定 continue / retry / compact / stop</a:t>
+              <a:t>维护合法轨迹而不是纯文本输出</a:t>
+            </a:r>
+          </a:p>
+        </p:txBody>
+      </p:sp>
+      <p:sp>
+        <p:nvSpPr>
+          <p:cNvPr id="6" name="TextBox 5"/>
+          <p:cNvSpPr txBox="1"/>
+          <p:nvPr/>
+        </p:nvSpPr>
+        <p:spPr>
+          <a:xfrm>
+            <a:off x="6217920" y="1600200"/>
+            <a:ext cx="4389120" cy="457200"/>
+          </a:xfrm>
+          <a:prstGeom prst="rect">
+            <a:avLst/>
+          </a:prstGeom>
+          <a:noFill/>
+        </p:spPr>
+        <p:txBody>
+          <a:bodyPr wrap="none">
+            <a:spAutoFit/>
+          </a:bodyPr>
+          <a:lstStyle/>
+          <a:p>
+            <a:r>
+              <a:rPr sz="1800" b="1">
+                <a:solidFill>
+                  <a:srgbClr val="205295"/>
+                </a:solidFill>
+                <a:latin typeface="Arial"/>
+              </a:rPr>
+              <a:t>QueryEngine.ts = conversation host</a:t>
+            </a:r>
+          </a:p>
+        </p:txBody>
+      </p:sp>
+      <p:sp>
+        <p:nvSpPr>
+          <p:cNvPr id="7" name="TextBox 6"/>
+          <p:cNvSpPr txBox="1"/>
+          <p:nvPr/>
+        </p:nvSpPr>
+        <p:spPr>
+          <a:xfrm>
+            <a:off x="6217920" y="2011680"/>
+            <a:ext cx="4389120" cy="3200400"/>
+          </a:xfrm>
+          <a:prstGeom prst="rect">
+            <a:avLst/>
+          </a:prstGeom>
+          <a:noFill/>
+        </p:spPr>
+        <p:txBody>
+          <a:bodyPr wrap="square" lIns="76200" rIns="76200" tIns="50800" bIns="50800">
+            <a:spAutoFit/>
+          </a:bodyPr>
+          <a:lstStyle/>
+          <a:p>
+            <a:pPr>
+              <a:spcAft>
+                <a:spcPts val="800"/>
+              </a:spcAft>
+            </a:pPr>
+            <a:r>
+              <a:rPr sz="1700" b="0">
+                <a:solidFill>
+                  <a:srgbClr val="1F2937"/>
+                </a:solidFill>
+                <a:latin typeface="Arial"/>
+              </a:rPr>
+              <a:t>负责一段会话怎么活</a:t>
+            </a:r>
+          </a:p>
+          <a:p>
+            <a:pPr>
+              <a:spcAft>
+                <a:spcPts val="800"/>
+              </a:spcAft>
+            </a:pPr>
+            <a:r>
+              <a:rPr sz="1700" b="0">
+                <a:solidFill>
+                  <a:srgbClr val="1F2937"/>
+                </a:solidFill>
+                <a:latin typeface="Arial"/>
+              </a:rPr>
+              <a:t>保持多轮 messages 与 usage</a:t>
+            </a:r>
+          </a:p>
+          <a:p>
+            <a:pPr>
+              <a:spcAft>
+                <a:spcPts val="800"/>
+              </a:spcAft>
+            </a:pPr>
+            <a:r>
+              <a:rPr sz="1700" b="0">
+                <a:solidFill>
+                  <a:srgbClr val="1F2937"/>
+                </a:solidFill>
+                <a:latin typeface="Arial"/>
+              </a:rPr>
+              <a:t>预落盘 transcript</a:t>
+            </a:r>
+          </a:p>
+          <a:p>
+            <a:pPr>
+              <a:spcAft>
+                <a:spcPts val="800"/>
+              </a:spcAft>
+            </a:pPr>
+            <a:r>
+              <a:rPr sz="1700" b="0">
+                <a:solidFill>
+                  <a:srgbClr val="1F2937"/>
+                </a:solidFill>
+                <a:latin typeface="Arial"/>
+              </a:rPr>
+              <a:t>做 SDK / headless 输出投影</a:t>
             </a:r>
           </a:p>
         </p:txBody>
@@ -9196,7 +10775,7 @@
                 </a:solidFill>
                 <a:latin typeface="Arial"/>
               </a:rPr>
-              <a:t>QueryEngine.ts：conversation host</a:t>
+              <a:t>turn loop 更像 recovery graph</a:t>
             </a:r>
           </a:p>
         </p:txBody>
@@ -9246,14 +10825,691 @@
       </p:sp>
       <p:sp>
         <p:nvSpPr>
-          <p:cNvPr id="4" name="TextBox 3"/>
+          <p:cNvPr id="4" name="Rounded Rectangle 3"/>
+          <p:cNvSpPr/>
+          <p:nvPr/>
+        </p:nvSpPr>
+        <p:spPr>
+          <a:xfrm>
+            <a:off x="731520" y="2194560"/>
+            <a:ext cx="1463040" cy="685800"/>
+          </a:xfrm>
+          <a:prstGeom prst="roundRect">
+            <a:avLst/>
+          </a:prstGeom>
+          <a:solidFill>
+            <a:srgbClr val="FFFFFF"/>
+          </a:solidFill>
+          <a:ln>
+            <a:solidFill>
+              <a:srgbClr val="205295"/>
+            </a:solidFill>
+          </a:ln>
+        </p:spPr>
+        <p:style>
+          <a:lnRef idx="1">
+            <a:schemeClr val="accent1"/>
+          </a:lnRef>
+          <a:fillRef idx="3">
+            <a:schemeClr val="accent1"/>
+          </a:fillRef>
+          <a:effectRef idx="2">
+            <a:schemeClr val="accent1"/>
+          </a:effectRef>
+          <a:fontRef idx="minor">
+            <a:schemeClr val="lt1"/>
+          </a:fontRef>
+        </p:style>
+        <p:txBody>
+          <a:bodyPr rtlCol="0" anchor="ctr" wrap="square" lIns="76200" rIns="76200" tIns="50800" bIns="50800"/>
+          <a:lstStyle/>
+          <a:p>
+            <a:pPr algn="ctr"/>
+            <a:r>
+              <a:rPr sz="1600" b="1">
+                <a:solidFill>
+                  <a:srgbClr val="0B1F44"/>
+                </a:solidFill>
+                <a:latin typeface="Arial"/>
+              </a:rPr>
+              <a:t>messages</a:t>
+            </a:r>
+          </a:p>
+        </p:txBody>
+      </p:sp>
+      <p:sp>
+        <p:nvSpPr>
+          <p:cNvPr id="5" name="Rounded Rectangle 4"/>
+          <p:cNvSpPr/>
+          <p:nvPr/>
+        </p:nvSpPr>
+        <p:spPr>
+          <a:xfrm>
+            <a:off x="2651760" y="2194560"/>
+            <a:ext cx="1645920" cy="685800"/>
+          </a:xfrm>
+          <a:prstGeom prst="roundRect">
+            <a:avLst/>
+          </a:prstGeom>
+          <a:solidFill>
+            <a:srgbClr val="FFFFFF"/>
+          </a:solidFill>
+          <a:ln>
+            <a:solidFill>
+              <a:srgbClr val="205295"/>
+            </a:solidFill>
+          </a:ln>
+        </p:spPr>
+        <p:style>
+          <a:lnRef idx="1">
+            <a:schemeClr val="accent1"/>
+          </a:lnRef>
+          <a:fillRef idx="3">
+            <a:schemeClr val="accent1"/>
+          </a:fillRef>
+          <a:effectRef idx="2">
+            <a:schemeClr val="accent1"/>
+          </a:effectRef>
+          <a:fontRef idx="minor">
+            <a:schemeClr val="lt1"/>
+          </a:fontRef>
+        </p:style>
+        <p:txBody>
+          <a:bodyPr rtlCol="0" anchor="ctr" wrap="square" lIns="76200" rIns="76200" tIns="50800" bIns="50800"/>
+          <a:lstStyle/>
+          <a:p>
+            <a:pPr algn="ctr"/>
+            <a:r>
+              <a:rPr sz="1600" b="1">
+                <a:solidFill>
+                  <a:srgbClr val="0B1F44"/>
+                </a:solidFill>
+                <a:latin typeface="Arial"/>
+              </a:rPr>
+              <a:t>sample</a:t>
+            </a:r>
+          </a:p>
+        </p:txBody>
+      </p:sp>
+      <p:sp>
+        <p:nvSpPr>
+          <p:cNvPr id="6" name="Rounded Rectangle 5"/>
+          <p:cNvSpPr/>
+          <p:nvPr/>
+        </p:nvSpPr>
+        <p:spPr>
+          <a:xfrm>
+            <a:off x="4754880" y="2194560"/>
+            <a:ext cx="1645920" cy="685800"/>
+          </a:xfrm>
+          <a:prstGeom prst="roundRect">
+            <a:avLst/>
+          </a:prstGeom>
+          <a:solidFill>
+            <a:srgbClr val="FFFFFF"/>
+          </a:solidFill>
+          <a:ln>
+            <a:solidFill>
+              <a:srgbClr val="205295"/>
+            </a:solidFill>
+          </a:ln>
+        </p:spPr>
+        <p:style>
+          <a:lnRef idx="1">
+            <a:schemeClr val="accent1"/>
+          </a:lnRef>
+          <a:fillRef idx="3">
+            <a:schemeClr val="accent1"/>
+          </a:fillRef>
+          <a:effectRef idx="2">
+            <a:schemeClr val="accent1"/>
+          </a:effectRef>
+          <a:fontRef idx="minor">
+            <a:schemeClr val="lt1"/>
+          </a:fontRef>
+        </p:style>
+        <p:txBody>
+          <a:bodyPr rtlCol="0" anchor="ctr" wrap="square" lIns="76200" rIns="76200" tIns="50800" bIns="50800"/>
+          <a:lstStyle/>
+          <a:p>
+            <a:pPr algn="ctr"/>
+            <a:r>
+              <a:rPr sz="1600" b="1">
+                <a:solidFill>
+                  <a:srgbClr val="0B1F44"/>
+                </a:solidFill>
+                <a:latin typeface="Arial"/>
+              </a:rPr>
+              <a:t>tool_use</a:t>
+            </a:r>
+          </a:p>
+        </p:txBody>
+      </p:sp>
+      <p:sp>
+        <p:nvSpPr>
+          <p:cNvPr id="7" name="Rounded Rectangle 6"/>
+          <p:cNvSpPr/>
+          <p:nvPr/>
+        </p:nvSpPr>
+        <p:spPr>
+          <a:xfrm>
+            <a:off x="6858000" y="2194560"/>
+            <a:ext cx="1645920" cy="685800"/>
+          </a:xfrm>
+          <a:prstGeom prst="roundRect">
+            <a:avLst/>
+          </a:prstGeom>
+          <a:solidFill>
+            <a:srgbClr val="FFFFFF"/>
+          </a:solidFill>
+          <a:ln>
+            <a:solidFill>
+              <a:srgbClr val="205295"/>
+            </a:solidFill>
+          </a:ln>
+        </p:spPr>
+        <p:style>
+          <a:lnRef idx="1">
+            <a:schemeClr val="accent1"/>
+          </a:lnRef>
+          <a:fillRef idx="3">
+            <a:schemeClr val="accent1"/>
+          </a:fillRef>
+          <a:effectRef idx="2">
+            <a:schemeClr val="accent1"/>
+          </a:effectRef>
+          <a:fontRef idx="minor">
+            <a:schemeClr val="lt1"/>
+          </a:fontRef>
+        </p:style>
+        <p:txBody>
+          <a:bodyPr rtlCol="0" anchor="ctr" wrap="square" lIns="76200" rIns="76200" tIns="50800" bIns="50800"/>
+          <a:lstStyle/>
+          <a:p>
+            <a:pPr algn="ctr"/>
+            <a:r>
+              <a:rPr sz="1600" b="1">
+                <a:solidFill>
+                  <a:srgbClr val="0B1F44"/>
+                </a:solidFill>
+                <a:latin typeface="Arial"/>
+              </a:rPr>
+              <a:t>tool_result</a:t>
+            </a:r>
+          </a:p>
+        </p:txBody>
+      </p:sp>
+      <p:sp>
+        <p:nvSpPr>
+          <p:cNvPr id="8" name="Rounded Rectangle 7"/>
+          <p:cNvSpPr/>
+          <p:nvPr/>
+        </p:nvSpPr>
+        <p:spPr>
+          <a:xfrm>
+            <a:off x="8961120" y="2194560"/>
+            <a:ext cx="1645920" cy="685800"/>
+          </a:xfrm>
+          <a:prstGeom prst="roundRect">
+            <a:avLst/>
+          </a:prstGeom>
+          <a:solidFill>
+            <a:srgbClr val="DDEAFB"/>
+          </a:solidFill>
+          <a:ln>
+            <a:solidFill>
+              <a:srgbClr val="205295"/>
+            </a:solidFill>
+          </a:ln>
+        </p:spPr>
+        <p:style>
+          <a:lnRef idx="1">
+            <a:schemeClr val="accent1"/>
+          </a:lnRef>
+          <a:fillRef idx="3">
+            <a:schemeClr val="accent1"/>
+          </a:fillRef>
+          <a:effectRef idx="2">
+            <a:schemeClr val="accent1"/>
+          </a:effectRef>
+          <a:fontRef idx="minor">
+            <a:schemeClr val="lt1"/>
+          </a:fontRef>
+        </p:style>
+        <p:txBody>
+          <a:bodyPr rtlCol="0" anchor="ctr" wrap="square" lIns="76200" rIns="76200" tIns="50800" bIns="50800"/>
+          <a:lstStyle/>
+          <a:p>
+            <a:pPr algn="ctr"/>
+            <a:r>
+              <a:rPr sz="1600" b="1">
+                <a:solidFill>
+                  <a:srgbClr val="0B1F44"/>
+                </a:solidFill>
+                <a:latin typeface="Arial"/>
+              </a:rPr>
+              <a:t>next turn</a:t>
+            </a:r>
+          </a:p>
+        </p:txBody>
+      </p:sp>
+      <p:cxnSp>
+        <p:nvCxnSpPr>
+          <p:cNvPr id="9" name="Connector 8"/>
+          <p:cNvCxnSpPr/>
+          <p:nvPr/>
+        </p:nvCxnSpPr>
+        <p:spPr>
+          <a:xfrm>
+            <a:off x="2194560" y="2542032"/>
+            <a:ext cx="457200" cy="0"/>
+          </a:xfrm>
+          <a:prstGeom prst="line">
+            <a:avLst/>
+          </a:prstGeom>
+          <a:ln w="25400">
+            <a:solidFill>
+              <a:srgbClr val="205295"/>
+            </a:solidFill>
+          </a:ln>
+        </p:spPr>
+        <p:style>
+          <a:lnRef idx="2">
+            <a:schemeClr val="accent1"/>
+          </a:lnRef>
+          <a:fillRef idx="0">
+            <a:schemeClr val="accent1"/>
+          </a:fillRef>
+          <a:effectRef idx="1">
+            <a:schemeClr val="accent1"/>
+          </a:effectRef>
+          <a:fontRef idx="minor">
+            <a:schemeClr val="tx1"/>
+          </a:fontRef>
+        </p:style>
+      </p:cxnSp>
+      <p:cxnSp>
+        <p:nvCxnSpPr>
+          <p:cNvPr id="10" name="Connector 9"/>
+          <p:cNvCxnSpPr/>
+          <p:nvPr/>
+        </p:nvCxnSpPr>
+        <p:spPr>
+          <a:xfrm>
+            <a:off x="4297680" y="2542032"/>
+            <a:ext cx="457200" cy="0"/>
+          </a:xfrm>
+          <a:prstGeom prst="line">
+            <a:avLst/>
+          </a:prstGeom>
+          <a:ln w="25400">
+            <a:solidFill>
+              <a:srgbClr val="205295"/>
+            </a:solidFill>
+          </a:ln>
+        </p:spPr>
+        <p:style>
+          <a:lnRef idx="2">
+            <a:schemeClr val="accent1"/>
+          </a:lnRef>
+          <a:fillRef idx="0">
+            <a:schemeClr val="accent1"/>
+          </a:fillRef>
+          <a:effectRef idx="1">
+            <a:schemeClr val="accent1"/>
+          </a:effectRef>
+          <a:fontRef idx="minor">
+            <a:schemeClr val="tx1"/>
+          </a:fontRef>
+        </p:style>
+      </p:cxnSp>
+      <p:cxnSp>
+        <p:nvCxnSpPr>
+          <p:cNvPr id="11" name="Connector 10"/>
+          <p:cNvCxnSpPr/>
+          <p:nvPr/>
+        </p:nvCxnSpPr>
+        <p:spPr>
+          <a:xfrm>
+            <a:off x="6400800" y="2542032"/>
+            <a:ext cx="457200" cy="0"/>
+          </a:xfrm>
+          <a:prstGeom prst="line">
+            <a:avLst/>
+          </a:prstGeom>
+          <a:ln w="25400">
+            <a:solidFill>
+              <a:srgbClr val="205295"/>
+            </a:solidFill>
+          </a:ln>
+        </p:spPr>
+        <p:style>
+          <a:lnRef idx="2">
+            <a:schemeClr val="accent1"/>
+          </a:lnRef>
+          <a:fillRef idx="0">
+            <a:schemeClr val="accent1"/>
+          </a:fillRef>
+          <a:effectRef idx="1">
+            <a:schemeClr val="accent1"/>
+          </a:effectRef>
+          <a:fontRef idx="minor">
+            <a:schemeClr val="tx1"/>
+          </a:fontRef>
+        </p:style>
+      </p:cxnSp>
+      <p:cxnSp>
+        <p:nvCxnSpPr>
+          <p:cNvPr id="12" name="Connector 11"/>
+          <p:cNvCxnSpPr/>
+          <p:nvPr/>
+        </p:nvCxnSpPr>
+        <p:spPr>
+          <a:xfrm>
+            <a:off x="8503920" y="2542032"/>
+            <a:ext cx="457200" cy="0"/>
+          </a:xfrm>
+          <a:prstGeom prst="line">
+            <a:avLst/>
+          </a:prstGeom>
+          <a:ln w="25400">
+            <a:solidFill>
+              <a:srgbClr val="205295"/>
+            </a:solidFill>
+          </a:ln>
+        </p:spPr>
+        <p:style>
+          <a:lnRef idx="2">
+            <a:schemeClr val="accent1"/>
+          </a:lnRef>
+          <a:fillRef idx="0">
+            <a:schemeClr val="accent1"/>
+          </a:fillRef>
+          <a:effectRef idx="1">
+            <a:schemeClr val="accent1"/>
+          </a:effectRef>
+          <a:fontRef idx="minor">
+            <a:schemeClr val="tx1"/>
+          </a:fontRef>
+        </p:style>
+      </p:cxnSp>
+      <p:sp>
+        <p:nvSpPr>
+          <p:cNvPr id="13" name="Rounded Rectangle 12"/>
+          <p:cNvSpPr/>
+          <p:nvPr/>
+        </p:nvSpPr>
+        <p:spPr>
+          <a:xfrm>
+            <a:off x="2743200" y="4069080"/>
+            <a:ext cx="2011680" cy="640080"/>
+          </a:xfrm>
+          <a:prstGeom prst="roundRect">
+            <a:avLst/>
+          </a:prstGeom>
+          <a:solidFill>
+            <a:srgbClr val="FFFFFF"/>
+          </a:solidFill>
+          <a:ln>
+            <a:solidFill>
+              <a:srgbClr val="205295"/>
+            </a:solidFill>
+          </a:ln>
+        </p:spPr>
+        <p:style>
+          <a:lnRef idx="1">
+            <a:schemeClr val="accent1"/>
+          </a:lnRef>
+          <a:fillRef idx="3">
+            <a:schemeClr val="accent1"/>
+          </a:fillRef>
+          <a:effectRef idx="2">
+            <a:schemeClr val="accent1"/>
+          </a:effectRef>
+          <a:fontRef idx="minor">
+            <a:schemeClr val="lt1"/>
+          </a:fontRef>
+        </p:style>
+        <p:txBody>
+          <a:bodyPr rtlCol="0" anchor="ctr" wrap="square" lIns="76200" rIns="76200" tIns="50800" bIns="50800"/>
+          <a:lstStyle/>
+          <a:p>
+            <a:pPr algn="ctr"/>
+            <a:r>
+              <a:rPr sz="1600" b="1">
+                <a:solidFill>
+                  <a:srgbClr val="0B1F44"/>
+                </a:solidFill>
+                <a:latin typeface="Arial"/>
+              </a:rPr>
+              <a:t>prompt_too_long</a:t>
+            </a:r>
+          </a:p>
+        </p:txBody>
+      </p:sp>
+      <p:sp>
+        <p:nvSpPr>
+          <p:cNvPr id="14" name="Rounded Rectangle 13"/>
+          <p:cNvSpPr/>
+          <p:nvPr/>
+        </p:nvSpPr>
+        <p:spPr>
+          <a:xfrm>
+            <a:off x="5120640" y="4069080"/>
+            <a:ext cx="2011680" cy="640080"/>
+          </a:xfrm>
+          <a:prstGeom prst="roundRect">
+            <a:avLst/>
+          </a:prstGeom>
+          <a:solidFill>
+            <a:srgbClr val="FFFFFF"/>
+          </a:solidFill>
+          <a:ln>
+            <a:solidFill>
+              <a:srgbClr val="205295"/>
+            </a:solidFill>
+          </a:ln>
+        </p:spPr>
+        <p:style>
+          <a:lnRef idx="1">
+            <a:schemeClr val="accent1"/>
+          </a:lnRef>
+          <a:fillRef idx="3">
+            <a:schemeClr val="accent1"/>
+          </a:fillRef>
+          <a:effectRef idx="2">
+            <a:schemeClr val="accent1"/>
+          </a:effectRef>
+          <a:fontRef idx="minor">
+            <a:schemeClr val="lt1"/>
+          </a:fontRef>
+        </p:style>
+        <p:txBody>
+          <a:bodyPr rtlCol="0" anchor="ctr" wrap="square" lIns="76200" rIns="76200" tIns="50800" bIns="50800"/>
+          <a:lstStyle/>
+          <a:p>
+            <a:pPr algn="ctr"/>
+            <a:r>
+              <a:rPr sz="1600" b="1">
+                <a:solidFill>
+                  <a:srgbClr val="0B1F44"/>
+                </a:solidFill>
+                <a:latin typeface="Arial"/>
+              </a:rPr>
+              <a:t>max_output_tokens</a:t>
+            </a:r>
+          </a:p>
+        </p:txBody>
+      </p:sp>
+      <p:sp>
+        <p:nvSpPr>
+          <p:cNvPr id="15" name="Rounded Rectangle 14"/>
+          <p:cNvSpPr/>
+          <p:nvPr/>
+        </p:nvSpPr>
+        <p:spPr>
+          <a:xfrm>
+            <a:off x="7498079" y="4069080"/>
+            <a:ext cx="2011680" cy="640080"/>
+          </a:xfrm>
+          <a:prstGeom prst="roundRect">
+            <a:avLst/>
+          </a:prstGeom>
+          <a:solidFill>
+            <a:srgbClr val="DDEAFB"/>
+          </a:solidFill>
+          <a:ln>
+            <a:solidFill>
+              <a:srgbClr val="205295"/>
+            </a:solidFill>
+          </a:ln>
+        </p:spPr>
+        <p:style>
+          <a:lnRef idx="1">
+            <a:schemeClr val="accent1"/>
+          </a:lnRef>
+          <a:fillRef idx="3">
+            <a:schemeClr val="accent1"/>
+          </a:fillRef>
+          <a:effectRef idx="2">
+            <a:schemeClr val="accent1"/>
+          </a:effectRef>
+          <a:fontRef idx="minor">
+            <a:schemeClr val="lt1"/>
+          </a:fontRef>
+        </p:style>
+        <p:txBody>
+          <a:bodyPr rtlCol="0" anchor="ctr" wrap="square" lIns="76200" rIns="76200" tIns="50800" bIns="50800"/>
+          <a:lstStyle/>
+          <a:p>
+            <a:pPr algn="ctr"/>
+            <a:r>
+              <a:rPr sz="1600" b="1">
+                <a:solidFill>
+                  <a:srgbClr val="0B1F44"/>
+                </a:solidFill>
+                <a:latin typeface="Arial"/>
+              </a:rPr>
+              <a:t>reactive compact</a:t>
+            </a:r>
+          </a:p>
+        </p:txBody>
+      </p:sp>
+      <p:cxnSp>
+        <p:nvCxnSpPr>
+          <p:cNvPr id="16" name="Connector 15"/>
+          <p:cNvCxnSpPr/>
+          <p:nvPr/>
+        </p:nvCxnSpPr>
+        <p:spPr>
+          <a:xfrm>
+            <a:off x="3474720" y="2880360"/>
+            <a:ext cx="182880" cy="1188720"/>
+          </a:xfrm>
+          <a:prstGeom prst="line">
+            <a:avLst/>
+          </a:prstGeom>
+          <a:ln w="25400">
+            <a:solidFill>
+              <a:srgbClr val="205295"/>
+            </a:solidFill>
+          </a:ln>
+        </p:spPr>
+        <p:style>
+          <a:lnRef idx="2">
+            <a:schemeClr val="accent1"/>
+          </a:lnRef>
+          <a:fillRef idx="0">
+            <a:schemeClr val="accent1"/>
+          </a:fillRef>
+          <a:effectRef idx="1">
+            <a:schemeClr val="accent1"/>
+          </a:effectRef>
+          <a:fontRef idx="minor">
+            <a:schemeClr val="tx1"/>
+          </a:fontRef>
+        </p:style>
+      </p:cxnSp>
+      <p:cxnSp>
+        <p:nvCxnSpPr>
+          <p:cNvPr id="17" name="Connector 16"/>
+          <p:cNvCxnSpPr/>
+          <p:nvPr/>
+        </p:nvCxnSpPr>
+        <p:spPr>
+          <a:xfrm>
+            <a:off x="5577840" y="2880360"/>
+            <a:ext cx="548640" cy="1188720"/>
+          </a:xfrm>
+          <a:prstGeom prst="line">
+            <a:avLst/>
+          </a:prstGeom>
+          <a:ln w="25400">
+            <a:solidFill>
+              <a:srgbClr val="205295"/>
+            </a:solidFill>
+          </a:ln>
+        </p:spPr>
+        <p:style>
+          <a:lnRef idx="2">
+            <a:schemeClr val="accent1"/>
+          </a:lnRef>
+          <a:fillRef idx="0">
+            <a:schemeClr val="accent1"/>
+          </a:fillRef>
+          <a:effectRef idx="1">
+            <a:schemeClr val="accent1"/>
+          </a:effectRef>
+          <a:fontRef idx="minor">
+            <a:schemeClr val="tx1"/>
+          </a:fontRef>
+        </p:style>
+      </p:cxnSp>
+      <p:cxnSp>
+        <p:nvCxnSpPr>
+          <p:cNvPr id="18" name="Connector 17"/>
+          <p:cNvCxnSpPr/>
+          <p:nvPr/>
+        </p:nvCxnSpPr>
+        <p:spPr>
+          <a:xfrm flipV="1">
+            <a:off x="8138160" y="2880360"/>
+            <a:ext cx="1188720" cy="1828800"/>
+          </a:xfrm>
+          <a:prstGeom prst="line">
+            <a:avLst/>
+          </a:prstGeom>
+          <a:ln w="25400">
+            <a:solidFill>
+              <a:srgbClr val="205295"/>
+            </a:solidFill>
+          </a:ln>
+        </p:spPr>
+        <p:style>
+          <a:lnRef idx="2">
+            <a:schemeClr val="accent1"/>
+          </a:lnRef>
+          <a:fillRef idx="0">
+            <a:schemeClr val="accent1"/>
+          </a:fillRef>
+          <a:effectRef idx="1">
+            <a:schemeClr val="accent1"/>
+          </a:effectRef>
+          <a:fontRef idx="minor">
+            <a:schemeClr val="tx1"/>
+          </a:fontRef>
+        </p:style>
+      </p:cxnSp>
+      <p:sp>
+        <p:nvSpPr>
+          <p:cNvPr id="19" name="TextBox 18"/>
           <p:cNvSpPr txBox="1"/>
           <p:nvPr/>
         </p:nvSpPr>
         <p:spPr>
           <a:xfrm>
-            <a:off x="777240" y="1508760"/>
-            <a:ext cx="10241280" cy="4389120"/>
+            <a:off x="822960" y="4983480"/>
+            <a:ext cx="10058400" cy="914400"/>
           </a:xfrm>
           <a:prstGeom prst="rect">
             <a:avLst/>
@@ -9272,13 +11528,13 @@
               </a:spcAft>
             </a:pPr>
             <a:r>
-              <a:rPr sz="1900" b="0">
+              <a:rPr sz="1600" b="0">
                 <a:solidFill>
                   <a:srgbClr val="1F2937"/>
                 </a:solidFill>
                 <a:latin typeface="Arial"/>
               </a:rPr>
-              <a:t>不是内核本身，而是会话宿主</a:t>
+              <a:t>它维护的是可继续、可恢复、可压缩、可回放的合法轨迹</a:t>
             </a:r>
           </a:p>
           <a:p>
@@ -9288,45 +11544,13 @@
               </a:spcAft>
             </a:pPr>
             <a:r>
-              <a:rPr sz="1900" b="0">
+              <a:rPr sz="1600" b="0">
                 <a:solidFill>
                   <a:srgbClr val="1F2937"/>
                 </a:solidFill>
                 <a:latin typeface="Arial"/>
               </a:rPr>
-              <a:t>负责保持多轮消息历史、聚合 usage、维护 permission denial</a:t>
-            </a:r>
-          </a:p>
-          <a:p>
-            <a:pPr>
-              <a:spcAft>
-                <a:spcPts val="800"/>
-              </a:spcAft>
-            </a:pPr>
-            <a:r>
-              <a:rPr sz="1900" b="0">
-                <a:solidFill>
-                  <a:srgbClr val="1F2937"/>
-                </a:solidFill>
-                <a:latin typeface="Arial"/>
-              </a:rPr>
-              <a:t>持有 readFileState、预落盘 transcript、做 SDK/headless 输出投影</a:t>
-            </a:r>
-          </a:p>
-          <a:p>
-            <a:pPr>
-              <a:spcAft>
-                <a:spcPts val="800"/>
-              </a:spcAft>
-            </a:pPr>
-            <a:r>
-              <a:rPr sz="1900" b="0">
-                <a:solidFill>
-                  <a:srgbClr val="1F2937"/>
-                </a:solidFill>
-                <a:latin typeface="Arial"/>
-              </a:rPr>
-              <a:t>可以简单记成：query.ts 负责一轮怎么跑，QueryEngine.ts 负责一段会话怎么活</a:t>
+              <a:t>关键不是“发一次请求”，而是不断修正同一条 trajectory</a:t>
             </a:r>
           </a:p>
         </p:txBody>
@@ -9386,7 +11610,7 @@
                 </a:solidFill>
                 <a:latin typeface="Arial"/>
               </a:rPr>
-              <a:t>为什么长会话还能稳定工作</a:t>
+              <a:t>transcript / recovery 是 durable runtime 骨架</a:t>
             </a:r>
           </a:p>
         </p:txBody>
@@ -9442,8 +11666,8 @@
         </p:nvSpPr>
         <p:spPr>
           <a:xfrm>
-            <a:off x="777240" y="1508760"/>
-            <a:ext cx="10241280" cy="4389120"/>
+            <a:off x="777240" y="1645920"/>
+            <a:ext cx="10241280" cy="3017520"/>
           </a:xfrm>
           <a:prstGeom prst="rect">
             <a:avLst/>
@@ -9468,7 +11692,7 @@
                 </a:solidFill>
                 <a:latin typeface="Arial"/>
               </a:rPr>
-              <a:t>sessionStorage.ts 维护 durable transcript</a:t>
+              <a:t>sessionStorage.ts 保存的不是普通聊天记录，而是带 parentUuid 的消息链</a:t>
             </a:r>
           </a:p>
           <a:p>
@@ -9484,7 +11708,7 @@
                 </a:solidFill>
                 <a:latin typeface="Arial"/>
               </a:rPr>
-              <a:t>conversationRecovery.ts 会过滤坏消息并补 continuation</a:t>
+              <a:t>progress message 不进入主链，compact boundary 会进入恢复协议</a:t>
             </a:r>
           </a:p>
           <a:p>
@@ -9500,7 +11724,7 @@
                 </a:solidFill>
                 <a:latin typeface="Arial"/>
               </a:rPr>
-              <a:t>tool result budget / content replacement 保护 prompt cache prefix</a:t>
+              <a:t>conversationRecovery.ts 做的不是反序列化，而是把历史修回 API 可继续状态</a:t>
             </a:r>
           </a:p>
           <a:p>
@@ -9516,7 +11740,41 @@
                 </a:solidFill>
                 <a:latin typeface="Arial"/>
               </a:rPr>
-              <a:t>compact 的目标不是简单摘要，而是重建可继续工作的最小 context</a:t>
+              <a:t>synthetic continuation 说明系统在恢复“未完成的 runtime”，不是回放聊天 UI</a:t>
+            </a:r>
+          </a:p>
+        </p:txBody>
+      </p:sp>
+      <p:sp>
+        <p:nvSpPr>
+          <p:cNvPr id="5" name="TextBox 4"/>
+          <p:cNvSpPr txBox="1"/>
+          <p:nvPr/>
+        </p:nvSpPr>
+        <p:spPr>
+          <a:xfrm>
+            <a:off x="841248" y="5532120"/>
+            <a:ext cx="10058400" cy="502920"/>
+          </a:xfrm>
+          <a:prstGeom prst="rect">
+            <a:avLst/>
+          </a:prstGeom>
+          <a:noFill/>
+        </p:spPr>
+        <p:txBody>
+          <a:bodyPr wrap="square" lIns="76200" rIns="76200" tIns="50800" bIns="50800">
+            <a:spAutoFit/>
+          </a:bodyPr>
+          <a:lstStyle/>
+          <a:p>
+            <a:r>
+              <a:rPr sz="1400" b="0">
+                <a:solidFill>
+                  <a:srgbClr val="475569"/>
+                </a:solidFill>
+                <a:latin typeface="Arial"/>
+              </a:rPr>
+              <a:t>一句话：transcript 提供可追溯历史，recovery 把它修回可继续运行的当前状态。</a:t>
             </a:r>
           </a:p>
         </p:txBody>

--- a/docs/zh/00-代码总览与运行时走读-WPS兼容版.pptx
+++ b/docs/zh/00-代码总览与运行时走读-WPS兼容版.pptx
@@ -5995,7 +5995,7 @@
                 </a:solidFill>
                 <a:latin typeface="Arial"/>
               </a:rPr>
-              <a:t>文档里最重要的一组判断：状态载体分层</a:t>
+              <a:t>运行时状态载体</a:t>
             </a:r>
           </a:p>
         </p:txBody>
@@ -6308,7 +6308,7 @@
                 </a:solidFill>
                 <a:latin typeface="Arial"/>
               </a:rPr>
-              <a:t>文档里的另一个高价值产出：调试入口</a:t>
+              <a:t>调试与排障入口</a:t>
             </a:r>
           </a:p>
         </p:txBody>
@@ -6621,7 +6621,7 @@
                 </a:solidFill>
                 <a:latin typeface="Arial"/>
               </a:rPr>
-              <a:t>为什么它更像产品化 runtime</a:t>
+              <a:t>产品化 runtime 的控制面</a:t>
             </a:r>
           </a:p>
         </p:txBody>
@@ -6950,7 +6950,7 @@
                 </a:solidFill>
                 <a:latin typeface="Arial"/>
               </a:rPr>
-              <a:t>代码质量判断也需要进 PPT</a:t>
+              <a:t>代码质量与结构问题</a:t>
             </a:r>
           </a:p>
         </p:txBody>
@@ -7501,7 +7501,7 @@
                 </a:solidFill>
                 <a:latin typeface="Arial"/>
               </a:rPr>
-              <a:t>最后只保留最重要的结论</a:t>
+              <a:t>关键结论与阅读建议</a:t>
             </a:r>
           </a:p>
         </p:txBody>

--- a/docs/zh/00-代码总览与运行时走读-WPS兼容版.pptx
+++ b/docs/zh/00-代码总览与运行时走读-WPS兼容版.pptx
@@ -24,8 +24,6 @@
     <p:sldId id="272" r:id="rId23"/>
     <p:sldId id="273" r:id="rId24"/>
     <p:sldId id="274" r:id="rId25"/>
-    <p:sldId id="275" r:id="rId26"/>
-    <p:sldId id="276" r:id="rId27"/>
   </p:sldIdLst>
   <p:sldSz cx="12191695" cy="6858000" type="screen4x3"/>
   <p:notesSz cx="6858000" cy="9144000"/>
@@ -3294,7 +3292,7 @@
                 </a:solidFill>
                 <a:latin typeface="Arial"/>
               </a:rPr>
-              <a:t>tool result budget / content replacement 很关键</a:t>
+              <a:t>compact：分层整理，不是一刀切摘要</a:t>
             </a:r>
           </a:p>
         </p:txBody>
@@ -3344,14 +3342,424 @@
       </p:sp>
       <p:sp>
         <p:nvSpPr>
-          <p:cNvPr id="4" name="TextBox 3"/>
+          <p:cNvPr id="4" name="Rounded Rectangle 3"/>
+          <p:cNvSpPr/>
+          <p:nvPr/>
+        </p:nvSpPr>
+        <p:spPr>
+          <a:xfrm>
+            <a:off x="731520" y="1828800"/>
+            <a:ext cx="1371600" cy="640080"/>
+          </a:xfrm>
+          <a:prstGeom prst="roundRect">
+            <a:avLst/>
+          </a:prstGeom>
+          <a:solidFill>
+            <a:srgbClr val="FFFFFF"/>
+          </a:solidFill>
+          <a:ln>
+            <a:solidFill>
+              <a:srgbClr val="205295"/>
+            </a:solidFill>
+          </a:ln>
+        </p:spPr>
+        <p:style>
+          <a:lnRef idx="1">
+            <a:schemeClr val="accent1"/>
+          </a:lnRef>
+          <a:fillRef idx="3">
+            <a:schemeClr val="accent1"/>
+          </a:fillRef>
+          <a:effectRef idx="2">
+            <a:schemeClr val="accent1"/>
+          </a:effectRef>
+          <a:fontRef idx="minor">
+            <a:schemeClr val="lt1"/>
+          </a:fontRef>
+        </p:style>
+        <p:txBody>
+          <a:bodyPr rtlCol="0" anchor="ctr" wrap="square" lIns="76200" rIns="76200" tIns="50800" bIns="50800"/>
+          <a:lstStyle/>
+          <a:p>
+            <a:pPr algn="ctr"/>
+            <a:r>
+              <a:rPr sz="1600" b="1">
+                <a:solidFill>
+                  <a:srgbClr val="0B1F44"/>
+                </a:solidFill>
+                <a:latin typeface="Arial"/>
+              </a:rPr>
+              <a:t>snip</a:t>
+            </a:r>
+          </a:p>
+        </p:txBody>
+      </p:sp>
+      <p:sp>
+        <p:nvSpPr>
+          <p:cNvPr id="5" name="Rounded Rectangle 4"/>
+          <p:cNvSpPr/>
+          <p:nvPr/>
+        </p:nvSpPr>
+        <p:spPr>
+          <a:xfrm>
+            <a:off x="2468880" y="1828800"/>
+            <a:ext cx="1645920" cy="640080"/>
+          </a:xfrm>
+          <a:prstGeom prst="roundRect">
+            <a:avLst/>
+          </a:prstGeom>
+          <a:solidFill>
+            <a:srgbClr val="FFFFFF"/>
+          </a:solidFill>
+          <a:ln>
+            <a:solidFill>
+              <a:srgbClr val="205295"/>
+            </a:solidFill>
+          </a:ln>
+        </p:spPr>
+        <p:style>
+          <a:lnRef idx="1">
+            <a:schemeClr val="accent1"/>
+          </a:lnRef>
+          <a:fillRef idx="3">
+            <a:schemeClr val="accent1"/>
+          </a:fillRef>
+          <a:effectRef idx="2">
+            <a:schemeClr val="accent1"/>
+          </a:effectRef>
+          <a:fontRef idx="minor">
+            <a:schemeClr val="lt1"/>
+          </a:fontRef>
+        </p:style>
+        <p:txBody>
+          <a:bodyPr rtlCol="0" anchor="ctr" wrap="square" lIns="76200" rIns="76200" tIns="50800" bIns="50800"/>
+          <a:lstStyle/>
+          <a:p>
+            <a:pPr algn="ctr"/>
+            <a:r>
+              <a:rPr sz="1600" b="1">
+                <a:solidFill>
+                  <a:srgbClr val="0B1F44"/>
+                </a:solidFill>
+                <a:latin typeface="Arial"/>
+              </a:rPr>
+              <a:t>microcompact</a:t>
+            </a:r>
+          </a:p>
+        </p:txBody>
+      </p:sp>
+      <p:sp>
+        <p:nvSpPr>
+          <p:cNvPr id="6" name="Rounded Rectangle 5"/>
+          <p:cNvSpPr/>
+          <p:nvPr/>
+        </p:nvSpPr>
+        <p:spPr>
+          <a:xfrm>
+            <a:off x="4480560" y="1828800"/>
+            <a:ext cx="1737360" cy="640080"/>
+          </a:xfrm>
+          <a:prstGeom prst="roundRect">
+            <a:avLst/>
+          </a:prstGeom>
+          <a:solidFill>
+            <a:srgbClr val="FFFFFF"/>
+          </a:solidFill>
+          <a:ln>
+            <a:solidFill>
+              <a:srgbClr val="205295"/>
+            </a:solidFill>
+          </a:ln>
+        </p:spPr>
+        <p:style>
+          <a:lnRef idx="1">
+            <a:schemeClr val="accent1"/>
+          </a:lnRef>
+          <a:fillRef idx="3">
+            <a:schemeClr val="accent1"/>
+          </a:fillRef>
+          <a:effectRef idx="2">
+            <a:schemeClr val="accent1"/>
+          </a:effectRef>
+          <a:fontRef idx="minor">
+            <a:schemeClr val="lt1"/>
+          </a:fontRef>
+        </p:style>
+        <p:txBody>
+          <a:bodyPr rtlCol="0" anchor="ctr" wrap="square" lIns="76200" rIns="76200" tIns="50800" bIns="50800"/>
+          <a:lstStyle/>
+          <a:p>
+            <a:pPr algn="ctr"/>
+            <a:r>
+              <a:rPr sz="1600" b="1">
+                <a:solidFill>
+                  <a:srgbClr val="0B1F44"/>
+                </a:solidFill>
+                <a:latin typeface="Arial"/>
+              </a:rPr>
+              <a:t>collapse</a:t>
+            </a:r>
+          </a:p>
+        </p:txBody>
+      </p:sp>
+      <p:sp>
+        <p:nvSpPr>
+          <p:cNvPr id="7" name="Rounded Rectangle 6"/>
+          <p:cNvSpPr/>
+          <p:nvPr/>
+        </p:nvSpPr>
+        <p:spPr>
+          <a:xfrm>
+            <a:off x="6583680" y="1828800"/>
+            <a:ext cx="1645920" cy="640080"/>
+          </a:xfrm>
+          <a:prstGeom prst="roundRect">
+            <a:avLst/>
+          </a:prstGeom>
+          <a:solidFill>
+            <a:srgbClr val="FFFFFF"/>
+          </a:solidFill>
+          <a:ln>
+            <a:solidFill>
+              <a:srgbClr val="205295"/>
+            </a:solidFill>
+          </a:ln>
+        </p:spPr>
+        <p:style>
+          <a:lnRef idx="1">
+            <a:schemeClr val="accent1"/>
+          </a:lnRef>
+          <a:fillRef idx="3">
+            <a:schemeClr val="accent1"/>
+          </a:fillRef>
+          <a:effectRef idx="2">
+            <a:schemeClr val="accent1"/>
+          </a:effectRef>
+          <a:fontRef idx="minor">
+            <a:schemeClr val="lt1"/>
+          </a:fontRef>
+        </p:style>
+        <p:txBody>
+          <a:bodyPr rtlCol="0" anchor="ctr" wrap="square" lIns="76200" rIns="76200" tIns="50800" bIns="50800"/>
+          <a:lstStyle/>
+          <a:p>
+            <a:pPr algn="ctr"/>
+            <a:r>
+              <a:rPr sz="1600" b="1">
+                <a:solidFill>
+                  <a:srgbClr val="0B1F44"/>
+                </a:solidFill>
+                <a:latin typeface="Arial"/>
+              </a:rPr>
+              <a:t>autocompact</a:t>
+            </a:r>
+          </a:p>
+        </p:txBody>
+      </p:sp>
+      <p:sp>
+        <p:nvSpPr>
+          <p:cNvPr id="8" name="Rounded Rectangle 7"/>
+          <p:cNvSpPr/>
+          <p:nvPr/>
+        </p:nvSpPr>
+        <p:spPr>
+          <a:xfrm>
+            <a:off x="8595360" y="1828800"/>
+            <a:ext cx="2011680" cy="640080"/>
+          </a:xfrm>
+          <a:prstGeom prst="roundRect">
+            <a:avLst/>
+          </a:prstGeom>
+          <a:solidFill>
+            <a:srgbClr val="FFFFFF"/>
+          </a:solidFill>
+          <a:ln>
+            <a:solidFill>
+              <a:srgbClr val="205295"/>
+            </a:solidFill>
+          </a:ln>
+        </p:spPr>
+        <p:style>
+          <a:lnRef idx="1">
+            <a:schemeClr val="accent1"/>
+          </a:lnRef>
+          <a:fillRef idx="3">
+            <a:schemeClr val="accent1"/>
+          </a:fillRef>
+          <a:effectRef idx="2">
+            <a:schemeClr val="accent1"/>
+          </a:effectRef>
+          <a:fontRef idx="minor">
+            <a:schemeClr val="lt1"/>
+          </a:fontRef>
+        </p:style>
+        <p:txBody>
+          <a:bodyPr rtlCol="0" anchor="ctr" wrap="square" lIns="76200" rIns="76200" tIns="50800" bIns="50800"/>
+          <a:lstStyle/>
+          <a:p>
+            <a:pPr algn="ctr"/>
+            <a:r>
+              <a:rPr sz="1600" b="1">
+                <a:solidFill>
+                  <a:srgbClr val="0B1F44"/>
+                </a:solidFill>
+                <a:latin typeface="Arial"/>
+              </a:rPr>
+              <a:t>reactive compact</a:t>
+            </a:r>
+          </a:p>
+        </p:txBody>
+      </p:sp>
+      <p:cxnSp>
+        <p:nvCxnSpPr>
+          <p:cNvPr id="9" name="Connector 8"/>
+          <p:cNvCxnSpPr/>
+          <p:nvPr/>
+        </p:nvCxnSpPr>
+        <p:spPr>
+          <a:xfrm>
+            <a:off x="2103120" y="2148840"/>
+            <a:ext cx="365760" cy="0"/>
+          </a:xfrm>
+          <a:prstGeom prst="line">
+            <a:avLst/>
+          </a:prstGeom>
+          <a:ln w="25400">
+            <a:solidFill>
+              <a:srgbClr val="205295"/>
+            </a:solidFill>
+          </a:ln>
+        </p:spPr>
+        <p:style>
+          <a:lnRef idx="2">
+            <a:schemeClr val="accent1"/>
+          </a:lnRef>
+          <a:fillRef idx="0">
+            <a:schemeClr val="accent1"/>
+          </a:fillRef>
+          <a:effectRef idx="1">
+            <a:schemeClr val="accent1"/>
+          </a:effectRef>
+          <a:fontRef idx="minor">
+            <a:schemeClr val="tx1"/>
+          </a:fontRef>
+        </p:style>
+      </p:cxnSp>
+      <p:cxnSp>
+        <p:nvCxnSpPr>
+          <p:cNvPr id="10" name="Connector 9"/>
+          <p:cNvCxnSpPr/>
+          <p:nvPr/>
+        </p:nvCxnSpPr>
+        <p:spPr>
+          <a:xfrm>
+            <a:off x="4114800" y="2148840"/>
+            <a:ext cx="365760" cy="0"/>
+          </a:xfrm>
+          <a:prstGeom prst="line">
+            <a:avLst/>
+          </a:prstGeom>
+          <a:ln w="25400">
+            <a:solidFill>
+              <a:srgbClr val="205295"/>
+            </a:solidFill>
+          </a:ln>
+        </p:spPr>
+        <p:style>
+          <a:lnRef idx="2">
+            <a:schemeClr val="accent1"/>
+          </a:lnRef>
+          <a:fillRef idx="0">
+            <a:schemeClr val="accent1"/>
+          </a:fillRef>
+          <a:effectRef idx="1">
+            <a:schemeClr val="accent1"/>
+          </a:effectRef>
+          <a:fontRef idx="minor">
+            <a:schemeClr val="tx1"/>
+          </a:fontRef>
+        </p:style>
+      </p:cxnSp>
+      <p:cxnSp>
+        <p:nvCxnSpPr>
+          <p:cNvPr id="11" name="Connector 10"/>
+          <p:cNvCxnSpPr/>
+          <p:nvPr/>
+        </p:nvCxnSpPr>
+        <p:spPr>
+          <a:xfrm>
+            <a:off x="6217920" y="2148840"/>
+            <a:ext cx="365760" cy="0"/>
+          </a:xfrm>
+          <a:prstGeom prst="line">
+            <a:avLst/>
+          </a:prstGeom>
+          <a:ln w="25400">
+            <a:solidFill>
+              <a:srgbClr val="205295"/>
+            </a:solidFill>
+          </a:ln>
+        </p:spPr>
+        <p:style>
+          <a:lnRef idx="2">
+            <a:schemeClr val="accent1"/>
+          </a:lnRef>
+          <a:fillRef idx="0">
+            <a:schemeClr val="accent1"/>
+          </a:fillRef>
+          <a:effectRef idx="1">
+            <a:schemeClr val="accent1"/>
+          </a:effectRef>
+          <a:fontRef idx="minor">
+            <a:schemeClr val="tx1"/>
+          </a:fontRef>
+        </p:style>
+      </p:cxnSp>
+      <p:cxnSp>
+        <p:nvCxnSpPr>
+          <p:cNvPr id="12" name="Connector 11"/>
+          <p:cNvCxnSpPr/>
+          <p:nvPr/>
+        </p:nvCxnSpPr>
+        <p:spPr>
+          <a:xfrm>
+            <a:off x="8229600" y="2148840"/>
+            <a:ext cx="365760" cy="0"/>
+          </a:xfrm>
+          <a:prstGeom prst="line">
+            <a:avLst/>
+          </a:prstGeom>
+          <a:ln w="25400">
+            <a:solidFill>
+              <a:srgbClr val="205295"/>
+            </a:solidFill>
+          </a:ln>
+        </p:spPr>
+        <p:style>
+          <a:lnRef idx="2">
+            <a:schemeClr val="accent1"/>
+          </a:lnRef>
+          <a:fillRef idx="0">
+            <a:schemeClr val="accent1"/>
+          </a:fillRef>
+          <a:effectRef idx="1">
+            <a:schemeClr val="accent1"/>
+          </a:effectRef>
+          <a:fontRef idx="minor">
+            <a:schemeClr val="tx1"/>
+          </a:fontRef>
+        </p:style>
+      </p:cxnSp>
+      <p:sp>
+        <p:nvSpPr>
+          <p:cNvPr id="13" name="TextBox 12"/>
           <p:cNvSpPr txBox="1"/>
           <p:nvPr/>
         </p:nvSpPr>
         <p:spPr>
           <a:xfrm>
-            <a:off x="777240" y="1645920"/>
-            <a:ext cx="10241280" cy="3108960"/>
+            <a:off x="822960" y="3291840"/>
+            <a:ext cx="10149840" cy="1828800"/>
           </a:xfrm>
           <a:prstGeom prst="rect">
             <a:avLst/>
@@ -3370,13 +3778,13 @@
               </a:spcAft>
             </a:pPr>
             <a:r>
-              <a:rPr sz="1900" b="0">
+              <a:rPr sz="1700" b="0">
                 <a:solidFill>
                   <a:srgbClr val="1F2937"/>
                 </a:solidFill>
                 <a:latin typeface="Arial"/>
               </a:rPr>
-              <a:t>它解决的不是“截断输出”，而是“冻结输出命运”</a:t>
+              <a:t>要按两条轴来理解：主动整理 vs 被动恢复；轻量缩减 vs full compact</a:t>
             </a:r>
           </a:p>
           <a:p>
@@ -3386,13 +3794,13 @@
               </a:spcAft>
             </a:pPr>
             <a:r>
-              <a:rPr sz="1900" b="0">
+              <a:rPr sz="1700" b="0">
                 <a:solidFill>
                   <a:srgbClr val="1F2937"/>
                 </a:solidFill>
                 <a:latin typeface="Arial"/>
               </a:rPr>
-              <a:t>某个 tool_use_id 一旦决定替换，后面必须始终复用同一 replacement string</a:t>
+              <a:t>full compact 后保留的不是只有 summary，还包括 boundary、文件恢复、plan_mode、invoked_skills、deferred delta</a:t>
             </a:r>
           </a:p>
           <a:p>
@@ -3402,63 +3810,13 @@
               </a:spcAft>
             </a:pPr>
             <a:r>
-              <a:rPr sz="1900" b="0">
+              <a:rPr sz="1700" b="0">
                 <a:solidFill>
                   <a:srgbClr val="1F2937"/>
                 </a:solidFill>
                 <a:latin typeface="Arial"/>
               </a:rPr>
-              <a:t>大输出先外化到磁盘，再用稳定 preview 进入 context</a:t>
-            </a:r>
-          </a:p>
-          <a:p>
-            <a:pPr>
-              <a:spcAft>
-                <a:spcPts val="800"/>
-              </a:spcAft>
-            </a:pPr>
-            <a:r>
-              <a:rPr sz="1900" b="0">
-                <a:solidFill>
-                  <a:srgbClr val="1F2937"/>
-                </a:solidFill>
-                <a:latin typeface="Arial"/>
-              </a:rPr>
-              <a:t>恢复后还要重放相同 replacement，才能保住 prompt cache prefix</a:t>
-            </a:r>
-          </a:p>
-        </p:txBody>
-      </p:sp>
-      <p:sp>
-        <p:nvSpPr>
-          <p:cNvPr id="5" name="TextBox 4"/>
-          <p:cNvSpPr txBox="1"/>
-          <p:nvPr/>
-        </p:nvSpPr>
-        <p:spPr>
-          <a:xfrm>
-            <a:off x="841248" y="5532120"/>
-            <a:ext cx="10058400" cy="502920"/>
-          </a:xfrm>
-          <a:prstGeom prst="rect">
-            <a:avLst/>
-          </a:prstGeom>
-          <a:noFill/>
-        </p:spPr>
-        <p:txBody>
-          <a:bodyPr wrap="square" lIns="76200" rIns="76200" tIns="50800" bIns="50800">
-            <a:spAutoFit/>
-          </a:bodyPr>
-          <a:lstStyle/>
-          <a:p>
-            <a:r>
-              <a:rPr sz="1400" b="0">
-                <a:solidFill>
-                  <a:srgbClr val="475569"/>
-                </a:solidFill>
-                <a:latin typeface="Arial"/>
-              </a:rPr>
-              <a:t>这层是 Claude Code 和很多 demo agent 最大的差别之一。</a:t>
+              <a:t>本质上是在重建可继续工作的最小 context</a:t>
             </a:r>
           </a:p>
         </p:txBody>
@@ -3518,7 +3876,7 @@
                 </a:solidFill>
                 <a:latin typeface="Arial"/>
               </a:rPr>
-              <a:t>compact：分层整理，不是一刀切摘要</a:t>
+              <a:t>compact 之后到底保留什么</a:t>
             </a:r>
           </a:p>
         </p:txBody>
@@ -3568,424 +3926,14 @@
       </p:sp>
       <p:sp>
         <p:nvSpPr>
-          <p:cNvPr id="4" name="Rounded Rectangle 3"/>
-          <p:cNvSpPr/>
-          <p:nvPr/>
-        </p:nvSpPr>
-        <p:spPr>
-          <a:xfrm>
-            <a:off x="731520" y="1828800"/>
-            <a:ext cx="1371600" cy="640080"/>
-          </a:xfrm>
-          <a:prstGeom prst="roundRect">
-            <a:avLst/>
-          </a:prstGeom>
-          <a:solidFill>
-            <a:srgbClr val="FFFFFF"/>
-          </a:solidFill>
-          <a:ln>
-            <a:solidFill>
-              <a:srgbClr val="205295"/>
-            </a:solidFill>
-          </a:ln>
-        </p:spPr>
-        <p:style>
-          <a:lnRef idx="1">
-            <a:schemeClr val="accent1"/>
-          </a:lnRef>
-          <a:fillRef idx="3">
-            <a:schemeClr val="accent1"/>
-          </a:fillRef>
-          <a:effectRef idx="2">
-            <a:schemeClr val="accent1"/>
-          </a:effectRef>
-          <a:fontRef idx="minor">
-            <a:schemeClr val="lt1"/>
-          </a:fontRef>
-        </p:style>
-        <p:txBody>
-          <a:bodyPr rtlCol="0" anchor="ctr" wrap="square" lIns="76200" rIns="76200" tIns="50800" bIns="50800"/>
-          <a:lstStyle/>
-          <a:p>
-            <a:pPr algn="ctr"/>
-            <a:r>
-              <a:rPr sz="1600" b="1">
-                <a:solidFill>
-                  <a:srgbClr val="0B1F44"/>
-                </a:solidFill>
-                <a:latin typeface="Arial"/>
-              </a:rPr>
-              <a:t>snip</a:t>
-            </a:r>
-          </a:p>
-        </p:txBody>
-      </p:sp>
-      <p:sp>
-        <p:nvSpPr>
-          <p:cNvPr id="5" name="Rounded Rectangle 4"/>
-          <p:cNvSpPr/>
-          <p:nvPr/>
-        </p:nvSpPr>
-        <p:spPr>
-          <a:xfrm>
-            <a:off x="2468880" y="1828800"/>
-            <a:ext cx="1645920" cy="640080"/>
-          </a:xfrm>
-          <a:prstGeom prst="roundRect">
-            <a:avLst/>
-          </a:prstGeom>
-          <a:solidFill>
-            <a:srgbClr val="FFFFFF"/>
-          </a:solidFill>
-          <a:ln>
-            <a:solidFill>
-              <a:srgbClr val="205295"/>
-            </a:solidFill>
-          </a:ln>
-        </p:spPr>
-        <p:style>
-          <a:lnRef idx="1">
-            <a:schemeClr val="accent1"/>
-          </a:lnRef>
-          <a:fillRef idx="3">
-            <a:schemeClr val="accent1"/>
-          </a:fillRef>
-          <a:effectRef idx="2">
-            <a:schemeClr val="accent1"/>
-          </a:effectRef>
-          <a:fontRef idx="minor">
-            <a:schemeClr val="lt1"/>
-          </a:fontRef>
-        </p:style>
-        <p:txBody>
-          <a:bodyPr rtlCol="0" anchor="ctr" wrap="square" lIns="76200" rIns="76200" tIns="50800" bIns="50800"/>
-          <a:lstStyle/>
-          <a:p>
-            <a:pPr algn="ctr"/>
-            <a:r>
-              <a:rPr sz="1600" b="1">
-                <a:solidFill>
-                  <a:srgbClr val="0B1F44"/>
-                </a:solidFill>
-                <a:latin typeface="Arial"/>
-              </a:rPr>
-              <a:t>microcompact</a:t>
-            </a:r>
-          </a:p>
-        </p:txBody>
-      </p:sp>
-      <p:sp>
-        <p:nvSpPr>
-          <p:cNvPr id="6" name="Rounded Rectangle 5"/>
-          <p:cNvSpPr/>
-          <p:nvPr/>
-        </p:nvSpPr>
-        <p:spPr>
-          <a:xfrm>
-            <a:off x="4480560" y="1828800"/>
-            <a:ext cx="1737360" cy="640080"/>
-          </a:xfrm>
-          <a:prstGeom prst="roundRect">
-            <a:avLst/>
-          </a:prstGeom>
-          <a:solidFill>
-            <a:srgbClr val="FFFFFF"/>
-          </a:solidFill>
-          <a:ln>
-            <a:solidFill>
-              <a:srgbClr val="205295"/>
-            </a:solidFill>
-          </a:ln>
-        </p:spPr>
-        <p:style>
-          <a:lnRef idx="1">
-            <a:schemeClr val="accent1"/>
-          </a:lnRef>
-          <a:fillRef idx="3">
-            <a:schemeClr val="accent1"/>
-          </a:fillRef>
-          <a:effectRef idx="2">
-            <a:schemeClr val="accent1"/>
-          </a:effectRef>
-          <a:fontRef idx="minor">
-            <a:schemeClr val="lt1"/>
-          </a:fontRef>
-        </p:style>
-        <p:txBody>
-          <a:bodyPr rtlCol="0" anchor="ctr" wrap="square" lIns="76200" rIns="76200" tIns="50800" bIns="50800"/>
-          <a:lstStyle/>
-          <a:p>
-            <a:pPr algn="ctr"/>
-            <a:r>
-              <a:rPr sz="1600" b="1">
-                <a:solidFill>
-                  <a:srgbClr val="0B1F44"/>
-                </a:solidFill>
-                <a:latin typeface="Arial"/>
-              </a:rPr>
-              <a:t>collapse</a:t>
-            </a:r>
-          </a:p>
-        </p:txBody>
-      </p:sp>
-      <p:sp>
-        <p:nvSpPr>
-          <p:cNvPr id="7" name="Rounded Rectangle 6"/>
-          <p:cNvSpPr/>
-          <p:nvPr/>
-        </p:nvSpPr>
-        <p:spPr>
-          <a:xfrm>
-            <a:off x="6583680" y="1828800"/>
-            <a:ext cx="1645920" cy="640080"/>
-          </a:xfrm>
-          <a:prstGeom prst="roundRect">
-            <a:avLst/>
-          </a:prstGeom>
-          <a:solidFill>
-            <a:srgbClr val="FFFFFF"/>
-          </a:solidFill>
-          <a:ln>
-            <a:solidFill>
-              <a:srgbClr val="205295"/>
-            </a:solidFill>
-          </a:ln>
-        </p:spPr>
-        <p:style>
-          <a:lnRef idx="1">
-            <a:schemeClr val="accent1"/>
-          </a:lnRef>
-          <a:fillRef idx="3">
-            <a:schemeClr val="accent1"/>
-          </a:fillRef>
-          <a:effectRef idx="2">
-            <a:schemeClr val="accent1"/>
-          </a:effectRef>
-          <a:fontRef idx="minor">
-            <a:schemeClr val="lt1"/>
-          </a:fontRef>
-        </p:style>
-        <p:txBody>
-          <a:bodyPr rtlCol="0" anchor="ctr" wrap="square" lIns="76200" rIns="76200" tIns="50800" bIns="50800"/>
-          <a:lstStyle/>
-          <a:p>
-            <a:pPr algn="ctr"/>
-            <a:r>
-              <a:rPr sz="1600" b="1">
-                <a:solidFill>
-                  <a:srgbClr val="0B1F44"/>
-                </a:solidFill>
-                <a:latin typeface="Arial"/>
-              </a:rPr>
-              <a:t>autocompact</a:t>
-            </a:r>
-          </a:p>
-        </p:txBody>
-      </p:sp>
-      <p:sp>
-        <p:nvSpPr>
-          <p:cNvPr id="8" name="Rounded Rectangle 7"/>
-          <p:cNvSpPr/>
-          <p:nvPr/>
-        </p:nvSpPr>
-        <p:spPr>
-          <a:xfrm>
-            <a:off x="8595360" y="1828800"/>
-            <a:ext cx="2011680" cy="640080"/>
-          </a:xfrm>
-          <a:prstGeom prst="roundRect">
-            <a:avLst/>
-          </a:prstGeom>
-          <a:solidFill>
-            <a:srgbClr val="FFFFFF"/>
-          </a:solidFill>
-          <a:ln>
-            <a:solidFill>
-              <a:srgbClr val="205295"/>
-            </a:solidFill>
-          </a:ln>
-        </p:spPr>
-        <p:style>
-          <a:lnRef idx="1">
-            <a:schemeClr val="accent1"/>
-          </a:lnRef>
-          <a:fillRef idx="3">
-            <a:schemeClr val="accent1"/>
-          </a:fillRef>
-          <a:effectRef idx="2">
-            <a:schemeClr val="accent1"/>
-          </a:effectRef>
-          <a:fontRef idx="minor">
-            <a:schemeClr val="lt1"/>
-          </a:fontRef>
-        </p:style>
-        <p:txBody>
-          <a:bodyPr rtlCol="0" anchor="ctr" wrap="square" lIns="76200" rIns="76200" tIns="50800" bIns="50800"/>
-          <a:lstStyle/>
-          <a:p>
-            <a:pPr algn="ctr"/>
-            <a:r>
-              <a:rPr sz="1600" b="1">
-                <a:solidFill>
-                  <a:srgbClr val="0B1F44"/>
-                </a:solidFill>
-                <a:latin typeface="Arial"/>
-              </a:rPr>
-              <a:t>reactive compact</a:t>
-            </a:r>
-          </a:p>
-        </p:txBody>
-      </p:sp>
-      <p:cxnSp>
-        <p:nvCxnSpPr>
-          <p:cNvPr id="9" name="Connector 8"/>
-          <p:cNvCxnSpPr/>
-          <p:nvPr/>
-        </p:nvCxnSpPr>
-        <p:spPr>
-          <a:xfrm>
-            <a:off x="2103120" y="2148840"/>
-            <a:ext cx="365760" cy="0"/>
-          </a:xfrm>
-          <a:prstGeom prst="line">
-            <a:avLst/>
-          </a:prstGeom>
-          <a:ln w="25400">
-            <a:solidFill>
-              <a:srgbClr val="205295"/>
-            </a:solidFill>
-          </a:ln>
-        </p:spPr>
-        <p:style>
-          <a:lnRef idx="2">
-            <a:schemeClr val="accent1"/>
-          </a:lnRef>
-          <a:fillRef idx="0">
-            <a:schemeClr val="accent1"/>
-          </a:fillRef>
-          <a:effectRef idx="1">
-            <a:schemeClr val="accent1"/>
-          </a:effectRef>
-          <a:fontRef idx="minor">
-            <a:schemeClr val="tx1"/>
-          </a:fontRef>
-        </p:style>
-      </p:cxnSp>
-      <p:cxnSp>
-        <p:nvCxnSpPr>
-          <p:cNvPr id="10" name="Connector 9"/>
-          <p:cNvCxnSpPr/>
-          <p:nvPr/>
-        </p:nvCxnSpPr>
-        <p:spPr>
-          <a:xfrm>
-            <a:off x="4114800" y="2148840"/>
-            <a:ext cx="365760" cy="0"/>
-          </a:xfrm>
-          <a:prstGeom prst="line">
-            <a:avLst/>
-          </a:prstGeom>
-          <a:ln w="25400">
-            <a:solidFill>
-              <a:srgbClr val="205295"/>
-            </a:solidFill>
-          </a:ln>
-        </p:spPr>
-        <p:style>
-          <a:lnRef idx="2">
-            <a:schemeClr val="accent1"/>
-          </a:lnRef>
-          <a:fillRef idx="0">
-            <a:schemeClr val="accent1"/>
-          </a:fillRef>
-          <a:effectRef idx="1">
-            <a:schemeClr val="accent1"/>
-          </a:effectRef>
-          <a:fontRef idx="minor">
-            <a:schemeClr val="tx1"/>
-          </a:fontRef>
-        </p:style>
-      </p:cxnSp>
-      <p:cxnSp>
-        <p:nvCxnSpPr>
-          <p:cNvPr id="11" name="Connector 10"/>
-          <p:cNvCxnSpPr/>
-          <p:nvPr/>
-        </p:nvCxnSpPr>
-        <p:spPr>
-          <a:xfrm>
-            <a:off x="6217920" y="2148840"/>
-            <a:ext cx="365760" cy="0"/>
-          </a:xfrm>
-          <a:prstGeom prst="line">
-            <a:avLst/>
-          </a:prstGeom>
-          <a:ln w="25400">
-            <a:solidFill>
-              <a:srgbClr val="205295"/>
-            </a:solidFill>
-          </a:ln>
-        </p:spPr>
-        <p:style>
-          <a:lnRef idx="2">
-            <a:schemeClr val="accent1"/>
-          </a:lnRef>
-          <a:fillRef idx="0">
-            <a:schemeClr val="accent1"/>
-          </a:fillRef>
-          <a:effectRef idx="1">
-            <a:schemeClr val="accent1"/>
-          </a:effectRef>
-          <a:fontRef idx="minor">
-            <a:schemeClr val="tx1"/>
-          </a:fontRef>
-        </p:style>
-      </p:cxnSp>
-      <p:cxnSp>
-        <p:nvCxnSpPr>
-          <p:cNvPr id="12" name="Connector 11"/>
-          <p:cNvCxnSpPr/>
-          <p:nvPr/>
-        </p:nvCxnSpPr>
-        <p:spPr>
-          <a:xfrm>
-            <a:off x="8229600" y="2148840"/>
-            <a:ext cx="365760" cy="0"/>
-          </a:xfrm>
-          <a:prstGeom prst="line">
-            <a:avLst/>
-          </a:prstGeom>
-          <a:ln w="25400">
-            <a:solidFill>
-              <a:srgbClr val="205295"/>
-            </a:solidFill>
-          </a:ln>
-        </p:spPr>
-        <p:style>
-          <a:lnRef idx="2">
-            <a:schemeClr val="accent1"/>
-          </a:lnRef>
-          <a:fillRef idx="0">
-            <a:schemeClr val="accent1"/>
-          </a:fillRef>
-          <a:effectRef idx="1">
-            <a:schemeClr val="accent1"/>
-          </a:effectRef>
-          <a:fontRef idx="minor">
-            <a:schemeClr val="tx1"/>
-          </a:fontRef>
-        </p:style>
-      </p:cxnSp>
-      <p:sp>
-        <p:nvSpPr>
-          <p:cNvPr id="13" name="TextBox 12"/>
+          <p:cNvPr id="4" name="TextBox 3"/>
           <p:cNvSpPr txBox="1"/>
           <p:nvPr/>
         </p:nvSpPr>
         <p:spPr>
           <a:xfrm>
-            <a:off x="822960" y="3291840"/>
-            <a:ext cx="10149840" cy="1828800"/>
+            <a:off x="777240" y="1508760"/>
+            <a:ext cx="10241280" cy="4389120"/>
           </a:xfrm>
           <a:prstGeom prst="rect">
             <a:avLst/>
@@ -4004,13 +3952,13 @@
               </a:spcAft>
             </a:pPr>
             <a:r>
-              <a:rPr sz="1700" b="0">
+              <a:rPr sz="1900" b="0">
                 <a:solidFill>
                   <a:srgbClr val="1F2937"/>
                 </a:solidFill>
                 <a:latin typeface="Arial"/>
               </a:rPr>
-              <a:t>要按两条轴来理解：主动整理 vs 被动恢复；轻量缩减 vs full compact</a:t>
+              <a:t>保留的不只是 summary，还包括 compact boundary、messagesToKeep 和文件恢复 attachment</a:t>
             </a:r>
           </a:p>
           <a:p>
@@ -4020,13 +3968,13 @@
               </a:spcAft>
             </a:pPr>
             <a:r>
-              <a:rPr sz="1700" b="0">
+              <a:rPr sz="1900" b="0">
                 <a:solidFill>
                   <a:srgbClr val="1F2937"/>
                 </a:solidFill>
                 <a:latin typeface="Arial"/>
               </a:rPr>
-              <a:t>full compact 后保留的不是只有 summary，还包括 boundary、文件恢复、plan_mode、invoked_skills、deferred delta</a:t>
+              <a:t>plan_mode、invoked_skills、deferred tools delta 也会被带回新的工作面</a:t>
             </a:r>
           </a:p>
           <a:p>
@@ -4036,13 +3984,29 @@
               </a:spcAft>
             </a:pPr>
             <a:r>
-              <a:rPr sz="1700" b="0">
+              <a:rPr sz="1900" b="0">
                 <a:solidFill>
                   <a:srgbClr val="1F2937"/>
                 </a:solidFill>
                 <a:latin typeface="Arial"/>
               </a:rPr>
-              <a:t>本质上是在重建可继续工作的最小 context</a:t>
+              <a:t>compact 更像“重建可继续工作的最小 context”，不是把历史压成一段摘要</a:t>
+            </a:r>
+          </a:p>
+          <a:p>
+            <a:pPr>
+              <a:spcAft>
+                <a:spcPts val="800"/>
+              </a:spcAft>
+            </a:pPr>
+            <a:r>
+              <a:rPr sz="1900" b="0">
+                <a:solidFill>
+                  <a:srgbClr val="1F2937"/>
+                </a:solidFill>
+                <a:latin typeface="Arial"/>
+              </a:rPr>
+              <a:t>这也是为什么 compact 后模型还能接着做事，而不是只能泛泛续写</a:t>
             </a:r>
           </a:p>
         </p:txBody>
@@ -4102,7 +4066,7 @@
                 </a:solidFill>
                 <a:latin typeface="Arial"/>
               </a:rPr>
-              <a:t>compact 的价值不是“做摘要”</a:t>
+              <a:t>skills 与 attachments 如何进入 context</a:t>
             </a:r>
           </a:p>
         </p:txBody>
@@ -4158,42 +4122,8 @@
         </p:nvSpPr>
         <p:spPr>
           <a:xfrm>
-            <a:off x="731520" y="1600200"/>
-            <a:ext cx="4389120" cy="457200"/>
-          </a:xfrm>
-          <a:prstGeom prst="rect">
-            <a:avLst/>
-          </a:prstGeom>
-          <a:noFill/>
-        </p:spPr>
-        <p:txBody>
-          <a:bodyPr wrap="none">
-            <a:spAutoFit/>
-          </a:bodyPr>
-          <a:lstStyle/>
-          <a:p>
-            <a:r>
-              <a:rPr sz="1800" b="1">
-                <a:solidFill>
-                  <a:srgbClr val="205295"/>
-                </a:solidFill>
-                <a:latin typeface="Arial"/>
-              </a:rPr>
-              <a:t>触发层次</a:t>
-            </a:r>
-          </a:p>
-        </p:txBody>
-      </p:sp>
-      <p:sp>
-        <p:nvSpPr>
-          <p:cNvPr id="5" name="TextBox 4"/>
-          <p:cNvSpPr txBox="1"/>
-          <p:nvPr/>
-        </p:nvSpPr>
-        <p:spPr>
-          <a:xfrm>
-            <a:off x="731520" y="2011680"/>
-            <a:ext cx="4389120" cy="3200400"/>
+            <a:off x="777240" y="1508760"/>
+            <a:ext cx="10241280" cy="4389120"/>
           </a:xfrm>
           <a:prstGeom prst="rect">
             <a:avLst/>
@@ -4212,13 +4142,13 @@
               </a:spcAft>
             </a:pPr>
             <a:r>
-              <a:rPr sz="1700" b="0">
+              <a:rPr sz="1900" b="0">
                 <a:solidFill>
                   <a:srgbClr val="1F2937"/>
                 </a:solidFill>
                 <a:latin typeface="Arial"/>
               </a:rPr>
-              <a:t>microcompact</a:t>
+              <a:t>skill 被扫描到时只是 capability 可见，真正调用时正文才进入 context</a:t>
             </a:r>
           </a:p>
           <a:p>
@@ -4228,13 +4158,13 @@
               </a:spcAft>
             </a:pPr>
             <a:r>
-              <a:rPr sz="1700" b="0">
+              <a:rPr sz="1900" b="0">
                 <a:solidFill>
                   <a:srgbClr val="1F2937"/>
                 </a:solidFill>
                 <a:latin typeface="Arial"/>
               </a:rPr>
-              <a:t>snip</a:t>
+              <a:t>attachments.ts 会按 turn 注入 memories、dynamic skills、plan_mode、mailbox、deferred delta 等信息</a:t>
             </a:r>
           </a:p>
           <a:p>
@@ -4244,13 +4174,13 @@
               </a:spcAft>
             </a:pPr>
             <a:r>
-              <a:rPr sz="1700" b="0">
+              <a:rPr sz="1900" b="0">
                 <a:solidFill>
                   <a:srgbClr val="1F2937"/>
                 </a:solidFill>
                 <a:latin typeface="Arial"/>
               </a:rPr>
-              <a:t>context collapse</a:t>
+              <a:t>很多运行时信息不是常驻消息，而是按 turn 临时重建的工作面</a:t>
             </a:r>
           </a:p>
           <a:p>
@@ -4260,184 +4190,13 @@
               </a:spcAft>
             </a:pPr>
             <a:r>
-              <a:rPr sz="1700" b="0">
+              <a:rPr sz="1900" b="0">
                 <a:solidFill>
                   <a:srgbClr val="1F2937"/>
                 </a:solidFill>
                 <a:latin typeface="Arial"/>
               </a:rPr>
-              <a:t>autocompact</a:t>
-            </a:r>
-          </a:p>
-          <a:p>
-            <a:pPr>
-              <a:spcAft>
-                <a:spcPts val="800"/>
-              </a:spcAft>
-            </a:pPr>
-            <a:r>
-              <a:rPr sz="1700" b="0">
-                <a:solidFill>
-                  <a:srgbClr val="1F2937"/>
-                </a:solidFill>
-                <a:latin typeface="Arial"/>
-              </a:rPr>
-              <a:t>reactive compact</a:t>
-            </a:r>
-          </a:p>
-        </p:txBody>
-      </p:sp>
-      <p:sp>
-        <p:nvSpPr>
-          <p:cNvPr id="6" name="TextBox 5"/>
-          <p:cNvSpPr txBox="1"/>
-          <p:nvPr/>
-        </p:nvSpPr>
-        <p:spPr>
-          <a:xfrm>
-            <a:off x="6217920" y="1600200"/>
-            <a:ext cx="4389120" cy="457200"/>
-          </a:xfrm>
-          <a:prstGeom prst="rect">
-            <a:avLst/>
-          </a:prstGeom>
-          <a:noFill/>
-        </p:spPr>
-        <p:txBody>
-          <a:bodyPr wrap="none">
-            <a:spAutoFit/>
-          </a:bodyPr>
-          <a:lstStyle/>
-          <a:p>
-            <a:r>
-              <a:rPr sz="1800" b="1">
-                <a:solidFill>
-                  <a:srgbClr val="205295"/>
-                </a:solidFill>
-                <a:latin typeface="Arial"/>
-              </a:rPr>
-              <a:t>compact 后保留什么</a:t>
-            </a:r>
-          </a:p>
-        </p:txBody>
-      </p:sp>
-      <p:sp>
-        <p:nvSpPr>
-          <p:cNvPr id="7" name="TextBox 6"/>
-          <p:cNvSpPr txBox="1"/>
-          <p:nvPr/>
-        </p:nvSpPr>
-        <p:spPr>
-          <a:xfrm>
-            <a:off x="6217920" y="2011680"/>
-            <a:ext cx="4389120" cy="3200400"/>
-          </a:xfrm>
-          <a:prstGeom prst="rect">
-            <a:avLst/>
-          </a:prstGeom>
-          <a:noFill/>
-        </p:spPr>
-        <p:txBody>
-          <a:bodyPr wrap="square" lIns="76200" rIns="76200" tIns="50800" bIns="50800">
-            <a:spAutoFit/>
-          </a:bodyPr>
-          <a:lstStyle/>
-          <a:p>
-            <a:pPr>
-              <a:spcAft>
-                <a:spcPts val="800"/>
-              </a:spcAft>
-            </a:pPr>
-            <a:r>
-              <a:rPr sz="1700" b="0">
-                <a:solidFill>
-                  <a:srgbClr val="1F2937"/>
-                </a:solidFill>
-                <a:latin typeface="Arial"/>
-              </a:rPr>
-              <a:t>boundary + summary</a:t>
-            </a:r>
-          </a:p>
-          <a:p>
-            <a:pPr>
-              <a:spcAft>
-                <a:spcPts val="800"/>
-              </a:spcAft>
-            </a:pPr>
-            <a:r>
-              <a:rPr sz="1700" b="0">
-                <a:solidFill>
-                  <a:srgbClr val="1F2937"/>
-                </a:solidFill>
-                <a:latin typeface="Arial"/>
-              </a:rPr>
-              <a:t>messagesToKeep</a:t>
-            </a:r>
-          </a:p>
-          <a:p>
-            <a:pPr>
-              <a:spcAft>
-                <a:spcPts val="800"/>
-              </a:spcAft>
-            </a:pPr>
-            <a:r>
-              <a:rPr sz="1700" b="0">
-                <a:solidFill>
-                  <a:srgbClr val="1F2937"/>
-                </a:solidFill>
-                <a:latin typeface="Arial"/>
-              </a:rPr>
-              <a:t>文件恢复 attachment</a:t>
-            </a:r>
-          </a:p>
-          <a:p>
-            <a:pPr>
-              <a:spcAft>
-                <a:spcPts val="800"/>
-              </a:spcAft>
-            </a:pPr>
-            <a:r>
-              <a:rPr sz="1700" b="0">
-                <a:solidFill>
-                  <a:srgbClr val="1F2937"/>
-                </a:solidFill>
-                <a:latin typeface="Arial"/>
-              </a:rPr>
-              <a:t>plan_mode / invoked_skills / deferred delta</a:t>
-            </a:r>
-          </a:p>
-        </p:txBody>
-      </p:sp>
-      <p:sp>
-        <p:nvSpPr>
-          <p:cNvPr id="8" name="TextBox 7"/>
-          <p:cNvSpPr txBox="1"/>
-          <p:nvPr/>
-        </p:nvSpPr>
-        <p:spPr>
-          <a:xfrm>
-            <a:off x="841248" y="5532120"/>
-            <a:ext cx="10058400" cy="502920"/>
-          </a:xfrm>
-          <a:prstGeom prst="rect">
-            <a:avLst/>
-          </a:prstGeom>
-          <a:noFill/>
-        </p:spPr>
-        <p:txBody>
-          <a:bodyPr wrap="square" lIns="76200" rIns="76200" tIns="50800" bIns="50800">
-            <a:spAutoFit/>
-          </a:bodyPr>
-          <a:lstStyle/>
-          <a:p>
-            <a:r>
-              <a:rPr sz="1400" b="0">
-                <a:solidFill>
-                  <a:srgbClr val="475569"/>
-                </a:solidFill>
-                <a:latin typeface="Arial"/>
-              </a:rPr>
-              <a:t>结论：compact 更像“重建可继续工作的最小 context”，不是只留一段总结。</a:t>
+              <a:t>这也是 attachments.ts 更像 context router，而不是附件工具箱的原因</a:t>
             </a:r>
           </a:p>
         </p:txBody>
@@ -4497,7 +4256,7 @@
                 </a:solidFill>
                 <a:latin typeface="Arial"/>
               </a:rPr>
-              <a:t>attachments.ts 是 context router</a:t>
+              <a:t>真正的 autonomy boundary 在 tool pipeline</a:t>
             </a:r>
           </a:p>
         </p:txBody>
@@ -4547,14 +4306,513 @@
       </p:sp>
       <p:sp>
         <p:nvSpPr>
-          <p:cNvPr id="4" name="TextBox 3"/>
+          <p:cNvPr id="4" name="Rounded Rectangle 3"/>
+          <p:cNvSpPr/>
+          <p:nvPr/>
+        </p:nvSpPr>
+        <p:spPr>
+          <a:xfrm>
+            <a:off x="502920" y="2240280"/>
+            <a:ext cx="1280160" cy="713232"/>
+          </a:xfrm>
+          <a:prstGeom prst="roundRect">
+            <a:avLst/>
+          </a:prstGeom>
+          <a:solidFill>
+            <a:srgbClr val="FFFFFF"/>
+          </a:solidFill>
+          <a:ln>
+            <a:solidFill>
+              <a:srgbClr val="205295"/>
+            </a:solidFill>
+          </a:ln>
+        </p:spPr>
+        <p:style>
+          <a:lnRef idx="1">
+            <a:schemeClr val="accent1"/>
+          </a:lnRef>
+          <a:fillRef idx="3">
+            <a:schemeClr val="accent1"/>
+          </a:fillRef>
+          <a:effectRef idx="2">
+            <a:schemeClr val="accent1"/>
+          </a:effectRef>
+          <a:fontRef idx="minor">
+            <a:schemeClr val="lt1"/>
+          </a:fontRef>
+        </p:style>
+        <p:txBody>
+          <a:bodyPr rtlCol="0" anchor="ctr" wrap="square" lIns="76200" rIns="76200" tIns="50800" bIns="50800"/>
+          <a:lstStyle/>
+          <a:p>
+            <a:pPr algn="ctr"/>
+            <a:r>
+              <a:rPr sz="1600" b="1">
+                <a:solidFill>
+                  <a:srgbClr val="0B1F44"/>
+                </a:solidFill>
+                <a:latin typeface="Arial"/>
+              </a:rPr>
+              <a:t>schema</a:t>
+            </a:r>
+          </a:p>
+        </p:txBody>
+      </p:sp>
+      <p:sp>
+        <p:nvSpPr>
+          <p:cNvPr id="5" name="Rounded Rectangle 4"/>
+          <p:cNvSpPr/>
+          <p:nvPr/>
+        </p:nvSpPr>
+        <p:spPr>
+          <a:xfrm>
+            <a:off x="2075688" y="2240280"/>
+            <a:ext cx="1280160" cy="713232"/>
+          </a:xfrm>
+          <a:prstGeom prst="roundRect">
+            <a:avLst/>
+          </a:prstGeom>
+          <a:solidFill>
+            <a:srgbClr val="FFFFFF"/>
+          </a:solidFill>
+          <a:ln>
+            <a:solidFill>
+              <a:srgbClr val="205295"/>
+            </a:solidFill>
+          </a:ln>
+        </p:spPr>
+        <p:style>
+          <a:lnRef idx="1">
+            <a:schemeClr val="accent1"/>
+          </a:lnRef>
+          <a:fillRef idx="3">
+            <a:schemeClr val="accent1"/>
+          </a:fillRef>
+          <a:effectRef idx="2">
+            <a:schemeClr val="accent1"/>
+          </a:effectRef>
+          <a:fontRef idx="minor">
+            <a:schemeClr val="lt1"/>
+          </a:fontRef>
+        </p:style>
+        <p:txBody>
+          <a:bodyPr rtlCol="0" anchor="ctr" wrap="square" lIns="76200" rIns="76200" tIns="50800" bIns="50800"/>
+          <a:lstStyle/>
+          <a:p>
+            <a:pPr algn="ctr"/>
+            <a:r>
+              <a:rPr sz="1600" b="1">
+                <a:solidFill>
+                  <a:srgbClr val="0B1F44"/>
+                </a:solidFill>
+                <a:latin typeface="Arial"/>
+              </a:rPr>
+              <a:t>hooks</a:t>
+            </a:r>
+          </a:p>
+        </p:txBody>
+      </p:sp>
+      <p:sp>
+        <p:nvSpPr>
+          <p:cNvPr id="6" name="Rounded Rectangle 5"/>
+          <p:cNvSpPr/>
+          <p:nvPr/>
+        </p:nvSpPr>
+        <p:spPr>
+          <a:xfrm>
+            <a:off x="3648456" y="2240280"/>
+            <a:ext cx="1463040" cy="713232"/>
+          </a:xfrm>
+          <a:prstGeom prst="roundRect">
+            <a:avLst/>
+          </a:prstGeom>
+          <a:solidFill>
+            <a:srgbClr val="FFFFFF"/>
+          </a:solidFill>
+          <a:ln>
+            <a:solidFill>
+              <a:srgbClr val="205295"/>
+            </a:solidFill>
+          </a:ln>
+        </p:spPr>
+        <p:style>
+          <a:lnRef idx="1">
+            <a:schemeClr val="accent1"/>
+          </a:lnRef>
+          <a:fillRef idx="3">
+            <a:schemeClr val="accent1"/>
+          </a:fillRef>
+          <a:effectRef idx="2">
+            <a:schemeClr val="accent1"/>
+          </a:effectRef>
+          <a:fontRef idx="minor">
+            <a:schemeClr val="lt1"/>
+          </a:fontRef>
+        </p:style>
+        <p:txBody>
+          <a:bodyPr rtlCol="0" anchor="ctr" wrap="square" lIns="76200" rIns="76200" tIns="50800" bIns="50800"/>
+          <a:lstStyle/>
+          <a:p>
+            <a:pPr algn="ctr"/>
+            <a:r>
+              <a:rPr sz="1600" b="1">
+                <a:solidFill>
+                  <a:srgbClr val="0B1F44"/>
+                </a:solidFill>
+                <a:latin typeface="Arial"/>
+              </a:rPr>
+              <a:t>classifier</a:t>
+            </a:r>
+          </a:p>
+        </p:txBody>
+      </p:sp>
+      <p:sp>
+        <p:nvSpPr>
+          <p:cNvPr id="7" name="Rounded Rectangle 6"/>
+          <p:cNvSpPr/>
+          <p:nvPr/>
+        </p:nvSpPr>
+        <p:spPr>
+          <a:xfrm>
+            <a:off x="5404104" y="2240280"/>
+            <a:ext cx="1463040" cy="713232"/>
+          </a:xfrm>
+          <a:prstGeom prst="roundRect">
+            <a:avLst/>
+          </a:prstGeom>
+          <a:solidFill>
+            <a:srgbClr val="FFFFFF"/>
+          </a:solidFill>
+          <a:ln>
+            <a:solidFill>
+              <a:srgbClr val="205295"/>
+            </a:solidFill>
+          </a:ln>
+        </p:spPr>
+        <p:style>
+          <a:lnRef idx="1">
+            <a:schemeClr val="accent1"/>
+          </a:lnRef>
+          <a:fillRef idx="3">
+            <a:schemeClr val="accent1"/>
+          </a:fillRef>
+          <a:effectRef idx="2">
+            <a:schemeClr val="accent1"/>
+          </a:effectRef>
+          <a:fontRef idx="minor">
+            <a:schemeClr val="lt1"/>
+          </a:fontRef>
+        </p:style>
+        <p:txBody>
+          <a:bodyPr rtlCol="0" anchor="ctr" wrap="square" lIns="76200" rIns="76200" tIns="50800" bIns="50800"/>
+          <a:lstStyle/>
+          <a:p>
+            <a:pPr algn="ctr"/>
+            <a:r>
+              <a:rPr sz="1600" b="1">
+                <a:solidFill>
+                  <a:srgbClr val="0B1F44"/>
+                </a:solidFill>
+                <a:latin typeface="Arial"/>
+              </a:rPr>
+              <a:t>permission</a:t>
+            </a:r>
+          </a:p>
+        </p:txBody>
+      </p:sp>
+      <p:sp>
+        <p:nvSpPr>
+          <p:cNvPr id="8" name="Rounded Rectangle 7"/>
+          <p:cNvSpPr/>
+          <p:nvPr/>
+        </p:nvSpPr>
+        <p:spPr>
+          <a:xfrm>
+            <a:off x="7159752" y="2240280"/>
+            <a:ext cx="1371600" cy="713232"/>
+          </a:xfrm>
+          <a:prstGeom prst="roundRect">
+            <a:avLst/>
+          </a:prstGeom>
+          <a:solidFill>
+            <a:srgbClr val="DDEAFB"/>
+          </a:solidFill>
+          <a:ln>
+            <a:solidFill>
+              <a:srgbClr val="205295"/>
+            </a:solidFill>
+          </a:ln>
+        </p:spPr>
+        <p:style>
+          <a:lnRef idx="1">
+            <a:schemeClr val="accent1"/>
+          </a:lnRef>
+          <a:fillRef idx="3">
+            <a:schemeClr val="accent1"/>
+          </a:fillRef>
+          <a:effectRef idx="2">
+            <a:schemeClr val="accent1"/>
+          </a:effectRef>
+          <a:fontRef idx="minor">
+            <a:schemeClr val="lt1"/>
+          </a:fontRef>
+        </p:style>
+        <p:txBody>
+          <a:bodyPr rtlCol="0" anchor="ctr" wrap="square" lIns="76200" rIns="76200" tIns="50800" bIns="50800"/>
+          <a:lstStyle/>
+          <a:p>
+            <a:pPr algn="ctr"/>
+            <a:r>
+              <a:rPr sz="1600" b="1">
+                <a:solidFill>
+                  <a:srgbClr val="0B1F44"/>
+                </a:solidFill>
+                <a:latin typeface="Arial"/>
+              </a:rPr>
+              <a:t>tool.call</a:t>
+            </a:r>
+          </a:p>
+        </p:txBody>
+      </p:sp>
+      <p:sp>
+        <p:nvSpPr>
+          <p:cNvPr id="9" name="Rounded Rectangle 8"/>
+          <p:cNvSpPr/>
+          <p:nvPr/>
+        </p:nvSpPr>
+        <p:spPr>
+          <a:xfrm>
+            <a:off x="8823960" y="2240280"/>
+            <a:ext cx="1463040" cy="713232"/>
+          </a:xfrm>
+          <a:prstGeom prst="roundRect">
+            <a:avLst/>
+          </a:prstGeom>
+          <a:solidFill>
+            <a:srgbClr val="FFFFFF"/>
+          </a:solidFill>
+          <a:ln>
+            <a:solidFill>
+              <a:srgbClr val="205295"/>
+            </a:solidFill>
+          </a:ln>
+        </p:spPr>
+        <p:style>
+          <a:lnRef idx="1">
+            <a:schemeClr val="accent1"/>
+          </a:lnRef>
+          <a:fillRef idx="3">
+            <a:schemeClr val="accent1"/>
+          </a:fillRef>
+          <a:effectRef idx="2">
+            <a:schemeClr val="accent1"/>
+          </a:effectRef>
+          <a:fontRef idx="minor">
+            <a:schemeClr val="lt1"/>
+          </a:fontRef>
+        </p:style>
+        <p:txBody>
+          <a:bodyPr rtlCol="0" anchor="ctr" wrap="square" lIns="76200" rIns="76200" tIns="50800" bIns="50800"/>
+          <a:lstStyle/>
+          <a:p>
+            <a:pPr algn="ctr"/>
+            <a:r>
+              <a:rPr sz="1600" b="1">
+                <a:solidFill>
+                  <a:srgbClr val="0B1F44"/>
+                </a:solidFill>
+                <a:latin typeface="Arial"/>
+              </a:rPr>
+              <a:t>post-hooks</a:t>
+            </a:r>
+          </a:p>
+        </p:txBody>
+      </p:sp>
+      <p:cxnSp>
+        <p:nvCxnSpPr>
+          <p:cNvPr id="10" name="Connector 9"/>
+          <p:cNvCxnSpPr/>
+          <p:nvPr/>
+        </p:nvCxnSpPr>
+        <p:spPr>
+          <a:xfrm>
+            <a:off x="1783080" y="2596896"/>
+            <a:ext cx="292608" cy="0"/>
+          </a:xfrm>
+          <a:prstGeom prst="line">
+            <a:avLst/>
+          </a:prstGeom>
+          <a:ln w="25400">
+            <a:solidFill>
+              <a:srgbClr val="205295"/>
+            </a:solidFill>
+          </a:ln>
+        </p:spPr>
+        <p:style>
+          <a:lnRef idx="2">
+            <a:schemeClr val="accent1"/>
+          </a:lnRef>
+          <a:fillRef idx="0">
+            <a:schemeClr val="accent1"/>
+          </a:fillRef>
+          <a:effectRef idx="1">
+            <a:schemeClr val="accent1"/>
+          </a:effectRef>
+          <a:fontRef idx="minor">
+            <a:schemeClr val="tx1"/>
+          </a:fontRef>
+        </p:style>
+      </p:cxnSp>
+      <p:cxnSp>
+        <p:nvCxnSpPr>
+          <p:cNvPr id="11" name="Connector 10"/>
+          <p:cNvCxnSpPr/>
+          <p:nvPr/>
+        </p:nvCxnSpPr>
+        <p:spPr>
+          <a:xfrm>
+            <a:off x="3355848" y="2596896"/>
+            <a:ext cx="292608" cy="0"/>
+          </a:xfrm>
+          <a:prstGeom prst="line">
+            <a:avLst/>
+          </a:prstGeom>
+          <a:ln w="25400">
+            <a:solidFill>
+              <a:srgbClr val="205295"/>
+            </a:solidFill>
+          </a:ln>
+        </p:spPr>
+        <p:style>
+          <a:lnRef idx="2">
+            <a:schemeClr val="accent1"/>
+          </a:lnRef>
+          <a:fillRef idx="0">
+            <a:schemeClr val="accent1"/>
+          </a:fillRef>
+          <a:effectRef idx="1">
+            <a:schemeClr val="accent1"/>
+          </a:effectRef>
+          <a:fontRef idx="minor">
+            <a:schemeClr val="tx1"/>
+          </a:fontRef>
+        </p:style>
+      </p:cxnSp>
+      <p:cxnSp>
+        <p:nvCxnSpPr>
+          <p:cNvPr id="12" name="Connector 11"/>
+          <p:cNvCxnSpPr/>
+          <p:nvPr/>
+        </p:nvCxnSpPr>
+        <p:spPr>
+          <a:xfrm>
+            <a:off x="5111496" y="2596896"/>
+            <a:ext cx="292608" cy="0"/>
+          </a:xfrm>
+          <a:prstGeom prst="line">
+            <a:avLst/>
+          </a:prstGeom>
+          <a:ln w="25400">
+            <a:solidFill>
+              <a:srgbClr val="205295"/>
+            </a:solidFill>
+          </a:ln>
+        </p:spPr>
+        <p:style>
+          <a:lnRef idx="2">
+            <a:schemeClr val="accent1"/>
+          </a:lnRef>
+          <a:fillRef idx="0">
+            <a:schemeClr val="accent1"/>
+          </a:fillRef>
+          <a:effectRef idx="1">
+            <a:schemeClr val="accent1"/>
+          </a:effectRef>
+          <a:fontRef idx="minor">
+            <a:schemeClr val="tx1"/>
+          </a:fontRef>
+        </p:style>
+      </p:cxnSp>
+      <p:cxnSp>
+        <p:nvCxnSpPr>
+          <p:cNvPr id="13" name="Connector 12"/>
+          <p:cNvCxnSpPr/>
+          <p:nvPr/>
+        </p:nvCxnSpPr>
+        <p:spPr>
+          <a:xfrm>
+            <a:off x="6867144" y="2596896"/>
+            <a:ext cx="292608" cy="0"/>
+          </a:xfrm>
+          <a:prstGeom prst="line">
+            <a:avLst/>
+          </a:prstGeom>
+          <a:ln w="25400">
+            <a:solidFill>
+              <a:srgbClr val="205295"/>
+            </a:solidFill>
+          </a:ln>
+        </p:spPr>
+        <p:style>
+          <a:lnRef idx="2">
+            <a:schemeClr val="accent1"/>
+          </a:lnRef>
+          <a:fillRef idx="0">
+            <a:schemeClr val="accent1"/>
+          </a:fillRef>
+          <a:effectRef idx="1">
+            <a:schemeClr val="accent1"/>
+          </a:effectRef>
+          <a:fontRef idx="minor">
+            <a:schemeClr val="tx1"/>
+          </a:fontRef>
+        </p:style>
+      </p:cxnSp>
+      <p:cxnSp>
+        <p:nvCxnSpPr>
+          <p:cNvPr id="14" name="Connector 13"/>
+          <p:cNvCxnSpPr/>
+          <p:nvPr/>
+        </p:nvCxnSpPr>
+        <p:spPr>
+          <a:xfrm>
+            <a:off x="8531352" y="2596896"/>
+            <a:ext cx="292608" cy="0"/>
+          </a:xfrm>
+          <a:prstGeom prst="line">
+            <a:avLst/>
+          </a:prstGeom>
+          <a:ln w="25400">
+            <a:solidFill>
+              <a:srgbClr val="205295"/>
+            </a:solidFill>
+          </a:ln>
+        </p:spPr>
+        <p:style>
+          <a:lnRef idx="2">
+            <a:schemeClr val="accent1"/>
+          </a:lnRef>
+          <a:fillRef idx="0">
+            <a:schemeClr val="accent1"/>
+          </a:fillRef>
+          <a:effectRef idx="1">
+            <a:schemeClr val="accent1"/>
+          </a:effectRef>
+          <a:fontRef idx="minor">
+            <a:schemeClr val="tx1"/>
+          </a:fontRef>
+        </p:style>
+      </p:cxnSp>
+      <p:sp>
+        <p:nvSpPr>
+          <p:cNvPr id="15" name="TextBox 14"/>
           <p:cNvSpPr txBox="1"/>
           <p:nvPr/>
         </p:nvSpPr>
         <p:spPr>
           <a:xfrm>
-            <a:off x="777240" y="1645920"/>
-            <a:ext cx="10241280" cy="3200400"/>
+            <a:off x="822960" y="3794760"/>
+            <a:ext cx="10058400" cy="1554480"/>
           </a:xfrm>
           <a:prstGeom prst="rect">
             <a:avLst/>
@@ -4573,13 +4831,13 @@
               </a:spcAft>
             </a:pPr>
             <a:r>
-              <a:rPr sz="1900" b="0">
+              <a:rPr sz="1600" b="0">
                 <a:solidFill>
                   <a:srgbClr val="1F2937"/>
                 </a:solidFill>
                 <a:latin typeface="Arial"/>
               </a:rPr>
-              <a:t>每轮真正送给模型的 context，不只是 messages + system prompt</a:t>
+              <a:t>tool call 不是 findToolByName -&gt; tool.call 这么短</a:t>
             </a:r>
           </a:p>
           <a:p>
@@ -4589,13 +4847,13 @@
               </a:spcAft>
             </a:pPr>
             <a:r>
-              <a:rPr sz="1900" b="0">
+              <a:rPr sz="1600" b="0">
                 <a:solidFill>
                   <a:srgbClr val="1F2937"/>
                 </a:solidFill>
                 <a:latin typeface="Arial"/>
               </a:rPr>
-              <a:t>attachments.ts 会按 turn 注入 memories、dynamic skills、plan_mode、deferred_tools_delta、teammate_mailbox 等</a:t>
+              <a:t>permissions、hooks、classifier 在这里不是附属模块，而是同一条执行链</a:t>
             </a:r>
           </a:p>
           <a:p>
@@ -4605,29 +4863,13 @@
               </a:spcAft>
             </a:pPr>
             <a:r>
-              <a:rPr sz="1900" b="0">
+              <a:rPr sz="1600" b="0">
                 <a:solidFill>
                   <a:srgbClr val="1F2937"/>
                 </a:solidFill>
                 <a:latin typeface="Arial"/>
               </a:rPr>
-              <a:t>很多运行时信息不是常驻消息，而是按 turn 临时重建工作面</a:t>
-            </a:r>
-          </a:p>
-          <a:p>
-            <a:pPr>
-              <a:spcAft>
-                <a:spcPts val="800"/>
-              </a:spcAft>
-            </a:pPr>
-            <a:r>
-              <a:rPr sz="1900" b="0">
-                <a:solidFill>
-                  <a:srgbClr val="1F2937"/>
-                </a:solidFill>
-                <a:latin typeface="Arial"/>
-              </a:rPr>
-              <a:t>这就是为什么它更像“第二调度层”，而不是附件工具箱</a:t>
+              <a:t>这决定了 Claude Code 的 autonomy boundary 不在 UI，而在 runtime pipeline 本身</a:t>
             </a:r>
           </a:p>
         </p:txBody>
@@ -4687,7 +4929,7 @@
                 </a:solidFill>
                 <a:latin typeface="Arial"/>
               </a:rPr>
-              <a:t>真正的 autonomy boundary 在 tool pipeline</a:t>
+              <a:t>task runtime 与 mailbox</a:t>
             </a:r>
           </a:p>
         </p:txBody>
@@ -4743,8 +4985,8 @@
         </p:nvSpPr>
         <p:spPr>
           <a:xfrm>
-            <a:off x="502920" y="2240280"/>
-            <a:ext cx="1280160" cy="713232"/>
+            <a:off x="822960" y="2011680"/>
+            <a:ext cx="1645920" cy="731520"/>
           </a:xfrm>
           <a:prstGeom prst="roundRect">
             <a:avLst/>
@@ -4784,7 +5026,7 @@
                 </a:solidFill>
                 <a:latin typeface="Arial"/>
               </a:rPr>
-              <a:t>schema</a:t>
+              <a:t>User / Main</a:t>
             </a:r>
           </a:p>
         </p:txBody>
@@ -4797,8 +5039,8 @@
         </p:nvSpPr>
         <p:spPr>
           <a:xfrm>
-            <a:off x="2075688" y="2240280"/>
-            <a:ext cx="1280160" cy="713232"/>
+            <a:off x="3017520" y="2011680"/>
+            <a:ext cx="1828800" cy="731520"/>
           </a:xfrm>
           <a:prstGeom prst="roundRect">
             <a:avLst/>
@@ -4838,7 +5080,7 @@
                 </a:solidFill>
                 <a:latin typeface="Arial"/>
               </a:rPr>
-              <a:t>hooks</a:t>
+              <a:t>task runtime</a:t>
             </a:r>
           </a:p>
         </p:txBody>
@@ -4851,8 +5093,8 @@
         </p:nvSpPr>
         <p:spPr>
           <a:xfrm>
-            <a:off x="3648456" y="2240280"/>
-            <a:ext cx="1463040" cy="713232"/>
+            <a:off x="5394960" y="2011680"/>
+            <a:ext cx="1828800" cy="731520"/>
           </a:xfrm>
           <a:prstGeom prst="roundRect">
             <a:avLst/>
@@ -4892,7 +5134,7 @@
                 </a:solidFill>
                 <a:latin typeface="Arial"/>
               </a:rPr>
-              <a:t>classifier</a:t>
+              <a:t>subagent</a:t>
             </a:r>
           </a:p>
         </p:txBody>
@@ -4905,8 +5147,8 @@
         </p:nvSpPr>
         <p:spPr>
           <a:xfrm>
-            <a:off x="5404104" y="2240280"/>
-            <a:ext cx="1463040" cy="713232"/>
+            <a:off x="7772400" y="2011680"/>
+            <a:ext cx="1920240" cy="731520"/>
           </a:xfrm>
           <a:prstGeom prst="roundRect">
             <a:avLst/>
@@ -4946,7 +5188,7 @@
                 </a:solidFill>
                 <a:latin typeface="Arial"/>
               </a:rPr>
-              <a:t>permission</a:t>
+              <a:t>mailbox / queue</a:t>
             </a:r>
           </a:p>
         </p:txBody>
@@ -4959,8 +5201,8 @@
         </p:nvSpPr>
         <p:spPr>
           <a:xfrm>
-            <a:off x="7159752" y="2240280"/>
-            <a:ext cx="1371600" cy="713232"/>
+            <a:off x="5303520" y="4023360"/>
+            <a:ext cx="2103120" cy="731520"/>
           </a:xfrm>
           <a:prstGeom prst="roundRect">
             <a:avLst/>
@@ -5000,65 +5242,46 @@
                 </a:solidFill>
                 <a:latin typeface="Arial"/>
               </a:rPr>
-              <a:t>tool.call</a:t>
-            </a:r>
-          </a:p>
-        </p:txBody>
-      </p:sp>
-      <p:sp>
-        <p:nvSpPr>
-          <p:cNvPr id="9" name="Rounded Rectangle 8"/>
-          <p:cNvSpPr/>
-          <p:nvPr/>
-        </p:nvSpPr>
-        <p:spPr>
-          <a:xfrm>
-            <a:off x="8823960" y="2240280"/>
-            <a:ext cx="1463040" cy="713232"/>
-          </a:xfrm>
-          <a:prstGeom prst="roundRect">
-            <a:avLst/>
-          </a:prstGeom>
-          <a:solidFill>
-            <a:srgbClr val="FFFFFF"/>
-          </a:solidFill>
-          <a:ln>
+              <a:t>task-notification</a:t>
+            </a:r>
+          </a:p>
+        </p:txBody>
+      </p:sp>
+      <p:cxnSp>
+        <p:nvCxnSpPr>
+          <p:cNvPr id="9" name="Connector 8"/>
+          <p:cNvCxnSpPr/>
+          <p:nvPr/>
+        </p:nvCxnSpPr>
+        <p:spPr>
+          <a:xfrm>
+            <a:off x="2468880" y="2377440"/>
+            <a:ext cx="548640" cy="0"/>
+          </a:xfrm>
+          <a:prstGeom prst="line">
+            <a:avLst/>
+          </a:prstGeom>
+          <a:ln w="25400">
             <a:solidFill>
               <a:srgbClr val="205295"/>
             </a:solidFill>
           </a:ln>
         </p:spPr>
         <p:style>
-          <a:lnRef idx="1">
+          <a:lnRef idx="2">
             <a:schemeClr val="accent1"/>
           </a:lnRef>
-          <a:fillRef idx="3">
+          <a:fillRef idx="0">
             <a:schemeClr val="accent1"/>
           </a:fillRef>
-          <a:effectRef idx="2">
+          <a:effectRef idx="1">
             <a:schemeClr val="accent1"/>
           </a:effectRef>
           <a:fontRef idx="minor">
-            <a:schemeClr val="lt1"/>
+            <a:schemeClr val="tx1"/>
           </a:fontRef>
         </p:style>
-        <p:txBody>
-          <a:bodyPr rtlCol="0" anchor="ctr" wrap="square" lIns="76200" rIns="76200" tIns="50800" bIns="50800"/>
-          <a:lstStyle/>
-          <a:p>
-            <a:pPr algn="ctr"/>
-            <a:r>
-              <a:rPr sz="1600" b="1">
-                <a:solidFill>
-                  <a:srgbClr val="0B1F44"/>
-                </a:solidFill>
-                <a:latin typeface="Arial"/>
-              </a:rPr>
-              <a:t>post-hooks</a:t>
-            </a:r>
-          </a:p>
-        </p:txBody>
-      </p:sp>
+      </p:cxnSp>
       <p:cxnSp>
         <p:nvCxnSpPr>
           <p:cNvPr id="10" name="Connector 9"/>
@@ -5067,8 +5290,8 @@
         </p:nvCxnSpPr>
         <p:spPr>
           <a:xfrm>
-            <a:off x="1783080" y="2596896"/>
-            <a:ext cx="292608" cy="0"/>
+            <a:off x="4846320" y="2377440"/>
+            <a:ext cx="548640" cy="0"/>
           </a:xfrm>
           <a:prstGeom prst="line">
             <a:avLst/>
@@ -5102,8 +5325,8 @@
         </p:nvCxnSpPr>
         <p:spPr>
           <a:xfrm>
-            <a:off x="3355848" y="2596896"/>
-            <a:ext cx="292608" cy="0"/>
+            <a:off x="7223760" y="2377440"/>
+            <a:ext cx="548640" cy="0"/>
           </a:xfrm>
           <a:prstGeom prst="line">
             <a:avLst/>
@@ -5136,9 +5359,9 @@
           <p:nvPr/>
         </p:nvCxnSpPr>
         <p:spPr>
-          <a:xfrm>
-            <a:off x="5111496" y="2596896"/>
-            <a:ext cx="292608" cy="0"/>
+          <a:xfrm flipH="1">
+            <a:off x="6309360" y="2743200"/>
+            <a:ext cx="1463040" cy="1280160"/>
           </a:xfrm>
           <a:prstGeom prst="line">
             <a:avLst/>
@@ -5171,9 +5394,9 @@
           <p:nvPr/>
         </p:nvCxnSpPr>
         <p:spPr>
-          <a:xfrm>
-            <a:off x="6867144" y="2596896"/>
-            <a:ext cx="292608" cy="0"/>
+          <a:xfrm flipH="1" flipV="1">
+            <a:off x="1737360" y="2743200"/>
+            <a:ext cx="3566160" cy="1645920"/>
           </a:xfrm>
           <a:prstGeom prst="line">
             <a:avLst/>
@@ -5199,51 +5422,16 @@
           </a:fontRef>
         </p:style>
       </p:cxnSp>
-      <p:cxnSp>
-        <p:nvCxnSpPr>
-          <p:cNvPr id="14" name="Connector 13"/>
-          <p:cNvCxnSpPr/>
-          <p:nvPr/>
-        </p:nvCxnSpPr>
-        <p:spPr>
-          <a:xfrm>
-            <a:off x="8531352" y="2596896"/>
-            <a:ext cx="292608" cy="0"/>
-          </a:xfrm>
-          <a:prstGeom prst="line">
-            <a:avLst/>
-          </a:prstGeom>
-          <a:ln w="25400">
-            <a:solidFill>
-              <a:srgbClr val="205295"/>
-            </a:solidFill>
-          </a:ln>
-        </p:spPr>
-        <p:style>
-          <a:lnRef idx="2">
-            <a:schemeClr val="accent1"/>
-          </a:lnRef>
-          <a:fillRef idx="0">
-            <a:schemeClr val="accent1"/>
-          </a:fillRef>
-          <a:effectRef idx="1">
-            <a:schemeClr val="accent1"/>
-          </a:effectRef>
-          <a:fontRef idx="minor">
-            <a:schemeClr val="tx1"/>
-          </a:fontRef>
-        </p:style>
-      </p:cxnSp>
-      <p:sp>
-        <p:nvSpPr>
-          <p:cNvPr id="15" name="TextBox 14"/>
+      <p:sp>
+        <p:nvSpPr>
+          <p:cNvPr id="14" name="TextBox 13"/>
           <p:cNvSpPr txBox="1"/>
           <p:nvPr/>
         </p:nvSpPr>
         <p:spPr>
           <a:xfrm>
-            <a:off x="822960" y="3794760"/>
-            <a:ext cx="10058400" cy="1554480"/>
+            <a:off x="822960" y="4846320"/>
+            <a:ext cx="10149840" cy="1097280"/>
           </a:xfrm>
           <a:prstGeom prst="rect">
             <a:avLst/>
@@ -5268,7 +5456,7 @@
                 </a:solidFill>
                 <a:latin typeface="Arial"/>
               </a:rPr>
-              <a:t>tool call 不是 findToolByName -&gt; tool.call 这么短</a:t>
+              <a:t>task/framework.ts 负责注册、轮询、GC、notification</a:t>
             </a:r>
           </a:p>
           <a:p>
@@ -5284,7 +5472,7 @@
                 </a:solidFill>
                 <a:latin typeface="Arial"/>
               </a:rPr>
-              <a:t>permissions、hooks、classifier 在这里不是附属模块，而是同一条执行链</a:t>
+              <a:t>runAgent.ts 负责 subagent、sidechain transcript、metadata</a:t>
             </a:r>
           </a:p>
           <a:p>
@@ -5300,7 +5488,23 @@
                 </a:solidFill>
                 <a:latin typeface="Arial"/>
               </a:rPr>
-              <a:t>这决定了 Claude Code 的 autonomy boundary 不在 UI，而在 runtime pipeline 本身</a:t>
+              <a:t>mailbox / pendingMessages 的投递发生在 turn 边界</a:t>
+            </a:r>
+          </a:p>
+          <a:p>
+            <a:pPr>
+              <a:spcAft>
+                <a:spcPts val="800"/>
+              </a:spcAft>
+            </a:pPr>
+            <a:r>
+              <a:rPr sz="1600" b="0">
+                <a:solidFill>
+                  <a:srgbClr val="1F2937"/>
+                </a:solidFill>
+                <a:latin typeface="Arial"/>
+              </a:rPr>
+              <a:t>这牺牲了一点即时性，但换来了 turn 内状态一致性</a:t>
             </a:r>
           </a:p>
         </p:txBody>
@@ -5360,7 +5564,7 @@
                 </a:solidFill>
                 <a:latin typeface="Arial"/>
               </a:rPr>
-              <a:t>task runtime 与 mailbox</a:t>
+              <a:t>运行时状态载体</a:t>
             </a:r>
           </a:p>
         </p:txBody>
@@ -5410,459 +5614,48 @@
       </p:sp>
       <p:sp>
         <p:nvSpPr>
-          <p:cNvPr id="4" name="Rounded Rectangle 3"/>
-          <p:cNvSpPr/>
-          <p:nvPr/>
-        </p:nvSpPr>
-        <p:spPr>
-          <a:xfrm>
-            <a:off x="822960" y="2011680"/>
-            <a:ext cx="1645920" cy="731520"/>
-          </a:xfrm>
-          <a:prstGeom prst="roundRect">
-            <a:avLst/>
-          </a:prstGeom>
-          <a:solidFill>
-            <a:srgbClr val="FFFFFF"/>
-          </a:solidFill>
-          <a:ln>
-            <a:solidFill>
-              <a:srgbClr val="205295"/>
-            </a:solidFill>
-          </a:ln>
-        </p:spPr>
-        <p:style>
-          <a:lnRef idx="1">
-            <a:schemeClr val="accent1"/>
-          </a:lnRef>
-          <a:fillRef idx="3">
-            <a:schemeClr val="accent1"/>
-          </a:fillRef>
-          <a:effectRef idx="2">
-            <a:schemeClr val="accent1"/>
-          </a:effectRef>
-          <a:fontRef idx="minor">
-            <a:schemeClr val="lt1"/>
-          </a:fontRef>
-        </p:style>
-        <p:txBody>
-          <a:bodyPr rtlCol="0" anchor="ctr" wrap="square" lIns="76200" rIns="76200" tIns="50800" bIns="50800"/>
-          <a:lstStyle/>
-          <a:p>
-            <a:pPr algn="ctr"/>
-            <a:r>
-              <a:rPr sz="1600" b="1">
-                <a:solidFill>
-                  <a:srgbClr val="0B1F44"/>
-                </a:solidFill>
-                <a:latin typeface="Arial"/>
-              </a:rPr>
-              <a:t>User / Main</a:t>
-            </a:r>
-          </a:p>
-        </p:txBody>
-      </p:sp>
-      <p:sp>
-        <p:nvSpPr>
-          <p:cNvPr id="5" name="Rounded Rectangle 4"/>
-          <p:cNvSpPr/>
-          <p:nvPr/>
-        </p:nvSpPr>
-        <p:spPr>
-          <a:xfrm>
-            <a:off x="3017520" y="2011680"/>
-            <a:ext cx="1828800" cy="731520"/>
-          </a:xfrm>
-          <a:prstGeom prst="roundRect">
-            <a:avLst/>
-          </a:prstGeom>
-          <a:solidFill>
-            <a:srgbClr val="FFFFFF"/>
-          </a:solidFill>
-          <a:ln>
-            <a:solidFill>
-              <a:srgbClr val="205295"/>
-            </a:solidFill>
-          </a:ln>
-        </p:spPr>
-        <p:style>
-          <a:lnRef idx="1">
-            <a:schemeClr val="accent1"/>
-          </a:lnRef>
-          <a:fillRef idx="3">
-            <a:schemeClr val="accent1"/>
-          </a:fillRef>
-          <a:effectRef idx="2">
-            <a:schemeClr val="accent1"/>
-          </a:effectRef>
-          <a:fontRef idx="minor">
-            <a:schemeClr val="lt1"/>
-          </a:fontRef>
-        </p:style>
-        <p:txBody>
-          <a:bodyPr rtlCol="0" anchor="ctr" wrap="square" lIns="76200" rIns="76200" tIns="50800" bIns="50800"/>
-          <a:lstStyle/>
-          <a:p>
-            <a:pPr algn="ctr"/>
-            <a:r>
-              <a:rPr sz="1600" b="1">
-                <a:solidFill>
-                  <a:srgbClr val="0B1F44"/>
-                </a:solidFill>
-                <a:latin typeface="Arial"/>
-              </a:rPr>
-              <a:t>task runtime</a:t>
-            </a:r>
-          </a:p>
-        </p:txBody>
-      </p:sp>
-      <p:sp>
-        <p:nvSpPr>
-          <p:cNvPr id="6" name="Rounded Rectangle 5"/>
-          <p:cNvSpPr/>
-          <p:nvPr/>
-        </p:nvSpPr>
-        <p:spPr>
-          <a:xfrm>
-            <a:off x="5394960" y="2011680"/>
-            <a:ext cx="1828800" cy="731520"/>
-          </a:xfrm>
-          <a:prstGeom prst="roundRect">
-            <a:avLst/>
-          </a:prstGeom>
-          <a:solidFill>
-            <a:srgbClr val="FFFFFF"/>
-          </a:solidFill>
-          <a:ln>
-            <a:solidFill>
-              <a:srgbClr val="205295"/>
-            </a:solidFill>
-          </a:ln>
-        </p:spPr>
-        <p:style>
-          <a:lnRef idx="1">
-            <a:schemeClr val="accent1"/>
-          </a:lnRef>
-          <a:fillRef idx="3">
-            <a:schemeClr val="accent1"/>
-          </a:fillRef>
-          <a:effectRef idx="2">
-            <a:schemeClr val="accent1"/>
-          </a:effectRef>
-          <a:fontRef idx="minor">
-            <a:schemeClr val="lt1"/>
-          </a:fontRef>
-        </p:style>
-        <p:txBody>
-          <a:bodyPr rtlCol="0" anchor="ctr" wrap="square" lIns="76200" rIns="76200" tIns="50800" bIns="50800"/>
-          <a:lstStyle/>
-          <a:p>
-            <a:pPr algn="ctr"/>
-            <a:r>
-              <a:rPr sz="1600" b="1">
-                <a:solidFill>
-                  <a:srgbClr val="0B1F44"/>
-                </a:solidFill>
-                <a:latin typeface="Arial"/>
-              </a:rPr>
-              <a:t>subagent</a:t>
-            </a:r>
-          </a:p>
-        </p:txBody>
-      </p:sp>
-      <p:sp>
-        <p:nvSpPr>
-          <p:cNvPr id="7" name="Rounded Rectangle 6"/>
-          <p:cNvSpPr/>
-          <p:nvPr/>
-        </p:nvSpPr>
-        <p:spPr>
-          <a:xfrm>
-            <a:off x="7772400" y="2011680"/>
-            <a:ext cx="1920240" cy="731520"/>
-          </a:xfrm>
-          <a:prstGeom prst="roundRect">
-            <a:avLst/>
-          </a:prstGeom>
-          <a:solidFill>
-            <a:srgbClr val="FFFFFF"/>
-          </a:solidFill>
-          <a:ln>
-            <a:solidFill>
-              <a:srgbClr val="205295"/>
-            </a:solidFill>
-          </a:ln>
-        </p:spPr>
-        <p:style>
-          <a:lnRef idx="1">
-            <a:schemeClr val="accent1"/>
-          </a:lnRef>
-          <a:fillRef idx="3">
-            <a:schemeClr val="accent1"/>
-          </a:fillRef>
-          <a:effectRef idx="2">
-            <a:schemeClr val="accent1"/>
-          </a:effectRef>
-          <a:fontRef idx="minor">
-            <a:schemeClr val="lt1"/>
-          </a:fontRef>
-        </p:style>
-        <p:txBody>
-          <a:bodyPr rtlCol="0" anchor="ctr" wrap="square" lIns="76200" rIns="76200" tIns="50800" bIns="50800"/>
-          <a:lstStyle/>
-          <a:p>
-            <a:pPr algn="ctr"/>
-            <a:r>
-              <a:rPr sz="1600" b="1">
-                <a:solidFill>
-                  <a:srgbClr val="0B1F44"/>
-                </a:solidFill>
-                <a:latin typeface="Arial"/>
-              </a:rPr>
-              <a:t>mailbox / queue</a:t>
-            </a:r>
-          </a:p>
-        </p:txBody>
-      </p:sp>
-      <p:sp>
-        <p:nvSpPr>
-          <p:cNvPr id="8" name="Rounded Rectangle 7"/>
-          <p:cNvSpPr/>
-          <p:nvPr/>
-        </p:nvSpPr>
-        <p:spPr>
-          <a:xfrm>
-            <a:off x="5303520" y="4023360"/>
-            <a:ext cx="2103120" cy="731520"/>
-          </a:xfrm>
-          <a:prstGeom prst="roundRect">
-            <a:avLst/>
-          </a:prstGeom>
-          <a:solidFill>
-            <a:srgbClr val="DDEAFB"/>
-          </a:solidFill>
-          <a:ln>
-            <a:solidFill>
-              <a:srgbClr val="205295"/>
-            </a:solidFill>
-          </a:ln>
-        </p:spPr>
-        <p:style>
-          <a:lnRef idx="1">
-            <a:schemeClr val="accent1"/>
-          </a:lnRef>
-          <a:fillRef idx="3">
-            <a:schemeClr val="accent1"/>
-          </a:fillRef>
-          <a:effectRef idx="2">
-            <a:schemeClr val="accent1"/>
-          </a:effectRef>
-          <a:fontRef idx="minor">
-            <a:schemeClr val="lt1"/>
-          </a:fontRef>
-        </p:style>
-        <p:txBody>
-          <a:bodyPr rtlCol="0" anchor="ctr" wrap="square" lIns="76200" rIns="76200" tIns="50800" bIns="50800"/>
-          <a:lstStyle/>
-          <a:p>
-            <a:pPr algn="ctr"/>
-            <a:r>
-              <a:rPr sz="1600" b="1">
-                <a:solidFill>
-                  <a:srgbClr val="0B1F44"/>
-                </a:solidFill>
-                <a:latin typeface="Arial"/>
-              </a:rPr>
-              <a:t>task-notification</a:t>
-            </a:r>
-          </a:p>
-        </p:txBody>
-      </p:sp>
-      <p:cxnSp>
-        <p:nvCxnSpPr>
-          <p:cNvPr id="9" name="Connector 8"/>
-          <p:cNvCxnSpPr/>
-          <p:nvPr/>
-        </p:nvCxnSpPr>
-        <p:spPr>
-          <a:xfrm>
-            <a:off x="2468880" y="2377440"/>
-            <a:ext cx="548640" cy="0"/>
-          </a:xfrm>
-          <a:prstGeom prst="line">
-            <a:avLst/>
-          </a:prstGeom>
-          <a:ln w="25400">
-            <a:solidFill>
-              <a:srgbClr val="205295"/>
-            </a:solidFill>
-          </a:ln>
-        </p:spPr>
-        <p:style>
-          <a:lnRef idx="2">
-            <a:schemeClr val="accent1"/>
-          </a:lnRef>
-          <a:fillRef idx="0">
-            <a:schemeClr val="accent1"/>
-          </a:fillRef>
-          <a:effectRef idx="1">
-            <a:schemeClr val="accent1"/>
-          </a:effectRef>
-          <a:fontRef idx="minor">
-            <a:schemeClr val="tx1"/>
-          </a:fontRef>
-        </p:style>
-      </p:cxnSp>
-      <p:cxnSp>
-        <p:nvCxnSpPr>
-          <p:cNvPr id="10" name="Connector 9"/>
-          <p:cNvCxnSpPr/>
-          <p:nvPr/>
-        </p:nvCxnSpPr>
-        <p:spPr>
-          <a:xfrm>
-            <a:off x="4846320" y="2377440"/>
-            <a:ext cx="548640" cy="0"/>
-          </a:xfrm>
-          <a:prstGeom prst="line">
-            <a:avLst/>
-          </a:prstGeom>
-          <a:ln w="25400">
-            <a:solidFill>
-              <a:srgbClr val="205295"/>
-            </a:solidFill>
-          </a:ln>
-        </p:spPr>
-        <p:style>
-          <a:lnRef idx="2">
-            <a:schemeClr val="accent1"/>
-          </a:lnRef>
-          <a:fillRef idx="0">
-            <a:schemeClr val="accent1"/>
-          </a:fillRef>
-          <a:effectRef idx="1">
-            <a:schemeClr val="accent1"/>
-          </a:effectRef>
-          <a:fontRef idx="minor">
-            <a:schemeClr val="tx1"/>
-          </a:fontRef>
-        </p:style>
-      </p:cxnSp>
-      <p:cxnSp>
-        <p:nvCxnSpPr>
-          <p:cNvPr id="11" name="Connector 10"/>
-          <p:cNvCxnSpPr/>
-          <p:nvPr/>
-        </p:nvCxnSpPr>
-        <p:spPr>
-          <a:xfrm>
-            <a:off x="7223760" y="2377440"/>
-            <a:ext cx="548640" cy="0"/>
-          </a:xfrm>
-          <a:prstGeom prst="line">
-            <a:avLst/>
-          </a:prstGeom>
-          <a:ln w="25400">
-            <a:solidFill>
-              <a:srgbClr val="205295"/>
-            </a:solidFill>
-          </a:ln>
-        </p:spPr>
-        <p:style>
-          <a:lnRef idx="2">
-            <a:schemeClr val="accent1"/>
-          </a:lnRef>
-          <a:fillRef idx="0">
-            <a:schemeClr val="accent1"/>
-          </a:fillRef>
-          <a:effectRef idx="1">
-            <a:schemeClr val="accent1"/>
-          </a:effectRef>
-          <a:fontRef idx="minor">
-            <a:schemeClr val="tx1"/>
-          </a:fontRef>
-        </p:style>
-      </p:cxnSp>
-      <p:cxnSp>
-        <p:nvCxnSpPr>
-          <p:cNvPr id="12" name="Connector 11"/>
-          <p:cNvCxnSpPr/>
-          <p:nvPr/>
-        </p:nvCxnSpPr>
-        <p:spPr>
-          <a:xfrm flipH="1">
-            <a:off x="6309360" y="2743200"/>
-            <a:ext cx="1463040" cy="1280160"/>
-          </a:xfrm>
-          <a:prstGeom prst="line">
-            <a:avLst/>
-          </a:prstGeom>
-          <a:ln w="25400">
-            <a:solidFill>
-              <a:srgbClr val="205295"/>
-            </a:solidFill>
-          </a:ln>
-        </p:spPr>
-        <p:style>
-          <a:lnRef idx="2">
-            <a:schemeClr val="accent1"/>
-          </a:lnRef>
-          <a:fillRef idx="0">
-            <a:schemeClr val="accent1"/>
-          </a:fillRef>
-          <a:effectRef idx="1">
-            <a:schemeClr val="accent1"/>
-          </a:effectRef>
-          <a:fontRef idx="minor">
-            <a:schemeClr val="tx1"/>
-          </a:fontRef>
-        </p:style>
-      </p:cxnSp>
-      <p:cxnSp>
-        <p:nvCxnSpPr>
-          <p:cNvPr id="13" name="Connector 12"/>
-          <p:cNvCxnSpPr/>
-          <p:nvPr/>
-        </p:nvCxnSpPr>
-        <p:spPr>
-          <a:xfrm flipH="1" flipV="1">
-            <a:off x="1737360" y="2743200"/>
-            <a:ext cx="3566160" cy="1645920"/>
-          </a:xfrm>
-          <a:prstGeom prst="line">
-            <a:avLst/>
-          </a:prstGeom>
-          <a:ln w="25400">
-            <a:solidFill>
-              <a:srgbClr val="205295"/>
-            </a:solidFill>
-          </a:ln>
-        </p:spPr>
-        <p:style>
-          <a:lnRef idx="2">
-            <a:schemeClr val="accent1"/>
-          </a:lnRef>
-          <a:fillRef idx="0">
-            <a:schemeClr val="accent1"/>
-          </a:fillRef>
-          <a:effectRef idx="1">
-            <a:schemeClr val="accent1"/>
-          </a:effectRef>
-          <a:fontRef idx="minor">
-            <a:schemeClr val="tx1"/>
-          </a:fontRef>
-        </p:style>
-      </p:cxnSp>
-      <p:sp>
-        <p:nvSpPr>
-          <p:cNvPr id="14" name="TextBox 13"/>
+          <p:cNvPr id="4" name="TextBox 3"/>
           <p:cNvSpPr txBox="1"/>
           <p:nvPr/>
         </p:nvSpPr>
         <p:spPr>
           <a:xfrm>
-            <a:off x="822960" y="4846320"/>
-            <a:ext cx="10149840" cy="1097280"/>
+            <a:off x="731520" y="1600200"/>
+            <a:ext cx="4389120" cy="457200"/>
+          </a:xfrm>
+          <a:prstGeom prst="rect">
+            <a:avLst/>
+          </a:prstGeom>
+          <a:noFill/>
+        </p:spPr>
+        <p:txBody>
+          <a:bodyPr wrap="none">
+            <a:spAutoFit/>
+          </a:bodyPr>
+          <a:lstStyle/>
+          <a:p>
+            <a:r>
+              <a:rPr sz="1800" b="1">
+                <a:solidFill>
+                  <a:srgbClr val="205295"/>
+                </a:solidFill>
+                <a:latin typeface="Arial"/>
+              </a:rPr>
+              <a:t>turn-local / host-wide</a:t>
+            </a:r>
+          </a:p>
+        </p:txBody>
+      </p:sp>
+      <p:sp>
+        <p:nvSpPr>
+          <p:cNvPr id="5" name="TextBox 4"/>
+          <p:cNvSpPr txBox="1"/>
+          <p:nvPr/>
+        </p:nvSpPr>
+        <p:spPr>
+          <a:xfrm>
+            <a:off x="731520" y="2011680"/>
+            <a:ext cx="4389120" cy="3200400"/>
           </a:xfrm>
           <a:prstGeom prst="rect">
             <a:avLst/>
@@ -5881,13 +5674,13 @@
               </a:spcAft>
             </a:pPr>
             <a:r>
-              <a:rPr sz="1600" b="0">
+              <a:rPr sz="1700" b="0">
                 <a:solidFill>
                   <a:srgbClr val="1F2937"/>
                 </a:solidFill>
                 <a:latin typeface="Arial"/>
               </a:rPr>
-              <a:t>task/framework.ts 负责注册、轮询、GC、notification</a:t>
+              <a:t>messages：turn-local 工作面</a:t>
             </a:r>
           </a:p>
           <a:p>
@@ -5897,13 +5690,13 @@
               </a:spcAft>
             </a:pPr>
             <a:r>
-              <a:rPr sz="1600" b="0">
+              <a:rPr sz="1700" b="0">
                 <a:solidFill>
                   <a:srgbClr val="1F2937"/>
                 </a:solidFill>
                 <a:latin typeface="Arial"/>
               </a:rPr>
-              <a:t>runAgent.ts 负责 subagent、sidechain transcript、metadata</a:t>
+              <a:t>ToolUseContext：工具执行总线</a:t>
             </a:r>
           </a:p>
           <a:p>
@@ -5913,15 +5706,72 @@
               </a:spcAft>
             </a:pPr>
             <a:r>
-              <a:rPr sz="1600" b="0">
+              <a:rPr sz="1700" b="0">
                 <a:solidFill>
                   <a:srgbClr val="1F2937"/>
                 </a:solidFill>
                 <a:latin typeface="Arial"/>
               </a:rPr>
-              <a:t>mailbox / pendingMessages 的投递发生在 turn 边界</a:t>
-            </a:r>
-          </a:p>
+              <a:t>AppState：宿主共享状态</a:t>
+            </a:r>
+          </a:p>
+        </p:txBody>
+      </p:sp>
+      <p:sp>
+        <p:nvSpPr>
+          <p:cNvPr id="6" name="TextBox 5"/>
+          <p:cNvSpPr txBox="1"/>
+          <p:nvPr/>
+        </p:nvSpPr>
+        <p:spPr>
+          <a:xfrm>
+            <a:off x="6217920" y="1600200"/>
+            <a:ext cx="4389120" cy="457200"/>
+          </a:xfrm>
+          <a:prstGeom prst="rect">
+            <a:avLst/>
+          </a:prstGeom>
+          <a:noFill/>
+        </p:spPr>
+        <p:txBody>
+          <a:bodyPr wrap="none">
+            <a:spAutoFit/>
+          </a:bodyPr>
+          <a:lstStyle/>
+          <a:p>
+            <a:r>
+              <a:rPr sz="1800" b="1">
+                <a:solidFill>
+                  <a:srgbClr val="205295"/>
+                </a:solidFill>
+                <a:latin typeface="Arial"/>
+              </a:rPr>
+              <a:t>durable / on-demand</a:t>
+            </a:r>
+          </a:p>
+        </p:txBody>
+      </p:sp>
+      <p:sp>
+        <p:nvSpPr>
+          <p:cNvPr id="7" name="TextBox 6"/>
+          <p:cNvSpPr txBox="1"/>
+          <p:nvPr/>
+        </p:nvSpPr>
+        <p:spPr>
+          <a:xfrm>
+            <a:off x="6217920" y="2011680"/>
+            <a:ext cx="4389120" cy="3200400"/>
+          </a:xfrm>
+          <a:prstGeom prst="rect">
+            <a:avLst/>
+          </a:prstGeom>
+          <a:noFill/>
+        </p:spPr>
+        <p:txBody>
+          <a:bodyPr wrap="square" lIns="76200" rIns="76200" tIns="50800" bIns="50800">
+            <a:spAutoFit/>
+          </a:bodyPr>
+          <a:lstStyle/>
           <a:p>
             <a:pPr>
               <a:spcAft>
@@ -5929,13 +5779,45 @@
               </a:spcAft>
             </a:pPr>
             <a:r>
-              <a:rPr sz="1600" b="0">
+              <a:rPr sz="1700" b="0">
                 <a:solidFill>
                   <a:srgbClr val="1F2937"/>
                 </a:solidFill>
                 <a:latin typeface="Arial"/>
               </a:rPr>
-              <a:t>这牺牲了一点即时性，但换来了 turn 内状态一致性</a:t>
+              <a:t>transcript / sidechain：durable history</a:t>
+            </a:r>
+          </a:p>
+          <a:p>
+            <a:pPr>
+              <a:spcAft>
+                <a:spcPts val="800"/>
+              </a:spcAft>
+            </a:pPr>
+            <a:r>
+              <a:rPr sz="1700" b="0">
+                <a:solidFill>
+                  <a:srgbClr val="1F2937"/>
+                </a:solidFill>
+                <a:latin typeface="Arial"/>
+              </a:rPr>
+              <a:t>attachments / sidecar artifacts：按需重注入</a:t>
+            </a:r>
+          </a:p>
+          <a:p>
+            <a:pPr>
+              <a:spcAft>
+                <a:spcPts val="800"/>
+              </a:spcAft>
+            </a:pPr>
+            <a:r>
+              <a:rPr sz="1700" b="0">
+                <a:solidFill>
+                  <a:srgbClr val="1F2937"/>
+                </a:solidFill>
+                <a:latin typeface="Arial"/>
+              </a:rPr>
+              <a:t>不要把系统简化成“只有消息数组”</a:t>
             </a:r>
           </a:p>
         </p:txBody>
@@ -5995,7 +5877,7 @@
                 </a:solidFill>
                 <a:latin typeface="Arial"/>
               </a:rPr>
-              <a:t>运行时状态载体</a:t>
+              <a:t>产品化 runtime 的控制面</a:t>
             </a:r>
           </a:p>
         </p:txBody>
@@ -6072,7 +5954,7 @@
                 </a:solidFill>
                 <a:latin typeface="Arial"/>
               </a:rPr>
-              <a:t>turn-local / host-wide</a:t>
+              <a:t>控制面</a:t>
             </a:r>
           </a:p>
         </p:txBody>
@@ -6111,7 +5993,7 @@
                 </a:solidFill>
                 <a:latin typeface="Arial"/>
               </a:rPr>
-              <a:t>messages：turn-local 工作面</a:t>
+              <a:t>认证：OAuth / API key / third-party provider</a:t>
             </a:r>
           </a:p>
           <a:p>
@@ -6127,7 +6009,7 @@
                 </a:solidFill>
                 <a:latin typeface="Arial"/>
               </a:rPr>
-              <a:t>ToolUseContext：工具执行总线</a:t>
+              <a:t>策略：policy_limits、remote managed settings、forceLoginOrgUUID</a:t>
             </a:r>
           </a:p>
           <a:p>
@@ -6143,7 +6025,7 @@
                 </a:solidFill>
                 <a:latin typeface="Arial"/>
               </a:rPr>
-              <a:t>AppState：宿主共享状态</a:t>
+              <a:t>结论：服务端负责裁决，客户端负责执行</a:t>
             </a:r>
           </a:p>
         </p:txBody>
@@ -6177,7 +6059,7 @@
                 </a:solidFill>
                 <a:latin typeface="Arial"/>
               </a:rPr>
-              <a:t>durable / on-demand</a:t>
+              <a:t>扩展面与观测</a:t>
             </a:r>
           </a:p>
         </p:txBody>
@@ -6216,7 +6098,7 @@
                 </a:solidFill>
                 <a:latin typeface="Arial"/>
               </a:rPr>
-              <a:t>transcript / sidechain：durable history</a:t>
+              <a:t>API 层是多 provider 统一适配层</a:t>
             </a:r>
           </a:p>
           <a:p>
@@ -6232,7 +6114,7 @@
                 </a:solidFill>
                 <a:latin typeface="Arial"/>
               </a:rPr>
-              <a:t>attachments / sidecar artifacts：按需重注入</a:t>
+              <a:t>prompt stack 是一层 control plane</a:t>
             </a:r>
           </a:p>
           <a:p>
@@ -6248,7 +6130,23 @@
                 </a:solidFill>
                 <a:latin typeface="Arial"/>
               </a:rPr>
-              <a:t>不要把系统简化成“只有消息数组”</a:t>
+              <a:t>MCP / plugins / commands / skills 都是一级扩展面</a:t>
+            </a:r>
+          </a:p>
+          <a:p>
+            <a:pPr>
+              <a:spcAft>
+                <a:spcPts val="800"/>
+              </a:spcAft>
+            </a:pPr>
+            <a:r>
+              <a:rPr sz="1700" b="0">
+                <a:solidFill>
+                  <a:srgbClr val="1F2937"/>
+                </a:solidFill>
+                <a:latin typeface="Arial"/>
+              </a:rPr>
+              <a:t>queryProfiler / analyzeContext / cacheBreakDetection 负责解释系统为何变慢或变贵</a:t>
             </a:r>
           </a:p>
         </p:txBody>
@@ -6308,7 +6206,7 @@
                 </a:solidFill>
                 <a:latin typeface="Arial"/>
               </a:rPr>
-              <a:t>调试与排障入口</a:t>
+              <a:t>代码质量与结构问题</a:t>
             </a:r>
           </a:p>
         </p:txBody>
@@ -6385,7 +6283,7 @@
                 </a:solidFill>
                 <a:latin typeface="Arial"/>
               </a:rPr>
-              <a:t>遇到问题先看哪里</a:t>
+              <a:t>优点</a:t>
             </a:r>
           </a:p>
         </p:txBody>
@@ -6424,7 +6322,7 @@
                 </a:solidFill>
                 <a:latin typeface="Arial"/>
               </a:rPr>
-              <a:t>turn loop：query.ts / QueryEngine.ts</a:t>
+              <a:t>工程成熟度高，很多细节来自线上问题</a:t>
             </a:r>
           </a:p>
           <a:p>
@@ -6440,7 +6338,7 @@
                 </a:solidFill>
                 <a:latin typeface="Arial"/>
               </a:rPr>
-              <a:t>context 过大：compact.ts / microCompact.ts / analyzeContext.ts</a:t>
+              <a:t>auth、settings、tools、mcp、query 分层总体清楚</a:t>
             </a:r>
           </a:p>
           <a:p>
@@ -6456,7 +6354,7 @@
                 </a:solidFill>
                 <a:latin typeface="Arial"/>
               </a:rPr>
-              <a:t>工具被拒绝：toolExecution.ts / permissions / hooks</a:t>
+              <a:t>对 shell 安全、缓存、401、多进程锁处理扎实</a:t>
             </a:r>
           </a:p>
         </p:txBody>
@@ -6490,7 +6388,7 @@
                 </a:solidFill>
                 <a:latin typeface="Arial"/>
               </a:rPr>
-              <a:t>排障价值</a:t>
+              <a:t>主要结构债</a:t>
             </a:r>
           </a:p>
         </p:txBody>
@@ -6529,7 +6427,7 @@
                 </a:solidFill>
                 <a:latin typeface="Arial"/>
               </a:rPr>
-              <a:t>它把“读源码”变成“可直接排障”</a:t>
+              <a:t>query.ts 接近 God Loop</a:t>
             </a:r>
           </a:p>
           <a:p>
@@ -6545,7 +6443,7 @@
                 </a:solidFill>
                 <a:latin typeface="Arial"/>
               </a:rPr>
-              <a:t>能快速定位：为什么继续、为什么 compact、为什么拒绝、为什么变慢</a:t>
+              <a:t>ToolUseContext 过胖</a:t>
             </a:r>
           </a:p>
           <a:p>
@@ -6561,7 +6459,23 @@
                 </a:solidFill>
                 <a:latin typeface="Arial"/>
               </a:rPr>
-              <a:t>这也是走读文档区别于普通目录介绍的地方</a:t>
+              <a:t>cache invariants 分散</a:t>
+            </a:r>
+          </a:p>
+          <a:p>
+            <a:pPr>
+              <a:spcAft>
+                <a:spcPts val="800"/>
+              </a:spcAft>
+            </a:pPr>
+            <a:r>
+              <a:rPr sz="1700" b="0">
+                <a:solidFill>
+                  <a:srgbClr val="1F2937"/>
+                </a:solidFill>
+                <a:latin typeface="Arial"/>
+              </a:rPr>
+              <a:t>permissions / tasks / remote execution 已经上升成 control plane，但 owner 仍分散</a:t>
             </a:r>
           </a:p>
         </p:txBody>
@@ -6621,7 +6535,7 @@
                 </a:solidFill>
                 <a:latin typeface="Arial"/>
               </a:rPr>
-              <a:t>产品化 runtime 的控制面</a:t>
+              <a:t>调试与排障入口</a:t>
             </a:r>
           </a:p>
         </p:txBody>
@@ -6698,7 +6612,7 @@
                 </a:solidFill>
                 <a:latin typeface="Arial"/>
               </a:rPr>
-              <a:t>控制面</a:t>
+              <a:t>遇到问题先看哪里</a:t>
             </a:r>
           </a:p>
         </p:txBody>
@@ -6737,7 +6651,7 @@
                 </a:solidFill>
                 <a:latin typeface="Arial"/>
               </a:rPr>
-              <a:t>认证：OAuth / API key / third-party provider</a:t>
+              <a:t>turn loop：query.ts / QueryEngine.ts</a:t>
             </a:r>
           </a:p>
           <a:p>
@@ -6753,7 +6667,7 @@
                 </a:solidFill>
                 <a:latin typeface="Arial"/>
               </a:rPr>
-              <a:t>策略：policy_limits、remote managed settings、forceLoginOrgUUID</a:t>
+              <a:t>context 过大：compact.ts / microCompact.ts / analyzeContext.ts</a:t>
             </a:r>
           </a:p>
           <a:p>
@@ -6769,7 +6683,7 @@
                 </a:solidFill>
                 <a:latin typeface="Arial"/>
               </a:rPr>
-              <a:t>结论：服务端负责裁决，客户端负责执行</a:t>
+              <a:t>工具被拒绝：toolExecution.ts / permissions / hooks</a:t>
             </a:r>
           </a:p>
         </p:txBody>
@@ -6803,7 +6717,7 @@
                 </a:solidFill>
                 <a:latin typeface="Arial"/>
               </a:rPr>
-              <a:t>扩展面与观测</a:t>
+              <a:t>排障价值</a:t>
             </a:r>
           </a:p>
         </p:txBody>
@@ -6842,7 +6756,7 @@
                 </a:solidFill>
                 <a:latin typeface="Arial"/>
               </a:rPr>
-              <a:t>API 层是多 provider 统一适配层</a:t>
+              <a:t>它把“读源码”变成“可直接排障”</a:t>
             </a:r>
           </a:p>
           <a:p>
@@ -6858,7 +6772,7 @@
                 </a:solidFill>
                 <a:latin typeface="Arial"/>
               </a:rPr>
-              <a:t>prompt stack 是一层 control plane</a:t>
+              <a:t>能快速定位：为什么继续、为什么 compact、为什么拒绝、为什么变慢</a:t>
             </a:r>
           </a:p>
           <a:p>
@@ -6874,23 +6788,7 @@
                 </a:solidFill>
                 <a:latin typeface="Arial"/>
               </a:rPr>
-              <a:t>MCP / plugins / commands / skills 都是一级扩展面</a:t>
-            </a:r>
-          </a:p>
-          <a:p>
-            <a:pPr>
-              <a:spcAft>
-                <a:spcPts val="800"/>
-              </a:spcAft>
-            </a:pPr>
-            <a:r>
-              <a:rPr sz="1700" b="0">
-                <a:solidFill>
-                  <a:srgbClr val="1F2937"/>
-                </a:solidFill>
-                <a:latin typeface="Arial"/>
-              </a:rPr>
-              <a:t>queryProfiler / analyzeContext / cacheBreakDetection 负责解释系统为何变慢或变贵</a:t>
+              <a:t>这也是走读文档区别于普通目录介绍的地方</a:t>
             </a:r>
           </a:p>
         </p:txBody>
@@ -6950,7 +6848,7 @@
                 </a:solidFill>
                 <a:latin typeface="Arial"/>
               </a:rPr>
-              <a:t>代码质量与结构问题</a:t>
+              <a:t>关键结论与阅读建议</a:t>
             </a:r>
           </a:p>
         </p:txBody>
@@ -7027,7 +6925,7 @@
                 </a:solidFill>
                 <a:latin typeface="Arial"/>
               </a:rPr>
-              <a:t>优点</a:t>
+              <a:t>读源码时先抓</a:t>
             </a:r>
           </a:p>
         </p:txBody>
@@ -7066,7 +6964,7 @@
                 </a:solidFill>
                 <a:latin typeface="Arial"/>
               </a:rPr>
-              <a:t>工程成熟度高，很多细节来自线上问题</a:t>
+              <a:t>main.tsx -&gt; query.ts -&gt; tools</a:t>
             </a:r>
           </a:p>
           <a:p>
@@ -7082,7 +6980,7 @@
                 </a:solidFill>
                 <a:latin typeface="Arial"/>
               </a:rPr>
-              <a:t>auth、settings、tools、mcp、query 分层总体清楚</a:t>
+              <a:t>settings -&gt; auth -&gt; api client</a:t>
             </a:r>
           </a:p>
           <a:p>
@@ -7098,7 +6996,7 @@
                 </a:solidFill>
                 <a:latin typeface="Arial"/>
               </a:rPr>
-              <a:t>对 shell 安全、缓存、401、多进程锁处理扎实</a:t>
+              <a:t>policy / managed settings -&gt; 本地执行</a:t>
             </a:r>
           </a:p>
         </p:txBody>
@@ -7132,7 +7030,7 @@
                 </a:solidFill>
                 <a:latin typeface="Arial"/>
               </a:rPr>
-              <a:t>主要结构债</a:t>
+              <a:t>从源码提炼的使用建议</a:t>
             </a:r>
           </a:p>
         </p:txBody>
@@ -7171,7 +7069,7 @@
                 </a:solidFill>
                 <a:latin typeface="Arial"/>
               </a:rPr>
-              <a:t>query.ts 接近 God Loop</a:t>
+              <a:t>先读相关代码再改</a:t>
             </a:r>
           </a:p>
           <a:p>
@@ -7187,7 +7085,7 @@
                 </a:solidFill>
                 <a:latin typeface="Arial"/>
               </a:rPr>
-              <a:t>ToolUseContext 过胖</a:t>
+              <a:t>优先复用现有实现</a:t>
             </a:r>
           </a:p>
           <a:p>
@@ -7203,7 +7101,7 @@
                 </a:solidFill>
                 <a:latin typeface="Arial"/>
               </a:rPr>
-              <a:t>cache invariants 分散</a:t>
+              <a:t>做最小必要改动</a:t>
             </a:r>
           </a:p>
           <a:p>
@@ -7219,7 +7117,41 @@
                 </a:solidFill>
                 <a:latin typeface="Arial"/>
               </a:rPr>
-              <a:t>permissions / tasks / remote execution 已经上升成 control plane，但 owner 仍分散</a:t>
+              <a:t>验证后如实汇报</a:t>
+            </a:r>
+          </a:p>
+        </p:txBody>
+      </p:sp>
+      <p:sp>
+        <p:nvSpPr>
+          <p:cNvPr id="8" name="TextBox 7"/>
+          <p:cNvSpPr txBox="1"/>
+          <p:nvPr/>
+        </p:nvSpPr>
+        <p:spPr>
+          <a:xfrm>
+            <a:off x="841248" y="5532120"/>
+            <a:ext cx="10058400" cy="502920"/>
+          </a:xfrm>
+          <a:prstGeom prst="rect">
+            <a:avLst/>
+          </a:prstGeom>
+          <a:noFill/>
+        </p:spPr>
+        <p:txBody>
+          <a:bodyPr wrap="square" lIns="76200" rIns="76200" tIns="50800" bIns="50800">
+            <a:spAutoFit/>
+          </a:bodyPr>
+          <a:lstStyle/>
+          <a:p>
+            <a:r>
+              <a:rPr sz="1400" b="0">
+                <a:solidFill>
+                  <a:srgbClr val="475569"/>
+                </a:solidFill>
+                <a:latin typeface="Arial"/>
+              </a:rPr>
+              <a:t>一句话：Claude Code 本质上是一个围绕 turn loop 构建的、可被企业管理的终端 agent runtime。</a:t>
             </a:r>
           </a:p>
         </p:txBody>
@@ -7279,7 +7211,7 @@
                 </a:solidFill>
                 <a:latin typeface="Arial"/>
               </a:rPr>
-              <a:t>分享目录</a:t>
+              <a:t>先给结论</a:t>
             </a:r>
           </a:p>
         </p:txBody>
@@ -7361,7 +7293,7 @@
                 </a:solidFill>
                 <a:latin typeface="Arial"/>
               </a:rPr>
-              <a:t>这份仓库本质上是什么</a:t>
+              <a:t>这不是“调用模型 API 的壳”，而是完整的 terminal agent runtime</a:t>
             </a:r>
           </a:p>
           <a:p>
@@ -7377,7 +7309,7 @@
                 </a:solidFill>
                 <a:latin typeface="Arial"/>
               </a:rPr>
-              <a:t>架构总览与主执行链路</a:t>
+              <a:t>最值得看的不是功能数量，而是 turn loop、recovery、compact、tool pipeline 这些长期工作机制</a:t>
             </a:r>
           </a:p>
           <a:p>
@@ -7393,512 +7325,7 @@
                 </a:solidFill>
                 <a:latin typeface="Arial"/>
               </a:rPr>
-              <a:t>turn loop、compact 与 context</a:t>
-            </a:r>
-          </a:p>
-          <a:p>
-            <a:pPr>
-              <a:spcAft>
-                <a:spcPts val="800"/>
-              </a:spcAft>
-            </a:pPr>
-            <a:r>
-              <a:rPr sz="1900" b="0">
-                <a:solidFill>
-                  <a:srgbClr val="1F2937"/>
-                </a:solidFill>
-                <a:latin typeface="Arial"/>
-              </a:rPr>
-              <a:t>tool pipeline、task runtime 与 mailbox</a:t>
-            </a:r>
-          </a:p>
-          <a:p>
-            <a:pPr>
-              <a:spcAft>
-                <a:spcPts val="800"/>
-              </a:spcAft>
-            </a:pPr>
-            <a:r>
-              <a:rPr sz="1900" b="0">
-                <a:solidFill>
-                  <a:srgbClr val="1F2937"/>
-                </a:solidFill>
-                <a:latin typeface="Arial"/>
-              </a:rPr>
-              <a:t>认证、策略、扩展系统与可观测性</a:t>
-            </a:r>
-          </a:p>
-          <a:p>
-            <a:pPr>
-              <a:spcAft>
-                <a:spcPts val="800"/>
-              </a:spcAft>
-            </a:pPr>
-            <a:r>
-              <a:rPr sz="1900" b="0">
-                <a:solidFill>
-                  <a:srgbClr val="1F2937"/>
-                </a:solidFill>
-                <a:latin typeface="Arial"/>
-              </a:rPr>
-              <a:t>最后总结与阅读建议</a:t>
-            </a:r>
-          </a:p>
-        </p:txBody>
-      </p:sp>
-    </p:spTree>
-  </p:cSld>
-  <p:clrMapOvr>
-    <a:masterClrMapping/>
-  </p:clrMapOvr>
-</p:sld>
-</file>
-
-<file path=ppt/slides/slide20.xml><?xml version="1.0" encoding="utf-8"?>
-<p:sld xmlns:a="http://schemas.openxmlformats.org/drawingml/2006/main" xmlns:p="http://schemas.openxmlformats.org/presentationml/2006/main" xmlns:r="http://schemas.openxmlformats.org/officeDocument/2006/relationships">
-  <p:cSld>
-    <p:bg>
-      <p:bgPr>
-        <a:solidFill>
-          <a:srgbClr val="F8FAFC"/>
-        </a:solidFill>
-        <a:effectLst/>
-      </p:bgPr>
-    </p:bg>
-    <p:spTree>
-      <p:nvGrpSpPr>
-        <p:cNvPr id="1" name=""/>
-        <p:cNvGrpSpPr/>
-        <p:nvPr/>
-      </p:nvGrpSpPr>
-      <p:grpSpPr/>
-      <p:sp>
-        <p:nvSpPr>
-          <p:cNvPr id="2" name="TextBox 1"/>
-          <p:cNvSpPr txBox="1"/>
-          <p:nvPr/>
-        </p:nvSpPr>
-        <p:spPr>
-          <a:xfrm>
-            <a:off x="594360" y="384048"/>
-            <a:ext cx="10789920" cy="685800"/>
-          </a:xfrm>
-          <a:prstGeom prst="rect">
-            <a:avLst/>
-          </a:prstGeom>
-          <a:noFill/>
-        </p:spPr>
-        <p:txBody>
-          <a:bodyPr wrap="square" lIns="76200" rIns="76200" tIns="50800" bIns="50800">
-            <a:spAutoFit/>
-          </a:bodyPr>
-          <a:lstStyle/>
-          <a:p>
-            <a:r>
-              <a:rPr sz="2600" b="1">
-                <a:solidFill>
-                  <a:srgbClr val="0B1F44"/>
-                </a:solidFill>
-                <a:latin typeface="Arial"/>
-              </a:rPr>
-              <a:t>关键结论与阅读建议</a:t>
-            </a:r>
-          </a:p>
-        </p:txBody>
-      </p:sp>
-      <p:sp>
-        <p:nvSpPr>
-          <p:cNvPr id="3" name="Rectangle 2"/>
-          <p:cNvSpPr/>
-          <p:nvPr/>
-        </p:nvSpPr>
-        <p:spPr>
-          <a:xfrm>
-            <a:off x="621792" y="1078992"/>
-            <a:ext cx="2011680" cy="27432"/>
-          </a:xfrm>
-          <a:prstGeom prst="rect">
-            <a:avLst/>
-          </a:prstGeom>
-          <a:solidFill>
-            <a:srgbClr val="DBE4F0"/>
-          </a:solidFill>
-          <a:ln>
-            <a:noFill/>
-          </a:ln>
-        </p:spPr>
-        <p:style>
-          <a:lnRef idx="1">
-            <a:schemeClr val="accent1"/>
-          </a:lnRef>
-          <a:fillRef idx="3">
-            <a:schemeClr val="accent1"/>
-          </a:fillRef>
-          <a:effectRef idx="2">
-            <a:schemeClr val="accent1"/>
-          </a:effectRef>
-          <a:fontRef idx="minor">
-            <a:schemeClr val="lt1"/>
-          </a:fontRef>
-        </p:style>
-        <p:txBody>
-          <a:bodyPr rtlCol="0" anchor="ctr"/>
-          <a:lstStyle/>
-          <a:p>
-            <a:pPr algn="ctr"/>
-          </a:p>
-        </p:txBody>
-      </p:sp>
-      <p:sp>
-        <p:nvSpPr>
-          <p:cNvPr id="4" name="TextBox 3"/>
-          <p:cNvSpPr txBox="1"/>
-          <p:nvPr/>
-        </p:nvSpPr>
-        <p:spPr>
-          <a:xfrm>
-            <a:off x="731520" y="1600200"/>
-            <a:ext cx="4389120" cy="457200"/>
-          </a:xfrm>
-          <a:prstGeom prst="rect">
-            <a:avLst/>
-          </a:prstGeom>
-          <a:noFill/>
-        </p:spPr>
-        <p:txBody>
-          <a:bodyPr wrap="none">
-            <a:spAutoFit/>
-          </a:bodyPr>
-          <a:lstStyle/>
-          <a:p>
-            <a:r>
-              <a:rPr sz="1800" b="1">
-                <a:solidFill>
-                  <a:srgbClr val="205295"/>
-                </a:solidFill>
-                <a:latin typeface="Arial"/>
-              </a:rPr>
-              <a:t>读源码时先抓</a:t>
-            </a:r>
-          </a:p>
-        </p:txBody>
-      </p:sp>
-      <p:sp>
-        <p:nvSpPr>
-          <p:cNvPr id="5" name="TextBox 4"/>
-          <p:cNvSpPr txBox="1"/>
-          <p:nvPr/>
-        </p:nvSpPr>
-        <p:spPr>
-          <a:xfrm>
-            <a:off x="731520" y="2011680"/>
-            <a:ext cx="4389120" cy="3200400"/>
-          </a:xfrm>
-          <a:prstGeom prst="rect">
-            <a:avLst/>
-          </a:prstGeom>
-          <a:noFill/>
-        </p:spPr>
-        <p:txBody>
-          <a:bodyPr wrap="square" lIns="76200" rIns="76200" tIns="50800" bIns="50800">
-            <a:spAutoFit/>
-          </a:bodyPr>
-          <a:lstStyle/>
-          <a:p>
-            <a:pPr>
-              <a:spcAft>
-                <a:spcPts val="800"/>
-              </a:spcAft>
-            </a:pPr>
-            <a:r>
-              <a:rPr sz="1700" b="0">
-                <a:solidFill>
-                  <a:srgbClr val="1F2937"/>
-                </a:solidFill>
-                <a:latin typeface="Arial"/>
-              </a:rPr>
-              <a:t>main.tsx -&gt; query.ts -&gt; tools</a:t>
-            </a:r>
-          </a:p>
-          <a:p>
-            <a:pPr>
-              <a:spcAft>
-                <a:spcPts val="800"/>
-              </a:spcAft>
-            </a:pPr>
-            <a:r>
-              <a:rPr sz="1700" b="0">
-                <a:solidFill>
-                  <a:srgbClr val="1F2937"/>
-                </a:solidFill>
-                <a:latin typeface="Arial"/>
-              </a:rPr>
-              <a:t>settings -&gt; auth -&gt; api client</a:t>
-            </a:r>
-          </a:p>
-          <a:p>
-            <a:pPr>
-              <a:spcAft>
-                <a:spcPts val="800"/>
-              </a:spcAft>
-            </a:pPr>
-            <a:r>
-              <a:rPr sz="1700" b="0">
-                <a:solidFill>
-                  <a:srgbClr val="1F2937"/>
-                </a:solidFill>
-                <a:latin typeface="Arial"/>
-              </a:rPr>
-              <a:t>policy / managed settings -&gt; 本地执行</a:t>
-            </a:r>
-          </a:p>
-        </p:txBody>
-      </p:sp>
-      <p:sp>
-        <p:nvSpPr>
-          <p:cNvPr id="6" name="TextBox 5"/>
-          <p:cNvSpPr txBox="1"/>
-          <p:nvPr/>
-        </p:nvSpPr>
-        <p:spPr>
-          <a:xfrm>
-            <a:off x="6217920" y="1600200"/>
-            <a:ext cx="4389120" cy="457200"/>
-          </a:xfrm>
-          <a:prstGeom prst="rect">
-            <a:avLst/>
-          </a:prstGeom>
-          <a:noFill/>
-        </p:spPr>
-        <p:txBody>
-          <a:bodyPr wrap="none">
-            <a:spAutoFit/>
-          </a:bodyPr>
-          <a:lstStyle/>
-          <a:p>
-            <a:r>
-              <a:rPr sz="1800" b="1">
-                <a:solidFill>
-                  <a:srgbClr val="205295"/>
-                </a:solidFill>
-                <a:latin typeface="Arial"/>
-              </a:rPr>
-              <a:t>从源码提炼的使用建议</a:t>
-            </a:r>
-          </a:p>
-        </p:txBody>
-      </p:sp>
-      <p:sp>
-        <p:nvSpPr>
-          <p:cNvPr id="7" name="TextBox 6"/>
-          <p:cNvSpPr txBox="1"/>
-          <p:nvPr/>
-        </p:nvSpPr>
-        <p:spPr>
-          <a:xfrm>
-            <a:off x="6217920" y="2011680"/>
-            <a:ext cx="4389120" cy="3200400"/>
-          </a:xfrm>
-          <a:prstGeom prst="rect">
-            <a:avLst/>
-          </a:prstGeom>
-          <a:noFill/>
-        </p:spPr>
-        <p:txBody>
-          <a:bodyPr wrap="square" lIns="76200" rIns="76200" tIns="50800" bIns="50800">
-            <a:spAutoFit/>
-          </a:bodyPr>
-          <a:lstStyle/>
-          <a:p>
-            <a:pPr>
-              <a:spcAft>
-                <a:spcPts val="800"/>
-              </a:spcAft>
-            </a:pPr>
-            <a:r>
-              <a:rPr sz="1700" b="0">
-                <a:solidFill>
-                  <a:srgbClr val="1F2937"/>
-                </a:solidFill>
-                <a:latin typeface="Arial"/>
-              </a:rPr>
-              <a:t>先读相关代码再改</a:t>
-            </a:r>
-          </a:p>
-          <a:p>
-            <a:pPr>
-              <a:spcAft>
-                <a:spcPts val="800"/>
-              </a:spcAft>
-            </a:pPr>
-            <a:r>
-              <a:rPr sz="1700" b="0">
-                <a:solidFill>
-                  <a:srgbClr val="1F2937"/>
-                </a:solidFill>
-                <a:latin typeface="Arial"/>
-              </a:rPr>
-              <a:t>优先复用现有实现</a:t>
-            </a:r>
-          </a:p>
-          <a:p>
-            <a:pPr>
-              <a:spcAft>
-                <a:spcPts val="800"/>
-              </a:spcAft>
-            </a:pPr>
-            <a:r>
-              <a:rPr sz="1700" b="0">
-                <a:solidFill>
-                  <a:srgbClr val="1F2937"/>
-                </a:solidFill>
-                <a:latin typeface="Arial"/>
-              </a:rPr>
-              <a:t>做最小必要改动</a:t>
-            </a:r>
-          </a:p>
-          <a:p>
-            <a:pPr>
-              <a:spcAft>
-                <a:spcPts val="800"/>
-              </a:spcAft>
-            </a:pPr>
-            <a:r>
-              <a:rPr sz="1700" b="0">
-                <a:solidFill>
-                  <a:srgbClr val="1F2937"/>
-                </a:solidFill>
-                <a:latin typeface="Arial"/>
-              </a:rPr>
-              <a:t>验证后如实汇报</a:t>
-            </a:r>
-          </a:p>
-        </p:txBody>
-      </p:sp>
-      <p:sp>
-        <p:nvSpPr>
-          <p:cNvPr id="8" name="TextBox 7"/>
-          <p:cNvSpPr txBox="1"/>
-          <p:nvPr/>
-        </p:nvSpPr>
-        <p:spPr>
-          <a:xfrm>
-            <a:off x="841248" y="5532120"/>
-            <a:ext cx="10058400" cy="502920"/>
-          </a:xfrm>
-          <a:prstGeom prst="rect">
-            <a:avLst/>
-          </a:prstGeom>
-          <a:noFill/>
-        </p:spPr>
-        <p:txBody>
-          <a:bodyPr wrap="square" lIns="76200" rIns="76200" tIns="50800" bIns="50800">
-            <a:spAutoFit/>
-          </a:bodyPr>
-          <a:lstStyle/>
-          <a:p>
-            <a:r>
-              <a:rPr sz="1400" b="0">
-                <a:solidFill>
-                  <a:srgbClr val="475569"/>
-                </a:solidFill>
-                <a:latin typeface="Arial"/>
-              </a:rPr>
-              <a:t>一句话：Claude Code 本质上是一个围绕 turn loop 构建的、可被企业管理的终端 agent runtime。</a:t>
-            </a:r>
-          </a:p>
-        </p:txBody>
-      </p:sp>
-    </p:spTree>
-  </p:cSld>
-  <p:clrMapOvr>
-    <a:masterClrMapping/>
-  </p:clrMapOvr>
-</p:sld>
-</file>
-
-<file path=ppt/slides/slide21.xml><?xml version="1.0" encoding="utf-8"?>
-<p:sld xmlns:a="http://schemas.openxmlformats.org/drawingml/2006/main" xmlns:p="http://schemas.openxmlformats.org/presentationml/2006/main" xmlns:r="http://schemas.openxmlformats.org/officeDocument/2006/relationships">
-  <p:cSld>
-    <p:bg>
-      <p:bgPr>
-        <a:solidFill>
-          <a:srgbClr val="101C3F"/>
-        </a:solidFill>
-        <a:effectLst/>
-      </p:bgPr>
-    </p:bg>
-    <p:spTree>
-      <p:nvGrpSpPr>
-        <p:cNvPr id="1" name=""/>
-        <p:cNvGrpSpPr/>
-        <p:nvPr/>
-      </p:nvGrpSpPr>
-      <p:grpSpPr/>
-      <p:sp>
-        <p:nvSpPr>
-          <p:cNvPr id="2" name="TextBox 1"/>
-          <p:cNvSpPr txBox="1"/>
-          <p:nvPr/>
-        </p:nvSpPr>
-        <p:spPr>
-          <a:xfrm>
-            <a:off x="594360" y="384048"/>
-            <a:ext cx="10789920" cy="685800"/>
-          </a:xfrm>
-          <a:prstGeom prst="rect">
-            <a:avLst/>
-          </a:prstGeom>
-          <a:noFill/>
-        </p:spPr>
-        <p:txBody>
-          <a:bodyPr wrap="square" lIns="76200" rIns="76200" tIns="50800" bIns="50800">
-            <a:spAutoFit/>
-          </a:bodyPr>
-          <a:lstStyle/>
-          <a:p>
-            <a:r>
-              <a:rPr sz="2800" b="1">
-                <a:solidFill>
-                  <a:srgbClr val="FFFFFF"/>
-                </a:solidFill>
-                <a:latin typeface="Arial"/>
-              </a:rPr>
-              <a:t>谢谢</a:t>
-            </a:r>
-          </a:p>
-        </p:txBody>
-      </p:sp>
-      <p:sp>
-        <p:nvSpPr>
-          <p:cNvPr id="3" name="TextBox 2"/>
-          <p:cNvSpPr txBox="1"/>
-          <p:nvPr/>
-        </p:nvSpPr>
-        <p:spPr>
-          <a:xfrm>
-            <a:off x="658368" y="1280160"/>
-            <a:ext cx="10241280" cy="640080"/>
-          </a:xfrm>
-          <a:prstGeom prst="rect">
-            <a:avLst/>
-          </a:prstGeom>
-          <a:noFill/>
-        </p:spPr>
-        <p:txBody>
-          <a:bodyPr wrap="square" lIns="76200" rIns="76200" tIns="50800" bIns="50800">
-            <a:spAutoFit/>
-          </a:bodyPr>
-          <a:lstStyle/>
-          <a:p>
-            <a:r>
-              <a:rPr sz="1500" b="0">
-                <a:solidFill>
-                  <a:srgbClr val="FFFFFF"/>
-                </a:solidFill>
-                <a:latin typeface="Arial"/>
-              </a:rPr>
-              <a:t>这份源码最值得看的，不只是功能，而是它已经为长时间工作的 runtime 付过哪些工程账。</a:t>
+              <a:t>真正的工程价值在于：它已经为长会话、工具执行、恢复和策略控制付过账</a:t>
             </a:r>
           </a:p>
         </p:txBody>
@@ -11610,7 +11037,7 @@
                 </a:solidFill>
                 <a:latin typeface="Arial"/>
               </a:rPr>
-              <a:t>transcript / recovery 是 durable runtime 骨架</a:t>
+              <a:t>为什么长会话还能继续工作</a:t>
             </a:r>
           </a:p>
         </p:txBody>
@@ -11666,8 +11093,8 @@
         </p:nvSpPr>
         <p:spPr>
           <a:xfrm>
-            <a:off x="777240" y="1645920"/>
-            <a:ext cx="10241280" cy="3017520"/>
+            <a:off x="777240" y="1508760"/>
+            <a:ext cx="10241280" cy="4389120"/>
           </a:xfrm>
           <a:prstGeom prst="rect">
             <a:avLst/>
@@ -11692,7 +11119,7 @@
                 </a:solidFill>
                 <a:latin typeface="Arial"/>
               </a:rPr>
-              <a:t>sessionStorage.ts 保存的不是普通聊天记录，而是带 parentUuid 的消息链</a:t>
+              <a:t>transcript / recovery 维护的是带 parentUuid 的可恢复消息链，而不是普通聊天记录</a:t>
             </a:r>
           </a:p>
           <a:p>
@@ -11708,7 +11135,7 @@
                 </a:solidFill>
                 <a:latin typeface="Arial"/>
               </a:rPr>
-              <a:t>progress message 不进入主链，compact boundary 会进入恢复协议</a:t>
+              <a:t>tool result budget / content replacement 解决的不是“截断输出”，而是“冻结输出命运”</a:t>
             </a:r>
           </a:p>
           <a:p>
@@ -11724,7 +11151,7 @@
                 </a:solidFill>
                 <a:latin typeface="Arial"/>
               </a:rPr>
-              <a:t>conversationRecovery.ts 做的不是反序列化，而是把历史修回 API 可继续状态</a:t>
+              <a:t>大输出会外化到磁盘，再以稳定 preview 回到 context，恢复后还要重放同一 replacement</a:t>
             </a:r>
           </a:p>
           <a:p>
@@ -11740,7 +11167,7 @@
                 </a:solidFill>
                 <a:latin typeface="Arial"/>
               </a:rPr>
-              <a:t>synthetic continuation 说明系统在恢复“未完成的 runtime”，不是回放聊天 UI</a:t>
+              <a:t>这两层一起保证：长会话不会因为工具输出过大或中断恢复而失去连续性</a:t>
             </a:r>
           </a:p>
         </p:txBody>
@@ -11774,7 +11201,7 @@
                 </a:solidFill>
                 <a:latin typeface="Arial"/>
               </a:rPr>
-              <a:t>一句话：transcript 提供可追溯历史，recovery 把它修回可继续运行的当前状态。</a:t>
+              <a:t>关键点：系统维护的不是 UI 聊天记录，而是可继续运行的当前状态。</a:t>
             </a:r>
           </a:p>
         </p:txBody>
